--- a/downloads/AI-ideas-Myles-Parslow.pptx
+++ b/downloads/AI-ideas-Myles-Parslow.pptx
@@ -111,7 +111,7 @@
   <p:extLst>
     <p:ext uri="{521415D9-36F7-43E2-AB2F-B90AF26B5E84}">
       <p14:sectionLst xmlns:p14="http://schemas.microsoft.com/office/powerpoint/2010/main">
-        <p14:section name="AI for the firm" id="{f705e735-d5c5-3b20-367b-90ddbf63dbf2}">
+        <p14:section name="AI for the firm" id="{6b1d20b7-4271-c322-219c-3523f9396ca3}">
           <p14:sldIdLst>
             <p14:sldId id="256"/>
             <p14:sldId id="257"/>
@@ -1223,7 +1223,7 @@
                   <a:srgbClr val="2D4459"/>
                 </a:solidFill>
               </a:rPr>
-              <a:t>What I have already built</a:t>
+              <a:t>I have built fifteen working legal tools</a:t>
             </a:r>
             <a:endParaRPr lang="en-US" sz="2600" dirty="0"/>
           </a:p>
@@ -1261,7 +1261,7 @@
                   <a:schemeClr val="tx2"/>
                 </a:solidFill>
               </a:rPr>
-              <a:t>Fifteen working tools, built on my own time to learn what AI can do for this work. A lawyer makes every decision.</a:t>
+              <a:t>Built on my own time, for nearly every part of the firm. A lawyer makes every decision.</a:t>
             </a:r>
             <a:endParaRPr lang="en-US" sz="1300" dirty="0"/>
           </a:p>
@@ -1337,7 +1337,7 @@
         <p:spPr>
           <a:xfrm>
             <a:off x="548640" y="1682496"/>
-            <a:ext cx="1389888" cy="640080"/>
+            <a:ext cx="1389888" cy="603504"/>
           </a:xfrm>
           <a:prstGeom prst="rect">
             <a:avLst/>
@@ -1353,28 +1353,28 @@
               <a:buNone/>
             </a:pPr>
             <a:r>
-              <a:rPr lang="en-US" sz="1100" b="1" dirty="0">
+              <a:rPr lang="en-US" sz="1200" b="1" dirty="0">
                 <a:solidFill>
                   <a:schemeClr val="tx1"/>
                 </a:solidFill>
               </a:rPr>
               <a:t>Conflion</a:t>
             </a:r>
-            <a:endParaRPr lang="en-US" sz="1100" dirty="0"/>
-          </a:p>
-          <a:p>
-            <a:pPr indent="0" marL="0">
-              <a:buNone/>
-            </a:pPr>
-            <a:r>
-              <a:rPr lang="en-US" sz="850" dirty="0">
+            <a:endParaRPr lang="en-US" sz="1200" dirty="0"/>
+          </a:p>
+          <a:p>
+            <a:pPr indent="0" marL="0">
+              <a:buNone/>
+            </a:pPr>
+            <a:r>
+              <a:rPr lang="en-US" sz="1000" dirty="0">
                 <a:solidFill>
                   <a:schemeClr val="tx2"/>
                 </a:solidFill>
               </a:rPr>
-              <a:t>Conflicts check and intake that finds what a letter-for-letter search misses.</a:t>
-            </a:r>
-            <a:endParaRPr lang="en-US" sz="1100" dirty="0"/>
+              <a:t>Conflicts check and intake</a:t>
+            </a:r>
+            <a:endParaRPr lang="en-US" sz="1200" dirty="0"/>
           </a:p>
         </p:txBody>
       </p:sp>
@@ -1386,8 +1386,8 @@
         </p:nvSpPr>
         <p:spPr>
           <a:xfrm>
-            <a:off x="548640" y="2340864"/>
-            <a:ext cx="1389888" cy="640080"/>
+            <a:off x="548640" y="2322576"/>
+            <a:ext cx="1389888" cy="603504"/>
           </a:xfrm>
           <a:prstGeom prst="rect">
             <a:avLst/>
@@ -1403,28 +1403,28 @@
               <a:buNone/>
             </a:pPr>
             <a:r>
-              <a:rPr lang="en-US" sz="1100" b="1" dirty="0">
+              <a:rPr lang="en-US" sz="1200" b="1" dirty="0">
                 <a:solidFill>
                   <a:schemeClr val="tx1"/>
                 </a:solidFill>
               </a:rPr>
               <a:t>Party Finder</a:t>
             </a:r>
-            <a:endParaRPr lang="en-US" sz="1100" dirty="0"/>
-          </a:p>
-          <a:p>
-            <a:pPr indent="0" marL="0">
-              <a:buNone/>
-            </a:pPr>
-            <a:r>
-              <a:rPr lang="en-US" sz="850" dirty="0">
+            <a:endParaRPr lang="en-US" sz="1200" dirty="0"/>
+          </a:p>
+          <a:p>
+            <a:pPr indent="0" marL="0">
+              <a:buNone/>
+            </a:pPr>
+            <a:r>
+              <a:rPr lang="en-US" sz="1000" dirty="0">
                 <a:solidFill>
                   <a:schemeClr val="tx2"/>
                 </a:solidFill>
               </a:rPr>
-              <a:t>Reads the complaint or deal papers and builds the list of names to search.</a:t>
-            </a:r>
-            <a:endParaRPr lang="en-US" sz="1100" dirty="0"/>
+              <a:t>Names to search, from the documents</a:t>
+            </a:r>
+            <a:endParaRPr lang="en-US" sz="1200" dirty="0"/>
           </a:p>
         </p:txBody>
       </p:sp>
@@ -1436,8 +1436,8 @@
         </p:nvSpPr>
         <p:spPr>
           <a:xfrm>
-            <a:off x="548640" y="2999232"/>
-            <a:ext cx="1389888" cy="640080"/>
+            <a:off x="548640" y="2962656"/>
+            <a:ext cx="1389888" cy="603504"/>
           </a:xfrm>
           <a:prstGeom prst="rect">
             <a:avLst/>
@@ -1453,28 +1453,28 @@
               <a:buNone/>
             </a:pPr>
             <a:r>
-              <a:rPr lang="en-US" sz="1100" b="1" dirty="0">
+              <a:rPr lang="en-US" sz="1200" b="1" dirty="0">
                 <a:solidFill>
                   <a:schemeClr val="tx1"/>
                 </a:solidFill>
               </a:rPr>
               <a:t>LexAtlas</a:t>
             </a:r>
-            <a:endParaRPr lang="en-US" sz="1100" dirty="0"/>
-          </a:p>
-          <a:p>
-            <a:pPr indent="0" marL="0">
-              <a:buNone/>
-            </a:pPr>
-            <a:r>
-              <a:rPr lang="en-US" sz="850" dirty="0">
+            <a:endParaRPr lang="en-US" sz="1200" dirty="0"/>
+          </a:p>
+          <a:p>
+            <a:pPr indent="0" marL="0">
+              <a:buNone/>
+            </a:pPr>
+            <a:r>
+              <a:rPr lang="en-US" sz="1000" dirty="0">
                 <a:solidFill>
                   <a:schemeClr val="tx2"/>
                 </a:solidFill>
               </a:rPr>
-              <a:t>Relationship graph of companies, people and matters, walls in the data.</a:t>
-            </a:r>
-            <a:endParaRPr lang="en-US" sz="1100" dirty="0"/>
+              <a:t>Relationship graph with ethical walls</a:t>
+            </a:r>
+            <a:endParaRPr lang="en-US" sz="1200" dirty="0"/>
           </a:p>
         </p:txBody>
       </p:sp>
@@ -1486,8 +1486,8 @@
         </p:nvSpPr>
         <p:spPr>
           <a:xfrm>
-            <a:off x="548640" y="3657600"/>
-            <a:ext cx="1389888" cy="640080"/>
+            <a:off x="548640" y="3602736"/>
+            <a:ext cx="1389888" cy="603504"/>
           </a:xfrm>
           <a:prstGeom prst="rect">
             <a:avLst/>
@@ -1503,28 +1503,28 @@
               <a:buNone/>
             </a:pPr>
             <a:r>
-              <a:rPr lang="en-US" sz="1100" b="1" dirty="0">
+              <a:rPr lang="en-US" sz="1200" b="1" dirty="0">
                 <a:solidFill>
                   <a:schemeClr val="tx1"/>
                 </a:solidFill>
               </a:rPr>
               <a:t>VigilMark</a:t>
             </a:r>
-            <a:endParaRPr lang="en-US" sz="1100" dirty="0"/>
-          </a:p>
-          <a:p>
-            <a:pPr indent="0" marL="0">
-              <a:buNone/>
-            </a:pPr>
-            <a:r>
-              <a:rPr lang="en-US" sz="850" dirty="0">
+            <a:endParaRPr lang="en-US" sz="1200" dirty="0"/>
+          </a:p>
+          <a:p>
+            <a:pPr indent="0" marL="0">
+              <a:buNone/>
+            </a:pPr>
+            <a:r>
+              <a:rPr lang="en-US" sz="1000" dirty="0">
                 <a:solidFill>
                   <a:schemeClr val="tx2"/>
                 </a:solidFill>
               </a:rPr>
-              <a:t>Trademark watch that ranks new filings against clients' marks.</a:t>
-            </a:r>
-            <a:endParaRPr lang="en-US" sz="1100" dirty="0"/>
+              <a:t>Trademark watch and triage</a:t>
+            </a:r>
+            <a:endParaRPr lang="en-US" sz="1200" dirty="0"/>
           </a:p>
         </p:txBody>
       </p:sp>
@@ -1598,7 +1598,7 @@
         <p:spPr>
           <a:xfrm>
             <a:off x="2231136" y="1682496"/>
-            <a:ext cx="1389888" cy="640080"/>
+            <a:ext cx="1389888" cy="603504"/>
           </a:xfrm>
           <a:prstGeom prst="rect">
             <a:avLst/>
@@ -1614,28 +1614,28 @@
               <a:buNone/>
             </a:pPr>
             <a:r>
-              <a:rPr lang="en-US" sz="1100" b="1" dirty="0">
+              <a:rPr lang="en-US" sz="1200" b="1" dirty="0">
                 <a:solidFill>
                   <a:schemeClr val="tx1"/>
                 </a:solidFill>
               </a:rPr>
               <a:t>Win your case ASAP</a:t>
             </a:r>
-            <a:endParaRPr lang="en-US" sz="1100" dirty="0"/>
-          </a:p>
-          <a:p>
-            <a:pPr indent="0" marL="0">
-              <a:buNone/>
-            </a:pPr>
-            <a:r>
-              <a:rPr lang="en-US" sz="850" dirty="0">
+            <a:endParaRPr lang="en-US" sz="1200" dirty="0"/>
+          </a:p>
+          <a:p>
+            <a:pPr indent="0" marL="0">
+              <a:buNone/>
+            </a:pPr>
+            <a:r>
+              <a:rPr lang="en-US" sz="1000" dirty="0">
                 <a:solidFill>
                   <a:schemeClr val="tx2"/>
                 </a:solidFill>
               </a:rPr>
-              <a:t>First read of a complaint: every theory that could end the case early.</a:t>
-            </a:r>
-            <a:endParaRPr lang="en-US" sz="1100" dirty="0"/>
+              <a:t>First read of a complaint</a:t>
+            </a:r>
+            <a:endParaRPr lang="en-US" sz="1200" dirty="0"/>
           </a:p>
         </p:txBody>
       </p:sp>
@@ -1647,8 +1647,8 @@
         </p:nvSpPr>
         <p:spPr>
           <a:xfrm>
-            <a:off x="2231136" y="2340864"/>
-            <a:ext cx="1389888" cy="640080"/>
+            <a:off x="2231136" y="2322576"/>
+            <a:ext cx="1389888" cy="603504"/>
           </a:xfrm>
           <a:prstGeom prst="rect">
             <a:avLst/>
@@ -1664,28 +1664,28 @@
               <a:buNone/>
             </a:pPr>
             <a:r>
-              <a:rPr lang="en-US" sz="1100" b="1" dirty="0">
+              <a:rPr lang="en-US" sz="1200" b="1" dirty="0">
                 <a:solidFill>
                   <a:schemeClr val="tx1"/>
                 </a:solidFill>
               </a:rPr>
               <a:t>Testimony Check</a:t>
             </a:r>
-            <a:endParaRPr lang="en-US" sz="1100" dirty="0"/>
-          </a:p>
-          <a:p>
-            <a:pPr indent="0" marL="0">
-              <a:buNone/>
-            </a:pPr>
-            <a:r>
-              <a:rPr lang="en-US" sz="850" dirty="0">
+            <a:endParaRPr lang="en-US" sz="1200" dirty="0"/>
+          </a:p>
+          <a:p>
+            <a:pPr indent="0" marL="0">
+              <a:buNone/>
+            </a:pPr>
+            <a:r>
+              <a:rPr lang="en-US" sz="1000" dirty="0">
                 <a:solidFill>
                   <a:schemeClr val="tx2"/>
                 </a:solidFill>
               </a:rPr>
-              <a:t>Finds where a witness's story conflicts with the record.</a:t>
-            </a:r>
-            <a:endParaRPr lang="en-US" sz="1100" dirty="0"/>
+              <a:t>Witness vs. the record</a:t>
+            </a:r>
+            <a:endParaRPr lang="en-US" sz="1200" dirty="0"/>
           </a:p>
         </p:txBody>
       </p:sp>
@@ -1697,8 +1697,8 @@
         </p:nvSpPr>
         <p:spPr>
           <a:xfrm>
-            <a:off x="2231136" y="2999232"/>
-            <a:ext cx="1389888" cy="640080"/>
+            <a:off x="2231136" y="2962656"/>
+            <a:ext cx="1389888" cy="603504"/>
           </a:xfrm>
           <a:prstGeom prst="rect">
             <a:avLst/>
@@ -1714,28 +1714,28 @@
               <a:buNone/>
             </a:pPr>
             <a:r>
-              <a:rPr lang="en-US" sz="1100" b="1" dirty="0">
+              <a:rPr lang="en-US" sz="1200" b="1" dirty="0">
                 <a:solidFill>
                   <a:schemeClr val="tx1"/>
                 </a:solidFill>
               </a:rPr>
               <a:t>Citation Gate</a:t>
             </a:r>
-            <a:endParaRPr lang="en-US" sz="1100" dirty="0"/>
-          </a:p>
-          <a:p>
-            <a:pPr indent="0" marL="0">
-              <a:buNone/>
-            </a:pPr>
-            <a:r>
-              <a:rPr lang="en-US" sz="850" dirty="0">
+            <a:endParaRPr lang="en-US" sz="1200" dirty="0"/>
+          </a:p>
+          <a:p>
+            <a:pPr indent="0" marL="0">
+              <a:buNone/>
+            </a:pPr>
+            <a:r>
+              <a:rPr lang="en-US" sz="1000" dirty="0">
                 <a:solidFill>
                   <a:schemeClr val="tx2"/>
                 </a:solidFill>
               </a:rPr>
-              <a:t>Checks every cited case and quotation against real opinions.</a:t>
-            </a:r>
-            <a:endParaRPr lang="en-US" sz="1100" dirty="0"/>
+              <a:t>Every citation checked</a:t>
+            </a:r>
+            <a:endParaRPr lang="en-US" sz="1200" dirty="0"/>
           </a:p>
         </p:txBody>
       </p:sp>
@@ -1747,8 +1747,8 @@
         </p:nvSpPr>
         <p:spPr>
           <a:xfrm>
-            <a:off x="2231136" y="3657600"/>
-            <a:ext cx="1389888" cy="640080"/>
+            <a:off x="2231136" y="3602736"/>
+            <a:ext cx="1389888" cy="603504"/>
           </a:xfrm>
           <a:prstGeom prst="rect">
             <a:avLst/>
@@ -1764,28 +1764,28 @@
               <a:buNone/>
             </a:pPr>
             <a:r>
-              <a:rPr lang="en-US" sz="1100" b="1" dirty="0">
+              <a:rPr lang="en-US" sz="1200" b="1" dirty="0">
                 <a:solidFill>
                   <a:schemeClr val="tx1"/>
                 </a:solidFill>
               </a:rPr>
               <a:t>Case Wins Debrief</a:t>
             </a:r>
-            <a:endParaRPr lang="en-US" sz="1100" dirty="0"/>
-          </a:p>
-          <a:p>
-            <a:pPr indent="0" marL="0">
-              <a:buNone/>
-            </a:pPr>
-            <a:r>
-              <a:rPr lang="en-US" sz="850" dirty="0">
+            <a:endParaRPr lang="en-US" sz="1200" dirty="0"/>
+          </a:p>
+          <a:p>
+            <a:pPr indent="0" marL="0">
+              <a:buNone/>
+            </a:pPr>
+            <a:r>
+              <a:rPr lang="en-US" sz="1000" dirty="0">
                 <a:solidFill>
                   <a:schemeClr val="tx2"/>
                 </a:solidFill>
               </a:rPr>
-              <a:t>Turns the firm's wins into patterns the next team can reuse.</a:t>
-            </a:r>
-            <a:endParaRPr lang="en-US" sz="1100" dirty="0"/>
+              <a:t>Lessons from wins, reusable</a:t>
+            </a:r>
+            <a:endParaRPr lang="en-US" sz="1200" dirty="0"/>
           </a:p>
         </p:txBody>
       </p:sp>
@@ -1859,7 +1859,7 @@
         <p:spPr>
           <a:xfrm>
             <a:off x="3913632" y="1682496"/>
-            <a:ext cx="1389888" cy="640080"/>
+            <a:ext cx="1389888" cy="603504"/>
           </a:xfrm>
           <a:prstGeom prst="rect">
             <a:avLst/>
@@ -1875,28 +1875,28 @@
               <a:buNone/>
             </a:pPr>
             <a:r>
-              <a:rPr lang="en-US" sz="1100" b="1" dirty="0">
+              <a:rPr lang="en-US" sz="1200" b="1" dirty="0">
                 <a:solidFill>
                   <a:schemeClr val="tx1"/>
                 </a:solidFill>
               </a:rPr>
               <a:t>Matter Desk</a:t>
             </a:r>
-            <a:endParaRPr lang="en-US" sz="1100" dirty="0"/>
-          </a:p>
-          <a:p>
-            <a:pPr indent="0" marL="0">
-              <a:buNone/>
-            </a:pPr>
-            <a:r>
-              <a:rPr lang="en-US" sz="850" dirty="0">
+            <a:endParaRPr lang="en-US" sz="1200" dirty="0"/>
+          </a:p>
+          <a:p>
+            <a:pPr indent="0" marL="0">
+              <a:buNone/>
+            </a:pPr>
+            <a:r>
+              <a:rPr lang="en-US" sz="1000" dirty="0">
                 <a:solidFill>
                   <a:schemeClr val="tx2"/>
                 </a:solidFill>
               </a:rPr>
-              <a:t>First read of a new matter in five practice areas, deadlines dated.</a:t>
-            </a:r>
-            <a:endParaRPr lang="en-US" sz="1100" dirty="0"/>
+              <a:t>First read of a new matter</a:t>
+            </a:r>
+            <a:endParaRPr lang="en-US" sz="1200" dirty="0"/>
           </a:p>
         </p:txBody>
       </p:sp>
@@ -1908,8 +1908,8 @@
         </p:nvSpPr>
         <p:spPr>
           <a:xfrm>
-            <a:off x="3913632" y="2340864"/>
-            <a:ext cx="1389888" cy="640080"/>
+            <a:off x="3913632" y="2322576"/>
+            <a:ext cx="1389888" cy="603504"/>
           </a:xfrm>
           <a:prstGeom prst="rect">
             <a:avLst/>
@@ -1925,28 +1925,28 @@
               <a:buNone/>
             </a:pPr>
             <a:r>
-              <a:rPr lang="en-US" sz="1100" b="1" dirty="0">
+              <a:rPr lang="en-US" sz="1200" b="1" dirty="0">
                 <a:solidFill>
                   <a:schemeClr val="tx1"/>
                 </a:solidFill>
               </a:rPr>
               <a:t>Synthesis</a:t>
             </a:r>
-            <a:endParaRPr lang="en-US" sz="1100" dirty="0"/>
-          </a:p>
-          <a:p>
-            <a:pPr indent="0" marL="0">
-              <a:buNone/>
-            </a:pPr>
-            <a:r>
-              <a:rPr lang="en-US" sz="850" dirty="0">
+            <a:endParaRPr lang="en-US" sz="1200" dirty="0"/>
+          </a:p>
+          <a:p>
+            <a:pPr indent="0" marL="0">
+              <a:buNone/>
+            </a:pPr>
+            <a:r>
+              <a:rPr lang="en-US" sz="1000" dirty="0">
                 <a:solidFill>
                   <a:schemeClr val="tx2"/>
                 </a:solidFill>
               </a:rPr>
-              <a:t>Buy-side deal workbench: schedules, markup and closing checklist.</a:t>
-            </a:r>
-            <a:endParaRPr lang="en-US" sz="1100" dirty="0"/>
+              <a:t>Buy-side deal workbench</a:t>
+            </a:r>
+            <a:endParaRPr lang="en-US" sz="1200" dirty="0"/>
           </a:p>
         </p:txBody>
       </p:sp>
@@ -1958,8 +1958,8 @@
         </p:nvSpPr>
         <p:spPr>
           <a:xfrm>
-            <a:off x="3913632" y="2999232"/>
-            <a:ext cx="1389888" cy="640080"/>
+            <a:off x="3913632" y="2962656"/>
+            <a:ext cx="1389888" cy="603504"/>
           </a:xfrm>
           <a:prstGeom prst="rect">
             <a:avLst/>
@@ -1975,28 +1975,28 @@
               <a:buNone/>
             </a:pPr>
             <a:r>
-              <a:rPr lang="en-US" sz="1100" b="1" dirty="0">
+              <a:rPr lang="en-US" sz="1200" b="1" dirty="0">
                 <a:solidFill>
                   <a:schemeClr val="tx1"/>
                 </a:solidFill>
               </a:rPr>
               <a:t>Skippy</a:t>
             </a:r>
-            <a:endParaRPr lang="en-US" sz="1100" dirty="0"/>
-          </a:p>
-          <a:p>
-            <a:pPr indent="0" marL="0">
-              <a:buNone/>
-            </a:pPr>
-            <a:r>
-              <a:rPr lang="en-US" sz="850" dirty="0">
+            <a:endParaRPr lang="en-US" sz="1200" dirty="0"/>
+          </a:p>
+          <a:p>
+            <a:pPr indent="0" marL="0">
+              <a:buNone/>
+            </a:pPr>
+            <a:r>
+              <a:rPr lang="en-US" sz="1000" dirty="0">
                 <a:solidFill>
                   <a:schemeClr val="tx2"/>
                 </a:solidFill>
               </a:rPr>
-              <a:t>Answers questions about a matter's files, cited to the page.</a:t>
-            </a:r>
-            <a:endParaRPr lang="en-US" sz="1100" dirty="0"/>
+              <a:t>Ask the matter, cited to the page</a:t>
+            </a:r>
+            <a:endParaRPr lang="en-US" sz="1200" dirty="0"/>
           </a:p>
         </p:txBody>
       </p:sp>
@@ -2070,7 +2070,7 @@
         <p:spPr>
           <a:xfrm>
             <a:off x="5596128" y="1682496"/>
-            <a:ext cx="1389888" cy="640080"/>
+            <a:ext cx="1389888" cy="603504"/>
           </a:xfrm>
           <a:prstGeom prst="rect">
             <a:avLst/>
@@ -2086,28 +2086,28 @@
               <a:buNone/>
             </a:pPr>
             <a:r>
-              <a:rPr lang="en-US" sz="1100" b="1" dirty="0">
+              <a:rPr lang="en-US" sz="1200" b="1" dirty="0">
                 <a:solidFill>
                   <a:schemeClr val="tx1"/>
                 </a:solidFill>
               </a:rPr>
               <a:t>Guideline Guard</a:t>
             </a:r>
-            <a:endParaRPr lang="en-US" sz="1100" dirty="0"/>
-          </a:p>
-          <a:p>
-            <a:pPr indent="0" marL="0">
-              <a:buNone/>
-            </a:pPr>
-            <a:r>
-              <a:rPr lang="en-US" sz="850" dirty="0">
+            <a:endParaRPr lang="en-US" sz="1200" dirty="0"/>
+          </a:p>
+          <a:p>
+            <a:pPr indent="0" marL="0">
+              <a:buNone/>
+            </a:pPr>
+            <a:r>
+              <a:rPr lang="en-US" sz="1000" dirty="0">
                 <a:solidFill>
                   <a:schemeClr val="tx2"/>
                 </a:solidFill>
               </a:rPr>
-              <a:t>Applies each client's outside counsel guidelines to the prebill.</a:t>
-            </a:r>
-            <a:endParaRPr lang="en-US" sz="1100" dirty="0"/>
+              <a:t>Client guidelines on the prebill</a:t>
+            </a:r>
+            <a:endParaRPr lang="en-US" sz="1200" dirty="0"/>
           </a:p>
         </p:txBody>
       </p:sp>
@@ -2119,8 +2119,8 @@
         </p:nvSpPr>
         <p:spPr>
           <a:xfrm>
-            <a:off x="5596128" y="2340864"/>
-            <a:ext cx="1389888" cy="640080"/>
+            <a:off x="5596128" y="2322576"/>
+            <a:ext cx="1389888" cy="603504"/>
           </a:xfrm>
           <a:prstGeom prst="rect">
             <a:avLst/>
@@ -2136,28 +2136,28 @@
               <a:buNone/>
             </a:pPr>
             <a:r>
-              <a:rPr lang="en-US" sz="1100" b="1" dirty="0">
+              <a:rPr lang="en-US" sz="1200" b="1" dirty="0">
                 <a:solidFill>
                   <a:schemeClr val="tx1"/>
                 </a:solidFill>
               </a:rPr>
               <a:t>Hour Catch</a:t>
             </a:r>
-            <a:endParaRPr lang="en-US" sz="1100" dirty="0"/>
-          </a:p>
-          <a:p>
-            <a:pPr indent="0" marL="0">
-              <a:buNone/>
-            </a:pPr>
-            <a:r>
-              <a:rPr lang="en-US" sz="850" dirty="0">
+            <a:endParaRPr lang="en-US" sz="1200" dirty="0"/>
+          </a:p>
+          <a:p>
+            <a:pPr indent="0" marL="0">
+              <a:buNone/>
+            </a:pPr>
+            <a:r>
+              <a:rPr lang="en-US" sz="1000" dirty="0">
                 <a:solidFill>
                   <a:schemeClr val="tx2"/>
                 </a:solidFill>
               </a:rPr>
-              <a:t>Reads a lawyer's day and drafts the time entries it would miss.</a:t>
-            </a:r>
-            <a:endParaRPr lang="en-US" sz="1100" dirty="0"/>
+              <a:t>Missed time, drafted</a:t>
+            </a:r>
+            <a:endParaRPr lang="en-US" sz="1200" dirty="0"/>
           </a:p>
         </p:txBody>
       </p:sp>
@@ -2231,7 +2231,7 @@
         <p:spPr>
           <a:xfrm>
             <a:off x="7278624" y="1682496"/>
-            <a:ext cx="1389888" cy="640080"/>
+            <a:ext cx="1389888" cy="603504"/>
           </a:xfrm>
           <a:prstGeom prst="rect">
             <a:avLst/>
@@ -2247,28 +2247,28 @@
               <a:buNone/>
             </a:pPr>
             <a:r>
-              <a:rPr lang="en-US" sz="1100" b="1" dirty="0">
+              <a:rPr lang="en-US" sz="1200" b="1" dirty="0">
                 <a:solidFill>
                   <a:schemeClr val="tx1"/>
                 </a:solidFill>
               </a:rPr>
               <a:t>Praxis</a:t>
             </a:r>
-            <a:endParaRPr lang="en-US" sz="1100" dirty="0"/>
-          </a:p>
-          <a:p>
-            <a:pPr indent="0" marL="0">
-              <a:buNone/>
-            </a:pPr>
-            <a:r>
-              <a:rPr lang="en-US" sz="850" dirty="0">
+            <a:endParaRPr lang="en-US" sz="1200" dirty="0"/>
+          </a:p>
+          <a:p>
+            <a:pPr indent="0" marL="0">
+              <a:buNone/>
+            </a:pPr>
+            <a:r>
+              <a:rPr lang="en-US" sz="1000" dirty="0">
                 <a:solidFill>
                   <a:schemeClr val="tx2"/>
                 </a:solidFill>
               </a:rPr>
-              <a:t>Maps and scores AI ideas and carries the winners through pilots.</a:t>
-            </a:r>
-            <a:endParaRPr lang="en-US" sz="1100" dirty="0"/>
+              <a:t>Scores AI ideas, runs pilots</a:t>
+            </a:r>
+            <a:endParaRPr lang="en-US" sz="1200" dirty="0"/>
           </a:p>
         </p:txBody>
       </p:sp>
@@ -2280,8 +2280,8 @@
         </p:nvSpPr>
         <p:spPr>
           <a:xfrm>
-            <a:off x="7278624" y="2340864"/>
-            <a:ext cx="1389888" cy="640080"/>
+            <a:off x="7278624" y="2322576"/>
+            <a:ext cx="1389888" cy="603504"/>
           </a:xfrm>
           <a:prstGeom prst="rect">
             <a:avLst/>
@@ -2297,28 +2297,28 @@
               <a:buNone/>
             </a:pPr>
             <a:r>
-              <a:rPr lang="en-US" sz="1100" b="1" dirty="0">
+              <a:rPr lang="en-US" sz="1200" b="1" dirty="0">
                 <a:solidFill>
                   <a:schemeClr val="tx1"/>
                 </a:solidFill>
               </a:rPr>
               <a:t>Marketing Studio</a:t>
             </a:r>
-            <a:endParaRPr lang="en-US" sz="1100" dirty="0"/>
-          </a:p>
-          <a:p>
-            <a:pPr indent="0" marL="0">
-              <a:buNone/>
-            </a:pPr>
-            <a:r>
-              <a:rPr lang="en-US" sz="850" dirty="0">
+            <a:endParaRPr lang="en-US" sz="1200" dirty="0"/>
+          </a:p>
+          <a:p>
+            <a:pPr indent="0" marL="0">
+              <a:buNone/>
+            </a:pPr>
+            <a:r>
+              <a:rPr lang="en-US" sz="1000" dirty="0">
                 <a:solidFill>
                   <a:schemeClr val="tx2"/>
                 </a:solidFill>
               </a:rPr>
-              <a:t>Drafts bios, alerts and RFP responses, then checks them against the rules.</a:t>
-            </a:r>
-            <a:endParaRPr lang="en-US" sz="1100" dirty="0"/>
+              <a:t>Bios, alerts and RFPs, checked</a:t>
+            </a:r>
+            <a:endParaRPr lang="en-US" sz="1200" dirty="0"/>
           </a:p>
         </p:txBody>
       </p:sp>
@@ -2401,7 +2401,7 @@
                   <a:schemeClr val="tx2"/>
                 </a:solidFill>
               </a:rPr>
-              <a:t>Sensitive data stays on firm hardware</a:t>
+              <a:t>Data stays on firm hardware</a:t>
             </a:r>
             <a:endParaRPr lang="en-US" sz="950" dirty="0"/>
           </a:p>
@@ -2486,7 +2486,7 @@
                   <a:schemeClr val="tx2"/>
                 </a:solidFill>
               </a:rPr>
-              <a:t>Sign-on and role-based access</a:t>
+              <a:t>Sign-on and roles</a:t>
             </a:r>
             <a:endParaRPr lang="en-US" sz="950" dirty="0"/>
           </a:p>
@@ -2571,7 +2571,7 @@
                   <a:schemeClr val="tx2"/>
                 </a:solidFill>
               </a:rPr>
-              <a:t>Ethical walls enforced in the data</a:t>
+              <a:t>Ethical walls</a:t>
             </a:r>
             <a:endParaRPr lang="en-US" sz="950" dirty="0"/>
           </a:p>
@@ -2656,7 +2656,7 @@
                   <a:schemeClr val="tx2"/>
                 </a:solidFill>
               </a:rPr>
-              <a:t>Audit trail on every action</a:t>
+              <a:t>Audit trail</a:t>
             </a:r>
             <a:endParaRPr lang="en-US" sz="950" dirty="0"/>
           </a:p>
@@ -2741,7 +2741,7 @@
                   <a:schemeClr val="tx2"/>
                 </a:solidFill>
               </a:rPr>
-              <a:t>Tests and docs written for IT review</a:t>
+              <a:t>Tests and docs for IT</a:t>
             </a:r>
             <a:endParaRPr lang="en-US" sz="950" dirty="0"/>
           </a:p>
@@ -2849,7 +2849,7 @@
                   <a:srgbClr val="2D4459"/>
                 </a:solidFill>
               </a:rPr>
-              <a:t>Quick wins I think are worth exploring</a:t>
+              <a:t>Four quick wins on what we already license</a:t>
             </a:r>
             <a:endParaRPr lang="en-US" sz="2600" dirty="0"/>
           </a:p>
@@ -2887,7 +2887,7 @@
                   <a:schemeClr val="tx2"/>
                 </a:solidFill>
               </a:rPr>
-              <a:t>Ideas, not a plan. Each could run within a few months, mostly on tools the firm already licenses.</a:t>
+              <a:t>Ideas, not a plan. Each uses data the firm already holds, and a person reviews every output.</a:t>
             </a:r>
             <a:endParaRPr lang="en-US" sz="1300" dirty="0"/>
           </a:p>
@@ -2895,7 +2895,7 @@
       </p:sp>
       <p:sp>
         <p:nvSpPr>
-          <p:cNvPr id="4" name="Outside counsel guidelines brief card"/>
+          <p:cNvPr id="4" name="Client guidelines brief card"/>
           <p:cNvSpPr/>
           <p:nvPr/>
         </p:nvSpPr>
@@ -2969,7 +2969,7 @@
       </p:pic>
       <p:sp>
         <p:nvSpPr>
-          <p:cNvPr id="7" name="Outside counsel guidelines brief name"/>
+          <p:cNvPr id="7" name="Client guidelines brief name"/>
           <p:cNvSpPr txBox="1"/>
           <p:nvPr/>
         </p:nvSpPr>
@@ -2997,7 +2997,7 @@
                   <a:schemeClr val="tx1"/>
                 </a:solidFill>
               </a:rPr>
-              <a:t>Outside counsel guidelines brief</a:t>
+              <a:t>Client guidelines brief</a:t>
             </a:r>
             <a:endParaRPr lang="en-US" sz="1400" dirty="0"/>
           </a:p>
@@ -3005,14 +3005,14 @@
       </p:sp>
       <p:sp>
         <p:nvSpPr>
-          <p:cNvPr id="8" name="Outside counsel guidelines brief what"/>
-          <p:cNvSpPr txBox="1"/>
-          <p:nvPr/>
-        </p:nvSpPr>
-        <p:spPr>
-          <a:xfrm>
-            <a:off x="594360" y="1856232"/>
-            <a:ext cx="3749040" cy="548640"/>
+          <p:cNvPr id="8" name="Client guidelines brief what"/>
+          <p:cNvSpPr txBox="1"/>
+          <p:nvPr/>
+        </p:nvSpPr>
+        <p:spPr>
+          <a:xfrm>
+            <a:off x="594360" y="1892808"/>
+            <a:ext cx="3749040" cy="868680"/>
           </a:xfrm>
           <a:prstGeom prst="rect">
             <a:avLst/>
@@ -3028,67 +3028,20 @@
               <a:buNone/>
             </a:pPr>
             <a:r>
-              <a:rPr lang="en-US" sz="1100" dirty="0">
+              <a:rPr lang="en-US" sz="1300" dirty="0">
                 <a:solidFill>
                   <a:schemeClr val="tx1"/>
                 </a:solidFill>
               </a:rPr>
-              <a:t>Turns each client's guidelines into a one-page brief per matter and flags time entries that break them before the invoice goes out.</a:t>
-            </a:r>
-            <a:endParaRPr lang="en-US" sz="1100" dirty="0"/>
-          </a:p>
-        </p:txBody>
-      </p:sp>
-      <p:sp>
-        <p:nvSpPr>
-          <p:cNvPr id="9" name="Outside counsel guidelines brief why"/>
-          <p:cNvSpPr txBox="1"/>
-          <p:nvPr/>
-        </p:nvSpPr>
-        <p:spPr>
-          <a:xfrm>
-            <a:off x="594360" y="2386584"/>
-            <a:ext cx="3749040" cy="457200"/>
-          </a:xfrm>
-          <a:prstGeom prst="rect">
-            <a:avLst/>
-          </a:prstGeom>
-          <a:noFill/>
-          <a:ln/>
-        </p:spPr>
-        <p:txBody>
-          <a:bodyPr wrap="square" lIns="0" tIns="0" rIns="0" bIns="0" rtlCol="0" anchor="t"/>
-          <a:lstStyle/>
-          <a:p>
-            <a:pPr indent="0" marL="0">
-              <a:buNone/>
-            </a:pPr>
-            <a:r>
-              <a:rPr lang="en-US" sz="1000" b="1" dirty="0">
-                <a:solidFill>
-                  <a:schemeClr val="accent5"/>
-                </a:solidFill>
-              </a:rPr>
-              <a:t>Why I would start here: </a:t>
-            </a:r>
-            <a:pPr indent="0" marL="0">
-              <a:buNone/>
-            </a:pPr>
-            <a:r>
-              <a:rPr lang="en-US" sz="1000" dirty="0">
-                <a:solidFill>
-                  <a:schemeClr val="tx2"/>
-                </a:solidFill>
-              </a:rPr>
-              <a:t>Uses documents the firm already holds. A person reviews the output before anything leaves.</a:t>
-            </a:r>
-            <a:endParaRPr lang="en-US" sz="1000" dirty="0"/>
-          </a:p>
-        </p:txBody>
-      </p:sp>
-      <p:sp>
-        <p:nvSpPr>
-          <p:cNvPr id="10" name="Pre-bill reviewer card"/>
+              <a:t>Each client's billing rules on one page, and entries that break them flagged before the invoice goes out.</a:t>
+            </a:r>
+            <a:endParaRPr lang="en-US" sz="1300" dirty="0"/>
+          </a:p>
+        </p:txBody>
+      </p:sp>
+      <p:sp>
+        <p:nvSpPr>
+          <p:cNvPr id="9" name="Pre-bill reviewer card"/>
           <p:cNvSpPr/>
           <p:nvPr/>
         </p:nvSpPr>
@@ -3113,7 +3066,7 @@
       </p:sp>
       <p:sp>
         <p:nvSpPr>
-          <p:cNvPr id="11" name="icon square"/>
+          <p:cNvPr id="10" name="icon square"/>
           <p:cNvSpPr/>
           <p:nvPr/>
         </p:nvSpPr>
@@ -3138,7 +3091,7 @@
       </p:sp>
       <p:pic>
         <p:nvPicPr>
-          <p:cNvPr id="12" name="dollar icon" descr="preencoded.png">    </p:cNvPr>
+          <p:cNvPr id="11" name="dollar icon" descr="preencoded.png">    </p:cNvPr>
           <p:cNvPicPr>
             <a:picLocks noChangeAspect="1"/>
           </p:cNvPicPr>
@@ -3162,7 +3115,7 @@
       </p:pic>
       <p:sp>
         <p:nvSpPr>
-          <p:cNvPr id="13" name="Pre-bill reviewer name"/>
+          <p:cNvPr id="12" name="Pre-bill reviewer name"/>
           <p:cNvSpPr txBox="1"/>
           <p:nvPr/>
         </p:nvSpPr>
@@ -3198,14 +3151,14 @@
       </p:sp>
       <p:sp>
         <p:nvSpPr>
-          <p:cNvPr id="14" name="Pre-bill reviewer what"/>
-          <p:cNvSpPr txBox="1"/>
-          <p:nvPr/>
-        </p:nvSpPr>
-        <p:spPr>
-          <a:xfrm>
-            <a:off x="4800600" y="1856232"/>
-            <a:ext cx="3749040" cy="548640"/>
+          <p:cNvPr id="13" name="Pre-bill reviewer what"/>
+          <p:cNvSpPr txBox="1"/>
+          <p:nvPr/>
+        </p:nvSpPr>
+        <p:spPr>
+          <a:xfrm>
+            <a:off x="4800600" y="1892808"/>
+            <a:ext cx="3749040" cy="868680"/>
           </a:xfrm>
           <a:prstGeom prst="rect">
             <a:avLst/>
@@ -3221,67 +3174,20 @@
               <a:buNone/>
             </a:pPr>
             <a:r>
-              <a:rPr lang="en-US" sz="1100" dirty="0">
+              <a:rPr lang="en-US" sz="1300" dirty="0">
                 <a:solidFill>
                   <a:schemeClr val="tx1"/>
                 </a:solidFill>
               </a:rPr>
-              <a:t>Flags vague or block-billed entries a client is likely to reject and suggests a rewrite.</a:t>
-            </a:r>
-            <a:endParaRPr lang="en-US" sz="1100" dirty="0"/>
-          </a:p>
-        </p:txBody>
-      </p:sp>
-      <p:sp>
-        <p:nvSpPr>
-          <p:cNvPr id="15" name="Pre-bill reviewer why"/>
-          <p:cNvSpPr txBox="1"/>
-          <p:nvPr/>
-        </p:nvSpPr>
-        <p:spPr>
-          <a:xfrm>
-            <a:off x="4800600" y="2386584"/>
-            <a:ext cx="3749040" cy="457200"/>
-          </a:xfrm>
-          <a:prstGeom prst="rect">
-            <a:avLst/>
-          </a:prstGeom>
-          <a:noFill/>
-          <a:ln/>
-        </p:spPr>
-        <p:txBody>
-          <a:bodyPr wrap="square" lIns="0" tIns="0" rIns="0" bIns="0" rtlCol="0" anchor="t"/>
-          <a:lstStyle/>
-          <a:p>
-            <a:pPr indent="0" marL="0">
-              <a:buNone/>
-            </a:pPr>
-            <a:r>
-              <a:rPr lang="en-US" sz="1000" b="1" dirty="0">
-                <a:solidFill>
-                  <a:schemeClr val="accent5"/>
-                </a:solidFill>
-              </a:rPr>
-              <a:t>Why I would start here: </a:t>
-            </a:r>
-            <a:pPr indent="0" marL="0">
-              <a:buNone/>
-            </a:pPr>
-            <a:r>
-              <a:rPr lang="en-US" sz="1000" dirty="0">
-                <a:solidFill>
-                  <a:schemeClr val="tx2"/>
-                </a:solidFill>
-              </a:rPr>
-              <a:t>Internal only. The write-offs it prevents show up on the firm's own ledger.</a:t>
-            </a:r>
-            <a:endParaRPr lang="en-US" sz="1000" dirty="0"/>
-          </a:p>
-        </p:txBody>
-      </p:sp>
-      <p:sp>
-        <p:nvSpPr>
-          <p:cNvPr id="16" name="Matter handoff memo card"/>
+              <a:t>Flags vague or block-billed entries a client would reject, and suggests the rewrite.</a:t>
+            </a:r>
+            <a:endParaRPr lang="en-US" sz="1300" dirty="0"/>
+          </a:p>
+        </p:txBody>
+      </p:sp>
+      <p:sp>
+        <p:nvSpPr>
+          <p:cNvPr id="14" name="Matter handoff memo card"/>
           <p:cNvSpPr/>
           <p:nvPr/>
         </p:nvSpPr>
@@ -3306,7 +3212,7 @@
       </p:sp>
       <p:sp>
         <p:nvSpPr>
-          <p:cNvPr id="17" name="icon square"/>
+          <p:cNvPr id="15" name="icon square"/>
           <p:cNvSpPr/>
           <p:nvPr/>
         </p:nvSpPr>
@@ -3331,7 +3237,7 @@
       </p:sp>
       <p:pic>
         <p:nvPicPr>
-          <p:cNvPr id="18" name="repeat icon" descr="preencoded.png">    </p:cNvPr>
+          <p:cNvPr id="16" name="repeat icon" descr="preencoded.png">    </p:cNvPr>
           <p:cNvPicPr>
             <a:picLocks noChangeAspect="1"/>
           </p:cNvPicPr>
@@ -3355,7 +3261,7 @@
       </p:pic>
       <p:sp>
         <p:nvSpPr>
-          <p:cNvPr id="19" name="Matter handoff memo name"/>
+          <p:cNvPr id="17" name="Matter handoff memo name"/>
           <p:cNvSpPr txBox="1"/>
           <p:nvPr/>
         </p:nvSpPr>
@@ -3391,14 +3297,14 @@
       </p:sp>
       <p:sp>
         <p:nvSpPr>
-          <p:cNvPr id="20" name="Matter handoff memo what"/>
-          <p:cNvSpPr txBox="1"/>
-          <p:nvPr/>
-        </p:nvSpPr>
-        <p:spPr>
-          <a:xfrm>
-            <a:off x="594360" y="3639312"/>
-            <a:ext cx="3749040" cy="548640"/>
+          <p:cNvPr id="18" name="Matter handoff memo what"/>
+          <p:cNvSpPr txBox="1"/>
+          <p:nvPr/>
+        </p:nvSpPr>
+        <p:spPr>
+          <a:xfrm>
+            <a:off x="594360" y="3675888"/>
+            <a:ext cx="3749040" cy="868680"/>
           </a:xfrm>
           <a:prstGeom prst="rect">
             <a:avLst/>
@@ -3414,67 +3320,20 @@
               <a:buNone/>
             </a:pPr>
             <a:r>
-              <a:rPr lang="en-US" sz="1100" dirty="0">
+              <a:rPr lang="en-US" sz="1300" dirty="0">
                 <a:solidFill>
                   <a:schemeClr val="tx1"/>
                 </a:solidFill>
               </a:rPr>
-              <a:t>Produces a "state of the matter" summary from emails and documents when someone rotates off or retires.</a:t>
-            </a:r>
-            <a:endParaRPr lang="en-US" sz="1100" dirty="0"/>
-          </a:p>
-        </p:txBody>
-      </p:sp>
-      <p:sp>
-        <p:nvSpPr>
-          <p:cNvPr id="21" name="Matter handoff memo why"/>
-          <p:cNvSpPr txBox="1"/>
-          <p:nvPr/>
-        </p:nvSpPr>
-        <p:spPr>
-          <a:xfrm>
-            <a:off x="594360" y="4169664"/>
-            <a:ext cx="3749040" cy="457200"/>
-          </a:xfrm>
-          <a:prstGeom prst="rect">
-            <a:avLst/>
-          </a:prstGeom>
-          <a:noFill/>
-          <a:ln/>
-        </p:spPr>
-        <p:txBody>
-          <a:bodyPr wrap="square" lIns="0" tIns="0" rIns="0" bIns="0" rtlCol="0" anchor="t"/>
-          <a:lstStyle/>
-          <a:p>
-            <a:pPr indent="0" marL="0">
-              <a:buNone/>
-            </a:pPr>
-            <a:r>
-              <a:rPr lang="en-US" sz="1000" b="1" dirty="0">
-                <a:solidFill>
-                  <a:schemeClr val="accent5"/>
-                </a:solidFill>
-              </a:rPr>
-              <a:t>Why I would start here: </a:t>
-            </a:r>
-            <a:pPr indent="0" marL="0">
-              <a:buNone/>
-            </a:pPr>
-            <a:r>
-              <a:rPr lang="en-US" sz="1000" dirty="0">
-                <a:solidFill>
-                  <a:schemeClr val="tx2"/>
-                </a:solidFill>
-              </a:rPr>
-              <a:t>Reads the firm's own files. Replaces a task nobody enjoys.</a:t>
-            </a:r>
-            <a:endParaRPr lang="en-US" sz="1000" dirty="0"/>
-          </a:p>
-        </p:txBody>
-      </p:sp>
-      <p:sp>
-        <p:nvSpPr>
-          <p:cNvPr id="22" name="Drafting from our own precedents card"/>
+              <a:t>A "state of the matter" brief from the emails and documents when someone rotates off or retires.</a:t>
+            </a:r>
+            <a:endParaRPr lang="en-US" sz="1300" dirty="0"/>
+          </a:p>
+        </p:txBody>
+      </p:sp>
+      <p:sp>
+        <p:nvSpPr>
+          <p:cNvPr id="19" name="Drafting from our own precedents card"/>
           <p:cNvSpPr/>
           <p:nvPr/>
         </p:nvSpPr>
@@ -3499,7 +3358,7 @@
       </p:sp>
       <p:sp>
         <p:nvSpPr>
-          <p:cNvPr id="23" name="icon square"/>
+          <p:cNvPr id="20" name="icon square"/>
           <p:cNvSpPr/>
           <p:nvPr/>
         </p:nvSpPr>
@@ -3524,7 +3383,7 @@
       </p:sp>
       <p:pic>
         <p:nvPicPr>
-          <p:cNvPr id="24" name="edit icon" descr="preencoded.png">    </p:cNvPr>
+          <p:cNvPr id="21" name="edit icon" descr="preencoded.png">    </p:cNvPr>
           <p:cNvPicPr>
             <a:picLocks noChangeAspect="1"/>
           </p:cNvPicPr>
@@ -3548,7 +3407,7 @@
       </p:pic>
       <p:sp>
         <p:nvSpPr>
-          <p:cNvPr id="25" name="Drafting from our own precedents name"/>
+          <p:cNvPr id="22" name="Drafting from our own precedents name"/>
           <p:cNvSpPr txBox="1"/>
           <p:nvPr/>
         </p:nvSpPr>
@@ -3584,14 +3443,14 @@
       </p:sp>
       <p:sp>
         <p:nvSpPr>
-          <p:cNvPr id="26" name="Drafting from our own precedents what"/>
-          <p:cNvSpPr txBox="1"/>
-          <p:nvPr/>
-        </p:nvSpPr>
-        <p:spPr>
-          <a:xfrm>
-            <a:off x="4800600" y="3639312"/>
-            <a:ext cx="3749040" cy="548640"/>
+          <p:cNvPr id="23" name="Drafting from our own precedents what"/>
+          <p:cNvSpPr txBox="1"/>
+          <p:nvPr/>
+        </p:nvSpPr>
+        <p:spPr>
+          <a:xfrm>
+            <a:off x="4800600" y="3675888"/>
+            <a:ext cx="3749040" cy="868680"/>
           </a:xfrm>
           <a:prstGeom prst="rect">
             <a:avLst/>
@@ -3607,61 +3466,14 @@
               <a:buNone/>
             </a:pPr>
             <a:r>
-              <a:rPr lang="en-US" sz="1100" dirty="0">
+              <a:rPr lang="en-US" sz="1300" dirty="0">
                 <a:solidFill>
                   <a:schemeClr val="tx1"/>
                 </a:solidFill>
               </a:rPr>
-              <a:t>First drafts of routine documents from the firm's best past examples instead of generic templates.</a:t>
-            </a:r>
-            <a:endParaRPr lang="en-US" sz="1100" dirty="0"/>
-          </a:p>
-        </p:txBody>
-      </p:sp>
-      <p:sp>
-        <p:nvSpPr>
-          <p:cNvPr id="27" name="Drafting from our own precedents why"/>
-          <p:cNvSpPr txBox="1"/>
-          <p:nvPr/>
-        </p:nvSpPr>
-        <p:spPr>
-          <a:xfrm>
-            <a:off x="4800600" y="4169664"/>
-            <a:ext cx="3749040" cy="457200"/>
-          </a:xfrm>
-          <a:prstGeom prst="rect">
-            <a:avLst/>
-          </a:prstGeom>
-          <a:noFill/>
-          <a:ln/>
-        </p:spPr>
-        <p:txBody>
-          <a:bodyPr wrap="square" lIns="0" tIns="0" rIns="0" bIns="0" rtlCol="0" anchor="t"/>
-          <a:lstStyle/>
-          <a:p>
-            <a:pPr indent="0" marL="0">
-              <a:buNone/>
-            </a:pPr>
-            <a:r>
-              <a:rPr lang="en-US" sz="1000" b="1" dirty="0">
-                <a:solidFill>
-                  <a:schemeClr val="accent5"/>
-                </a:solidFill>
-              </a:rPr>
-              <a:t>Why I would start here: </a:t>
-            </a:r>
-            <a:pPr indent="0" marL="0">
-              <a:buNone/>
-            </a:pPr>
-            <a:r>
-              <a:rPr lang="en-US" sz="1000" dirty="0">
-                <a:solidFill>
-                  <a:schemeClr val="tx2"/>
-                </a:solidFill>
-              </a:rPr>
-              <a:t>Can start inside Copilot and the document system with approved prompts. Nothing new to host.</a:t>
-            </a:r>
-            <a:endParaRPr lang="en-US" sz="1000" dirty="0"/>
+              <a:t>First drafts from the firm's best past documents, inside Copilot and the document system.</a:t>
+            </a:r>
+            <a:endParaRPr lang="en-US" sz="1300" dirty="0"/>
           </a:p>
         </p:txBody>
       </p:sp>
@@ -3767,7 +3579,7 @@
                   <a:srgbClr val="2D4459"/>
                 </a:solidFill>
               </a:rPr>
-              <a:t>Bigger ideas, if there is appetite</a:t>
+              <a:t>Three bigger ideas, built on what the firm already knows</a:t>
             </a:r>
             <a:endParaRPr lang="en-US" sz="2600" dirty="0"/>
           </a:p>
@@ -3805,7 +3617,7 @@
                   <a:schemeClr val="tx2"/>
                 </a:solidFill>
               </a:rPr>
-              <a:t>A few directions I find promising. They would need IT and leadership to shape them.</a:t>
+              <a:t>Directions I find promising. They would need IT and leadership to shape them.</a:t>
             </a:r>
             <a:endParaRPr lang="en-US" sz="1300" dirty="0"/>
           </a:p>
@@ -3820,7 +3632,7 @@
         <p:spPr>
           <a:xfrm>
             <a:off x="457200" y="1325880"/>
-            <a:ext cx="2651760" cy="3246120"/>
+            <a:ext cx="2651760" cy="2743200"/>
           </a:xfrm>
           <a:prstGeom prst="rect">
             <a:avLst/>
@@ -3923,230 +3735,97 @@
       </p:sp>
       <p:sp>
         <p:nvSpPr>
-          <p:cNvPr id="8" name="Client risk radar What it is label"/>
-          <p:cNvSpPr txBox="1"/>
-          <p:nvPr/>
-        </p:nvSpPr>
-        <p:spPr>
-          <a:xfrm>
-            <a:off x="594360" y="1984248"/>
-            <a:ext cx="2377440" cy="201168"/>
-          </a:xfrm>
-          <a:prstGeom prst="rect">
-            <a:avLst/>
-          </a:prstGeom>
-          <a:noFill/>
-          <a:ln/>
-        </p:spPr>
-        <p:txBody>
-          <a:bodyPr wrap="square" lIns="0" tIns="0" rIns="0" bIns="0" rtlCol="0" anchor="ctr"/>
-          <a:lstStyle/>
-          <a:p>
-            <a:pPr indent="0" marL="0">
-              <a:buNone/>
-            </a:pPr>
-            <a:r>
-              <a:rPr lang="en-US" sz="950" b="1" dirty="0">
+          <p:cNvPr id="8" name="Client risk radar what"/>
+          <p:cNvSpPr txBox="1"/>
+          <p:nvPr/>
+        </p:nvSpPr>
+        <p:spPr>
+          <a:xfrm>
+            <a:off x="594360" y="2011680"/>
+            <a:ext cx="2377440" cy="1188720"/>
+          </a:xfrm>
+          <a:prstGeom prst="rect">
+            <a:avLst/>
+          </a:prstGeom>
+          <a:noFill/>
+          <a:ln/>
+        </p:spPr>
+        <p:txBody>
+          <a:bodyPr wrap="square" lIns="0" tIns="0" rIns="0" bIns="0" rtlCol="0" anchor="t"/>
+          <a:lstStyle/>
+          <a:p>
+            <a:pPr indent="0" marL="0">
+              <a:buNone/>
+            </a:pPr>
+            <a:r>
+              <a:rPr lang="en-US" sz="1250" dirty="0">
+                <a:solidFill>
+                  <a:schemeClr val="tx1"/>
+                </a:solidFill>
+              </a:rPr>
+              <a:t>Watches public signals about our clients, such as lawsuits, inspection citations and agency audits.</a:t>
+            </a:r>
+            <a:endParaRPr lang="en-US" sz="1250" dirty="0"/>
+          </a:p>
+        </p:txBody>
+      </p:sp>
+      <p:sp>
+        <p:nvSpPr>
+          <p:cNvPr id="9" name="Client risk radar why"/>
+          <p:cNvSpPr txBox="1"/>
+          <p:nvPr/>
+        </p:nvSpPr>
+        <p:spPr>
+          <a:xfrm>
+            <a:off x="594360" y="3154680"/>
+            <a:ext cx="2377440" cy="822960"/>
+          </a:xfrm>
+          <a:prstGeom prst="rect">
+            <a:avLst/>
+          </a:prstGeom>
+          <a:noFill/>
+          <a:ln/>
+        </p:spPr>
+        <p:txBody>
+          <a:bodyPr wrap="square" lIns="0" tIns="0" rIns="0" bIns="0" rtlCol="0" anchor="t"/>
+          <a:lstStyle/>
+          <a:p>
+            <a:pPr indent="0" marL="0">
+              <a:buNone/>
+            </a:pPr>
+            <a:r>
+              <a:rPr lang="en-US" sz="1200" b="1" dirty="0">
                 <a:solidFill>
                   <a:schemeClr val="accent5"/>
                 </a:solidFill>
               </a:rPr>
-              <a:t>What it is</a:t>
-            </a:r>
-            <a:endParaRPr lang="en-US" sz="950" dirty="0"/>
-          </a:p>
-        </p:txBody>
-      </p:sp>
-      <p:sp>
-        <p:nvSpPr>
-          <p:cNvPr id="9" name="Client risk radar What it is"/>
-          <p:cNvSpPr txBox="1"/>
-          <p:nvPr/>
-        </p:nvSpPr>
-        <p:spPr>
-          <a:xfrm>
-            <a:off x="594360" y="2185416"/>
-            <a:ext cx="2377440" cy="621792"/>
-          </a:xfrm>
-          <a:prstGeom prst="rect">
-            <a:avLst/>
-          </a:prstGeom>
-          <a:noFill/>
-          <a:ln/>
-        </p:spPr>
-        <p:txBody>
-          <a:bodyPr wrap="square" lIns="0" tIns="0" rIns="0" bIns="0" rtlCol="0" anchor="t"/>
-          <a:lstStyle/>
-          <a:p>
-            <a:pPr indent="0" marL="0">
-              <a:buNone/>
-            </a:pPr>
-            <a:r>
-              <a:rPr lang="en-US" sz="1050" dirty="0">
+              <a:t>Why it matters: </a:t>
+            </a:r>
+            <a:pPr indent="0" marL="0">
+              <a:buNone/>
+            </a:pPr>
+            <a:r>
+              <a:rPr lang="en-US" sz="1200" dirty="0">
                 <a:solidFill>
                   <a:schemeClr val="tx1"/>
                 </a:solidFill>
               </a:rPr>
-              <a:t>Watches public signals about our clients, such as lawsuits, inspection citations, agency audits and news, and turns them into early warnings.</a:t>
-            </a:r>
-            <a:endParaRPr lang="en-US" sz="1050" dirty="0"/>
-          </a:p>
-        </p:txBody>
-      </p:sp>
-      <p:sp>
-        <p:nvSpPr>
-          <p:cNvPr id="10" name="Client risk radar Why it matters label"/>
-          <p:cNvSpPr txBox="1"/>
-          <p:nvPr/>
-        </p:nvSpPr>
-        <p:spPr>
-          <a:xfrm>
-            <a:off x="594360" y="2843784"/>
-            <a:ext cx="2377440" cy="201168"/>
-          </a:xfrm>
-          <a:prstGeom prst="rect">
-            <a:avLst/>
-          </a:prstGeom>
-          <a:noFill/>
-          <a:ln/>
-        </p:spPr>
-        <p:txBody>
-          <a:bodyPr wrap="square" lIns="0" tIns="0" rIns="0" bIns="0" rtlCol="0" anchor="ctr"/>
-          <a:lstStyle/>
-          <a:p>
-            <a:pPr indent="0" marL="0">
-              <a:buNone/>
-            </a:pPr>
-            <a:r>
-              <a:rPr lang="en-US" sz="950" b="1" dirty="0">
-                <a:solidFill>
-                  <a:schemeClr val="accent5"/>
-                </a:solidFill>
-              </a:rPr>
-              <a:t>Why it matters</a:t>
-            </a:r>
-            <a:endParaRPr lang="en-US" sz="950" dirty="0"/>
-          </a:p>
-        </p:txBody>
-      </p:sp>
-      <p:sp>
-        <p:nvSpPr>
-          <p:cNvPr id="11" name="Client risk radar Why it matters"/>
-          <p:cNvSpPr txBox="1"/>
-          <p:nvPr/>
-        </p:nvSpPr>
-        <p:spPr>
-          <a:xfrm>
-            <a:off x="594360" y="3044952"/>
-            <a:ext cx="2377440" cy="621792"/>
-          </a:xfrm>
-          <a:prstGeom prst="rect">
-            <a:avLst/>
-          </a:prstGeom>
-          <a:noFill/>
-          <a:ln/>
-        </p:spPr>
-        <p:txBody>
-          <a:bodyPr wrap="square" lIns="0" tIns="0" rIns="0" bIns="0" rtlCol="0" anchor="t"/>
-          <a:lstStyle/>
-          <a:p>
-            <a:pPr indent="0" marL="0">
-              <a:buNone/>
-            </a:pPr>
-            <a:r>
-              <a:rPr lang="en-US" sz="1050" dirty="0">
-                <a:solidFill>
-                  <a:schemeClr val="tx1"/>
-                </a:solidFill>
-              </a:rPr>
-              <a:t>We call the client before the client knows it needs help. Reactive work becomes proactive outreach.</a:t>
-            </a:r>
-            <a:endParaRPr lang="en-US" sz="1050" dirty="0"/>
-          </a:p>
-        </p:txBody>
-      </p:sp>
-      <p:sp>
-        <p:nvSpPr>
-          <p:cNvPr id="12" name="Client risk radar What it needs label"/>
-          <p:cNvSpPr txBox="1"/>
-          <p:nvPr/>
-        </p:nvSpPr>
-        <p:spPr>
-          <a:xfrm>
-            <a:off x="594360" y="3703320"/>
-            <a:ext cx="2377440" cy="201168"/>
-          </a:xfrm>
-          <a:prstGeom prst="rect">
-            <a:avLst/>
-          </a:prstGeom>
-          <a:noFill/>
-          <a:ln/>
-        </p:spPr>
-        <p:txBody>
-          <a:bodyPr wrap="square" lIns="0" tIns="0" rIns="0" bIns="0" rtlCol="0" anchor="ctr"/>
-          <a:lstStyle/>
-          <a:p>
-            <a:pPr indent="0" marL="0">
-              <a:buNone/>
-            </a:pPr>
-            <a:r>
-              <a:rPr lang="en-US" sz="950" b="1" dirty="0">
-                <a:solidFill>
-                  <a:schemeClr val="accent5"/>
-                </a:solidFill>
-              </a:rPr>
-              <a:t>What it needs</a:t>
-            </a:r>
-            <a:endParaRPr lang="en-US" sz="950" dirty="0"/>
-          </a:p>
-        </p:txBody>
-      </p:sp>
-      <p:sp>
-        <p:nvSpPr>
-          <p:cNvPr id="13" name="Client risk radar What it needs"/>
-          <p:cNvSpPr txBox="1"/>
-          <p:nvPr/>
-        </p:nvSpPr>
-        <p:spPr>
-          <a:xfrm>
-            <a:off x="594360" y="3904488"/>
-            <a:ext cx="2377440" cy="621792"/>
-          </a:xfrm>
-          <a:prstGeom prst="rect">
-            <a:avLst/>
-          </a:prstGeom>
-          <a:noFill/>
-          <a:ln/>
-        </p:spPr>
-        <p:txBody>
-          <a:bodyPr wrap="square" lIns="0" tIns="0" rIns="0" bIns="0" rtlCol="0" anchor="t"/>
-          <a:lstStyle/>
-          <a:p>
-            <a:pPr indent="0" marL="0">
-              <a:buNone/>
-            </a:pPr>
-            <a:r>
-              <a:rPr lang="en-US" sz="1050" dirty="0">
-                <a:solidFill>
-                  <a:schemeClr val="tx1"/>
-                </a:solidFill>
-              </a:rPr>
-              <a:t>A client list, public sources, and a review step before any outreach.</a:t>
-            </a:r>
-            <a:endParaRPr lang="en-US" sz="1050" dirty="0"/>
-          </a:p>
-        </p:txBody>
-      </p:sp>
-      <p:sp>
-        <p:nvSpPr>
-          <p:cNvPr id="14" name="Institutional knowledge engine card"/>
+              <a:t>We call the client before they know they need help.</a:t>
+            </a:r>
+            <a:endParaRPr lang="en-US" sz="1200" dirty="0"/>
+          </a:p>
+        </p:txBody>
+      </p:sp>
+      <p:sp>
+        <p:nvSpPr>
+          <p:cNvPr id="10" name="Firm knowledge engine card"/>
           <p:cNvSpPr/>
           <p:nvPr/>
         </p:nvSpPr>
         <p:spPr>
           <a:xfrm>
             <a:off x="3291840" y="1325880"/>
-            <a:ext cx="2651760" cy="3246120"/>
+            <a:ext cx="2651760" cy="2743200"/>
           </a:xfrm>
           <a:prstGeom prst="rect">
             <a:avLst/>
@@ -4164,7 +3843,7 @@
       </p:sp>
       <p:sp>
         <p:nvSpPr>
-          <p:cNvPr id="15" name="icon square"/>
+          <p:cNvPr id="11" name="icon square"/>
           <p:cNvSpPr/>
           <p:nvPr/>
         </p:nvSpPr>
@@ -4189,7 +3868,7 @@
       </p:sp>
       <p:pic>
         <p:nvPicPr>
-          <p:cNvPr id="16" name="search icon" descr="preencoded.png">    </p:cNvPr>
+          <p:cNvPr id="12" name="search icon" descr="preencoded.png">    </p:cNvPr>
           <p:cNvPicPr>
             <a:picLocks noChangeAspect="1"/>
           </p:cNvPicPr>
@@ -4213,7 +3892,7 @@
       </p:pic>
       <p:sp>
         <p:nvSpPr>
-          <p:cNvPr id="17" name="Institutional knowledge engine name"/>
+          <p:cNvPr id="13" name="Firm knowledge engine name"/>
           <p:cNvSpPr txBox="1"/>
           <p:nvPr/>
         </p:nvSpPr>
@@ -4241,7 +3920,7 @@
                   <a:schemeClr val="tx1"/>
                 </a:solidFill>
               </a:rPr>
-              <a:t>Institutional knowledge engine</a:t>
+              <a:t>Firm knowledge engine</a:t>
             </a:r>
             <a:endParaRPr lang="en-US" sz="1400" dirty="0"/>
           </a:p>
@@ -4249,230 +3928,97 @@
       </p:sp>
       <p:sp>
         <p:nvSpPr>
-          <p:cNvPr id="18" name="Institutional knowledge engine What it is label"/>
-          <p:cNvSpPr txBox="1"/>
-          <p:nvPr/>
-        </p:nvSpPr>
-        <p:spPr>
-          <a:xfrm>
-            <a:off x="3429000" y="1984248"/>
-            <a:ext cx="2377440" cy="201168"/>
-          </a:xfrm>
-          <a:prstGeom prst="rect">
-            <a:avLst/>
-          </a:prstGeom>
-          <a:noFill/>
-          <a:ln/>
-        </p:spPr>
-        <p:txBody>
-          <a:bodyPr wrap="square" lIns="0" tIns="0" rIns="0" bIns="0" rtlCol="0" anchor="ctr"/>
-          <a:lstStyle/>
-          <a:p>
-            <a:pPr indent="0" marL="0">
-              <a:buNone/>
-            </a:pPr>
-            <a:r>
-              <a:rPr lang="en-US" sz="950" b="1" dirty="0">
+          <p:cNvPr id="14" name="Firm knowledge engine what"/>
+          <p:cNvSpPr txBox="1"/>
+          <p:nvPr/>
+        </p:nvSpPr>
+        <p:spPr>
+          <a:xfrm>
+            <a:off x="3429000" y="2011680"/>
+            <a:ext cx="2377440" cy="1188720"/>
+          </a:xfrm>
+          <a:prstGeom prst="rect">
+            <a:avLst/>
+          </a:prstGeom>
+          <a:noFill/>
+          <a:ln/>
+        </p:spPr>
+        <p:txBody>
+          <a:bodyPr wrap="square" lIns="0" tIns="0" rIns="0" bIns="0" rtlCol="0" anchor="t"/>
+          <a:lstStyle/>
+          <a:p>
+            <a:pPr indent="0" marL="0">
+              <a:buNone/>
+            </a:pPr>
+            <a:r>
+              <a:rPr lang="en-US" sz="1250" dirty="0">
+                <a:solidFill>
+                  <a:schemeClr val="tx1"/>
+                </a:solidFill>
+              </a:rPr>
+              <a:t>Ask "who here has handled this?" or "how did we argue this before?" and get an answer from our own files.</a:t>
+            </a:r>
+            <a:endParaRPr lang="en-US" sz="1250" dirty="0"/>
+          </a:p>
+        </p:txBody>
+      </p:sp>
+      <p:sp>
+        <p:nvSpPr>
+          <p:cNvPr id="15" name="Firm knowledge engine why"/>
+          <p:cNvSpPr txBox="1"/>
+          <p:nvPr/>
+        </p:nvSpPr>
+        <p:spPr>
+          <a:xfrm>
+            <a:off x="3429000" y="3154680"/>
+            <a:ext cx="2377440" cy="822960"/>
+          </a:xfrm>
+          <a:prstGeom prst="rect">
+            <a:avLst/>
+          </a:prstGeom>
+          <a:noFill/>
+          <a:ln/>
+        </p:spPr>
+        <p:txBody>
+          <a:bodyPr wrap="square" lIns="0" tIns="0" rIns="0" bIns="0" rtlCol="0" anchor="t"/>
+          <a:lstStyle/>
+          <a:p>
+            <a:pPr indent="0" marL="0">
+              <a:buNone/>
+            </a:pPr>
+            <a:r>
+              <a:rPr lang="en-US" sz="1200" b="1" dirty="0">
                 <a:solidFill>
                   <a:schemeClr val="accent5"/>
                 </a:solidFill>
               </a:rPr>
-              <a:t>What it is</a:t>
-            </a:r>
-            <a:endParaRPr lang="en-US" sz="950" dirty="0"/>
-          </a:p>
-        </p:txBody>
-      </p:sp>
-      <p:sp>
-        <p:nvSpPr>
-          <p:cNvPr id="19" name="Institutional knowledge engine What it is"/>
-          <p:cNvSpPr txBox="1"/>
-          <p:nvPr/>
-        </p:nvSpPr>
-        <p:spPr>
-          <a:xfrm>
-            <a:off x="3429000" y="2185416"/>
-            <a:ext cx="2377440" cy="621792"/>
-          </a:xfrm>
-          <a:prstGeom prst="rect">
-            <a:avLst/>
-          </a:prstGeom>
-          <a:noFill/>
-          <a:ln/>
-        </p:spPr>
-        <p:txBody>
-          <a:bodyPr wrap="square" lIns="0" tIns="0" rIns="0" bIns="0" rtlCol="0" anchor="t"/>
-          <a:lstStyle/>
-          <a:p>
-            <a:pPr indent="0" marL="0">
-              <a:buNone/>
-            </a:pPr>
-            <a:r>
-              <a:rPr lang="en-US" sz="1050" dirty="0">
+              <a:t>Why it matters: </a:t>
+            </a:r>
+            <a:pPr indent="0" marL="0">
+              <a:buNone/>
+            </a:pPr>
+            <a:r>
+              <a:rPr lang="en-US" sz="1200" dirty="0">
                 <a:solidFill>
                   <a:schemeClr val="tx1"/>
                 </a:solidFill>
               </a:rPr>
-              <a:t>Attorneys ask "who here has handled this kind of matter?" or "how did we argue this before?" and get an answer from the firm's own files.</a:t>
-            </a:r>
-            <a:endParaRPr lang="en-US" sz="1050" dirty="0"/>
-          </a:p>
-        </p:txBody>
-      </p:sp>
-      <p:sp>
-        <p:nvSpPr>
-          <p:cNvPr id="20" name="Institutional knowledge engine Why it matters label"/>
-          <p:cNvSpPr txBox="1"/>
-          <p:nvPr/>
-        </p:nvSpPr>
-        <p:spPr>
-          <a:xfrm>
-            <a:off x="3429000" y="2843784"/>
-            <a:ext cx="2377440" cy="201168"/>
-          </a:xfrm>
-          <a:prstGeom prst="rect">
-            <a:avLst/>
-          </a:prstGeom>
-          <a:noFill/>
-          <a:ln/>
-        </p:spPr>
-        <p:txBody>
-          <a:bodyPr wrap="square" lIns="0" tIns="0" rIns="0" bIns="0" rtlCol="0" anchor="ctr"/>
-          <a:lstStyle/>
-          <a:p>
-            <a:pPr indent="0" marL="0">
-              <a:buNone/>
-            </a:pPr>
-            <a:r>
-              <a:rPr lang="en-US" sz="950" b="1" dirty="0">
-                <a:solidFill>
-                  <a:schemeClr val="accent5"/>
-                </a:solidFill>
-              </a:rPr>
-              <a:t>Why it matters</a:t>
-            </a:r>
-            <a:endParaRPr lang="en-US" sz="950" dirty="0"/>
-          </a:p>
-        </p:txBody>
-      </p:sp>
-      <p:sp>
-        <p:nvSpPr>
-          <p:cNvPr id="21" name="Institutional knowledge engine Why it matters"/>
-          <p:cNvSpPr txBox="1"/>
-          <p:nvPr/>
-        </p:nvSpPr>
-        <p:spPr>
-          <a:xfrm>
-            <a:off x="3429000" y="3044952"/>
-            <a:ext cx="2377440" cy="621792"/>
-          </a:xfrm>
-          <a:prstGeom prst="rect">
-            <a:avLst/>
-          </a:prstGeom>
-          <a:noFill/>
-          <a:ln/>
-        </p:spPr>
-        <p:txBody>
-          <a:bodyPr wrap="square" lIns="0" tIns="0" rIns="0" bIns="0" rtlCol="0" anchor="t"/>
-          <a:lstStyle/>
-          <a:p>
-            <a:pPr indent="0" marL="0">
-              <a:buNone/>
-            </a:pPr>
-            <a:r>
-              <a:rPr lang="en-US" sz="1050" dirty="0">
-                <a:solidFill>
-                  <a:schemeClr val="tx1"/>
-                </a:solidFill>
-              </a:rPr>
-              <a:t>Captures expertise before senior partners retire. New attorneys ramp faster.</a:t>
-            </a:r>
-            <a:endParaRPr lang="en-US" sz="1050" dirty="0"/>
-          </a:p>
-        </p:txBody>
-      </p:sp>
-      <p:sp>
-        <p:nvSpPr>
-          <p:cNvPr id="22" name="Institutional knowledge engine What it needs label"/>
-          <p:cNvSpPr txBox="1"/>
-          <p:nvPr/>
-        </p:nvSpPr>
-        <p:spPr>
-          <a:xfrm>
-            <a:off x="3429000" y="3703320"/>
-            <a:ext cx="2377440" cy="201168"/>
-          </a:xfrm>
-          <a:prstGeom prst="rect">
-            <a:avLst/>
-          </a:prstGeom>
-          <a:noFill/>
-          <a:ln/>
-        </p:spPr>
-        <p:txBody>
-          <a:bodyPr wrap="square" lIns="0" tIns="0" rIns="0" bIns="0" rtlCol="0" anchor="ctr"/>
-          <a:lstStyle/>
-          <a:p>
-            <a:pPr indent="0" marL="0">
-              <a:buNone/>
-            </a:pPr>
-            <a:r>
-              <a:rPr lang="en-US" sz="950" b="1" dirty="0">
-                <a:solidFill>
-                  <a:schemeClr val="accent5"/>
-                </a:solidFill>
-              </a:rPr>
-              <a:t>What it needs</a:t>
-            </a:r>
-            <a:endParaRPr lang="en-US" sz="950" dirty="0"/>
-          </a:p>
-        </p:txBody>
-      </p:sp>
-      <p:sp>
-        <p:nvSpPr>
-          <p:cNvPr id="23" name="Institutional knowledge engine What it needs"/>
-          <p:cNvSpPr txBox="1"/>
-          <p:nvPr/>
-        </p:nvSpPr>
-        <p:spPr>
-          <a:xfrm>
-            <a:off x="3429000" y="3904488"/>
-            <a:ext cx="2377440" cy="621792"/>
-          </a:xfrm>
-          <a:prstGeom prst="rect">
-            <a:avLst/>
-          </a:prstGeom>
-          <a:noFill/>
-          <a:ln/>
-        </p:spPr>
-        <p:txBody>
-          <a:bodyPr wrap="square" lIns="0" tIns="0" rIns="0" bIns="0" rtlCol="0" anchor="t"/>
-          <a:lstStyle/>
-          <a:p>
-            <a:pPr indent="0" marL="0">
-              <a:buNone/>
-            </a:pPr>
-            <a:r>
-              <a:rPr lang="en-US" sz="1050" dirty="0">
-                <a:solidFill>
-                  <a:schemeClr val="tx1"/>
-                </a:solidFill>
-              </a:rPr>
-              <a:t>Document system access that respects ethical walls and permissions. Already built into LexAtlas and Skippy on slide 1.</a:t>
-            </a:r>
-            <a:endParaRPr lang="en-US" sz="1050" dirty="0"/>
-          </a:p>
-        </p:txBody>
-      </p:sp>
-      <p:sp>
-        <p:nvSpPr>
-          <p:cNvPr id="24" name="Ask the matter card"/>
+              <a:t>Keeps expertise when senior partners retire.</a:t>
+            </a:r>
+            <a:endParaRPr lang="en-US" sz="1200" dirty="0"/>
+          </a:p>
+        </p:txBody>
+      </p:sp>
+      <p:sp>
+        <p:nvSpPr>
+          <p:cNvPr id="16" name="Ask the matter card"/>
           <p:cNvSpPr/>
           <p:nvPr/>
         </p:nvSpPr>
         <p:spPr>
           <a:xfrm>
             <a:off x="6126480" y="1325880"/>
-            <a:ext cx="2651760" cy="3246120"/>
+            <a:ext cx="2651760" cy="2743200"/>
           </a:xfrm>
           <a:prstGeom prst="rect">
             <a:avLst/>
@@ -4490,7 +4036,7 @@
       </p:sp>
       <p:sp>
         <p:nvSpPr>
-          <p:cNvPr id="25" name="icon square"/>
+          <p:cNvPr id="17" name="icon square"/>
           <p:cNvSpPr/>
           <p:nvPr/>
         </p:nvSpPr>
@@ -4515,7 +4061,7 @@
       </p:sp>
       <p:pic>
         <p:nvPicPr>
-          <p:cNvPr id="26" name="msg icon" descr="preencoded.png">    </p:cNvPr>
+          <p:cNvPr id="18" name="msg icon" descr="preencoded.png">    </p:cNvPr>
           <p:cNvPicPr>
             <a:picLocks noChangeAspect="1"/>
           </p:cNvPicPr>
@@ -4539,7 +4085,7 @@
       </p:pic>
       <p:sp>
         <p:nvSpPr>
-          <p:cNvPr id="27" name="Ask the matter name"/>
+          <p:cNvPr id="19" name="Ask the matter name"/>
           <p:cNvSpPr txBox="1"/>
           <p:nvPr/>
         </p:nvSpPr>
@@ -4575,253 +4121,84 @@
       </p:sp>
       <p:sp>
         <p:nvSpPr>
-          <p:cNvPr id="28" name="Ask the matter What it is label"/>
-          <p:cNvSpPr txBox="1"/>
-          <p:nvPr/>
-        </p:nvSpPr>
-        <p:spPr>
-          <a:xfrm>
-            <a:off x="6263640" y="1984248"/>
-            <a:ext cx="2377440" cy="201168"/>
-          </a:xfrm>
-          <a:prstGeom prst="rect">
-            <a:avLst/>
-          </a:prstGeom>
-          <a:noFill/>
-          <a:ln/>
-        </p:spPr>
-        <p:txBody>
-          <a:bodyPr wrap="square" lIns="0" tIns="0" rIns="0" bIns="0" rtlCol="0" anchor="ctr"/>
-          <a:lstStyle/>
-          <a:p>
-            <a:pPr indent="0" marL="0">
-              <a:buNone/>
-            </a:pPr>
-            <a:r>
-              <a:rPr lang="en-US" sz="950" b="1" dirty="0">
+          <p:cNvPr id="20" name="Ask the matter what"/>
+          <p:cNvSpPr txBox="1"/>
+          <p:nvPr/>
+        </p:nvSpPr>
+        <p:spPr>
+          <a:xfrm>
+            <a:off x="6263640" y="2011680"/>
+            <a:ext cx="2377440" cy="1188720"/>
+          </a:xfrm>
+          <a:prstGeom prst="rect">
+            <a:avLst/>
+          </a:prstGeom>
+          <a:noFill/>
+          <a:ln/>
+        </p:spPr>
+        <p:txBody>
+          <a:bodyPr wrap="square" lIns="0" tIns="0" rIns="0" bIns="0" rtlCol="0" anchor="t"/>
+          <a:lstStyle/>
+          <a:p>
+            <a:pPr indent="0" marL="0">
+              <a:buNone/>
+            </a:pPr>
+            <a:r>
+              <a:rPr lang="en-US" sz="1250" dirty="0">
+                <a:solidFill>
+                  <a:schemeClr val="tx1"/>
+                </a:solidFill>
+              </a:rPr>
+              <a:t>Questions over one matter's files, every answer cited to the page.</a:t>
+            </a:r>
+            <a:endParaRPr lang="en-US" sz="1250" dirty="0"/>
+          </a:p>
+        </p:txBody>
+      </p:sp>
+      <p:sp>
+        <p:nvSpPr>
+          <p:cNvPr id="21" name="Ask the matter why"/>
+          <p:cNvSpPr txBox="1"/>
+          <p:nvPr/>
+        </p:nvSpPr>
+        <p:spPr>
+          <a:xfrm>
+            <a:off x="6263640" y="3154680"/>
+            <a:ext cx="2377440" cy="822960"/>
+          </a:xfrm>
+          <a:prstGeom prst="rect">
+            <a:avLst/>
+          </a:prstGeom>
+          <a:noFill/>
+          <a:ln/>
+        </p:spPr>
+        <p:txBody>
+          <a:bodyPr wrap="square" lIns="0" tIns="0" rIns="0" bIns="0" rtlCol="0" anchor="t"/>
+          <a:lstStyle/>
+          <a:p>
+            <a:pPr indent="0" marL="0">
+              <a:buNone/>
+            </a:pPr>
+            <a:r>
+              <a:rPr lang="en-US" sz="1200" b="1" dirty="0">
                 <a:solidFill>
                   <a:schemeClr val="accent5"/>
                 </a:solidFill>
               </a:rPr>
-              <a:t>What it is</a:t>
-            </a:r>
-            <a:endParaRPr lang="en-US" sz="950" dirty="0"/>
-          </a:p>
-        </p:txBody>
-      </p:sp>
-      <p:sp>
-        <p:nvSpPr>
-          <p:cNvPr id="29" name="Ask the matter What it is"/>
-          <p:cNvSpPr txBox="1"/>
-          <p:nvPr/>
-        </p:nvSpPr>
-        <p:spPr>
-          <a:xfrm>
-            <a:off x="6263640" y="2185416"/>
-            <a:ext cx="2377440" cy="621792"/>
-          </a:xfrm>
-          <a:prstGeom prst="rect">
-            <a:avLst/>
-          </a:prstGeom>
-          <a:noFill/>
-          <a:ln/>
-        </p:spPr>
-        <p:txBody>
-          <a:bodyPr wrap="square" lIns="0" tIns="0" rIns="0" bIns="0" rtlCol="0" anchor="t"/>
-          <a:lstStyle/>
-          <a:p>
-            <a:pPr indent="0" marL="0">
-              <a:buNone/>
-            </a:pPr>
-            <a:r>
-              <a:rPr lang="en-US" sz="1050" dirty="0">
+              <a:t>Why it matters: </a:t>
+            </a:r>
+            <a:pPr indent="0" marL="0">
+              <a:buNone/>
+            </a:pPr>
+            <a:r>
+              <a:rPr lang="en-US" sz="1200" dirty="0">
                 <a:solidFill>
                   <a:schemeClr val="tx1"/>
                 </a:solidFill>
               </a:rPr>
-              <a:t>A secure question-and-answer tool over one matter's files, with every answer cited to the page.</a:t>
-            </a:r>
-            <a:endParaRPr lang="en-US" sz="1050" dirty="0"/>
-          </a:p>
-        </p:txBody>
-      </p:sp>
-      <p:sp>
-        <p:nvSpPr>
-          <p:cNvPr id="30" name="Ask the matter Why it matters label"/>
-          <p:cNvSpPr txBox="1"/>
-          <p:nvPr/>
-        </p:nvSpPr>
-        <p:spPr>
-          <a:xfrm>
-            <a:off x="6263640" y="2843784"/>
-            <a:ext cx="2377440" cy="201168"/>
-          </a:xfrm>
-          <a:prstGeom prst="rect">
-            <a:avLst/>
-          </a:prstGeom>
-          <a:noFill/>
-          <a:ln/>
-        </p:spPr>
-        <p:txBody>
-          <a:bodyPr wrap="square" lIns="0" tIns="0" rIns="0" bIns="0" rtlCol="0" anchor="ctr"/>
-          <a:lstStyle/>
-          <a:p>
-            <a:pPr indent="0" marL="0">
-              <a:buNone/>
-            </a:pPr>
-            <a:r>
-              <a:rPr lang="en-US" sz="950" b="1" dirty="0">
-                <a:solidFill>
-                  <a:schemeClr val="accent5"/>
-                </a:solidFill>
-              </a:rPr>
-              <a:t>Why it matters</a:t>
-            </a:r>
-            <a:endParaRPr lang="en-US" sz="950" dirty="0"/>
-          </a:p>
-        </p:txBody>
-      </p:sp>
-      <p:sp>
-        <p:nvSpPr>
-          <p:cNvPr id="31" name="Ask the matter Why it matters"/>
-          <p:cNvSpPr txBox="1"/>
-          <p:nvPr/>
-        </p:nvSpPr>
-        <p:spPr>
-          <a:xfrm>
-            <a:off x="6263640" y="3044952"/>
-            <a:ext cx="2377440" cy="621792"/>
-          </a:xfrm>
-          <a:prstGeom prst="rect">
-            <a:avLst/>
-          </a:prstGeom>
-          <a:noFill/>
-          <a:ln/>
-        </p:spPr>
-        <p:txBody>
-          <a:bodyPr wrap="square" lIns="0" tIns="0" rIns="0" bIns="0" rtlCol="0" anchor="t"/>
-          <a:lstStyle/>
-          <a:p>
-            <a:pPr indent="0" marL="0">
-              <a:buNone/>
-            </a:pPr>
-            <a:r>
-              <a:rPr lang="en-US" sz="1050" dirty="0">
-                <a:solidFill>
-                  <a:schemeClr val="tx1"/>
-                </a:solidFill>
-              </a:rPr>
-              <a:t>The first step toward the knowledge engine, scoped to one matter so the risk is contained.</a:t>
-            </a:r>
-            <a:endParaRPr lang="en-US" sz="1050" dirty="0"/>
-          </a:p>
-        </p:txBody>
-      </p:sp>
-      <p:sp>
-        <p:nvSpPr>
-          <p:cNvPr id="32" name="Ask the matter What it needs label"/>
-          <p:cNvSpPr txBox="1"/>
-          <p:nvPr/>
-        </p:nvSpPr>
-        <p:spPr>
-          <a:xfrm>
-            <a:off x="6263640" y="3703320"/>
-            <a:ext cx="2377440" cy="201168"/>
-          </a:xfrm>
-          <a:prstGeom prst="rect">
-            <a:avLst/>
-          </a:prstGeom>
-          <a:noFill/>
-          <a:ln/>
-        </p:spPr>
-        <p:txBody>
-          <a:bodyPr wrap="square" lIns="0" tIns="0" rIns="0" bIns="0" rtlCol="0" anchor="ctr"/>
-          <a:lstStyle/>
-          <a:p>
-            <a:pPr indent="0" marL="0">
-              <a:buNone/>
-            </a:pPr>
-            <a:r>
-              <a:rPr lang="en-US" sz="950" b="1" dirty="0">
-                <a:solidFill>
-                  <a:schemeClr val="accent5"/>
-                </a:solidFill>
-              </a:rPr>
-              <a:t>What it needs</a:t>
-            </a:r>
-            <a:endParaRPr lang="en-US" sz="950" dirty="0"/>
-          </a:p>
-        </p:txBody>
-      </p:sp>
-      <p:sp>
-        <p:nvSpPr>
-          <p:cNvPr id="33" name="Ask the matter What it needs"/>
-          <p:cNvSpPr txBox="1"/>
-          <p:nvPr/>
-        </p:nvSpPr>
-        <p:spPr>
-          <a:xfrm>
-            <a:off x="6263640" y="3904488"/>
-            <a:ext cx="2377440" cy="621792"/>
-          </a:xfrm>
-          <a:prstGeom prst="rect">
-            <a:avLst/>
-          </a:prstGeom>
-          <a:noFill/>
-          <a:ln/>
-        </p:spPr>
-        <p:txBody>
-          <a:bodyPr wrap="square" lIns="0" tIns="0" rIns="0" bIns="0" rtlCol="0" anchor="t"/>
-          <a:lstStyle/>
-          <a:p>
-            <a:pPr indent="0" marL="0">
-              <a:buNone/>
-            </a:pPr>
-            <a:r>
-              <a:rPr lang="en-US" sz="1050" dirty="0">
-                <a:solidFill>
-                  <a:schemeClr val="tx1"/>
-                </a:solidFill>
-              </a:rPr>
-              <a:t>One matter's files and a pilot team.</a:t>
-            </a:r>
-            <a:endParaRPr lang="en-US" sz="1050" dirty="0"/>
-          </a:p>
-        </p:txBody>
-      </p:sp>
-      <p:sp>
-        <p:nvSpPr>
-          <p:cNvPr id="34" name="fourth project note"/>
-          <p:cNvSpPr txBox="1"/>
-          <p:nvPr/>
-        </p:nvSpPr>
-        <p:spPr>
-          <a:xfrm>
-            <a:off x="457200" y="4617720"/>
-            <a:ext cx="7863840" cy="274320"/>
-          </a:xfrm>
-          <a:prstGeom prst="rect">
-            <a:avLst/>
-          </a:prstGeom>
-          <a:noFill/>
-          <a:ln/>
-        </p:spPr>
-        <p:txBody>
-          <a:bodyPr wrap="square" lIns="0" tIns="0" rIns="0" bIns="0" rtlCol="0" anchor="ctr"/>
-          <a:lstStyle/>
-          <a:p>
-            <a:pPr indent="0" marL="0">
-              <a:buNone/>
-            </a:pPr>
-            <a:r>
-              <a:rPr lang="en-US" sz="1000" i="1" dirty="0">
-                <a:solidFill>
-                  <a:schemeClr val="tx2"/>
-                </a:solidFill>
-              </a:rPr>
-              <a:t>A fourth I have wondered about: outcome and pricing intelligence from the firm's own matter history, to support fixed-fee bids.</a:t>
-            </a:r>
-            <a:endParaRPr lang="en-US" sz="1000" dirty="0"/>
+              <a:t>A contained first step toward the knowledge engine.</a:t>
+            </a:r>
+            <a:endParaRPr lang="en-US" sz="1200" dirty="0"/>
           </a:p>
         </p:txBody>
       </p:sp>
@@ -4927,7 +4304,7 @@
                   <a:srgbClr val="2D4459"/>
                 </a:solidFill>
               </a:rPr>
-              <a:t>How I think about choosing</a:t>
+              <a:t>My filter: configure first, buy second, build last</a:t>
             </a:r>
             <a:endParaRPr lang="en-US" sz="2600" dirty="0"/>
           </a:p>
@@ -4965,7 +4342,7 @@
                   <a:schemeClr val="tx2"/>
                 </a:solidFill>
               </a:rPr>
-              <a:t>A lens I have found useful, offered for discussion. Ideas are cheap; the hard part is choosing.</a:t>
+              <a:t>A lens I have found useful, offered for discussion.</a:t>
             </a:r>
             <a:endParaRPr lang="en-US" sz="1300" dirty="0"/>
           </a:p>
@@ -5112,7 +4489,7 @@
                   <a:schemeClr val="tx2"/>
                 </a:solidFill>
               </a:rPr>
-              <a:t>Who benefits, how often, and how much work it takes.</a:t>
+              <a:t>Who benefits, and how much work it takes.</a:t>
             </a:r>
             <a:endParaRPr lang="en-US" sz="1200" dirty="0"/>
           </a:p>
@@ -5223,7 +4600,7 @@
                   <a:schemeClr val="tx2"/>
                 </a:solidFill>
               </a:rPr>
-              <a:t>Is the data clean, in one place, and allowed to be used this way?</a:t>
+              <a:t>Is the data clean, in one place, and allowed?</a:t>
             </a:r>
             <a:endParaRPr lang="en-US" sz="1200" dirty="0"/>
           </a:p>
@@ -5334,7 +4711,7 @@
                   <a:schemeClr val="tx2"/>
                 </a:solidFill>
               </a:rPr>
-              <a:t>What tier of client data it touches. Do walls, permissions and client instructions hold?</a:t>
+              <a:t>Do walls, permissions and client instructions hold?</a:t>
             </a:r>
             <a:endParaRPr lang="en-US" sz="1200" dirty="0"/>
           </a:p>
@@ -5445,7 +4822,7 @@
                   <a:schemeClr val="tx2"/>
                 </a:solidFill>
               </a:rPr>
-              <a:t>Does it fit how people already work, and does a partner want it?</a:t>
+              <a:t>Does it fit how people already work?</a:t>
             </a:r>
             <a:endParaRPr lang="en-US" sz="1200" dirty="0"/>
           </a:p>
@@ -5556,7 +4933,7 @@
                   <a:schemeClr val="tx2"/>
                 </a:solidFill>
               </a:rPr>
-              <a:t>Who maintains it, and does IT have what it needs to run it?</a:t>
+              <a:t>Who maintains it?</a:t>
             </a:r>
             <a:endParaRPr lang="en-US" sz="1200" dirty="0"/>
           </a:p>
@@ -5716,7 +5093,7 @@
                   <a:schemeClr val="tx2"/>
                 </a:solidFill>
               </a:rPr>
-              <a:t>Get more from Copilot and the document system with approved prompts and checklists.</a:t>
+              <a:t>Get more from Copilot and the document system.</a:t>
             </a:r>
             <a:endParaRPr lang="en-US" sz="1200" dirty="0"/>
           </a:p>
@@ -5840,7 +5217,7 @@
                   <a:schemeClr val="tx2"/>
                 </a:solidFill>
               </a:rPr>
-              <a:t>Where the market is mature, after vetting vendors on data use, security, walls and audit logs.</a:t>
+              <a:t>Where the market is mature and vendors pass vetting.</a:t>
             </a:r>
             <a:endParaRPr lang="en-US" sz="1200" dirty="0"/>
           </a:p>
@@ -5964,7 +5341,7 @@
                   <a:schemeClr val="tx2"/>
                 </a:solidFill>
               </a:rPr>
-              <a:t>Only where the firm's own data and ways of working are the advantage.</a:t>
+              <a:t>Only where our own data is the advantage.</a:t>
             </a:r>
             <a:endParaRPr lang="en-US" sz="1200" dirty="0"/>
           </a:p>
@@ -6036,7 +5413,7 @@
                   <a:schemeClr val="bg1"/>
                 </a:solidFill>
               </a:rPr>
-              <a:t>Infrastructure, security, vendor decisions and the final say on what goes live are IT's call. Nothing here assumes otherwise.</a:t>
+              <a:t>Infrastructure, security, vendors and what goes live are IT's call.</a:t>
             </a:r>
             <a:endParaRPr lang="en-US" sz="1050" dirty="0"/>
           </a:p>
@@ -6144,7 +5521,7 @@
                   <a:schemeClr val="bg1"/>
                 </a:solidFill>
               </a:rPr>
-              <a:t>What a rollout could look like, and a longer view</a:t>
+              <a:t>A rollout takes about two weeks</a:t>
             </a:r>
             <a:endParaRPr lang="en-US" sz="2600" dirty="0"/>
           </a:p>
@@ -6182,7 +5559,7 @@
                   <a:schemeClr val="accent3"/>
                 </a:solidFill>
               </a:rPr>
-              <a:t>One example, the guidelines brief, as I picture it: about two weeks, nothing new to host.</a:t>
+              <a:t>One example, the client guidelines brief, as I picture it. Nothing new to host.</a:t>
             </a:r>
             <a:endParaRPr lang="en-US" sz="1300" dirty="0"/>
           </a:p>
@@ -6371,14 +5748,14 @@
               <a:buNone/>
             </a:pPr>
             <a:r>
-              <a:rPr lang="en-US" sz="950" dirty="0">
+              <a:rPr lang="en-US" sz="1050" dirty="0">
                 <a:solidFill>
                   <a:schemeClr val="accent3"/>
                 </a:solidFill>
               </a:rPr>
-              <a:t>Pull each client's outside counsel guidelines from the document system. They already exist.</a:t>
-            </a:r>
-            <a:endParaRPr lang="en-US" sz="950" dirty="0"/>
+              <a:t>The client guidelines are already in the document system.</a:t>
+            </a:r>
+            <a:endParaRPr lang="en-US" sz="1050" dirty="0"/>
           </a:p>
         </p:txBody>
       </p:sp>
@@ -6589,14 +5966,14 @@
               <a:buNone/>
             </a:pPr>
             <a:r>
-              <a:rPr lang="en-US" sz="950" dirty="0">
+              <a:rPr lang="en-US" sz="1050" dirty="0">
                 <a:solidFill>
                   <a:schemeClr val="accent3"/>
                 </a:solidFill>
               </a:rPr>
-              <a:t>The tool reads each guideline and writes a one-page brief of its billing rules, with the source paragraph behind each line.</a:t>
-            </a:r>
-            <a:endParaRPr lang="en-US" sz="950" dirty="0"/>
+              <a:t>One page of billing rules per client, each tied to its source paragraph.</a:t>
+            </a:r>
+            <a:endParaRPr lang="en-US" sz="1050" dirty="0"/>
           </a:p>
         </p:txBody>
       </p:sp>
@@ -6807,14 +6184,14 @@
               <a:buNone/>
             </a:pPr>
             <a:r>
-              <a:rPr lang="en-US" sz="950" dirty="0">
+              <a:rPr lang="en-US" sz="1050" dirty="0">
                 <a:solidFill>
                   <a:schemeClr val="accent3"/>
                 </a:solidFill>
               </a:rPr>
-              <a:t>Runs on firm hardware, no client text leaves. Sign-on, role-based access and an audit log are shown to IT in one sitting.</a:t>
-            </a:r>
-            <a:endParaRPr lang="en-US" sz="950" dirty="0"/>
+              <a:t>Runs on firm hardware. Sign-on, roles and audit log shown in one sitting.</a:t>
+            </a:r>
+            <a:endParaRPr lang="en-US" sz="1050" dirty="0"/>
           </a:p>
         </p:txBody>
       </p:sp>
@@ -7025,14 +6402,14 @@
               <a:buNone/>
             </a:pPr>
             <a:r>
-              <a:rPr lang="en-US" sz="950" dirty="0">
+              <a:rPr lang="en-US" sz="1050" dirty="0">
                 <a:solidFill>
                   <a:schemeClr val="accent3"/>
                 </a:solidFill>
               </a:rPr>
-              <a:t>One billing partner, one client's prebills. Entries that break a rule are flagged with the rule quoted. A person decides what to change.</a:t>
-            </a:r>
-            <a:endParaRPr lang="en-US" sz="950" dirty="0"/>
+              <a:t>One billing partner, one client's prebills. A person decides every change.</a:t>
+            </a:r>
+            <a:endParaRPr lang="en-US" sz="1050" dirty="0"/>
           </a:p>
         </p:txBody>
       </p:sp>
@@ -7243,14 +6620,14 @@
               <a:buNone/>
             </a:pPr>
             <a:r>
-              <a:rPr lang="en-US" sz="950" dirty="0">
+              <a:rPr lang="en-US" sz="1050" dirty="0">
                 <a:solidFill>
                   <a:schemeClr val="accent3"/>
                 </a:solidFill>
               </a:rPr>
-              <a:t>The brief sits on the matter. The flags appear in the prebill review step that already happens. Nobody learns a new program.</a:t>
-            </a:r>
-            <a:endParaRPr lang="en-US" sz="950" dirty="0"/>
+              <a:t>Flags appear in the prebill review that already happens.</a:t>
+            </a:r>
+            <a:endParaRPr lang="en-US" sz="1050" dirty="0"/>
           </a:p>
         </p:txBody>
       </p:sp>
@@ -7685,7 +7062,7 @@
                   <a:schemeClr val="bg1"/>
                 </a:solidFill>
               </a:rPr>
-              <a:t>A longer view, for discussion: one firm-owned platform</a:t>
+              <a:t>A longer view, for discussion: one firm-owned platform that touches everything</a:t>
             </a:r>
             <a:endParaRPr lang="en-US" sz="1400" dirty="0"/>
           </a:p>
@@ -7721,7 +7098,7 @@
                   <a:schemeClr val="bg1"/>
                 </a:solidFill>
               </a:rPr>
-              <a:t>An idea I keep coming back to: an in-house system that, over time, touches every file, matter and system the firm runs, with each tool here as a module of it, one set of permissions, one audit trail and models on firm hardware. The firm would own the code, the data and the roadmap. That is a long way off and leadership's call; I raise it because the quick wins can be built so they add up to it rather than stand alone.</a:t>
+              <a:t>Over time, one in-house system could touch every file, matter and system the firm runs, with each tool as a module, one set of permissions, one audit trail, and the firm owning the code and the data. That is leadership's call and a long way off. I raise it so the quick wins can be built to add up to it.</a:t>
             </a:r>
             <a:endParaRPr lang="en-US" sz="1050" dirty="0"/>
           </a:p>

--- a/downloads/AI-ideas-Myles-Parslow.pptx
+++ b/downloads/AI-ideas-Myles-Parslow.pptx
@@ -111,7 +111,7 @@
   <p:extLst>
     <p:ext uri="{521415D9-36F7-43E2-AB2F-B90AF26B5E84}">
       <p14:sectionLst xmlns:p14="http://schemas.microsoft.com/office/powerpoint/2010/main">
-        <p14:section name="AI for the firm" id="{6b1d20b7-4271-c322-219c-3523f9396ca3}">
+        <p14:section name="AI for the firm" id="{c95b617e-a02c-da72-5d64-599594b049e7}">
           <p14:sldIdLst>
             <p14:sldId id="256"/>
             <p14:sldId id="257"/>
@@ -1261,7 +1261,7 @@
                   <a:schemeClr val="tx2"/>
                 </a:solidFill>
               </a:rPr>
-              <a:t>Built on my own time, for nearly every part of the firm. A lawyer makes every decision.</a:t>
+              <a:t>Built in my free time with invented clients. Orange marks the three that could be used right away.</a:t>
             </a:r>
             <a:endParaRPr lang="en-US" sz="1300" dirty="0"/>
           </a:p>
@@ -1269,75 +1269,50 @@
       </p:sp>
       <p:sp>
         <p:nvSpPr>
-          <p:cNvPr id="4" name="Conflicts and intake column"/>
-          <p:cNvSpPr/>
+          <p:cNvPr id="4" name="Conflicts and intake heading"/>
+          <p:cNvSpPr txBox="1"/>
           <p:nvPr/>
         </p:nvSpPr>
         <p:spPr>
           <a:xfrm>
             <a:off x="457200" y="1188720"/>
-            <a:ext cx="1572768" cy="3127248"/>
-          </a:xfrm>
-          <a:prstGeom prst="rect">
-            <a:avLst/>
-          </a:prstGeom>
-          <a:solidFill>
-            <a:schemeClr val="bg2"/>
-          </a:solidFill>
-          <a:ln w="12700">
-            <a:solidFill>
-              <a:schemeClr val="bg2"/>
-            </a:solidFill>
-            <a:prstDash val="solid"/>
-          </a:ln>
-        </p:spPr>
-      </p:sp>
-      <p:sp>
-        <p:nvSpPr>
-          <p:cNvPr id="5" name="Conflicts and intake heading"/>
-          <p:cNvSpPr txBox="1"/>
-          <p:nvPr/>
-        </p:nvSpPr>
-        <p:spPr>
-          <a:xfrm>
-            <a:off x="548640" y="1243584"/>
-            <a:ext cx="1389888" cy="365760"/>
-          </a:xfrm>
-          <a:prstGeom prst="rect">
-            <a:avLst/>
-          </a:prstGeom>
-          <a:noFill/>
-          <a:ln/>
-        </p:spPr>
-        <p:txBody>
-          <a:bodyPr wrap="square" lIns="0" tIns="0" rIns="0" bIns="0" rtlCol="0" anchor="ctr"/>
-          <a:lstStyle/>
-          <a:p>
-            <a:pPr indent="0" marL="0">
-              <a:buNone/>
-            </a:pPr>
-            <a:r>
-              <a:rPr lang="en-US" sz="1100" b="1" dirty="0">
+            <a:ext cx="4023360" cy="219456"/>
+          </a:xfrm>
+          <a:prstGeom prst="rect">
+            <a:avLst/>
+          </a:prstGeom>
+          <a:noFill/>
+          <a:ln/>
+        </p:spPr>
+        <p:txBody>
+          <a:bodyPr wrap="square" lIns="0" tIns="0" rIns="0" bIns="0" rtlCol="0" anchor="b"/>
+          <a:lstStyle/>
+          <a:p>
+            <a:pPr indent="0" marL="0">
+              <a:buNone/>
+            </a:pPr>
+            <a:r>
+              <a:rPr lang="en-US" sz="900" b="1" spc="150" kern="0" dirty="0">
                 <a:solidFill>
                   <a:schemeClr val="accent5"/>
                 </a:solidFill>
               </a:rPr>
-              <a:t>Conflicts and intake</a:t>
-            </a:r>
-            <a:endParaRPr lang="en-US" sz="1100" dirty="0"/>
-          </a:p>
-        </p:txBody>
-      </p:sp>
-      <p:sp>
-        <p:nvSpPr>
-          <p:cNvPr id="6" name="Conflion entry"/>
-          <p:cNvSpPr txBox="1"/>
-          <p:nvPr/>
-        </p:nvSpPr>
-        <p:spPr>
-          <a:xfrm>
-            <a:off x="548640" y="1682496"/>
-            <a:ext cx="1389888" cy="603504"/>
+              <a:t>CONFLICTS AND INTAKE</a:t>
+            </a:r>
+            <a:endParaRPr lang="en-US" sz="900" dirty="0"/>
+          </a:p>
+        </p:txBody>
+      </p:sp>
+      <p:sp>
+        <p:nvSpPr>
+          <p:cNvPr id="5" name="Conflion name"/>
+          <p:cNvSpPr txBox="1"/>
+          <p:nvPr/>
+        </p:nvSpPr>
+        <p:spPr>
+          <a:xfrm>
+            <a:off x="457200" y="1435608"/>
+            <a:ext cx="1188720" cy="365760"/>
           </a:xfrm>
           <a:prstGeom prst="rect">
             <a:avLst/>
@@ -1353,41 +1328,27 @@
               <a:buNone/>
             </a:pPr>
             <a:r>
-              <a:rPr lang="en-US" sz="1200" b="1" dirty="0">
+              <a:rPr lang="en-US" sz="1050" b="1" dirty="0">
                 <a:solidFill>
                   <a:schemeClr val="tx1"/>
                 </a:solidFill>
               </a:rPr>
               <a:t>Conflion</a:t>
             </a:r>
-            <a:endParaRPr lang="en-US" sz="1200" dirty="0"/>
-          </a:p>
-          <a:p>
-            <a:pPr indent="0" marL="0">
-              <a:buNone/>
-            </a:pPr>
-            <a:r>
-              <a:rPr lang="en-US" sz="1000" dirty="0">
-                <a:solidFill>
-                  <a:schemeClr val="tx2"/>
-                </a:solidFill>
-              </a:rPr>
-              <a:t>Conflicts check and intake</a:t>
-            </a:r>
-            <a:endParaRPr lang="en-US" sz="1200" dirty="0"/>
-          </a:p>
-        </p:txBody>
-      </p:sp>
-      <p:sp>
-        <p:nvSpPr>
-          <p:cNvPr id="7" name="Party Finder entry"/>
-          <p:cNvSpPr txBox="1"/>
-          <p:nvPr/>
-        </p:nvSpPr>
-        <p:spPr>
-          <a:xfrm>
-            <a:off x="548640" y="2322576"/>
-            <a:ext cx="1389888" cy="603504"/>
+            <a:endParaRPr lang="en-US" sz="1050" dirty="0"/>
+          </a:p>
+        </p:txBody>
+      </p:sp>
+      <p:sp>
+        <p:nvSpPr>
+          <p:cNvPr id="6" name="Conflion line"/>
+          <p:cNvSpPr txBox="1"/>
+          <p:nvPr/>
+        </p:nvSpPr>
+        <p:spPr>
+          <a:xfrm>
+            <a:off x="1691640" y="1435608"/>
+            <a:ext cx="2788920" cy="365760"/>
           </a:xfrm>
           <a:prstGeom prst="rect">
             <a:avLst/>
@@ -1403,41 +1364,63 @@
               <a:buNone/>
             </a:pPr>
             <a:r>
-              <a:rPr lang="en-US" sz="1200" b="1" dirty="0">
+              <a:rPr lang="en-US" sz="950" dirty="0">
                 <a:solidFill>
                   <a:schemeClr val="tx1"/>
                 </a:solidFill>
               </a:rPr>
+              <a:t>Finds the conflicts a letter-for-letter search misses and routes each intake to the right approvers.</a:t>
+            </a:r>
+            <a:endParaRPr lang="en-US" sz="950" dirty="0"/>
+          </a:p>
+        </p:txBody>
+      </p:sp>
+      <p:sp>
+        <p:nvSpPr>
+          <p:cNvPr id="7" name="Party Finder name"/>
+          <p:cNvSpPr txBox="1"/>
+          <p:nvPr/>
+        </p:nvSpPr>
+        <p:spPr>
+          <a:xfrm>
+            <a:off x="457200" y="1819656"/>
+            <a:ext cx="1188720" cy="365760"/>
+          </a:xfrm>
+          <a:prstGeom prst="rect">
+            <a:avLst/>
+          </a:prstGeom>
+          <a:noFill/>
+          <a:ln/>
+        </p:spPr>
+        <p:txBody>
+          <a:bodyPr wrap="square" lIns="0" tIns="0" rIns="0" bIns="0" rtlCol="0" anchor="t"/>
+          <a:lstStyle/>
+          <a:p>
+            <a:pPr indent="0" marL="0">
+              <a:buNone/>
+            </a:pPr>
+            <a:r>
+              <a:rPr lang="en-US" sz="1050" b="1" dirty="0">
+                <a:solidFill>
+                  <a:schemeClr val="accent2"/>
+                </a:solidFill>
+              </a:rPr>
               <a:t>Party Finder</a:t>
             </a:r>
-            <a:endParaRPr lang="en-US" sz="1200" dirty="0"/>
-          </a:p>
-          <a:p>
-            <a:pPr indent="0" marL="0">
-              <a:buNone/>
-            </a:pPr>
-            <a:r>
-              <a:rPr lang="en-US" sz="1000" dirty="0">
-                <a:solidFill>
-                  <a:schemeClr val="tx2"/>
-                </a:solidFill>
-              </a:rPr>
-              <a:t>Names to search, from the documents</a:t>
-            </a:r>
-            <a:endParaRPr lang="en-US" sz="1200" dirty="0"/>
-          </a:p>
-        </p:txBody>
-      </p:sp>
-      <p:sp>
-        <p:nvSpPr>
-          <p:cNvPr id="8" name="LexAtlas entry"/>
-          <p:cNvSpPr txBox="1"/>
-          <p:nvPr/>
-        </p:nvSpPr>
-        <p:spPr>
-          <a:xfrm>
-            <a:off x="548640" y="2962656"/>
-            <a:ext cx="1389888" cy="603504"/>
+            <a:endParaRPr lang="en-US" sz="1050" dirty="0"/>
+          </a:p>
+        </p:txBody>
+      </p:sp>
+      <p:sp>
+        <p:nvSpPr>
+          <p:cNvPr id="8" name="Party Finder line"/>
+          <p:cNvSpPr txBox="1"/>
+          <p:nvPr/>
+        </p:nvSpPr>
+        <p:spPr>
+          <a:xfrm>
+            <a:off x="1691640" y="1819656"/>
+            <a:ext cx="2788920" cy="365760"/>
           </a:xfrm>
           <a:prstGeom prst="rect">
             <a:avLst/>
@@ -1453,41 +1436,63 @@
               <a:buNone/>
             </a:pPr>
             <a:r>
-              <a:rPr lang="en-US" sz="1200" b="1" dirty="0">
+              <a:rPr lang="en-US" sz="950" dirty="0">
                 <a:solidFill>
                   <a:schemeClr val="tx1"/>
                 </a:solidFill>
               </a:rPr>
+              <a:t>Reads the complaint or deal papers and lists every name to run, so intake misses no one.</a:t>
+            </a:r>
+            <a:endParaRPr lang="en-US" sz="950" dirty="0"/>
+          </a:p>
+        </p:txBody>
+      </p:sp>
+      <p:sp>
+        <p:nvSpPr>
+          <p:cNvPr id="9" name="LexAtlas name"/>
+          <p:cNvSpPr txBox="1"/>
+          <p:nvPr/>
+        </p:nvSpPr>
+        <p:spPr>
+          <a:xfrm>
+            <a:off x="457200" y="2203704"/>
+            <a:ext cx="1188720" cy="365760"/>
+          </a:xfrm>
+          <a:prstGeom prst="rect">
+            <a:avLst/>
+          </a:prstGeom>
+          <a:noFill/>
+          <a:ln/>
+        </p:spPr>
+        <p:txBody>
+          <a:bodyPr wrap="square" lIns="0" tIns="0" rIns="0" bIns="0" rtlCol="0" anchor="t"/>
+          <a:lstStyle/>
+          <a:p>
+            <a:pPr indent="0" marL="0">
+              <a:buNone/>
+            </a:pPr>
+            <a:r>
+              <a:rPr lang="en-US" sz="1050" b="1" dirty="0">
+                <a:solidFill>
+                  <a:schemeClr val="tx1"/>
+                </a:solidFill>
+              </a:rPr>
               <a:t>LexAtlas</a:t>
             </a:r>
-            <a:endParaRPr lang="en-US" sz="1200" dirty="0"/>
-          </a:p>
-          <a:p>
-            <a:pPr indent="0" marL="0">
-              <a:buNone/>
-            </a:pPr>
-            <a:r>
-              <a:rPr lang="en-US" sz="1000" dirty="0">
-                <a:solidFill>
-                  <a:schemeClr val="tx2"/>
-                </a:solidFill>
-              </a:rPr>
-              <a:t>Relationship graph with ethical walls</a:t>
-            </a:r>
-            <a:endParaRPr lang="en-US" sz="1200" dirty="0"/>
-          </a:p>
-        </p:txBody>
-      </p:sp>
-      <p:sp>
-        <p:nvSpPr>
-          <p:cNvPr id="9" name="VigilMark entry"/>
-          <p:cNvSpPr txBox="1"/>
-          <p:nvPr/>
-        </p:nvSpPr>
-        <p:spPr>
-          <a:xfrm>
-            <a:off x="548640" y="3602736"/>
-            <a:ext cx="1389888" cy="603504"/>
+            <a:endParaRPr lang="en-US" sz="1050" dirty="0"/>
+          </a:p>
+        </p:txBody>
+      </p:sp>
+      <p:sp>
+        <p:nvSpPr>
+          <p:cNvPr id="10" name="LexAtlas line"/>
+          <p:cNvSpPr txBox="1"/>
+          <p:nvPr/>
+        </p:nvSpPr>
+        <p:spPr>
+          <a:xfrm>
+            <a:off x="1691640" y="2203704"/>
+            <a:ext cx="2788920" cy="365760"/>
           </a:xfrm>
           <a:prstGeom prst="rect">
             <a:avLst/>
@@ -1503,102 +1508,135 @@
               <a:buNone/>
             </a:pPr>
             <a:r>
-              <a:rPr lang="en-US" sz="1200" b="1" dirty="0">
+              <a:rPr lang="en-US" sz="950" dirty="0">
                 <a:solidFill>
                   <a:schemeClr val="tx1"/>
                 </a:solidFill>
               </a:rPr>
+              <a:t>Maps how companies, people and matters connect, for conflicts and diligence.</a:t>
+            </a:r>
+            <a:endParaRPr lang="en-US" sz="950" dirty="0"/>
+          </a:p>
+        </p:txBody>
+      </p:sp>
+      <p:sp>
+        <p:nvSpPr>
+          <p:cNvPr id="11" name="VigilMark name"/>
+          <p:cNvSpPr txBox="1"/>
+          <p:nvPr/>
+        </p:nvSpPr>
+        <p:spPr>
+          <a:xfrm>
+            <a:off x="457200" y="2587752"/>
+            <a:ext cx="1188720" cy="365760"/>
+          </a:xfrm>
+          <a:prstGeom prst="rect">
+            <a:avLst/>
+          </a:prstGeom>
+          <a:noFill/>
+          <a:ln/>
+        </p:spPr>
+        <p:txBody>
+          <a:bodyPr wrap="square" lIns="0" tIns="0" rIns="0" bIns="0" rtlCol="0" anchor="t"/>
+          <a:lstStyle/>
+          <a:p>
+            <a:pPr indent="0" marL="0">
+              <a:buNone/>
+            </a:pPr>
+            <a:r>
+              <a:rPr lang="en-US" sz="1050" b="1" dirty="0">
+                <a:solidFill>
+                  <a:schemeClr val="tx1"/>
+                </a:solidFill>
+              </a:rPr>
               <a:t>VigilMark</a:t>
             </a:r>
-            <a:endParaRPr lang="en-US" sz="1200" dirty="0"/>
-          </a:p>
-          <a:p>
-            <a:pPr indent="0" marL="0">
-              <a:buNone/>
-            </a:pPr>
-            <a:r>
-              <a:rPr lang="en-US" sz="1000" dirty="0">
-                <a:solidFill>
-                  <a:schemeClr val="tx2"/>
-                </a:solidFill>
-              </a:rPr>
-              <a:t>Trademark watch and triage</a:t>
-            </a:r>
-            <a:endParaRPr lang="en-US" sz="1200" dirty="0"/>
-          </a:p>
-        </p:txBody>
-      </p:sp>
-      <p:sp>
-        <p:nvSpPr>
-          <p:cNvPr id="10" name="Litigation column"/>
-          <p:cNvSpPr/>
-          <p:nvPr/>
-        </p:nvSpPr>
-        <p:spPr>
-          <a:xfrm>
-            <a:off x="2139696" y="1188720"/>
-            <a:ext cx="1572768" cy="3127248"/>
-          </a:xfrm>
-          <a:prstGeom prst="rect">
-            <a:avLst/>
-          </a:prstGeom>
-          <a:solidFill>
-            <a:schemeClr val="bg2"/>
-          </a:solidFill>
-          <a:ln w="12700">
-            <a:solidFill>
-              <a:schemeClr val="bg2"/>
-            </a:solidFill>
-            <a:prstDash val="solid"/>
-          </a:ln>
-        </p:spPr>
-      </p:sp>
-      <p:sp>
-        <p:nvSpPr>
-          <p:cNvPr id="11" name="Litigation heading"/>
-          <p:cNvSpPr txBox="1"/>
-          <p:nvPr/>
-        </p:nvSpPr>
-        <p:spPr>
-          <a:xfrm>
-            <a:off x="2231136" y="1243584"/>
-            <a:ext cx="1389888" cy="365760"/>
-          </a:xfrm>
-          <a:prstGeom prst="rect">
-            <a:avLst/>
-          </a:prstGeom>
-          <a:noFill/>
-          <a:ln/>
-        </p:spPr>
-        <p:txBody>
-          <a:bodyPr wrap="square" lIns="0" tIns="0" rIns="0" bIns="0" rtlCol="0" anchor="ctr"/>
-          <a:lstStyle/>
-          <a:p>
-            <a:pPr indent="0" marL="0">
-              <a:buNone/>
-            </a:pPr>
-            <a:r>
-              <a:rPr lang="en-US" sz="1100" b="1" dirty="0">
+            <a:endParaRPr lang="en-US" sz="1050" dirty="0"/>
+          </a:p>
+        </p:txBody>
+      </p:sp>
+      <p:sp>
+        <p:nvSpPr>
+          <p:cNvPr id="12" name="VigilMark line"/>
+          <p:cNvSpPr txBox="1"/>
+          <p:nvPr/>
+        </p:nvSpPr>
+        <p:spPr>
+          <a:xfrm>
+            <a:off x="1691640" y="2587752"/>
+            <a:ext cx="2788920" cy="365760"/>
+          </a:xfrm>
+          <a:prstGeom prst="rect">
+            <a:avLst/>
+          </a:prstGeom>
+          <a:noFill/>
+          <a:ln/>
+        </p:spPr>
+        <p:txBody>
+          <a:bodyPr wrap="square" lIns="0" tIns="0" rIns="0" bIns="0" rtlCol="0" anchor="t"/>
+          <a:lstStyle/>
+          <a:p>
+            <a:pPr indent="0" marL="0">
+              <a:buNone/>
+            </a:pPr>
+            <a:r>
+              <a:rPr lang="en-US" sz="950" dirty="0">
+                <a:solidFill>
+                  <a:schemeClr val="tx1"/>
+                </a:solidFill>
+              </a:rPr>
+              <a:t>Ranks new trademark filings against clients' marks before the opposition window closes.</a:t>
+            </a:r>
+            <a:endParaRPr lang="en-US" sz="950" dirty="0"/>
+          </a:p>
+        </p:txBody>
+      </p:sp>
+      <p:sp>
+        <p:nvSpPr>
+          <p:cNvPr id="13" name="Litigation heading"/>
+          <p:cNvSpPr txBox="1"/>
+          <p:nvPr/>
+        </p:nvSpPr>
+        <p:spPr>
+          <a:xfrm>
+            <a:off x="457200" y="3044952"/>
+            <a:ext cx="4023360" cy="219456"/>
+          </a:xfrm>
+          <a:prstGeom prst="rect">
+            <a:avLst/>
+          </a:prstGeom>
+          <a:noFill/>
+          <a:ln/>
+        </p:spPr>
+        <p:txBody>
+          <a:bodyPr wrap="square" lIns="0" tIns="0" rIns="0" bIns="0" rtlCol="0" anchor="b"/>
+          <a:lstStyle/>
+          <a:p>
+            <a:pPr indent="0" marL="0">
+              <a:buNone/>
+            </a:pPr>
+            <a:r>
+              <a:rPr lang="en-US" sz="900" b="1" spc="150" kern="0" dirty="0">
                 <a:solidFill>
                   <a:schemeClr val="accent5"/>
                 </a:solidFill>
               </a:rPr>
-              <a:t>Litigation</a:t>
-            </a:r>
-            <a:endParaRPr lang="en-US" sz="1100" dirty="0"/>
-          </a:p>
-        </p:txBody>
-      </p:sp>
-      <p:sp>
-        <p:nvSpPr>
-          <p:cNvPr id="12" name="Win your case ASAP entry"/>
-          <p:cNvSpPr txBox="1"/>
-          <p:nvPr/>
-        </p:nvSpPr>
-        <p:spPr>
-          <a:xfrm>
-            <a:off x="2231136" y="1682496"/>
-            <a:ext cx="1389888" cy="603504"/>
+              <a:t>LITIGATION</a:t>
+            </a:r>
+            <a:endParaRPr lang="en-US" sz="900" dirty="0"/>
+          </a:p>
+        </p:txBody>
+      </p:sp>
+      <p:sp>
+        <p:nvSpPr>
+          <p:cNvPr id="14" name="Win your case ASAP name"/>
+          <p:cNvSpPr txBox="1"/>
+          <p:nvPr/>
+        </p:nvSpPr>
+        <p:spPr>
+          <a:xfrm>
+            <a:off x="457200" y="3291840"/>
+            <a:ext cx="1188720" cy="365760"/>
           </a:xfrm>
           <a:prstGeom prst="rect">
             <a:avLst/>
@@ -1614,41 +1652,27 @@
               <a:buNone/>
             </a:pPr>
             <a:r>
-              <a:rPr lang="en-US" sz="1200" b="1" dirty="0">
+              <a:rPr lang="en-US" sz="1050" b="1" dirty="0">
                 <a:solidFill>
                   <a:schemeClr val="tx1"/>
                 </a:solidFill>
               </a:rPr>
               <a:t>Win your case ASAP</a:t>
             </a:r>
-            <a:endParaRPr lang="en-US" sz="1200" dirty="0"/>
-          </a:p>
-          <a:p>
-            <a:pPr indent="0" marL="0">
-              <a:buNone/>
-            </a:pPr>
-            <a:r>
-              <a:rPr lang="en-US" sz="1000" dirty="0">
-                <a:solidFill>
-                  <a:schemeClr val="tx2"/>
-                </a:solidFill>
-              </a:rPr>
-              <a:t>First read of a complaint</a:t>
-            </a:r>
-            <a:endParaRPr lang="en-US" sz="1200" dirty="0"/>
-          </a:p>
-        </p:txBody>
-      </p:sp>
-      <p:sp>
-        <p:nvSpPr>
-          <p:cNvPr id="13" name="Testimony Check entry"/>
-          <p:cNvSpPr txBox="1"/>
-          <p:nvPr/>
-        </p:nvSpPr>
-        <p:spPr>
-          <a:xfrm>
-            <a:off x="2231136" y="2322576"/>
-            <a:ext cx="1389888" cy="603504"/>
+            <a:endParaRPr lang="en-US" sz="1050" dirty="0"/>
+          </a:p>
+        </p:txBody>
+      </p:sp>
+      <p:sp>
+        <p:nvSpPr>
+          <p:cNvPr id="15" name="Win your case ASAP line"/>
+          <p:cNvSpPr txBox="1"/>
+          <p:nvPr/>
+        </p:nvSpPr>
+        <p:spPr>
+          <a:xfrm>
+            <a:off x="1691640" y="3291840"/>
+            <a:ext cx="2788920" cy="365760"/>
           </a:xfrm>
           <a:prstGeom prst="rect">
             <a:avLst/>
@@ -1664,41 +1688,63 @@
               <a:buNone/>
             </a:pPr>
             <a:r>
-              <a:rPr lang="en-US" sz="1200" b="1" dirty="0">
+              <a:rPr lang="en-US" sz="950" dirty="0">
                 <a:solidFill>
                   <a:schemeClr val="tx1"/>
                 </a:solidFill>
               </a:rPr>
+              <a:t>First read of a complaint: which motions could end the case early, with filing dates.</a:t>
+            </a:r>
+            <a:endParaRPr lang="en-US" sz="950" dirty="0"/>
+          </a:p>
+        </p:txBody>
+      </p:sp>
+      <p:sp>
+        <p:nvSpPr>
+          <p:cNvPr id="16" name="Testimony Check name"/>
+          <p:cNvSpPr txBox="1"/>
+          <p:nvPr/>
+        </p:nvSpPr>
+        <p:spPr>
+          <a:xfrm>
+            <a:off x="457200" y="3675888"/>
+            <a:ext cx="1188720" cy="365760"/>
+          </a:xfrm>
+          <a:prstGeom prst="rect">
+            <a:avLst/>
+          </a:prstGeom>
+          <a:noFill/>
+          <a:ln/>
+        </p:spPr>
+        <p:txBody>
+          <a:bodyPr wrap="square" lIns="0" tIns="0" rIns="0" bIns="0" rtlCol="0" anchor="t"/>
+          <a:lstStyle/>
+          <a:p>
+            <a:pPr indent="0" marL="0">
+              <a:buNone/>
+            </a:pPr>
+            <a:r>
+              <a:rPr lang="en-US" sz="1050" b="1" dirty="0">
+                <a:solidFill>
+                  <a:schemeClr val="tx1"/>
+                </a:solidFill>
+              </a:rPr>
               <a:t>Testimony Check</a:t>
             </a:r>
-            <a:endParaRPr lang="en-US" sz="1200" dirty="0"/>
-          </a:p>
-          <a:p>
-            <a:pPr indent="0" marL="0">
-              <a:buNone/>
-            </a:pPr>
-            <a:r>
-              <a:rPr lang="en-US" sz="1000" dirty="0">
-                <a:solidFill>
-                  <a:schemeClr val="tx2"/>
-                </a:solidFill>
-              </a:rPr>
-              <a:t>Witness vs. the record</a:t>
-            </a:r>
-            <a:endParaRPr lang="en-US" sz="1200" dirty="0"/>
-          </a:p>
-        </p:txBody>
-      </p:sp>
-      <p:sp>
-        <p:nvSpPr>
-          <p:cNvPr id="14" name="Citation Gate entry"/>
-          <p:cNvSpPr txBox="1"/>
-          <p:nvPr/>
-        </p:nvSpPr>
-        <p:spPr>
-          <a:xfrm>
-            <a:off x="2231136" y="2962656"/>
-            <a:ext cx="1389888" cy="603504"/>
+            <a:endParaRPr lang="en-US" sz="1050" dirty="0"/>
+          </a:p>
+        </p:txBody>
+      </p:sp>
+      <p:sp>
+        <p:nvSpPr>
+          <p:cNvPr id="17" name="Testimony Check line"/>
+          <p:cNvSpPr txBox="1"/>
+          <p:nvPr/>
+        </p:nvSpPr>
+        <p:spPr>
+          <a:xfrm>
+            <a:off x="1691640" y="3675888"/>
+            <a:ext cx="2788920" cy="365760"/>
           </a:xfrm>
           <a:prstGeom prst="rect">
             <a:avLst/>
@@ -1714,41 +1760,63 @@
               <a:buNone/>
             </a:pPr>
             <a:r>
-              <a:rPr lang="en-US" sz="1200" b="1" dirty="0">
+              <a:rPr lang="en-US" sz="950" dirty="0">
                 <a:solidFill>
                   <a:schemeClr val="tx1"/>
                 </a:solidFill>
               </a:rPr>
+              <a:t>Finds where a witness's story conflicts with the documents and drafts the deposition outline.</a:t>
+            </a:r>
+            <a:endParaRPr lang="en-US" sz="950" dirty="0"/>
+          </a:p>
+        </p:txBody>
+      </p:sp>
+      <p:sp>
+        <p:nvSpPr>
+          <p:cNvPr id="18" name="Citation Gate name"/>
+          <p:cNvSpPr txBox="1"/>
+          <p:nvPr/>
+        </p:nvSpPr>
+        <p:spPr>
+          <a:xfrm>
+            <a:off x="457200" y="4059936"/>
+            <a:ext cx="1188720" cy="365760"/>
+          </a:xfrm>
+          <a:prstGeom prst="rect">
+            <a:avLst/>
+          </a:prstGeom>
+          <a:noFill/>
+          <a:ln/>
+        </p:spPr>
+        <p:txBody>
+          <a:bodyPr wrap="square" lIns="0" tIns="0" rIns="0" bIns="0" rtlCol="0" anchor="t"/>
+          <a:lstStyle/>
+          <a:p>
+            <a:pPr indent="0" marL="0">
+              <a:buNone/>
+            </a:pPr>
+            <a:r>
+              <a:rPr lang="en-US" sz="1050" b="1" dirty="0">
+                <a:solidFill>
+                  <a:schemeClr val="tx1"/>
+                </a:solidFill>
+              </a:rPr>
               <a:t>Citation Gate</a:t>
             </a:r>
-            <a:endParaRPr lang="en-US" sz="1200" dirty="0"/>
-          </a:p>
-          <a:p>
-            <a:pPr indent="0" marL="0">
-              <a:buNone/>
-            </a:pPr>
-            <a:r>
-              <a:rPr lang="en-US" sz="1000" dirty="0">
-                <a:solidFill>
-                  <a:schemeClr val="tx2"/>
-                </a:solidFill>
-              </a:rPr>
-              <a:t>Every citation checked</a:t>
-            </a:r>
-            <a:endParaRPr lang="en-US" sz="1200" dirty="0"/>
-          </a:p>
-        </p:txBody>
-      </p:sp>
-      <p:sp>
-        <p:nvSpPr>
-          <p:cNvPr id="15" name="Case Wins Debrief entry"/>
-          <p:cNvSpPr txBox="1"/>
-          <p:nvPr/>
-        </p:nvSpPr>
-        <p:spPr>
-          <a:xfrm>
-            <a:off x="2231136" y="3602736"/>
-            <a:ext cx="1389888" cy="603504"/>
+            <a:endParaRPr lang="en-US" sz="1050" dirty="0"/>
+          </a:p>
+        </p:txBody>
+      </p:sp>
+      <p:sp>
+        <p:nvSpPr>
+          <p:cNvPr id="19" name="Citation Gate line"/>
+          <p:cNvSpPr txBox="1"/>
+          <p:nvPr/>
+        </p:nvSpPr>
+        <p:spPr>
+          <a:xfrm>
+            <a:off x="1691640" y="4059936"/>
+            <a:ext cx="2788920" cy="365760"/>
           </a:xfrm>
           <a:prstGeom prst="rect">
             <a:avLst/>
@@ -1764,102 +1832,135 @@
               <a:buNone/>
             </a:pPr>
             <a:r>
-              <a:rPr lang="en-US" sz="1200" b="1" dirty="0">
+              <a:rPr lang="en-US" sz="950" dirty="0">
                 <a:solidFill>
                   <a:schemeClr val="tx1"/>
                 </a:solidFill>
               </a:rPr>
+              <a:t>Checks every cited case and quotation against real opinions before a brief goes out.</a:t>
+            </a:r>
+            <a:endParaRPr lang="en-US" sz="950" dirty="0"/>
+          </a:p>
+        </p:txBody>
+      </p:sp>
+      <p:sp>
+        <p:nvSpPr>
+          <p:cNvPr id="20" name="Case Wins Debrief name"/>
+          <p:cNvSpPr txBox="1"/>
+          <p:nvPr/>
+        </p:nvSpPr>
+        <p:spPr>
+          <a:xfrm>
+            <a:off x="457200" y="4443984"/>
+            <a:ext cx="1188720" cy="365760"/>
+          </a:xfrm>
+          <a:prstGeom prst="rect">
+            <a:avLst/>
+          </a:prstGeom>
+          <a:noFill/>
+          <a:ln/>
+        </p:spPr>
+        <p:txBody>
+          <a:bodyPr wrap="square" lIns="0" tIns="0" rIns="0" bIns="0" rtlCol="0" anchor="t"/>
+          <a:lstStyle/>
+          <a:p>
+            <a:pPr indent="0" marL="0">
+              <a:buNone/>
+            </a:pPr>
+            <a:r>
+              <a:rPr lang="en-US" sz="1050" b="1" dirty="0">
+                <a:solidFill>
+                  <a:schemeClr val="tx1"/>
+                </a:solidFill>
+              </a:rPr>
               <a:t>Case Wins Debrief</a:t>
             </a:r>
-            <a:endParaRPr lang="en-US" sz="1200" dirty="0"/>
-          </a:p>
-          <a:p>
-            <a:pPr indent="0" marL="0">
-              <a:buNone/>
-            </a:pPr>
-            <a:r>
-              <a:rPr lang="en-US" sz="1000" dirty="0">
-                <a:solidFill>
-                  <a:schemeClr val="tx2"/>
-                </a:solidFill>
-              </a:rPr>
-              <a:t>Lessons from wins, reusable</a:t>
-            </a:r>
-            <a:endParaRPr lang="en-US" sz="1200" dirty="0"/>
-          </a:p>
-        </p:txBody>
-      </p:sp>
-      <p:sp>
-        <p:nvSpPr>
-          <p:cNvPr id="16" name="Transactions and practice groups column"/>
-          <p:cNvSpPr/>
-          <p:nvPr/>
-        </p:nvSpPr>
-        <p:spPr>
-          <a:xfrm>
-            <a:off x="3822192" y="1188720"/>
-            <a:ext cx="1572768" cy="3127248"/>
-          </a:xfrm>
-          <a:prstGeom prst="rect">
-            <a:avLst/>
-          </a:prstGeom>
-          <a:solidFill>
-            <a:schemeClr val="bg2"/>
-          </a:solidFill>
-          <a:ln w="12700">
-            <a:solidFill>
-              <a:schemeClr val="bg2"/>
-            </a:solidFill>
-            <a:prstDash val="solid"/>
-          </a:ln>
-        </p:spPr>
-      </p:sp>
-      <p:sp>
-        <p:nvSpPr>
-          <p:cNvPr id="17" name="Transactions and practice groups heading"/>
-          <p:cNvSpPr txBox="1"/>
-          <p:nvPr/>
-        </p:nvSpPr>
-        <p:spPr>
-          <a:xfrm>
-            <a:off x="3913632" y="1243584"/>
-            <a:ext cx="1389888" cy="365760"/>
-          </a:xfrm>
-          <a:prstGeom prst="rect">
-            <a:avLst/>
-          </a:prstGeom>
-          <a:noFill/>
-          <a:ln/>
-        </p:spPr>
-        <p:txBody>
-          <a:bodyPr wrap="square" lIns="0" tIns="0" rIns="0" bIns="0" rtlCol="0" anchor="ctr"/>
-          <a:lstStyle/>
-          <a:p>
-            <a:pPr indent="0" marL="0">
-              <a:buNone/>
-            </a:pPr>
-            <a:r>
-              <a:rPr lang="en-US" sz="1100" b="1" dirty="0">
+            <a:endParaRPr lang="en-US" sz="1050" dirty="0"/>
+          </a:p>
+        </p:txBody>
+      </p:sp>
+      <p:sp>
+        <p:nvSpPr>
+          <p:cNvPr id="21" name="Case Wins Debrief line"/>
+          <p:cNvSpPr txBox="1"/>
+          <p:nvPr/>
+        </p:nvSpPr>
+        <p:spPr>
+          <a:xfrm>
+            <a:off x="1691640" y="4443984"/>
+            <a:ext cx="2788920" cy="365760"/>
+          </a:xfrm>
+          <a:prstGeom prst="rect">
+            <a:avLst/>
+          </a:prstGeom>
+          <a:noFill/>
+          <a:ln/>
+        </p:spPr>
+        <p:txBody>
+          <a:bodyPr wrap="square" lIns="0" tIns="0" rIns="0" bIns="0" rtlCol="0" anchor="t"/>
+          <a:lstStyle/>
+          <a:p>
+            <a:pPr indent="0" marL="0">
+              <a:buNone/>
+            </a:pPr>
+            <a:r>
+              <a:rPr lang="en-US" sz="950" dirty="0">
+                <a:solidFill>
+                  <a:schemeClr val="tx1"/>
+                </a:solidFill>
+              </a:rPr>
+              <a:t>Turns each trial win into lessons and a tool the next team can reuse.</a:t>
+            </a:r>
+            <a:endParaRPr lang="en-US" sz="950" dirty="0"/>
+          </a:p>
+        </p:txBody>
+      </p:sp>
+      <p:sp>
+        <p:nvSpPr>
+          <p:cNvPr id="22" name="Transactions and practice groups heading"/>
+          <p:cNvSpPr txBox="1"/>
+          <p:nvPr/>
+        </p:nvSpPr>
+        <p:spPr>
+          <a:xfrm>
+            <a:off x="4663440" y="1188720"/>
+            <a:ext cx="4023360" cy="219456"/>
+          </a:xfrm>
+          <a:prstGeom prst="rect">
+            <a:avLst/>
+          </a:prstGeom>
+          <a:noFill/>
+          <a:ln/>
+        </p:spPr>
+        <p:txBody>
+          <a:bodyPr wrap="square" lIns="0" tIns="0" rIns="0" bIns="0" rtlCol="0" anchor="b"/>
+          <a:lstStyle/>
+          <a:p>
+            <a:pPr indent="0" marL="0">
+              <a:buNone/>
+            </a:pPr>
+            <a:r>
+              <a:rPr lang="en-US" sz="900" b="1" spc="150" kern="0" dirty="0">
                 <a:solidFill>
                   <a:schemeClr val="accent5"/>
                 </a:solidFill>
               </a:rPr>
-              <a:t>Transactions and practice groups</a:t>
-            </a:r>
-            <a:endParaRPr lang="en-US" sz="1100" dirty="0"/>
-          </a:p>
-        </p:txBody>
-      </p:sp>
-      <p:sp>
-        <p:nvSpPr>
-          <p:cNvPr id="18" name="Matter Desk entry"/>
-          <p:cNvSpPr txBox="1"/>
-          <p:nvPr/>
-        </p:nvSpPr>
-        <p:spPr>
-          <a:xfrm>
-            <a:off x="3913632" y="1682496"/>
-            <a:ext cx="1389888" cy="603504"/>
+              <a:t>TRANSACTIONS AND PRACTICE GROUPS</a:t>
+            </a:r>
+            <a:endParaRPr lang="en-US" sz="900" dirty="0"/>
+          </a:p>
+        </p:txBody>
+      </p:sp>
+      <p:sp>
+        <p:nvSpPr>
+          <p:cNvPr id="23" name="Matter Desk name"/>
+          <p:cNvSpPr txBox="1"/>
+          <p:nvPr/>
+        </p:nvSpPr>
+        <p:spPr>
+          <a:xfrm>
+            <a:off x="4663440" y="1435608"/>
+            <a:ext cx="1188720" cy="365760"/>
           </a:xfrm>
           <a:prstGeom prst="rect">
             <a:avLst/>
@@ -1875,41 +1976,27 @@
               <a:buNone/>
             </a:pPr>
             <a:r>
-              <a:rPr lang="en-US" sz="1200" b="1" dirty="0">
+              <a:rPr lang="en-US" sz="1050" b="1" dirty="0">
                 <a:solidFill>
                   <a:schemeClr val="tx1"/>
                 </a:solidFill>
               </a:rPr>
               <a:t>Matter Desk</a:t>
             </a:r>
-            <a:endParaRPr lang="en-US" sz="1200" dirty="0"/>
-          </a:p>
-          <a:p>
-            <a:pPr indent="0" marL="0">
-              <a:buNone/>
-            </a:pPr>
-            <a:r>
-              <a:rPr lang="en-US" sz="1000" dirty="0">
-                <a:solidFill>
-                  <a:schemeClr val="tx2"/>
-                </a:solidFill>
-              </a:rPr>
-              <a:t>First read of a new matter</a:t>
-            </a:r>
-            <a:endParaRPr lang="en-US" sz="1200" dirty="0"/>
-          </a:p>
-        </p:txBody>
-      </p:sp>
-      <p:sp>
-        <p:nvSpPr>
-          <p:cNvPr id="19" name="Synthesis entry"/>
-          <p:cNvSpPr txBox="1"/>
-          <p:nvPr/>
-        </p:nvSpPr>
-        <p:spPr>
-          <a:xfrm>
-            <a:off x="3913632" y="2322576"/>
-            <a:ext cx="1389888" cy="603504"/>
+            <a:endParaRPr lang="en-US" sz="1050" dirty="0"/>
+          </a:p>
+        </p:txBody>
+      </p:sp>
+      <p:sp>
+        <p:nvSpPr>
+          <p:cNvPr id="24" name="Matter Desk line"/>
+          <p:cNvSpPr txBox="1"/>
+          <p:nvPr/>
+        </p:nvSpPr>
+        <p:spPr>
+          <a:xfrm>
+            <a:off x="5897880" y="1435608"/>
+            <a:ext cx="2788920" cy="365760"/>
           </a:xfrm>
           <a:prstGeom prst="rect">
             <a:avLst/>
@@ -1925,41 +2012,63 @@
               <a:buNone/>
             </a:pPr>
             <a:r>
-              <a:rPr lang="en-US" sz="1200" b="1" dirty="0">
+              <a:rPr lang="en-US" sz="950" dirty="0">
                 <a:solidFill>
                   <a:schemeClr val="tx1"/>
                 </a:solidFill>
               </a:rPr>
+              <a:t>First read of a new matter in five practice areas, with every deadline dated.</a:t>
+            </a:r>
+            <a:endParaRPr lang="en-US" sz="950" dirty="0"/>
+          </a:p>
+        </p:txBody>
+      </p:sp>
+      <p:sp>
+        <p:nvSpPr>
+          <p:cNvPr id="25" name="Synthesis name"/>
+          <p:cNvSpPr txBox="1"/>
+          <p:nvPr/>
+        </p:nvSpPr>
+        <p:spPr>
+          <a:xfrm>
+            <a:off x="4663440" y="1819656"/>
+            <a:ext cx="1188720" cy="365760"/>
+          </a:xfrm>
+          <a:prstGeom prst="rect">
+            <a:avLst/>
+          </a:prstGeom>
+          <a:noFill/>
+          <a:ln/>
+        </p:spPr>
+        <p:txBody>
+          <a:bodyPr wrap="square" lIns="0" tIns="0" rIns="0" bIns="0" rtlCol="0" anchor="t"/>
+          <a:lstStyle/>
+          <a:p>
+            <a:pPr indent="0" marL="0">
+              <a:buNone/>
+            </a:pPr>
+            <a:r>
+              <a:rPr lang="en-US" sz="1050" b="1" dirty="0">
+                <a:solidFill>
+                  <a:schemeClr val="tx1"/>
+                </a:solidFill>
+              </a:rPr>
               <a:t>Synthesis</a:t>
             </a:r>
-            <a:endParaRPr lang="en-US" sz="1200" dirty="0"/>
-          </a:p>
-          <a:p>
-            <a:pPr indent="0" marL="0">
-              <a:buNone/>
-            </a:pPr>
-            <a:r>
-              <a:rPr lang="en-US" sz="1000" dirty="0">
-                <a:solidFill>
-                  <a:schemeClr val="tx2"/>
-                </a:solidFill>
-              </a:rPr>
-              <a:t>Buy-side deal workbench</a:t>
-            </a:r>
-            <a:endParaRPr lang="en-US" sz="1200" dirty="0"/>
-          </a:p>
-        </p:txBody>
-      </p:sp>
-      <p:sp>
-        <p:nvSpPr>
-          <p:cNvPr id="20" name="Skippy entry"/>
-          <p:cNvSpPr txBox="1"/>
-          <p:nvPr/>
-        </p:nvSpPr>
-        <p:spPr>
-          <a:xfrm>
-            <a:off x="3913632" y="2962656"/>
-            <a:ext cx="1389888" cy="603504"/>
+            <a:endParaRPr lang="en-US" sz="1050" dirty="0"/>
+          </a:p>
+        </p:txBody>
+      </p:sp>
+      <p:sp>
+        <p:nvSpPr>
+          <p:cNvPr id="26" name="Synthesis line"/>
+          <p:cNvSpPr txBox="1"/>
+          <p:nvPr/>
+        </p:nvSpPr>
+        <p:spPr>
+          <a:xfrm>
+            <a:off x="5897880" y="1819656"/>
+            <a:ext cx="2788920" cy="365760"/>
           </a:xfrm>
           <a:prstGeom prst="rect">
             <a:avLst/>
@@ -1975,102 +2084,135 @@
               <a:buNone/>
             </a:pPr>
             <a:r>
-              <a:rPr lang="en-US" sz="1200" b="1" dirty="0">
+              <a:rPr lang="en-US" sz="950" dirty="0">
                 <a:solidFill>
                   <a:schemeClr val="tx1"/>
                 </a:solidFill>
               </a:rPr>
+              <a:t>Buy-side deal workbench: schedules against reps, the markup explained, closing list built.</a:t>
+            </a:r>
+            <a:endParaRPr lang="en-US" sz="950" dirty="0"/>
+          </a:p>
+        </p:txBody>
+      </p:sp>
+      <p:sp>
+        <p:nvSpPr>
+          <p:cNvPr id="27" name="Skippy name"/>
+          <p:cNvSpPr txBox="1"/>
+          <p:nvPr/>
+        </p:nvSpPr>
+        <p:spPr>
+          <a:xfrm>
+            <a:off x="4663440" y="2203704"/>
+            <a:ext cx="1188720" cy="365760"/>
+          </a:xfrm>
+          <a:prstGeom prst="rect">
+            <a:avLst/>
+          </a:prstGeom>
+          <a:noFill/>
+          <a:ln/>
+        </p:spPr>
+        <p:txBody>
+          <a:bodyPr wrap="square" lIns="0" tIns="0" rIns="0" bIns="0" rtlCol="0" anchor="t"/>
+          <a:lstStyle/>
+          <a:p>
+            <a:pPr indent="0" marL="0">
+              <a:buNone/>
+            </a:pPr>
+            <a:r>
+              <a:rPr lang="en-US" sz="1050" b="1" dirty="0">
+                <a:solidFill>
+                  <a:schemeClr val="tx1"/>
+                </a:solidFill>
+              </a:rPr>
               <a:t>Skippy</a:t>
             </a:r>
-            <a:endParaRPr lang="en-US" sz="1200" dirty="0"/>
-          </a:p>
-          <a:p>
-            <a:pPr indent="0" marL="0">
-              <a:buNone/>
-            </a:pPr>
-            <a:r>
-              <a:rPr lang="en-US" sz="1000" dirty="0">
-                <a:solidFill>
-                  <a:schemeClr val="tx2"/>
-                </a:solidFill>
-              </a:rPr>
-              <a:t>Ask the matter, cited to the page</a:t>
-            </a:r>
-            <a:endParaRPr lang="en-US" sz="1200" dirty="0"/>
-          </a:p>
-        </p:txBody>
-      </p:sp>
-      <p:sp>
-        <p:nvSpPr>
-          <p:cNvPr id="21" name="Billing and time column"/>
-          <p:cNvSpPr/>
-          <p:nvPr/>
-        </p:nvSpPr>
-        <p:spPr>
-          <a:xfrm>
-            <a:off x="5504688" y="1188720"/>
-            <a:ext cx="1572768" cy="3127248"/>
-          </a:xfrm>
-          <a:prstGeom prst="rect">
-            <a:avLst/>
-          </a:prstGeom>
-          <a:solidFill>
-            <a:schemeClr val="bg2"/>
-          </a:solidFill>
-          <a:ln w="12700">
-            <a:solidFill>
-              <a:schemeClr val="bg2"/>
-            </a:solidFill>
-            <a:prstDash val="solid"/>
-          </a:ln>
-        </p:spPr>
-      </p:sp>
-      <p:sp>
-        <p:nvSpPr>
-          <p:cNvPr id="22" name="Billing and time heading"/>
-          <p:cNvSpPr txBox="1"/>
-          <p:nvPr/>
-        </p:nvSpPr>
-        <p:spPr>
-          <a:xfrm>
-            <a:off x="5596128" y="1243584"/>
-            <a:ext cx="1389888" cy="365760"/>
-          </a:xfrm>
-          <a:prstGeom prst="rect">
-            <a:avLst/>
-          </a:prstGeom>
-          <a:noFill/>
-          <a:ln/>
-        </p:spPr>
-        <p:txBody>
-          <a:bodyPr wrap="square" lIns="0" tIns="0" rIns="0" bIns="0" rtlCol="0" anchor="ctr"/>
-          <a:lstStyle/>
-          <a:p>
-            <a:pPr indent="0" marL="0">
-              <a:buNone/>
-            </a:pPr>
-            <a:r>
-              <a:rPr lang="en-US" sz="1100" b="1" dirty="0">
+            <a:endParaRPr lang="en-US" sz="1050" dirty="0"/>
+          </a:p>
+        </p:txBody>
+      </p:sp>
+      <p:sp>
+        <p:nvSpPr>
+          <p:cNvPr id="28" name="Skippy line"/>
+          <p:cNvSpPr txBox="1"/>
+          <p:nvPr/>
+        </p:nvSpPr>
+        <p:spPr>
+          <a:xfrm>
+            <a:off x="5897880" y="2203704"/>
+            <a:ext cx="2788920" cy="365760"/>
+          </a:xfrm>
+          <a:prstGeom prst="rect">
+            <a:avLst/>
+          </a:prstGeom>
+          <a:noFill/>
+          <a:ln/>
+        </p:spPr>
+        <p:txBody>
+          <a:bodyPr wrap="square" lIns="0" tIns="0" rIns="0" bIns="0" rtlCol="0" anchor="t"/>
+          <a:lstStyle/>
+          <a:p>
+            <a:pPr indent="0" marL="0">
+              <a:buNone/>
+            </a:pPr>
+            <a:r>
+              <a:rPr lang="en-US" sz="950" dirty="0">
+                <a:solidFill>
+                  <a:schemeClr val="tx1"/>
+                </a:solidFill>
+              </a:rPr>
+              <a:t>Answers questions about a matter's files, every answer cited to the page.</a:t>
+            </a:r>
+            <a:endParaRPr lang="en-US" sz="950" dirty="0"/>
+          </a:p>
+        </p:txBody>
+      </p:sp>
+      <p:sp>
+        <p:nvSpPr>
+          <p:cNvPr id="29" name="Billing and time heading"/>
+          <p:cNvSpPr txBox="1"/>
+          <p:nvPr/>
+        </p:nvSpPr>
+        <p:spPr>
+          <a:xfrm>
+            <a:off x="4663440" y="2660904"/>
+            <a:ext cx="4023360" cy="219456"/>
+          </a:xfrm>
+          <a:prstGeom prst="rect">
+            <a:avLst/>
+          </a:prstGeom>
+          <a:noFill/>
+          <a:ln/>
+        </p:spPr>
+        <p:txBody>
+          <a:bodyPr wrap="square" lIns="0" tIns="0" rIns="0" bIns="0" rtlCol="0" anchor="b"/>
+          <a:lstStyle/>
+          <a:p>
+            <a:pPr indent="0" marL="0">
+              <a:buNone/>
+            </a:pPr>
+            <a:r>
+              <a:rPr lang="en-US" sz="900" b="1" spc="150" kern="0" dirty="0">
                 <a:solidFill>
                   <a:schemeClr val="accent5"/>
                 </a:solidFill>
               </a:rPr>
-              <a:t>Billing and time</a:t>
-            </a:r>
-            <a:endParaRPr lang="en-US" sz="1100" dirty="0"/>
-          </a:p>
-        </p:txBody>
-      </p:sp>
-      <p:sp>
-        <p:nvSpPr>
-          <p:cNvPr id="23" name="Guideline Guard entry"/>
-          <p:cNvSpPr txBox="1"/>
-          <p:nvPr/>
-        </p:nvSpPr>
-        <p:spPr>
-          <a:xfrm>
-            <a:off x="5596128" y="1682496"/>
-            <a:ext cx="1389888" cy="603504"/>
+              <a:t>BILLING AND TIME</a:t>
+            </a:r>
+            <a:endParaRPr lang="en-US" sz="900" dirty="0"/>
+          </a:p>
+        </p:txBody>
+      </p:sp>
+      <p:sp>
+        <p:nvSpPr>
+          <p:cNvPr id="30" name="Guideline Guard name"/>
+          <p:cNvSpPr txBox="1"/>
+          <p:nvPr/>
+        </p:nvSpPr>
+        <p:spPr>
+          <a:xfrm>
+            <a:off x="4663440" y="2907792"/>
+            <a:ext cx="1188720" cy="365760"/>
           </a:xfrm>
           <a:prstGeom prst="rect">
             <a:avLst/>
@@ -2086,41 +2228,63 @@
               <a:buNone/>
             </a:pPr>
             <a:r>
-              <a:rPr lang="en-US" sz="1200" b="1" dirty="0">
+              <a:rPr lang="en-US" sz="1050" b="1" dirty="0">
+                <a:solidFill>
+                  <a:schemeClr val="accent2"/>
+                </a:solidFill>
+              </a:rPr>
+              <a:t>Guideline Guard</a:t>
+            </a:r>
+            <a:endParaRPr lang="en-US" sz="1050" dirty="0"/>
+          </a:p>
+        </p:txBody>
+      </p:sp>
+      <p:sp>
+        <p:nvSpPr>
+          <p:cNvPr id="31" name="Guideline Guard line"/>
+          <p:cNvSpPr txBox="1"/>
+          <p:nvPr/>
+        </p:nvSpPr>
+        <p:spPr>
+          <a:xfrm>
+            <a:off x="5897880" y="2907792"/>
+            <a:ext cx="2788920" cy="365760"/>
+          </a:xfrm>
+          <a:prstGeom prst="rect">
+            <a:avLst/>
+          </a:prstGeom>
+          <a:noFill/>
+          <a:ln/>
+        </p:spPr>
+        <p:txBody>
+          <a:bodyPr wrap="square" lIns="0" tIns="0" rIns="0" bIns="0" rtlCol="0" anchor="t"/>
+          <a:lstStyle/>
+          <a:p>
+            <a:pPr indent="0" marL="0">
+              <a:buNone/>
+            </a:pPr>
+            <a:r>
+              <a:rPr lang="en-US" sz="950" dirty="0">
                 <a:solidFill>
                   <a:schemeClr val="tx1"/>
                 </a:solidFill>
               </a:rPr>
-              <a:t>Guideline Guard</a:t>
-            </a:r>
-            <a:endParaRPr lang="en-US" sz="1200" dirty="0"/>
-          </a:p>
-          <a:p>
-            <a:pPr indent="0" marL="0">
-              <a:buNone/>
-            </a:pPr>
-            <a:r>
-              <a:rPr lang="en-US" sz="1000" dirty="0">
-                <a:solidFill>
-                  <a:schemeClr val="tx2"/>
-                </a:solidFill>
-              </a:rPr>
-              <a:t>Client guidelines on the prebill</a:t>
-            </a:r>
-            <a:endParaRPr lang="en-US" sz="1200" dirty="0"/>
-          </a:p>
-        </p:txBody>
-      </p:sp>
-      <p:sp>
-        <p:nvSpPr>
-          <p:cNvPr id="24" name="Hour Catch entry"/>
-          <p:cNvSpPr txBox="1"/>
-          <p:nvPr/>
-        </p:nvSpPr>
-        <p:spPr>
-          <a:xfrm>
-            <a:off x="5596128" y="2322576"/>
-            <a:ext cx="1389888" cy="603504"/>
+              <a:t>Checks each prebill against that client's own guidelines and proposes the fix.</a:t>
+            </a:r>
+            <a:endParaRPr lang="en-US" sz="950" dirty="0"/>
+          </a:p>
+        </p:txBody>
+      </p:sp>
+      <p:sp>
+        <p:nvSpPr>
+          <p:cNvPr id="32" name="Hour Catch name"/>
+          <p:cNvSpPr txBox="1"/>
+          <p:nvPr/>
+        </p:nvSpPr>
+        <p:spPr>
+          <a:xfrm>
+            <a:off x="4663440" y="3291840"/>
+            <a:ext cx="1188720" cy="365760"/>
           </a:xfrm>
           <a:prstGeom prst="rect">
             <a:avLst/>
@@ -2136,102 +2300,99 @@
               <a:buNone/>
             </a:pPr>
             <a:r>
-              <a:rPr lang="en-US" sz="1200" b="1" dirty="0">
+              <a:rPr lang="en-US" sz="1050" b="1" dirty="0">
                 <a:solidFill>
                   <a:schemeClr val="tx1"/>
                 </a:solidFill>
               </a:rPr>
               <a:t>Hour Catch</a:t>
             </a:r>
-            <a:endParaRPr lang="en-US" sz="1200" dirty="0"/>
-          </a:p>
-          <a:p>
-            <a:pPr indent="0" marL="0">
-              <a:buNone/>
-            </a:pPr>
-            <a:r>
-              <a:rPr lang="en-US" sz="1000" dirty="0">
-                <a:solidFill>
-                  <a:schemeClr val="tx2"/>
-                </a:solidFill>
-              </a:rPr>
-              <a:t>Missed time, drafted</a:t>
-            </a:r>
-            <a:endParaRPr lang="en-US" sz="1200" dirty="0"/>
-          </a:p>
-        </p:txBody>
-      </p:sp>
-      <p:sp>
-        <p:nvSpPr>
-          <p:cNvPr id="25" name="Firm strategy and knowledge column"/>
-          <p:cNvSpPr/>
-          <p:nvPr/>
-        </p:nvSpPr>
-        <p:spPr>
-          <a:xfrm>
-            <a:off x="7187184" y="1188720"/>
-            <a:ext cx="1572768" cy="3127248"/>
-          </a:xfrm>
-          <a:prstGeom prst="rect">
-            <a:avLst/>
-          </a:prstGeom>
-          <a:solidFill>
-            <a:schemeClr val="bg2"/>
-          </a:solidFill>
-          <a:ln w="12700">
-            <a:solidFill>
-              <a:schemeClr val="bg2"/>
-            </a:solidFill>
-            <a:prstDash val="solid"/>
-          </a:ln>
-        </p:spPr>
-      </p:sp>
-      <p:sp>
-        <p:nvSpPr>
-          <p:cNvPr id="26" name="Firm strategy and knowledge heading"/>
-          <p:cNvSpPr txBox="1"/>
-          <p:nvPr/>
-        </p:nvSpPr>
-        <p:spPr>
-          <a:xfrm>
-            <a:off x="7278624" y="1243584"/>
-            <a:ext cx="1389888" cy="365760"/>
-          </a:xfrm>
-          <a:prstGeom prst="rect">
-            <a:avLst/>
-          </a:prstGeom>
-          <a:noFill/>
-          <a:ln/>
-        </p:spPr>
-        <p:txBody>
-          <a:bodyPr wrap="square" lIns="0" tIns="0" rIns="0" bIns="0" rtlCol="0" anchor="ctr"/>
-          <a:lstStyle/>
-          <a:p>
-            <a:pPr indent="0" marL="0">
-              <a:buNone/>
-            </a:pPr>
-            <a:r>
-              <a:rPr lang="en-US" sz="1100" b="1" dirty="0">
+            <a:endParaRPr lang="en-US" sz="1050" dirty="0"/>
+          </a:p>
+        </p:txBody>
+      </p:sp>
+      <p:sp>
+        <p:nvSpPr>
+          <p:cNvPr id="33" name="Hour Catch line"/>
+          <p:cNvSpPr txBox="1"/>
+          <p:nvPr/>
+        </p:nvSpPr>
+        <p:spPr>
+          <a:xfrm>
+            <a:off x="5897880" y="3291840"/>
+            <a:ext cx="2788920" cy="365760"/>
+          </a:xfrm>
+          <a:prstGeom prst="rect">
+            <a:avLst/>
+          </a:prstGeom>
+          <a:noFill/>
+          <a:ln/>
+        </p:spPr>
+        <p:txBody>
+          <a:bodyPr wrap="square" lIns="0" tIns="0" rIns="0" bIns="0" rtlCol="0" anchor="t"/>
+          <a:lstStyle/>
+          <a:p>
+            <a:pPr indent="0" marL="0">
+              <a:buNone/>
+            </a:pPr>
+            <a:r>
+              <a:rPr lang="en-US" sz="950" dirty="0">
+                <a:solidFill>
+                  <a:schemeClr val="tx1"/>
+                </a:solidFill>
+              </a:rPr>
+              <a:t>Reads a lawyer's day in Outlook and Teams and drafts the time entries that would be lost.</a:t>
+            </a:r>
+            <a:endParaRPr lang="en-US" sz="950" dirty="0"/>
+          </a:p>
+        </p:txBody>
+      </p:sp>
+      <p:sp>
+        <p:nvSpPr>
+          <p:cNvPr id="34" name="Firm strategy and marketing heading"/>
+          <p:cNvSpPr txBox="1"/>
+          <p:nvPr/>
+        </p:nvSpPr>
+        <p:spPr>
+          <a:xfrm>
+            <a:off x="4663440" y="3749040"/>
+            <a:ext cx="4023360" cy="219456"/>
+          </a:xfrm>
+          <a:prstGeom prst="rect">
+            <a:avLst/>
+          </a:prstGeom>
+          <a:noFill/>
+          <a:ln/>
+        </p:spPr>
+        <p:txBody>
+          <a:bodyPr wrap="square" lIns="0" tIns="0" rIns="0" bIns="0" rtlCol="0" anchor="b"/>
+          <a:lstStyle/>
+          <a:p>
+            <a:pPr indent="0" marL="0">
+              <a:buNone/>
+            </a:pPr>
+            <a:r>
+              <a:rPr lang="en-US" sz="900" b="1" spc="150" kern="0" dirty="0">
                 <a:solidFill>
                   <a:schemeClr val="accent5"/>
                 </a:solidFill>
               </a:rPr>
-              <a:t>Firm strategy and knowledge</a:t>
-            </a:r>
-            <a:endParaRPr lang="en-US" sz="1100" dirty="0"/>
-          </a:p>
-        </p:txBody>
-      </p:sp>
-      <p:sp>
-        <p:nvSpPr>
-          <p:cNvPr id="27" name="Praxis entry"/>
-          <p:cNvSpPr txBox="1"/>
-          <p:nvPr/>
-        </p:nvSpPr>
-        <p:spPr>
-          <a:xfrm>
-            <a:off x="7278624" y="1682496"/>
-            <a:ext cx="1389888" cy="603504"/>
+              <a:t>FIRM STRATEGY AND MARKETING</a:t>
+            </a:r>
+            <a:endParaRPr lang="en-US" sz="900" dirty="0"/>
+          </a:p>
+        </p:txBody>
+      </p:sp>
+      <p:sp>
+        <p:nvSpPr>
+          <p:cNvPr id="35" name="Praxis name"/>
+          <p:cNvSpPr txBox="1"/>
+          <p:nvPr/>
+        </p:nvSpPr>
+        <p:spPr>
+          <a:xfrm>
+            <a:off x="4663440" y="3995928"/>
+            <a:ext cx="1188720" cy="365760"/>
           </a:xfrm>
           <a:prstGeom prst="rect">
             <a:avLst/>
@@ -2247,41 +2408,27 @@
               <a:buNone/>
             </a:pPr>
             <a:r>
-              <a:rPr lang="en-US" sz="1200" b="1" dirty="0">
+              <a:rPr lang="en-US" sz="1050" b="1" dirty="0">
                 <a:solidFill>
                   <a:schemeClr val="tx1"/>
                 </a:solidFill>
               </a:rPr>
               <a:t>Praxis</a:t>
             </a:r>
-            <a:endParaRPr lang="en-US" sz="1200" dirty="0"/>
-          </a:p>
-          <a:p>
-            <a:pPr indent="0" marL="0">
-              <a:buNone/>
-            </a:pPr>
-            <a:r>
-              <a:rPr lang="en-US" sz="1000" dirty="0">
-                <a:solidFill>
-                  <a:schemeClr val="tx2"/>
-                </a:solidFill>
-              </a:rPr>
-              <a:t>Scores AI ideas, runs pilots</a:t>
-            </a:r>
-            <a:endParaRPr lang="en-US" sz="1200" dirty="0"/>
-          </a:p>
-        </p:txBody>
-      </p:sp>
-      <p:sp>
-        <p:nvSpPr>
-          <p:cNvPr id="28" name="Marketing Studio entry"/>
-          <p:cNvSpPr txBox="1"/>
-          <p:nvPr/>
-        </p:nvSpPr>
-        <p:spPr>
-          <a:xfrm>
-            <a:off x="7278624" y="2322576"/>
-            <a:ext cx="1389888" cy="603504"/>
+            <a:endParaRPr lang="en-US" sz="1050" dirty="0"/>
+          </a:p>
+        </p:txBody>
+      </p:sp>
+      <p:sp>
+        <p:nvSpPr>
+          <p:cNvPr id="36" name="Praxis line"/>
+          <p:cNvSpPr txBox="1"/>
+          <p:nvPr/>
+        </p:nvSpPr>
+        <p:spPr>
+          <a:xfrm>
+            <a:off x="5897880" y="3995928"/>
+            <a:ext cx="2788920" cy="365760"/>
           </a:xfrm>
           <a:prstGeom prst="rect">
             <a:avLst/>
@@ -2297,99 +2444,72 @@
               <a:buNone/>
             </a:pPr>
             <a:r>
-              <a:rPr lang="en-US" sz="1200" b="1" dirty="0">
+              <a:rPr lang="en-US" sz="950" dirty="0">
                 <a:solidFill>
                   <a:schemeClr val="tx1"/>
                 </a:solidFill>
               </a:rPr>
+              <a:t>Lets leadership compare AI ideas on impact, risk and effort, and track the pilots.</a:t>
+            </a:r>
+            <a:endParaRPr lang="en-US" sz="950" dirty="0"/>
+          </a:p>
+        </p:txBody>
+      </p:sp>
+      <p:sp>
+        <p:nvSpPr>
+          <p:cNvPr id="37" name="Marketing Studio name"/>
+          <p:cNvSpPr txBox="1"/>
+          <p:nvPr/>
+        </p:nvSpPr>
+        <p:spPr>
+          <a:xfrm>
+            <a:off x="4663440" y="4379976"/>
+            <a:ext cx="1188720" cy="365760"/>
+          </a:xfrm>
+          <a:prstGeom prst="rect">
+            <a:avLst/>
+          </a:prstGeom>
+          <a:noFill/>
+          <a:ln/>
+        </p:spPr>
+        <p:txBody>
+          <a:bodyPr wrap="square" lIns="0" tIns="0" rIns="0" bIns="0" rtlCol="0" anchor="t"/>
+          <a:lstStyle/>
+          <a:p>
+            <a:pPr indent="0" marL="0">
+              <a:buNone/>
+            </a:pPr>
+            <a:r>
+              <a:rPr lang="en-US" sz="1050" b="1" dirty="0">
+                <a:solidFill>
+                  <a:schemeClr val="accent2"/>
+                </a:solidFill>
+              </a:rPr>
               <a:t>Marketing Studio</a:t>
             </a:r>
-            <a:endParaRPr lang="en-US" sz="1200" dirty="0"/>
-          </a:p>
-          <a:p>
-            <a:pPr indent="0" marL="0">
-              <a:buNone/>
-            </a:pPr>
-            <a:r>
-              <a:rPr lang="en-US" sz="1000" dirty="0">
-                <a:solidFill>
-                  <a:schemeClr val="tx2"/>
-                </a:solidFill>
-              </a:rPr>
-              <a:t>Bios, alerts and RFPs, checked</a:t>
-            </a:r>
-            <a:endParaRPr lang="en-US" sz="1200" dirty="0"/>
-          </a:p>
-        </p:txBody>
-      </p:sp>
-      <p:sp>
-        <p:nvSpPr>
-          <p:cNvPr id="29" name="icon square"/>
-          <p:cNvSpPr/>
-          <p:nvPr/>
-        </p:nvSpPr>
-        <p:spPr>
-          <a:xfrm>
-            <a:off x="457200" y="4462272"/>
-            <a:ext cx="274320" cy="274320"/>
-          </a:xfrm>
-          <a:prstGeom prst="rect">
-            <a:avLst/>
-          </a:prstGeom>
-          <a:solidFill>
-            <a:schemeClr val="accent1"/>
-          </a:solidFill>
-          <a:ln w="12700">
-            <a:solidFill>
-              <a:schemeClr val="accent1"/>
-            </a:solidFill>
-            <a:prstDash val="solid"/>
-          </a:ln>
-        </p:spPr>
-      </p:sp>
-      <p:pic>
-        <p:nvPicPr>
-          <p:cNvPr id="30" name="lock icon" descr="preencoded.png">    </p:cNvPr>
-          <p:cNvPicPr>
-            <a:picLocks noChangeAspect="1"/>
-          </p:cNvPicPr>
-          <p:nvPr/>
-        </p:nvPicPr>
-        <p:blipFill>
-          <a:blip r:embed="rId1"/>
-          <a:stretch>
-            <a:fillRect/>
-          </a:stretch>
-        </p:blipFill>
-        <p:spPr>
-          <a:xfrm>
-            <a:off x="517550" y="4522622"/>
-            <a:ext cx="153619" cy="153619"/>
-          </a:xfrm>
-          <a:prstGeom prst="rect">
-            <a:avLst/>
-          </a:prstGeom>
-        </p:spPr>
-      </p:pic>
-      <p:sp>
-        <p:nvSpPr>
-          <p:cNvPr id="31" name="IT strip lock"/>
-          <p:cNvSpPr txBox="1"/>
-          <p:nvPr/>
-        </p:nvSpPr>
-        <p:spPr>
-          <a:xfrm>
-            <a:off x="786384" y="4425696"/>
-            <a:ext cx="1353312" cy="365760"/>
-          </a:xfrm>
-          <a:prstGeom prst="rect">
-            <a:avLst/>
-          </a:prstGeom>
-          <a:noFill/>
-          <a:ln/>
-        </p:spPr>
-        <p:txBody>
-          <a:bodyPr wrap="square" lIns="0" tIns="0" rIns="0" bIns="0" rtlCol="0" anchor="ctr"/>
+            <a:endParaRPr lang="en-US" sz="1050" dirty="0"/>
+          </a:p>
+        </p:txBody>
+      </p:sp>
+      <p:sp>
+        <p:nvSpPr>
+          <p:cNvPr id="38" name="Marketing Studio line"/>
+          <p:cNvSpPr txBox="1"/>
+          <p:nvPr/>
+        </p:nvSpPr>
+        <p:spPr>
+          <a:xfrm>
+            <a:off x="5897880" y="4379976"/>
+            <a:ext cx="2788920" cy="365760"/>
+          </a:xfrm>
+          <a:prstGeom prst="rect">
+            <a:avLst/>
+          </a:prstGeom>
+          <a:noFill/>
+          <a:ln/>
+        </p:spPr>
+        <p:txBody>
+          <a:bodyPr wrap="square" lIns="0" tIns="0" rIns="0" bIns="0" rtlCol="0" anchor="t"/>
           <a:lstStyle/>
           <a:p>
             <a:pPr indent="0" marL="0">
@@ -2398,350 +2518,10 @@
             <a:r>
               <a:rPr lang="en-US" sz="950" dirty="0">
                 <a:solidFill>
-                  <a:schemeClr val="tx2"/>
-                </a:solidFill>
-              </a:rPr>
-              <a:t>Data stays on firm hardware</a:t>
-            </a:r>
-            <a:endParaRPr lang="en-US" sz="950" dirty="0"/>
-          </a:p>
-        </p:txBody>
-      </p:sp>
-      <p:sp>
-        <p:nvSpPr>
-          <p:cNvPr id="32" name="icon square"/>
-          <p:cNvSpPr/>
-          <p:nvPr/>
-        </p:nvSpPr>
-        <p:spPr>
-          <a:xfrm>
-            <a:off x="2157984" y="4462272"/>
-            <a:ext cx="274320" cy="274320"/>
-          </a:xfrm>
-          <a:prstGeom prst="rect">
-            <a:avLst/>
-          </a:prstGeom>
-          <a:solidFill>
-            <a:schemeClr val="accent1"/>
-          </a:solidFill>
-          <a:ln w="12700">
-            <a:solidFill>
-              <a:schemeClr val="accent1"/>
-            </a:solidFill>
-            <a:prstDash val="solid"/>
-          </a:ln>
-        </p:spPr>
-      </p:sp>
-      <p:pic>
-        <p:nvPicPr>
-          <p:cNvPr id="33" name="users icon" descr="preencoded.png">    </p:cNvPr>
-          <p:cNvPicPr>
-            <a:picLocks noChangeAspect="1"/>
-          </p:cNvPicPr>
-          <p:nvPr/>
-        </p:nvPicPr>
-        <p:blipFill>
-          <a:blip r:embed="rId2"/>
-          <a:stretch>
-            <a:fillRect/>
-          </a:stretch>
-        </p:blipFill>
-        <p:spPr>
-          <a:xfrm>
-            <a:off x="2218334" y="4522622"/>
-            <a:ext cx="153619" cy="153619"/>
-          </a:xfrm>
-          <a:prstGeom prst="rect">
-            <a:avLst/>
-          </a:prstGeom>
-        </p:spPr>
-      </p:pic>
-      <p:sp>
-        <p:nvSpPr>
-          <p:cNvPr id="34" name="IT strip users"/>
-          <p:cNvSpPr txBox="1"/>
-          <p:nvPr/>
-        </p:nvSpPr>
-        <p:spPr>
-          <a:xfrm>
-            <a:off x="2487168" y="4425696"/>
-            <a:ext cx="1353312" cy="365760"/>
-          </a:xfrm>
-          <a:prstGeom prst="rect">
-            <a:avLst/>
-          </a:prstGeom>
-          <a:noFill/>
-          <a:ln/>
-        </p:spPr>
-        <p:txBody>
-          <a:bodyPr wrap="square" lIns="0" tIns="0" rIns="0" bIns="0" rtlCol="0" anchor="ctr"/>
-          <a:lstStyle/>
-          <a:p>
-            <a:pPr indent="0" marL="0">
-              <a:buNone/>
-            </a:pPr>
-            <a:r>
-              <a:rPr lang="en-US" sz="950" dirty="0">
-                <a:solidFill>
-                  <a:schemeClr val="tx2"/>
-                </a:solidFill>
-              </a:rPr>
-              <a:t>Sign-on and roles</a:t>
-            </a:r>
-            <a:endParaRPr lang="en-US" sz="950" dirty="0"/>
-          </a:p>
-        </p:txBody>
-      </p:sp>
-      <p:sp>
-        <p:nvSpPr>
-          <p:cNvPr id="35" name="icon square"/>
-          <p:cNvSpPr/>
-          <p:nvPr/>
-        </p:nvSpPr>
-        <p:spPr>
-          <a:xfrm>
-            <a:off x="3858768" y="4462272"/>
-            <a:ext cx="274320" cy="274320"/>
-          </a:xfrm>
-          <a:prstGeom prst="rect">
-            <a:avLst/>
-          </a:prstGeom>
-          <a:solidFill>
-            <a:schemeClr val="accent1"/>
-          </a:solidFill>
-          <a:ln w="12700">
-            <a:solidFill>
-              <a:schemeClr val="accent1"/>
-            </a:solidFill>
-            <a:prstDash val="solid"/>
-          </a:ln>
-        </p:spPr>
-      </p:sp>
-      <p:pic>
-        <p:nvPicPr>
-          <p:cNvPr id="36" name="shield icon" descr="preencoded.png">    </p:cNvPr>
-          <p:cNvPicPr>
-            <a:picLocks noChangeAspect="1"/>
-          </p:cNvPicPr>
-          <p:nvPr/>
-        </p:nvPicPr>
-        <p:blipFill>
-          <a:blip r:embed="rId3"/>
-          <a:stretch>
-            <a:fillRect/>
-          </a:stretch>
-        </p:blipFill>
-        <p:spPr>
-          <a:xfrm>
-            <a:off x="3919118" y="4522622"/>
-            <a:ext cx="153619" cy="153619"/>
-          </a:xfrm>
-          <a:prstGeom prst="rect">
-            <a:avLst/>
-          </a:prstGeom>
-        </p:spPr>
-      </p:pic>
-      <p:sp>
-        <p:nvSpPr>
-          <p:cNvPr id="37" name="IT strip shield"/>
-          <p:cNvSpPr txBox="1"/>
-          <p:nvPr/>
-        </p:nvSpPr>
-        <p:spPr>
-          <a:xfrm>
-            <a:off x="4187952" y="4425696"/>
-            <a:ext cx="1353312" cy="365760"/>
-          </a:xfrm>
-          <a:prstGeom prst="rect">
-            <a:avLst/>
-          </a:prstGeom>
-          <a:noFill/>
-          <a:ln/>
-        </p:spPr>
-        <p:txBody>
-          <a:bodyPr wrap="square" lIns="0" tIns="0" rIns="0" bIns="0" rtlCol="0" anchor="ctr"/>
-          <a:lstStyle/>
-          <a:p>
-            <a:pPr indent="0" marL="0">
-              <a:buNone/>
-            </a:pPr>
-            <a:r>
-              <a:rPr lang="en-US" sz="950" dirty="0">
-                <a:solidFill>
-                  <a:schemeClr val="tx2"/>
-                </a:solidFill>
-              </a:rPr>
-              <a:t>Ethical walls</a:t>
-            </a:r>
-            <a:endParaRPr lang="en-US" sz="950" dirty="0"/>
-          </a:p>
-        </p:txBody>
-      </p:sp>
-      <p:sp>
-        <p:nvSpPr>
-          <p:cNvPr id="38" name="icon square"/>
-          <p:cNvSpPr/>
-          <p:nvPr/>
-        </p:nvSpPr>
-        <p:spPr>
-          <a:xfrm>
-            <a:off x="5559552" y="4462272"/>
-            <a:ext cx="274320" cy="274320"/>
-          </a:xfrm>
-          <a:prstGeom prst="rect">
-            <a:avLst/>
-          </a:prstGeom>
-          <a:solidFill>
-            <a:schemeClr val="accent1"/>
-          </a:solidFill>
-          <a:ln w="12700">
-            <a:solidFill>
-              <a:schemeClr val="accent1"/>
-            </a:solidFill>
-            <a:prstDash val="solid"/>
-          </a:ln>
-        </p:spPr>
-      </p:sp>
-      <p:pic>
-        <p:nvPicPr>
-          <p:cNvPr id="39" name="list icon" descr="preencoded.png">    </p:cNvPr>
-          <p:cNvPicPr>
-            <a:picLocks noChangeAspect="1"/>
-          </p:cNvPicPr>
-          <p:nvPr/>
-        </p:nvPicPr>
-        <p:blipFill>
-          <a:blip r:embed="rId4"/>
-          <a:stretch>
-            <a:fillRect/>
-          </a:stretch>
-        </p:blipFill>
-        <p:spPr>
-          <a:xfrm>
-            <a:off x="5619902" y="4522622"/>
-            <a:ext cx="153619" cy="153619"/>
-          </a:xfrm>
-          <a:prstGeom prst="rect">
-            <a:avLst/>
-          </a:prstGeom>
-        </p:spPr>
-      </p:pic>
-      <p:sp>
-        <p:nvSpPr>
-          <p:cNvPr id="40" name="IT strip list"/>
-          <p:cNvSpPr txBox="1"/>
-          <p:nvPr/>
-        </p:nvSpPr>
-        <p:spPr>
-          <a:xfrm>
-            <a:off x="5888736" y="4425696"/>
-            <a:ext cx="1353312" cy="365760"/>
-          </a:xfrm>
-          <a:prstGeom prst="rect">
-            <a:avLst/>
-          </a:prstGeom>
-          <a:noFill/>
-          <a:ln/>
-        </p:spPr>
-        <p:txBody>
-          <a:bodyPr wrap="square" lIns="0" tIns="0" rIns="0" bIns="0" rtlCol="0" anchor="ctr"/>
-          <a:lstStyle/>
-          <a:p>
-            <a:pPr indent="0" marL="0">
-              <a:buNone/>
-            </a:pPr>
-            <a:r>
-              <a:rPr lang="en-US" sz="950" dirty="0">
-                <a:solidFill>
-                  <a:schemeClr val="tx2"/>
-                </a:solidFill>
-              </a:rPr>
-              <a:t>Audit trail</a:t>
-            </a:r>
-            <a:endParaRPr lang="en-US" sz="950" dirty="0"/>
-          </a:p>
-        </p:txBody>
-      </p:sp>
-      <p:sp>
-        <p:nvSpPr>
-          <p:cNvPr id="41" name="icon square"/>
-          <p:cNvSpPr/>
-          <p:nvPr/>
-        </p:nvSpPr>
-        <p:spPr>
-          <a:xfrm>
-            <a:off x="7260336" y="4462272"/>
-            <a:ext cx="274320" cy="274320"/>
-          </a:xfrm>
-          <a:prstGeom prst="rect">
-            <a:avLst/>
-          </a:prstGeom>
-          <a:solidFill>
-            <a:schemeClr val="accent1"/>
-          </a:solidFill>
-          <a:ln w="12700">
-            <a:solidFill>
-              <a:schemeClr val="accent1"/>
-            </a:solidFill>
-            <a:prstDash val="solid"/>
-          </a:ln>
-        </p:spPr>
-      </p:sp>
-      <p:pic>
-        <p:nvPicPr>
-          <p:cNvPr id="42" name="check icon" descr="preencoded.png">    </p:cNvPr>
-          <p:cNvPicPr>
-            <a:picLocks noChangeAspect="1"/>
-          </p:cNvPicPr>
-          <p:nvPr/>
-        </p:nvPicPr>
-        <p:blipFill>
-          <a:blip r:embed="rId5"/>
-          <a:stretch>
-            <a:fillRect/>
-          </a:stretch>
-        </p:blipFill>
-        <p:spPr>
-          <a:xfrm>
-            <a:off x="7320686" y="4522622"/>
-            <a:ext cx="153619" cy="153619"/>
-          </a:xfrm>
-          <a:prstGeom prst="rect">
-            <a:avLst/>
-          </a:prstGeom>
-        </p:spPr>
-      </p:pic>
-      <p:sp>
-        <p:nvSpPr>
-          <p:cNvPr id="43" name="IT strip check"/>
-          <p:cNvSpPr txBox="1"/>
-          <p:nvPr/>
-        </p:nvSpPr>
-        <p:spPr>
-          <a:xfrm>
-            <a:off x="7589520" y="4425696"/>
-            <a:ext cx="1353312" cy="365760"/>
-          </a:xfrm>
-          <a:prstGeom prst="rect">
-            <a:avLst/>
-          </a:prstGeom>
-          <a:noFill/>
-          <a:ln/>
-        </p:spPr>
-        <p:txBody>
-          <a:bodyPr wrap="square" lIns="0" tIns="0" rIns="0" bIns="0" rtlCol="0" anchor="ctr"/>
-          <a:lstStyle/>
-          <a:p>
-            <a:pPr indent="0" marL="0">
-              <a:buNone/>
-            </a:pPr>
-            <a:r>
-              <a:rPr lang="en-US" sz="950" dirty="0">
-                <a:solidFill>
-                  <a:schemeClr val="tx2"/>
-                </a:solidFill>
-              </a:rPr>
-              <a:t>Tests and docs for IT</a:t>
+                  <a:schemeClr val="tx1"/>
+                </a:solidFill>
+              </a:rPr>
+              <a:t>Drafts bios, client alerts and RFP responses in the firm's voice, then checks the rules.</a:t>
             </a:r>
             <a:endParaRPr lang="en-US" sz="950" dirty="0"/>
           </a:p>
@@ -2849,7 +2629,7 @@
                   <a:srgbClr val="2D4459"/>
                 </a:solidFill>
               </a:rPr>
-              <a:t>Four quick wins on what we already license</a:t>
+              <a:t>Three of them could be used right away</a:t>
             </a:r>
             <a:endParaRPr lang="en-US" sz="2600" dirty="0"/>
           </a:p>
@@ -2887,7 +2667,7 @@
                   <a:schemeClr val="tx2"/>
                 </a:solidFill>
               </a:rPr>
-              <a:t>Ideas, not a plan. Each uses data the firm already holds, and a person reviews every output.</a:t>
+              <a:t>None needs a connection to firm systems. Each runs in a browser on an approved account, and a person reviews every output.</a:t>
             </a:r>
             <a:endParaRPr lang="en-US" sz="1300" dirty="0"/>
           </a:p>
@@ -2895,14 +2675,14 @@
       </p:sp>
       <p:sp>
         <p:nvSpPr>
-          <p:cNvPr id="4" name="Client guidelines brief card"/>
+          <p:cNvPr id="4" name="Guideline Guard card"/>
           <p:cNvSpPr/>
           <p:nvPr/>
         </p:nvSpPr>
         <p:spPr>
           <a:xfrm>
-            <a:off x="457200" y="1234440"/>
-            <a:ext cx="4023360" cy="1645920"/>
+            <a:off x="457200" y="1280160"/>
+            <a:ext cx="2651760" cy="3383280"/>
           </a:xfrm>
           <a:prstGeom prst="rect">
             <a:avLst/>
@@ -2926,7 +2706,7 @@
         </p:nvSpPr>
         <p:spPr>
           <a:xfrm>
-            <a:off x="594360" y="1371600"/>
+            <a:off x="594360" y="1417320"/>
             <a:ext cx="384048" cy="384048"/>
           </a:xfrm>
           <a:prstGeom prst="rect">
@@ -2945,7 +2725,7 @@
       </p:sp>
       <p:pic>
         <p:nvPicPr>
-          <p:cNvPr id="6" name="book icon" descr="preencoded.png">    </p:cNvPr>
+          <p:cNvPr id="6" name="dollar icon" descr="preencoded.png">    </p:cNvPr>
           <p:cNvPicPr>
             <a:picLocks noChangeAspect="1"/>
           </p:cNvPicPr>
@@ -2959,7 +2739,7 @@
         </p:blipFill>
         <p:spPr>
           <a:xfrm>
-            <a:off x="678851" y="1456091"/>
+            <a:off x="678851" y="1501811"/>
             <a:ext cx="215067" cy="215067"/>
           </a:xfrm>
           <a:prstGeom prst="rect">
@@ -2969,14 +2749,14 @@
       </p:pic>
       <p:sp>
         <p:nvSpPr>
-          <p:cNvPr id="7" name="Client guidelines brief name"/>
-          <p:cNvSpPr txBox="1"/>
-          <p:nvPr/>
-        </p:nvSpPr>
-        <p:spPr>
-          <a:xfrm>
-            <a:off x="1097280" y="1344168"/>
-            <a:ext cx="3246120" cy="438912"/>
+          <p:cNvPr id="7" name="Guideline Guard name"/>
+          <p:cNvSpPr txBox="1"/>
+          <p:nvPr/>
+        </p:nvSpPr>
+        <p:spPr>
+          <a:xfrm>
+            <a:off x="1097280" y="1389888"/>
+            <a:ext cx="1874520" cy="438912"/>
           </a:xfrm>
           <a:prstGeom prst="rect">
             <a:avLst/>
@@ -2997,7 +2777,7 @@
                   <a:schemeClr val="tx1"/>
                 </a:solidFill>
               </a:rPr>
-              <a:t>Client guidelines brief</a:t>
+              <a:t>Guideline Guard</a:t>
             </a:r>
             <a:endParaRPr lang="en-US" sz="1400" dirty="0"/>
           </a:p>
@@ -3005,14 +2785,14 @@
       </p:sp>
       <p:sp>
         <p:nvSpPr>
-          <p:cNvPr id="8" name="Client guidelines brief what"/>
-          <p:cNvSpPr txBox="1"/>
-          <p:nvPr/>
-        </p:nvSpPr>
-        <p:spPr>
-          <a:xfrm>
-            <a:off x="594360" y="1892808"/>
-            <a:ext cx="3749040" cy="868680"/>
+          <p:cNvPr id="8" name="Guideline Guard what"/>
+          <p:cNvSpPr txBox="1"/>
+          <p:nvPr/>
+        </p:nvSpPr>
+        <p:spPr>
+          <a:xfrm>
+            <a:off x="594360" y="1965960"/>
+            <a:ext cx="2377440" cy="1143000"/>
           </a:xfrm>
           <a:prstGeom prst="rect">
             <a:avLst/>
@@ -3028,27 +2808,121 @@
               <a:buNone/>
             </a:pPr>
             <a:r>
-              <a:rPr lang="en-US" sz="1300" dirty="0">
+              <a:rPr lang="en-US" sz="1150" dirty="0">
                 <a:solidFill>
                   <a:schemeClr val="tx1"/>
                 </a:solidFill>
               </a:rPr>
-              <a:t>Each client's billing rules on one page, and entries that break them flagged before the invoice goes out.</a:t>
-            </a:r>
-            <a:endParaRPr lang="en-US" sz="1300" dirty="0"/>
-          </a:p>
-        </p:txBody>
-      </p:sp>
-      <p:sp>
-        <p:nvSpPr>
-          <p:cNvPr id="9" name="Pre-bill reviewer card"/>
+              <a:t>Checks each prebill against that client's outside counsel guidelines, quotes the rule it applies and proposes the fix.</a:t>
+            </a:r>
+            <a:endParaRPr lang="en-US" sz="1150" dirty="0"/>
+          </a:p>
+        </p:txBody>
+      </p:sp>
+      <p:sp>
+        <p:nvSpPr>
+          <p:cNvPr id="9" name="Guideline Guard helps"/>
+          <p:cNvSpPr txBox="1"/>
+          <p:nvPr/>
+        </p:nvSpPr>
+        <p:spPr>
+          <a:xfrm>
+            <a:off x="594360" y="3154680"/>
+            <a:ext cx="2377440" cy="731520"/>
+          </a:xfrm>
+          <a:prstGeom prst="rect">
+            <a:avLst/>
+          </a:prstGeom>
+          <a:noFill/>
+          <a:ln/>
+        </p:spPr>
+        <p:txBody>
+          <a:bodyPr wrap="square" lIns="0" tIns="0" rIns="0" bIns="0" rtlCol="0" anchor="t"/>
+          <a:lstStyle/>
+          <a:p>
+            <a:pPr indent="0" marL="0">
+              <a:buNone/>
+            </a:pPr>
+            <a:r>
+              <a:rPr lang="en-US" sz="1050" b="1" dirty="0">
+                <a:solidFill>
+                  <a:schemeClr val="accent5"/>
+                </a:solidFill>
+              </a:rPr>
+              <a:t>Helps: </a:t>
+            </a:r>
+            <a:pPr indent="0" marL="0">
+              <a:buNone/>
+            </a:pPr>
+            <a:r>
+              <a:rPr lang="en-US" sz="1050" dirty="0">
+                <a:solidFill>
+                  <a:schemeClr val="tx1"/>
+                </a:solidFill>
+              </a:rPr>
+              <a:t>Billing and responsible partners. Fewer write-offs and rejected invoices.</a:t>
+            </a:r>
+            <a:endParaRPr lang="en-US" sz="1050" dirty="0"/>
+          </a:p>
+        </p:txBody>
+      </p:sp>
+      <p:sp>
+        <p:nvSpPr>
+          <p:cNvPr id="10" name="Guideline Guard needs"/>
+          <p:cNvSpPr txBox="1"/>
+          <p:nvPr/>
+        </p:nvSpPr>
+        <p:spPr>
+          <a:xfrm>
+            <a:off x="594360" y="3931920"/>
+            <a:ext cx="2377440" cy="640080"/>
+          </a:xfrm>
+          <a:prstGeom prst="rect">
+            <a:avLst/>
+          </a:prstGeom>
+          <a:noFill/>
+          <a:ln/>
+        </p:spPr>
+        <p:txBody>
+          <a:bodyPr wrap="square" lIns="0" tIns="0" rIns="0" bIns="0" rtlCol="0" anchor="t"/>
+          <a:lstStyle/>
+          <a:p>
+            <a:pPr indent="0" marL="0">
+              <a:buNone/>
+            </a:pPr>
+            <a:r>
+              <a:rPr lang="en-US" sz="1050" b="1" dirty="0">
+                <a:solidFill>
+                  <a:schemeClr val="accent5"/>
+                </a:solidFill>
+              </a:rPr>
+              <a:t>To run it here: </a:t>
+            </a:r>
+            <a:pPr indent="0" marL="0">
+              <a:buNone/>
+            </a:pPr>
+            <a:r>
+              <a:rPr lang="en-US" sz="1050" dirty="0">
+                <a:solidFill>
+                  <a:schemeClr val="tx2"/>
+                </a:solidFill>
+              </a:rPr>
+              <a:t>The client's guidelines and the prebill.</a:t>
+            </a:r>
+            <a:endParaRPr lang="en-US" sz="1050" dirty="0"/>
+          </a:p>
+        </p:txBody>
+      </p:sp>
+      <p:sp>
+        <p:nvSpPr>
+          <p:cNvPr id="11" name="Party Finder card"/>
           <p:cNvSpPr/>
           <p:nvPr/>
         </p:nvSpPr>
         <p:spPr>
           <a:xfrm>
-            <a:off x="4663440" y="1234440"/>
-            <a:ext cx="4023360" cy="1645920"/>
+            <a:off x="3291840" y="1280160"/>
+            <a:ext cx="2651760" cy="3383280"/>
           </a:xfrm>
           <a:prstGeom prst="rect">
             <a:avLst/>
@@ -3066,13 +2940,13 @@
       </p:sp>
       <p:sp>
         <p:nvSpPr>
-          <p:cNvPr id="10" name="icon square"/>
+          <p:cNvPr id="12" name="icon square"/>
           <p:cNvSpPr/>
           <p:nvPr/>
         </p:nvSpPr>
         <p:spPr>
           <a:xfrm>
-            <a:off x="4800600" y="1371600"/>
+            <a:off x="3429000" y="1417320"/>
             <a:ext cx="384048" cy="384048"/>
           </a:xfrm>
           <a:prstGeom prst="rect">
@@ -3091,7 +2965,7 @@
       </p:sp>
       <p:pic>
         <p:nvPicPr>
-          <p:cNvPr id="11" name="dollar icon" descr="preencoded.png">    </p:cNvPr>
+          <p:cNvPr id="13" name="users icon" descr="preencoded.png">    </p:cNvPr>
           <p:cNvPicPr>
             <a:picLocks noChangeAspect="1"/>
           </p:cNvPicPr>
@@ -3105,7 +2979,7 @@
         </p:blipFill>
         <p:spPr>
           <a:xfrm>
-            <a:off x="4885091" y="1456091"/>
+            <a:off x="3513491" y="1501811"/>
             <a:ext cx="215067" cy="215067"/>
           </a:xfrm>
           <a:prstGeom prst="rect">
@@ -3115,14 +2989,14 @@
       </p:pic>
       <p:sp>
         <p:nvSpPr>
-          <p:cNvPr id="12" name="Pre-bill reviewer name"/>
-          <p:cNvSpPr txBox="1"/>
-          <p:nvPr/>
-        </p:nvSpPr>
-        <p:spPr>
-          <a:xfrm>
-            <a:off x="5303520" y="1344168"/>
-            <a:ext cx="3246120" cy="438912"/>
+          <p:cNvPr id="14" name="Party Finder name"/>
+          <p:cNvSpPr txBox="1"/>
+          <p:nvPr/>
+        </p:nvSpPr>
+        <p:spPr>
+          <a:xfrm>
+            <a:off x="3931920" y="1389888"/>
+            <a:ext cx="1874520" cy="438912"/>
           </a:xfrm>
           <a:prstGeom prst="rect">
             <a:avLst/>
@@ -3143,7 +3017,7 @@
                   <a:schemeClr val="tx1"/>
                 </a:solidFill>
               </a:rPr>
-              <a:t>Pre-bill reviewer</a:t>
+              <a:t>Party Finder</a:t>
             </a:r>
             <a:endParaRPr lang="en-US" sz="1400" dirty="0"/>
           </a:p>
@@ -3151,14 +3025,14 @@
       </p:sp>
       <p:sp>
         <p:nvSpPr>
-          <p:cNvPr id="13" name="Pre-bill reviewer what"/>
-          <p:cNvSpPr txBox="1"/>
-          <p:nvPr/>
-        </p:nvSpPr>
-        <p:spPr>
-          <a:xfrm>
-            <a:off x="4800600" y="1892808"/>
-            <a:ext cx="3749040" cy="868680"/>
+          <p:cNvPr id="15" name="Party Finder what"/>
+          <p:cNvSpPr txBox="1"/>
+          <p:nvPr/>
+        </p:nvSpPr>
+        <p:spPr>
+          <a:xfrm>
+            <a:off x="3429000" y="1965960"/>
+            <a:ext cx="2377440" cy="1143000"/>
           </a:xfrm>
           <a:prstGeom prst="rect">
             <a:avLst/>
@@ -3174,27 +3048,121 @@
               <a:buNone/>
             </a:pPr>
             <a:r>
-              <a:rPr lang="en-US" sz="1300" dirty="0">
+              <a:rPr lang="en-US" sz="1150" dirty="0">
                 <a:solidFill>
                   <a:schemeClr val="tx1"/>
                 </a:solidFill>
               </a:rPr>
-              <a:t>Flags vague or block-billed entries a client would reject, and suggests the rewrite.</a:t>
-            </a:r>
-            <a:endParaRPr lang="en-US" sz="1300" dirty="0"/>
-          </a:p>
-        </p:txBody>
-      </p:sp>
-      <p:sp>
-        <p:nvSpPr>
-          <p:cNvPr id="14" name="Matter handoff memo card"/>
+              <a:t>Reads the complaint, deal documents or engagement request and lists every name to search, each tied to the sentence it came from.</a:t>
+            </a:r>
+            <a:endParaRPr lang="en-US" sz="1150" dirty="0"/>
+          </a:p>
+        </p:txBody>
+      </p:sp>
+      <p:sp>
+        <p:nvSpPr>
+          <p:cNvPr id="16" name="Party Finder helps"/>
+          <p:cNvSpPr txBox="1"/>
+          <p:nvPr/>
+        </p:nvSpPr>
+        <p:spPr>
+          <a:xfrm>
+            <a:off x="3429000" y="3154680"/>
+            <a:ext cx="2377440" cy="731520"/>
+          </a:xfrm>
+          <a:prstGeom prst="rect">
+            <a:avLst/>
+          </a:prstGeom>
+          <a:noFill/>
+          <a:ln/>
+        </p:spPr>
+        <p:txBody>
+          <a:bodyPr wrap="square" lIns="0" tIns="0" rIns="0" bIns="0" rtlCol="0" anchor="t"/>
+          <a:lstStyle/>
+          <a:p>
+            <a:pPr indent="0" marL="0">
+              <a:buNone/>
+            </a:pPr>
+            <a:r>
+              <a:rPr lang="en-US" sz="1050" b="1" dirty="0">
+                <a:solidFill>
+                  <a:schemeClr val="accent5"/>
+                </a:solidFill>
+              </a:rPr>
+              <a:t>Helps: </a:t>
+            </a:r>
+            <a:pPr indent="0" marL="0">
+              <a:buNone/>
+            </a:pPr>
+            <a:r>
+              <a:rPr lang="en-US" sz="1050" dirty="0">
+                <a:solidFill>
+                  <a:schemeClr val="tx1"/>
+                </a:solidFill>
+              </a:rPr>
+              <a:t>Intake and conflicts staff. Nothing missed that an intake form would not catch.</a:t>
+            </a:r>
+            <a:endParaRPr lang="en-US" sz="1050" dirty="0"/>
+          </a:p>
+        </p:txBody>
+      </p:sp>
+      <p:sp>
+        <p:nvSpPr>
+          <p:cNvPr id="17" name="Party Finder needs"/>
+          <p:cNvSpPr txBox="1"/>
+          <p:nvPr/>
+        </p:nvSpPr>
+        <p:spPr>
+          <a:xfrm>
+            <a:off x="3429000" y="3931920"/>
+            <a:ext cx="2377440" cy="640080"/>
+          </a:xfrm>
+          <a:prstGeom prst="rect">
+            <a:avLst/>
+          </a:prstGeom>
+          <a:noFill/>
+          <a:ln/>
+        </p:spPr>
+        <p:txBody>
+          <a:bodyPr wrap="square" lIns="0" tIns="0" rIns="0" bIns="0" rtlCol="0" anchor="t"/>
+          <a:lstStyle/>
+          <a:p>
+            <a:pPr indent="0" marL="0">
+              <a:buNone/>
+            </a:pPr>
+            <a:r>
+              <a:rPr lang="en-US" sz="1050" b="1" dirty="0">
+                <a:solidFill>
+                  <a:schemeClr val="accent5"/>
+                </a:solidFill>
+              </a:rPr>
+              <a:t>To run it here: </a:t>
+            </a:r>
+            <a:pPr indent="0" marL="0">
+              <a:buNone/>
+            </a:pPr>
+            <a:r>
+              <a:rPr lang="en-US" sz="1050" dirty="0">
+                <a:solidFill>
+                  <a:schemeClr val="tx2"/>
+                </a:solidFill>
+              </a:rPr>
+              <a:t>The documents. Our conflicts system stays the system of record.</a:t>
+            </a:r>
+            <a:endParaRPr lang="en-US" sz="1050" dirty="0"/>
+          </a:p>
+        </p:txBody>
+      </p:sp>
+      <p:sp>
+        <p:nvSpPr>
+          <p:cNvPr id="18" name="Marketing Studio card"/>
           <p:cNvSpPr/>
           <p:nvPr/>
         </p:nvSpPr>
         <p:spPr>
           <a:xfrm>
-            <a:off x="457200" y="3017520"/>
-            <a:ext cx="4023360" cy="1645920"/>
+            <a:off x="6126480" y="1280160"/>
+            <a:ext cx="2651760" cy="3383280"/>
           </a:xfrm>
           <a:prstGeom prst="rect">
             <a:avLst/>
@@ -3212,13 +3180,13 @@
       </p:sp>
       <p:sp>
         <p:nvSpPr>
-          <p:cNvPr id="15" name="icon square"/>
+          <p:cNvPr id="19" name="icon square"/>
           <p:cNvSpPr/>
           <p:nvPr/>
         </p:nvSpPr>
         <p:spPr>
           <a:xfrm>
-            <a:off x="594360" y="3154680"/>
+            <a:off x="6263640" y="1417320"/>
             <a:ext cx="384048" cy="384048"/>
           </a:xfrm>
           <a:prstGeom prst="rect">
@@ -3237,7 +3205,7 @@
       </p:sp>
       <p:pic>
         <p:nvPicPr>
-          <p:cNvPr id="16" name="repeat icon" descr="preencoded.png">    </p:cNvPr>
+          <p:cNvPr id="20" name="edit icon" descr="preencoded.png">    </p:cNvPr>
           <p:cNvPicPr>
             <a:picLocks noChangeAspect="1"/>
           </p:cNvPicPr>
@@ -3251,7 +3219,7 @@
         </p:blipFill>
         <p:spPr>
           <a:xfrm>
-            <a:off x="678851" y="3239171"/>
+            <a:off x="6348131" y="1501811"/>
             <a:ext cx="215067" cy="215067"/>
           </a:xfrm>
           <a:prstGeom prst="rect">
@@ -3261,14 +3229,14 @@
       </p:pic>
       <p:sp>
         <p:nvSpPr>
-          <p:cNvPr id="17" name="Matter handoff memo name"/>
-          <p:cNvSpPr txBox="1"/>
-          <p:nvPr/>
-        </p:nvSpPr>
-        <p:spPr>
-          <a:xfrm>
-            <a:off x="1097280" y="3127248"/>
-            <a:ext cx="3246120" cy="438912"/>
+          <p:cNvPr id="21" name="Marketing Studio name"/>
+          <p:cNvSpPr txBox="1"/>
+          <p:nvPr/>
+        </p:nvSpPr>
+        <p:spPr>
+          <a:xfrm>
+            <a:off x="6766560" y="1389888"/>
+            <a:ext cx="1874520" cy="438912"/>
           </a:xfrm>
           <a:prstGeom prst="rect">
             <a:avLst/>
@@ -3289,7 +3257,7 @@
                   <a:schemeClr val="tx1"/>
                 </a:solidFill>
               </a:rPr>
-              <a:t>Matter handoff memo</a:t>
+              <a:t>Marketing Studio</a:t>
             </a:r>
             <a:endParaRPr lang="en-US" sz="1400" dirty="0"/>
           </a:p>
@@ -3297,14 +3265,14 @@
       </p:sp>
       <p:sp>
         <p:nvSpPr>
-          <p:cNvPr id="18" name="Matter handoff memo what"/>
-          <p:cNvSpPr txBox="1"/>
-          <p:nvPr/>
-        </p:nvSpPr>
-        <p:spPr>
-          <a:xfrm>
-            <a:off x="594360" y="3675888"/>
-            <a:ext cx="3749040" cy="868680"/>
+          <p:cNvPr id="22" name="Marketing Studio what"/>
+          <p:cNvSpPr txBox="1"/>
+          <p:nvPr/>
+        </p:nvSpPr>
+        <p:spPr>
+          <a:xfrm>
+            <a:off x="6263640" y="1965960"/>
+            <a:ext cx="2377440" cy="1143000"/>
           </a:xfrm>
           <a:prstGeom prst="rect">
             <a:avLst/>
@@ -3320,137 +3288,74 @@
               <a:buNone/>
             </a:pPr>
             <a:r>
-              <a:rPr lang="en-US" sz="1300" dirty="0">
+              <a:rPr lang="en-US" sz="1150" dirty="0">
                 <a:solidFill>
                   <a:schemeClr val="tx1"/>
                 </a:solidFill>
               </a:rPr>
-              <a:t>A "state of the matter" brief from the emails and documents when someone rotates off or retires.</a:t>
-            </a:r>
-            <a:endParaRPr lang="en-US" sz="1300" dirty="0"/>
-          </a:p>
-        </p:txBody>
-      </p:sp>
-      <p:sp>
-        <p:nvSpPr>
-          <p:cNvPr id="19" name="Drafting from our own precedents card"/>
-          <p:cNvSpPr/>
-          <p:nvPr/>
-        </p:nvSpPr>
-        <p:spPr>
-          <a:xfrm>
-            <a:off x="4663440" y="3017520"/>
-            <a:ext cx="4023360" cy="1645920"/>
-          </a:xfrm>
-          <a:prstGeom prst="rect">
-            <a:avLst/>
-          </a:prstGeom>
-          <a:solidFill>
-            <a:schemeClr val="bg2"/>
-          </a:solidFill>
-          <a:ln w="12700">
-            <a:solidFill>
-              <a:schemeClr val="bg2"/>
-            </a:solidFill>
-            <a:prstDash val="solid"/>
-          </a:ln>
-        </p:spPr>
-      </p:sp>
-      <p:sp>
-        <p:nvSpPr>
-          <p:cNvPr id="20" name="icon square"/>
-          <p:cNvSpPr/>
-          <p:nvPr/>
-        </p:nvSpPr>
-        <p:spPr>
-          <a:xfrm>
-            <a:off x="4800600" y="3154680"/>
-            <a:ext cx="384048" cy="384048"/>
-          </a:xfrm>
-          <a:prstGeom prst="rect">
-            <a:avLst/>
-          </a:prstGeom>
-          <a:solidFill>
-            <a:schemeClr val="accent1"/>
-          </a:solidFill>
-          <a:ln w="12700">
-            <a:solidFill>
-              <a:schemeClr val="accent1"/>
-            </a:solidFill>
-            <a:prstDash val="solid"/>
-          </a:ln>
-        </p:spPr>
-      </p:sp>
-      <p:pic>
-        <p:nvPicPr>
-          <p:cNvPr id="21" name="edit icon" descr="preencoded.png">    </p:cNvPr>
-          <p:cNvPicPr>
-            <a:picLocks noChangeAspect="1"/>
-          </p:cNvPicPr>
-          <p:nvPr/>
-        </p:nvPicPr>
-        <p:blipFill>
-          <a:blip r:embed="rId4"/>
-          <a:stretch>
-            <a:fillRect/>
-          </a:stretch>
-        </p:blipFill>
-        <p:spPr>
-          <a:xfrm>
-            <a:off x="4885091" y="3239171"/>
-            <a:ext cx="215067" cy="215067"/>
-          </a:xfrm>
-          <a:prstGeom prst="rect">
-            <a:avLst/>
-          </a:prstGeom>
-        </p:spPr>
-      </p:pic>
-      <p:sp>
-        <p:nvSpPr>
-          <p:cNvPr id="22" name="Drafting from our own precedents name"/>
-          <p:cNvSpPr txBox="1"/>
-          <p:nvPr/>
-        </p:nvSpPr>
-        <p:spPr>
-          <a:xfrm>
-            <a:off x="5303520" y="3127248"/>
-            <a:ext cx="3246120" cy="438912"/>
-          </a:xfrm>
-          <a:prstGeom prst="rect">
-            <a:avLst/>
-          </a:prstGeom>
-          <a:noFill/>
-          <a:ln/>
-        </p:spPr>
-        <p:txBody>
-          <a:bodyPr wrap="square" lIns="0" tIns="0" rIns="0" bIns="0" rtlCol="0" anchor="ctr"/>
-          <a:lstStyle/>
-          <a:p>
-            <a:pPr indent="0" marL="0">
-              <a:buNone/>
-            </a:pPr>
-            <a:r>
-              <a:rPr lang="en-US" sz="1400" b="1" dirty="0">
+              <a:t>Drafts attorney bios, client alerts, RFP responses and award submissions in the firm's voice, then checks each draft against its source and the advertising rules.</a:t>
+            </a:r>
+            <a:endParaRPr lang="en-US" sz="1150" dirty="0"/>
+          </a:p>
+        </p:txBody>
+      </p:sp>
+      <p:sp>
+        <p:nvSpPr>
+          <p:cNvPr id="23" name="Marketing Studio helps"/>
+          <p:cNvSpPr txBox="1"/>
+          <p:nvPr/>
+        </p:nvSpPr>
+        <p:spPr>
+          <a:xfrm>
+            <a:off x="6263640" y="3154680"/>
+            <a:ext cx="2377440" cy="731520"/>
+          </a:xfrm>
+          <a:prstGeom prst="rect">
+            <a:avLst/>
+          </a:prstGeom>
+          <a:noFill/>
+          <a:ln/>
+        </p:spPr>
+        <p:txBody>
+          <a:bodyPr wrap="square" lIns="0" tIns="0" rIns="0" bIns="0" rtlCol="0" anchor="t"/>
+          <a:lstStyle/>
+          <a:p>
+            <a:pPr indent="0" marL="0">
+              <a:buNone/>
+            </a:pPr>
+            <a:r>
+              <a:rPr lang="en-US" sz="1050" b="1" dirty="0">
+                <a:solidFill>
+                  <a:schemeClr val="accent5"/>
+                </a:solidFill>
+              </a:rPr>
+              <a:t>Helps: </a:t>
+            </a:r>
+            <a:pPr indent="0" marL="0">
+              <a:buNone/>
+            </a:pPr>
+            <a:r>
+              <a:rPr lang="en-US" sz="1050" dirty="0">
                 <a:solidFill>
                   <a:schemeClr val="tx1"/>
                 </a:solidFill>
               </a:rPr>
-              <a:t>Drafting from our own precedents</a:t>
-            </a:r>
-            <a:endParaRPr lang="en-US" sz="1400" dirty="0"/>
-          </a:p>
-        </p:txBody>
-      </p:sp>
-      <p:sp>
-        <p:nvSpPr>
-          <p:cNvPr id="23" name="Drafting from our own precedents what"/>
-          <p:cNvSpPr txBox="1"/>
-          <p:nvPr/>
-        </p:nvSpPr>
-        <p:spPr>
-          <a:xfrm>
-            <a:off x="4800600" y="3675888"/>
-            <a:ext cx="3749040" cy="868680"/>
+              <a:t>Marketing and the attorneys they chase for drafts. First drafts in minutes, nothing invented.</a:t>
+            </a:r>
+            <a:endParaRPr lang="en-US" sz="1050" dirty="0"/>
+          </a:p>
+        </p:txBody>
+      </p:sp>
+      <p:sp>
+        <p:nvSpPr>
+          <p:cNvPr id="24" name="Marketing Studio needs"/>
+          <p:cNvSpPr txBox="1"/>
+          <p:nvPr/>
+        </p:nvSpPr>
+        <p:spPr>
+          <a:xfrm>
+            <a:off x="6263640" y="3931920"/>
+            <a:ext cx="2377440" cy="640080"/>
           </a:xfrm>
           <a:prstGeom prst="rect">
             <a:avLst/>
@@ -3466,14 +3371,25 @@
               <a:buNone/>
             </a:pPr>
             <a:r>
-              <a:rPr lang="en-US" sz="1300" dirty="0">
-                <a:solidFill>
-                  <a:schemeClr val="tx1"/>
-                </a:solidFill>
-              </a:rPr>
-              <a:t>First drafts from the firm's best past documents, inside Copilot and the document system.</a:t>
-            </a:r>
-            <a:endParaRPr lang="en-US" sz="1300" dirty="0"/>
+              <a:rPr lang="en-US" sz="1050" b="1" dirty="0">
+                <a:solidFill>
+                  <a:schemeClr val="accent5"/>
+                </a:solidFill>
+              </a:rPr>
+              <a:t>To run it here: </a:t>
+            </a:r>
+            <a:pPr indent="0" marL="0">
+              <a:buNone/>
+            </a:pPr>
+            <a:r>
+              <a:rPr lang="en-US" sz="1050" dirty="0">
+                <a:solidFill>
+                  <a:schemeClr val="tx2"/>
+                </a:solidFill>
+              </a:rPr>
+              <a:t>The source material and the firm's style examples.</a:t>
+            </a:r>
+            <a:endParaRPr lang="en-US" sz="1050" dirty="0"/>
           </a:p>
         </p:txBody>
       </p:sp>
@@ -3617,7 +3533,7 @@
                   <a:schemeClr val="tx2"/>
                 </a:solidFill>
               </a:rPr>
-              <a:t>Directions I find promising. They would need IT and leadership to shape them.</a:t>
+              <a:t>Directions I find promising. They would need leadership to shape them, and IT to vet them.</a:t>
             </a:r>
             <a:endParaRPr lang="en-US" sz="1300" dirty="0"/>
           </a:p>
@@ -3810,7 +3726,7 @@
                   <a:schemeClr val="tx1"/>
                 </a:solidFill>
               </a:rPr>
-              <a:t>We call the client before they know they need help.</a:t>
+              <a:t>We call the client before they know they need help. VigilMark already does this for trademarks.</a:t>
             </a:r>
             <a:endParaRPr lang="en-US" sz="1200" dirty="0"/>
           </a:p>
@@ -4003,7 +3919,7 @@
                   <a:schemeClr val="tx1"/>
                 </a:solidFill>
               </a:rPr>
-              <a:t>Keeps expertise when senior partners retire.</a:t>
+              <a:t>Keeps expertise when senior partners retire. LexAtlas and Skippy are the pieces.</a:t>
             </a:r>
             <a:endParaRPr lang="en-US" sz="1200" dirty="0"/>
           </a:p>
@@ -4196,7 +4112,7 @@
                   <a:schemeClr val="tx1"/>
                 </a:solidFill>
               </a:rPr>
-              <a:t>A contained first step toward the knowledge engine.</a:t>
+              <a:t>A contained first step toward the knowledge engine. Skippy does this today, one matter at a time.</a:t>
             </a:r>
             <a:endParaRPr lang="en-US" sz="1200" dirty="0"/>
           </a:p>
@@ -5402,7 +5318,7 @@
                   <a:schemeClr val="bg1"/>
                 </a:solidFill>
               </a:rPr>
-              <a:t>All of it inside IT's rules. </a:t>
+              <a:t>Every one of these goes through IT review first: </a:t>
             </a:r>
             <a:pPr indent="0" marL="0">
               <a:buNone/>
@@ -5413,7 +5329,7 @@
                   <a:schemeClr val="bg1"/>
                 </a:solidFill>
               </a:rPr>
-              <a:t>Infrastructure, security, vendors and what goes live are IT's call.</a:t>
+              <a:t>where it runs, who can see what, and what is logged.</a:t>
             </a:r>
             <a:endParaRPr lang="en-US" sz="1050" dirty="0"/>
           </a:p>

--- a/downloads/AI-ideas-Myles-Parslow.pptx
+++ b/downloads/AI-ideas-Myles-Parslow.pptx
@@ -111,7 +111,7 @@
   <p:extLst>
     <p:ext uri="{521415D9-36F7-43E2-AB2F-B90AF26B5E84}">
       <p14:sectionLst xmlns:p14="http://schemas.microsoft.com/office/powerpoint/2010/main">
-        <p14:section name="AI for the firm" id="{c95b617e-a02c-da72-5d64-599594b049e7}">
+        <p14:section name="AI for the firm" id="{2fd9f0a0-1808-5e63-c29d-d98df3f3791b}">
           <p14:sldIdLst>
             <p14:sldId id="256"/>
             <p14:sldId id="257"/>
@@ -4220,7 +4220,7 @@
                   <a:srgbClr val="2D4459"/>
                 </a:solidFill>
               </a:rPr>
-              <a:t>My filter: configure first, buy second, build last</a:t>
+              <a:t>Four rules every tool I build follows</a:t>
             </a:r>
             <a:endParaRPr lang="en-US" sz="2600" dirty="0"/>
           </a:p>
@@ -4258,7 +4258,7 @@
                   <a:schemeClr val="tx2"/>
                 </a:solidFill>
               </a:rPr>
-              <a:t>A lens I have found useful, offered for discussion.</a:t>
+              <a:t>These are what make AI safe to use on client work. They hold for all fifteen tools.</a:t>
             </a:r>
             <a:endParaRPr lang="en-US" sz="1300" dirty="0"/>
           </a:p>
@@ -4266,641 +4266,14 @@
       </p:sp>
       <p:sp>
         <p:nvSpPr>
-          <p:cNvPr id="4" name="questions heading"/>
-          <p:cNvSpPr txBox="1"/>
+          <p:cNvPr id="4" name="Lawyers decide card"/>
+          <p:cNvSpPr/>
           <p:nvPr/>
         </p:nvSpPr>
         <p:spPr>
           <a:xfrm>
             <a:off x="457200" y="1280160"/>
-            <a:ext cx="4206240" cy="274320"/>
-          </a:xfrm>
-          <a:prstGeom prst="rect">
-            <a:avLst/>
-          </a:prstGeom>
-          <a:noFill/>
-          <a:ln/>
-        </p:spPr>
-        <p:txBody>
-          <a:bodyPr wrap="square" lIns="0" tIns="0" rIns="0" bIns="0" rtlCol="0" anchor="ctr"/>
-          <a:lstStyle/>
-          <a:p>
-            <a:pPr indent="0" marL="0">
-              <a:buNone/>
-            </a:pPr>
-            <a:r>
-              <a:rPr lang="en-US" sz="1300" b="1" dirty="0">
-                <a:solidFill>
-                  <a:schemeClr val="accent5"/>
-                </a:solidFill>
-              </a:rPr>
-              <a:t>Five questions I ask of an idea</a:t>
-            </a:r>
-            <a:endParaRPr lang="en-US" sz="1300" dirty="0"/>
-          </a:p>
-        </p:txBody>
-      </p:sp>
-      <p:sp>
-        <p:nvSpPr>
-          <p:cNvPr id="5" name="number 1"/>
-          <p:cNvSpPr/>
-          <p:nvPr/>
-        </p:nvSpPr>
-        <p:spPr>
-          <a:xfrm>
-            <a:off x="457200" y="1664208"/>
-            <a:ext cx="329184" cy="329184"/>
-          </a:xfrm>
-          <a:prstGeom prst="rect">
-            <a:avLst/>
-          </a:prstGeom>
-          <a:solidFill>
-            <a:schemeClr val="accent2"/>
-          </a:solidFill>
-          <a:ln w="12700">
-            <a:solidFill>
-              <a:schemeClr val="accent2"/>
-            </a:solidFill>
-            <a:prstDash val="solid"/>
-          </a:ln>
-        </p:spPr>
-      </p:sp>
-      <p:sp>
-        <p:nvSpPr>
-          <p:cNvPr id="6" name="number text 1"/>
-          <p:cNvSpPr txBox="1"/>
-          <p:nvPr/>
-        </p:nvSpPr>
-        <p:spPr>
-          <a:xfrm>
-            <a:off x="457200" y="1664208"/>
-            <a:ext cx="329184" cy="329184"/>
-          </a:xfrm>
-          <a:prstGeom prst="rect">
-            <a:avLst/>
-          </a:prstGeom>
-          <a:noFill/>
-          <a:ln/>
-        </p:spPr>
-        <p:txBody>
-          <a:bodyPr wrap="square" lIns="0" tIns="0" rIns="0" bIns="0" rtlCol="0" anchor="ctr"/>
-          <a:lstStyle/>
-          <a:p>
-            <a:pPr algn="ctr" indent="0" marL="0">
-              <a:buNone/>
-            </a:pPr>
-            <a:r>
-              <a:rPr lang="en-US" sz="1200" b="1" dirty="0">
-                <a:solidFill>
-                  <a:schemeClr val="bg1"/>
-                </a:solidFill>
-              </a:rPr>
-              <a:t>1</a:t>
-            </a:r>
-            <a:endParaRPr lang="en-US" sz="1200" dirty="0"/>
-          </a:p>
-        </p:txBody>
-      </p:sp>
-      <p:sp>
-        <p:nvSpPr>
-          <p:cNvPr id="7" name="question 1"/>
-          <p:cNvSpPr txBox="1"/>
-          <p:nvPr/>
-        </p:nvSpPr>
-        <p:spPr>
-          <a:xfrm>
-            <a:off x="914400" y="1627632"/>
-            <a:ext cx="3657600" cy="548640"/>
-          </a:xfrm>
-          <a:prstGeom prst="rect">
-            <a:avLst/>
-          </a:prstGeom>
-          <a:noFill/>
-          <a:ln/>
-        </p:spPr>
-        <p:txBody>
-          <a:bodyPr wrap="square" lIns="0" tIns="0" rIns="0" bIns="0" rtlCol="0" anchor="t"/>
-          <a:lstStyle/>
-          <a:p>
-            <a:pPr indent="0" marL="0">
-              <a:buNone/>
-            </a:pPr>
-            <a:r>
-              <a:rPr lang="en-US" sz="1200" b="1" dirty="0">
-                <a:solidFill>
-                  <a:schemeClr val="tx1"/>
-                </a:solidFill>
-              </a:rPr>
-              <a:t>Impact against effort</a:t>
-            </a:r>
-            <a:endParaRPr lang="en-US" sz="1200" dirty="0"/>
-          </a:p>
-          <a:p>
-            <a:pPr indent="0" marL="0">
-              <a:buNone/>
-            </a:pPr>
-            <a:r>
-              <a:rPr lang="en-US" sz="1000" dirty="0">
-                <a:solidFill>
-                  <a:schemeClr val="tx2"/>
-                </a:solidFill>
-              </a:rPr>
-              <a:t>Who benefits, and how much work it takes.</a:t>
-            </a:r>
-            <a:endParaRPr lang="en-US" sz="1200" dirty="0"/>
-          </a:p>
-        </p:txBody>
-      </p:sp>
-      <p:sp>
-        <p:nvSpPr>
-          <p:cNvPr id="8" name="number 2"/>
-          <p:cNvSpPr/>
-          <p:nvPr/>
-        </p:nvSpPr>
-        <p:spPr>
-          <a:xfrm>
-            <a:off x="457200" y="2231136"/>
-            <a:ext cx="329184" cy="329184"/>
-          </a:xfrm>
-          <a:prstGeom prst="rect">
-            <a:avLst/>
-          </a:prstGeom>
-          <a:solidFill>
-            <a:schemeClr val="accent2"/>
-          </a:solidFill>
-          <a:ln w="12700">
-            <a:solidFill>
-              <a:schemeClr val="accent2"/>
-            </a:solidFill>
-            <a:prstDash val="solid"/>
-          </a:ln>
-        </p:spPr>
-      </p:sp>
-      <p:sp>
-        <p:nvSpPr>
-          <p:cNvPr id="9" name="number text 2"/>
-          <p:cNvSpPr txBox="1"/>
-          <p:nvPr/>
-        </p:nvSpPr>
-        <p:spPr>
-          <a:xfrm>
-            <a:off x="457200" y="2231136"/>
-            <a:ext cx="329184" cy="329184"/>
-          </a:xfrm>
-          <a:prstGeom prst="rect">
-            <a:avLst/>
-          </a:prstGeom>
-          <a:noFill/>
-          <a:ln/>
-        </p:spPr>
-        <p:txBody>
-          <a:bodyPr wrap="square" lIns="0" tIns="0" rIns="0" bIns="0" rtlCol="0" anchor="ctr"/>
-          <a:lstStyle/>
-          <a:p>
-            <a:pPr algn="ctr" indent="0" marL="0">
-              <a:buNone/>
-            </a:pPr>
-            <a:r>
-              <a:rPr lang="en-US" sz="1200" b="1" dirty="0">
-                <a:solidFill>
-                  <a:schemeClr val="bg1"/>
-                </a:solidFill>
-              </a:rPr>
-              <a:t>2</a:t>
-            </a:r>
-            <a:endParaRPr lang="en-US" sz="1200" dirty="0"/>
-          </a:p>
-        </p:txBody>
-      </p:sp>
-      <p:sp>
-        <p:nvSpPr>
-          <p:cNvPr id="10" name="question 2"/>
-          <p:cNvSpPr txBox="1"/>
-          <p:nvPr/>
-        </p:nvSpPr>
-        <p:spPr>
-          <a:xfrm>
-            <a:off x="914400" y="2194560"/>
-            <a:ext cx="3657600" cy="548640"/>
-          </a:xfrm>
-          <a:prstGeom prst="rect">
-            <a:avLst/>
-          </a:prstGeom>
-          <a:noFill/>
-          <a:ln/>
-        </p:spPr>
-        <p:txBody>
-          <a:bodyPr wrap="square" lIns="0" tIns="0" rIns="0" bIns="0" rtlCol="0" anchor="t"/>
-          <a:lstStyle/>
-          <a:p>
-            <a:pPr indent="0" marL="0">
-              <a:buNone/>
-            </a:pPr>
-            <a:r>
-              <a:rPr lang="en-US" sz="1200" b="1" dirty="0">
-                <a:solidFill>
-                  <a:schemeClr val="tx1"/>
-                </a:solidFill>
-              </a:rPr>
-              <a:t>Data readiness</a:t>
-            </a:r>
-            <a:endParaRPr lang="en-US" sz="1200" dirty="0"/>
-          </a:p>
-          <a:p>
-            <a:pPr indent="0" marL="0">
-              <a:buNone/>
-            </a:pPr>
-            <a:r>
-              <a:rPr lang="en-US" sz="1000" dirty="0">
-                <a:solidFill>
-                  <a:schemeClr val="tx2"/>
-                </a:solidFill>
-              </a:rPr>
-              <a:t>Is the data clean, in one place, and allowed?</a:t>
-            </a:r>
-            <a:endParaRPr lang="en-US" sz="1200" dirty="0"/>
-          </a:p>
-        </p:txBody>
-      </p:sp>
-      <p:sp>
-        <p:nvSpPr>
-          <p:cNvPr id="11" name="number 3"/>
-          <p:cNvSpPr/>
-          <p:nvPr/>
-        </p:nvSpPr>
-        <p:spPr>
-          <a:xfrm>
-            <a:off x="457200" y="2798064"/>
-            <a:ext cx="329184" cy="329184"/>
-          </a:xfrm>
-          <a:prstGeom prst="rect">
-            <a:avLst/>
-          </a:prstGeom>
-          <a:solidFill>
-            <a:schemeClr val="accent2"/>
-          </a:solidFill>
-          <a:ln w="12700">
-            <a:solidFill>
-              <a:schemeClr val="accent2"/>
-            </a:solidFill>
-            <a:prstDash val="solid"/>
-          </a:ln>
-        </p:spPr>
-      </p:sp>
-      <p:sp>
-        <p:nvSpPr>
-          <p:cNvPr id="12" name="number text 3"/>
-          <p:cNvSpPr txBox="1"/>
-          <p:nvPr/>
-        </p:nvSpPr>
-        <p:spPr>
-          <a:xfrm>
-            <a:off x="457200" y="2798064"/>
-            <a:ext cx="329184" cy="329184"/>
-          </a:xfrm>
-          <a:prstGeom prst="rect">
-            <a:avLst/>
-          </a:prstGeom>
-          <a:noFill/>
-          <a:ln/>
-        </p:spPr>
-        <p:txBody>
-          <a:bodyPr wrap="square" lIns="0" tIns="0" rIns="0" bIns="0" rtlCol="0" anchor="ctr"/>
-          <a:lstStyle/>
-          <a:p>
-            <a:pPr algn="ctr" indent="0" marL="0">
-              <a:buNone/>
-            </a:pPr>
-            <a:r>
-              <a:rPr lang="en-US" sz="1200" b="1" dirty="0">
-                <a:solidFill>
-                  <a:schemeClr val="bg1"/>
-                </a:solidFill>
-              </a:rPr>
-              <a:t>3</a:t>
-            </a:r>
-            <a:endParaRPr lang="en-US" sz="1200" dirty="0"/>
-          </a:p>
-        </p:txBody>
-      </p:sp>
-      <p:sp>
-        <p:nvSpPr>
-          <p:cNvPr id="13" name="question 3"/>
-          <p:cNvSpPr txBox="1"/>
-          <p:nvPr/>
-        </p:nvSpPr>
-        <p:spPr>
-          <a:xfrm>
-            <a:off x="914400" y="2761488"/>
-            <a:ext cx="3657600" cy="548640"/>
-          </a:xfrm>
-          <a:prstGeom prst="rect">
-            <a:avLst/>
-          </a:prstGeom>
-          <a:noFill/>
-          <a:ln/>
-        </p:spPr>
-        <p:txBody>
-          <a:bodyPr wrap="square" lIns="0" tIns="0" rIns="0" bIns="0" rtlCol="0" anchor="t"/>
-          <a:lstStyle/>
-          <a:p>
-            <a:pPr indent="0" marL="0">
-              <a:buNone/>
-            </a:pPr>
-            <a:r>
-              <a:rPr lang="en-US" sz="1200" b="1" dirty="0">
-                <a:solidFill>
-                  <a:schemeClr val="tx1"/>
-                </a:solidFill>
-              </a:rPr>
-              <a:t>Risk and confidentiality</a:t>
-            </a:r>
-            <a:endParaRPr lang="en-US" sz="1200" dirty="0"/>
-          </a:p>
-          <a:p>
-            <a:pPr indent="0" marL="0">
-              <a:buNone/>
-            </a:pPr>
-            <a:r>
-              <a:rPr lang="en-US" sz="1000" dirty="0">
-                <a:solidFill>
-                  <a:schemeClr val="tx2"/>
-                </a:solidFill>
-              </a:rPr>
-              <a:t>Do walls, permissions and client instructions hold?</a:t>
-            </a:r>
-            <a:endParaRPr lang="en-US" sz="1200" dirty="0"/>
-          </a:p>
-        </p:txBody>
-      </p:sp>
-      <p:sp>
-        <p:nvSpPr>
-          <p:cNvPr id="14" name="number 4"/>
-          <p:cNvSpPr/>
-          <p:nvPr/>
-        </p:nvSpPr>
-        <p:spPr>
-          <a:xfrm>
-            <a:off x="457200" y="3364992"/>
-            <a:ext cx="329184" cy="329184"/>
-          </a:xfrm>
-          <a:prstGeom prst="rect">
-            <a:avLst/>
-          </a:prstGeom>
-          <a:solidFill>
-            <a:schemeClr val="accent2"/>
-          </a:solidFill>
-          <a:ln w="12700">
-            <a:solidFill>
-              <a:schemeClr val="accent2"/>
-            </a:solidFill>
-            <a:prstDash val="solid"/>
-          </a:ln>
-        </p:spPr>
-      </p:sp>
-      <p:sp>
-        <p:nvSpPr>
-          <p:cNvPr id="15" name="number text 4"/>
-          <p:cNvSpPr txBox="1"/>
-          <p:nvPr/>
-        </p:nvSpPr>
-        <p:spPr>
-          <a:xfrm>
-            <a:off x="457200" y="3364992"/>
-            <a:ext cx="329184" cy="329184"/>
-          </a:xfrm>
-          <a:prstGeom prst="rect">
-            <a:avLst/>
-          </a:prstGeom>
-          <a:noFill/>
-          <a:ln/>
-        </p:spPr>
-        <p:txBody>
-          <a:bodyPr wrap="square" lIns="0" tIns="0" rIns="0" bIns="0" rtlCol="0" anchor="ctr"/>
-          <a:lstStyle/>
-          <a:p>
-            <a:pPr algn="ctr" indent="0" marL="0">
-              <a:buNone/>
-            </a:pPr>
-            <a:r>
-              <a:rPr lang="en-US" sz="1200" b="1" dirty="0">
-                <a:solidFill>
-                  <a:schemeClr val="bg1"/>
-                </a:solidFill>
-              </a:rPr>
-              <a:t>4</a:t>
-            </a:r>
-            <a:endParaRPr lang="en-US" sz="1200" dirty="0"/>
-          </a:p>
-        </p:txBody>
-      </p:sp>
-      <p:sp>
-        <p:nvSpPr>
-          <p:cNvPr id="16" name="question 4"/>
-          <p:cNvSpPr txBox="1"/>
-          <p:nvPr/>
-        </p:nvSpPr>
-        <p:spPr>
-          <a:xfrm>
-            <a:off x="914400" y="3328416"/>
-            <a:ext cx="3657600" cy="548640"/>
-          </a:xfrm>
-          <a:prstGeom prst="rect">
-            <a:avLst/>
-          </a:prstGeom>
-          <a:noFill/>
-          <a:ln/>
-        </p:spPr>
-        <p:txBody>
-          <a:bodyPr wrap="square" lIns="0" tIns="0" rIns="0" bIns="0" rtlCol="0" anchor="t"/>
-          <a:lstStyle/>
-          <a:p>
-            <a:pPr indent="0" marL="0">
-              <a:buNone/>
-            </a:pPr>
-            <a:r>
-              <a:rPr lang="en-US" sz="1200" b="1" dirty="0">
-                <a:solidFill>
-                  <a:schemeClr val="tx1"/>
-                </a:solidFill>
-              </a:rPr>
-              <a:t>Adoption</a:t>
-            </a:r>
-            <a:endParaRPr lang="en-US" sz="1200" dirty="0"/>
-          </a:p>
-          <a:p>
-            <a:pPr indent="0" marL="0">
-              <a:buNone/>
-            </a:pPr>
-            <a:r>
-              <a:rPr lang="en-US" sz="1000" dirty="0">
-                <a:solidFill>
-                  <a:schemeClr val="tx2"/>
-                </a:solidFill>
-              </a:rPr>
-              <a:t>Does it fit how people already work?</a:t>
-            </a:r>
-            <a:endParaRPr lang="en-US" sz="1200" dirty="0"/>
-          </a:p>
-        </p:txBody>
-      </p:sp>
-      <p:sp>
-        <p:nvSpPr>
-          <p:cNvPr id="17" name="number 5"/>
-          <p:cNvSpPr/>
-          <p:nvPr/>
-        </p:nvSpPr>
-        <p:spPr>
-          <a:xfrm>
-            <a:off x="457200" y="3931920"/>
-            <a:ext cx="329184" cy="329184"/>
-          </a:xfrm>
-          <a:prstGeom prst="rect">
-            <a:avLst/>
-          </a:prstGeom>
-          <a:solidFill>
-            <a:schemeClr val="accent2"/>
-          </a:solidFill>
-          <a:ln w="12700">
-            <a:solidFill>
-              <a:schemeClr val="accent2"/>
-            </a:solidFill>
-            <a:prstDash val="solid"/>
-          </a:ln>
-        </p:spPr>
-      </p:sp>
-      <p:sp>
-        <p:nvSpPr>
-          <p:cNvPr id="18" name="number text 5"/>
-          <p:cNvSpPr txBox="1"/>
-          <p:nvPr/>
-        </p:nvSpPr>
-        <p:spPr>
-          <a:xfrm>
-            <a:off x="457200" y="3931920"/>
-            <a:ext cx="329184" cy="329184"/>
-          </a:xfrm>
-          <a:prstGeom prst="rect">
-            <a:avLst/>
-          </a:prstGeom>
-          <a:noFill/>
-          <a:ln/>
-        </p:spPr>
-        <p:txBody>
-          <a:bodyPr wrap="square" lIns="0" tIns="0" rIns="0" bIns="0" rtlCol="0" anchor="ctr"/>
-          <a:lstStyle/>
-          <a:p>
-            <a:pPr algn="ctr" indent="0" marL="0">
-              <a:buNone/>
-            </a:pPr>
-            <a:r>
-              <a:rPr lang="en-US" sz="1200" b="1" dirty="0">
-                <a:solidFill>
-                  <a:schemeClr val="bg1"/>
-                </a:solidFill>
-              </a:rPr>
-              <a:t>5</a:t>
-            </a:r>
-            <a:endParaRPr lang="en-US" sz="1200" dirty="0"/>
-          </a:p>
-        </p:txBody>
-      </p:sp>
-      <p:sp>
-        <p:nvSpPr>
-          <p:cNvPr id="19" name="question 5"/>
-          <p:cNvSpPr txBox="1"/>
-          <p:nvPr/>
-        </p:nvSpPr>
-        <p:spPr>
-          <a:xfrm>
-            <a:off x="914400" y="3895344"/>
-            <a:ext cx="3657600" cy="548640"/>
-          </a:xfrm>
-          <a:prstGeom prst="rect">
-            <a:avLst/>
-          </a:prstGeom>
-          <a:noFill/>
-          <a:ln/>
-        </p:spPr>
-        <p:txBody>
-          <a:bodyPr wrap="square" lIns="0" tIns="0" rIns="0" bIns="0" rtlCol="0" anchor="t"/>
-          <a:lstStyle/>
-          <a:p>
-            <a:pPr indent="0" marL="0">
-              <a:buNone/>
-            </a:pPr>
-            <a:r>
-              <a:rPr lang="en-US" sz="1200" b="1" dirty="0">
-                <a:solidFill>
-                  <a:schemeClr val="tx1"/>
-                </a:solidFill>
-              </a:rPr>
-              <a:t>Supportability</a:t>
-            </a:r>
-            <a:endParaRPr lang="en-US" sz="1200" dirty="0"/>
-          </a:p>
-          <a:p>
-            <a:pPr indent="0" marL="0">
-              <a:buNone/>
-            </a:pPr>
-            <a:r>
-              <a:rPr lang="en-US" sz="1000" dirty="0">
-                <a:solidFill>
-                  <a:schemeClr val="tx2"/>
-                </a:solidFill>
-              </a:rPr>
-              <a:t>Who maintains it?</a:t>
-            </a:r>
-            <a:endParaRPr lang="en-US" sz="1200" dirty="0"/>
-          </a:p>
-        </p:txBody>
-      </p:sp>
-      <p:sp>
-        <p:nvSpPr>
-          <p:cNvPr id="20" name="order heading"/>
-          <p:cNvSpPr txBox="1"/>
-          <p:nvPr/>
-        </p:nvSpPr>
-        <p:spPr>
-          <a:xfrm>
-            <a:off x="5029200" y="1280160"/>
-            <a:ext cx="3657600" cy="274320"/>
-          </a:xfrm>
-          <a:prstGeom prst="rect">
-            <a:avLst/>
-          </a:prstGeom>
-          <a:noFill/>
-          <a:ln/>
-        </p:spPr>
-        <p:txBody>
-          <a:bodyPr wrap="square" lIns="0" tIns="0" rIns="0" bIns="0" rtlCol="0" anchor="ctr"/>
-          <a:lstStyle/>
-          <a:p>
-            <a:pPr indent="0" marL="0">
-              <a:buNone/>
-            </a:pPr>
-            <a:r>
-              <a:rPr lang="en-US" sz="1300" b="1" dirty="0">
-                <a:solidFill>
-                  <a:schemeClr val="accent5"/>
-                </a:solidFill>
-              </a:rPr>
-              <a:t>The order I would lean toward</a:t>
-            </a:r>
-            <a:endParaRPr lang="en-US" sz="1300" dirty="0"/>
-          </a:p>
-        </p:txBody>
-      </p:sp>
-      <p:sp>
-        <p:nvSpPr>
-          <p:cNvPr id="21" name="Configure first card"/>
-          <p:cNvSpPr/>
-          <p:nvPr/>
-        </p:nvSpPr>
-        <p:spPr>
-          <a:xfrm>
-            <a:off x="5029200" y="1645920"/>
-            <a:ext cx="3657600" cy="676656"/>
+            <a:ext cx="4023360" cy="1536192"/>
           </a:xfrm>
           <a:prstGeom prst="rect">
             <a:avLst/>
@@ -4918,13 +4291,13 @@
       </p:sp>
       <p:sp>
         <p:nvSpPr>
-          <p:cNvPr id="22" name="icon square"/>
+          <p:cNvPr id="5" name="icon square"/>
           <p:cNvSpPr/>
           <p:nvPr/>
         </p:nvSpPr>
         <p:spPr>
           <a:xfrm>
-            <a:off x="5138928" y="1792224"/>
+            <a:off x="594360" y="1417320"/>
             <a:ext cx="384048" cy="384048"/>
           </a:xfrm>
           <a:prstGeom prst="rect">
@@ -4943,7 +4316,7 @@
       </p:sp>
       <p:pic>
         <p:nvPicPr>
-          <p:cNvPr id="23" name="settings icon" descr="preencoded.png">    </p:cNvPr>
+          <p:cNvPr id="6" name="users icon" descr="preencoded.png">    </p:cNvPr>
           <p:cNvPicPr>
             <a:picLocks noChangeAspect="1"/>
           </p:cNvPicPr>
@@ -4957,7 +4330,7 @@
         </p:blipFill>
         <p:spPr>
           <a:xfrm>
-            <a:off x="5223419" y="1876715"/>
+            <a:off x="678851" y="1501811"/>
             <a:ext cx="215067" cy="215067"/>
           </a:xfrm>
           <a:prstGeom prst="rect">
@@ -4967,14 +4340,50 @@
       </p:pic>
       <p:sp>
         <p:nvSpPr>
-          <p:cNvPr id="24" name="Configure first text"/>
-          <p:cNvSpPr txBox="1"/>
-          <p:nvPr/>
-        </p:nvSpPr>
-        <p:spPr>
-          <a:xfrm>
-            <a:off x="5623560" y="1700784"/>
-            <a:ext cx="2971800" cy="585216"/>
+          <p:cNvPr id="7" name="Lawyers decide name"/>
+          <p:cNvSpPr txBox="1"/>
+          <p:nvPr/>
+        </p:nvSpPr>
+        <p:spPr>
+          <a:xfrm>
+            <a:off x="1097280" y="1389888"/>
+            <a:ext cx="3246120" cy="438912"/>
+          </a:xfrm>
+          <a:prstGeom prst="rect">
+            <a:avLst/>
+          </a:prstGeom>
+          <a:noFill/>
+          <a:ln/>
+        </p:spPr>
+        <p:txBody>
+          <a:bodyPr wrap="square" lIns="0" tIns="0" rIns="0" bIns="0" rtlCol="0" anchor="ctr"/>
+          <a:lstStyle/>
+          <a:p>
+            <a:pPr indent="0" marL="0">
+              <a:buNone/>
+            </a:pPr>
+            <a:r>
+              <a:rPr lang="en-US" sz="1500" b="1" dirty="0">
+                <a:solidFill>
+                  <a:schemeClr val="tx1"/>
+                </a:solidFill>
+              </a:rPr>
+              <a:t>Lawyers decide</a:t>
+            </a:r>
+            <a:endParaRPr lang="en-US" sz="1500" dirty="0"/>
+          </a:p>
+        </p:txBody>
+      </p:sp>
+      <p:sp>
+        <p:nvSpPr>
+          <p:cNvPr id="8" name="Lawyers decide text"/>
+          <p:cNvSpPr txBox="1"/>
+          <p:nvPr/>
+        </p:nvSpPr>
+        <p:spPr>
+          <a:xfrm>
+            <a:off x="594360" y="1938528"/>
+            <a:ext cx="3749040" cy="822960"/>
           </a:xfrm>
           <a:prstGeom prst="rect">
             <a:avLst/>
@@ -4990,41 +4399,27 @@
               <a:buNone/>
             </a:pPr>
             <a:r>
-              <a:rPr lang="en-US" sz="1200" b="1" dirty="0">
+              <a:rPr lang="en-US" sz="1200" dirty="0">
                 <a:solidFill>
                   <a:schemeClr val="tx1"/>
                 </a:solidFill>
               </a:rPr>
-              <a:t>Configure first</a:t>
+              <a:t>AI suggestions stay marked as suggestions until a person confirms them. No tool clears a conflict, files a brief or posts time on its own.</a:t>
             </a:r>
             <a:endParaRPr lang="en-US" sz="1200" dirty="0"/>
           </a:p>
-          <a:p>
-            <a:pPr indent="0" marL="0">
-              <a:buNone/>
-            </a:pPr>
-            <a:r>
-              <a:rPr lang="en-US" sz="1000" dirty="0">
-                <a:solidFill>
-                  <a:schemeClr val="tx2"/>
-                </a:solidFill>
-              </a:rPr>
-              <a:t>Get more from Copilot and the document system.</a:t>
-            </a:r>
-            <a:endParaRPr lang="en-US" sz="1200" dirty="0"/>
-          </a:p>
-        </p:txBody>
-      </p:sp>
-      <p:sp>
-        <p:nvSpPr>
-          <p:cNvPr id="25" name="Buy second card"/>
+        </p:txBody>
+      </p:sp>
+      <p:sp>
+        <p:nvSpPr>
+          <p:cNvPr id="9" name="Code checks the model card"/>
           <p:cNvSpPr/>
           <p:nvPr/>
         </p:nvSpPr>
         <p:spPr>
           <a:xfrm>
-            <a:off x="5029200" y="2432304"/>
-            <a:ext cx="3657600" cy="676656"/>
+            <a:off x="4663440" y="1280160"/>
+            <a:ext cx="4023360" cy="1536192"/>
           </a:xfrm>
           <a:prstGeom prst="rect">
             <a:avLst/>
@@ -5042,13 +4437,13 @@
       </p:sp>
       <p:sp>
         <p:nvSpPr>
-          <p:cNvPr id="26" name="icon square"/>
+          <p:cNvPr id="10" name="icon square"/>
           <p:cNvSpPr/>
           <p:nvPr/>
         </p:nvSpPr>
         <p:spPr>
           <a:xfrm>
-            <a:off x="5138928" y="2578608"/>
+            <a:off x="4800600" y="1417320"/>
             <a:ext cx="384048" cy="384048"/>
           </a:xfrm>
           <a:prstGeom prst="rect">
@@ -5067,7 +4462,7 @@
       </p:sp>
       <p:pic>
         <p:nvPicPr>
-          <p:cNvPr id="27" name="cart icon" descr="preencoded.png">    </p:cNvPr>
+          <p:cNvPr id="11" name="check icon" descr="preencoded.png">    </p:cNvPr>
           <p:cNvPicPr>
             <a:picLocks noChangeAspect="1"/>
           </p:cNvPicPr>
@@ -5081,7 +4476,7 @@
         </p:blipFill>
         <p:spPr>
           <a:xfrm>
-            <a:off x="5223419" y="2663099"/>
+            <a:off x="4885091" y="1501811"/>
             <a:ext cx="215067" cy="215067"/>
           </a:xfrm>
           <a:prstGeom prst="rect">
@@ -5091,14 +4486,50 @@
       </p:pic>
       <p:sp>
         <p:nvSpPr>
-          <p:cNvPr id="28" name="Buy second text"/>
-          <p:cNvSpPr txBox="1"/>
-          <p:nvPr/>
-        </p:nvSpPr>
-        <p:spPr>
-          <a:xfrm>
-            <a:off x="5623560" y="2487168"/>
-            <a:ext cx="2971800" cy="585216"/>
+          <p:cNvPr id="12" name="Code checks the model name"/>
+          <p:cNvSpPr txBox="1"/>
+          <p:nvPr/>
+        </p:nvSpPr>
+        <p:spPr>
+          <a:xfrm>
+            <a:off x="5303520" y="1389888"/>
+            <a:ext cx="3246120" cy="438912"/>
+          </a:xfrm>
+          <a:prstGeom prst="rect">
+            <a:avLst/>
+          </a:prstGeom>
+          <a:noFill/>
+          <a:ln/>
+        </p:spPr>
+        <p:txBody>
+          <a:bodyPr wrap="square" lIns="0" tIns="0" rIns="0" bIns="0" rtlCol="0" anchor="ctr"/>
+          <a:lstStyle/>
+          <a:p>
+            <a:pPr indent="0" marL="0">
+              <a:buNone/>
+            </a:pPr>
+            <a:r>
+              <a:rPr lang="en-US" sz="1500" b="1" dirty="0">
+                <a:solidFill>
+                  <a:schemeClr val="tx1"/>
+                </a:solidFill>
+              </a:rPr>
+              <a:t>Code checks the model</a:t>
+            </a:r>
+            <a:endParaRPr lang="en-US" sz="1500" dirty="0"/>
+          </a:p>
+        </p:txBody>
+      </p:sp>
+      <p:sp>
+        <p:nvSpPr>
+          <p:cNvPr id="13" name="Code checks the model text"/>
+          <p:cNvSpPr txBox="1"/>
+          <p:nvPr/>
+        </p:nvSpPr>
+        <p:spPr>
+          <a:xfrm>
+            <a:off x="4800600" y="1938528"/>
+            <a:ext cx="3749040" cy="822960"/>
           </a:xfrm>
           <a:prstGeom prst="rect">
             <a:avLst/>
@@ -5114,41 +4545,27 @@
               <a:buNone/>
             </a:pPr>
             <a:r>
-              <a:rPr lang="en-US" sz="1200" b="1" dirty="0">
+              <a:rPr lang="en-US" sz="1200" dirty="0">
                 <a:solidFill>
                   <a:schemeClr val="tx1"/>
                 </a:solidFill>
               </a:rPr>
-              <a:t>Buy second</a:t>
+              <a:t>Quotations are matched word for word against the source. Deadlines, totals and redlines are computed in code, not guessed by the model.</a:t>
             </a:r>
             <a:endParaRPr lang="en-US" sz="1200" dirty="0"/>
           </a:p>
-          <a:p>
-            <a:pPr indent="0" marL="0">
-              <a:buNone/>
-            </a:pPr>
-            <a:r>
-              <a:rPr lang="en-US" sz="1000" dirty="0">
-                <a:solidFill>
-                  <a:schemeClr val="tx2"/>
-                </a:solidFill>
-              </a:rPr>
-              <a:t>Where the market is mature and vendors pass vetting.</a:t>
-            </a:r>
-            <a:endParaRPr lang="en-US" sz="1200" dirty="0"/>
-          </a:p>
-        </p:txBody>
-      </p:sp>
-      <p:sp>
-        <p:nvSpPr>
-          <p:cNvPr id="29" name="Build last card"/>
+        </p:txBody>
+      </p:sp>
+      <p:sp>
+        <p:nvSpPr>
+          <p:cNvPr id="14" name="Client data stays protected card"/>
           <p:cNvSpPr/>
           <p:nvPr/>
         </p:nvSpPr>
         <p:spPr>
           <a:xfrm>
-            <a:off x="5029200" y="3218688"/>
-            <a:ext cx="3657600" cy="676656"/>
+            <a:off x="457200" y="2971800"/>
+            <a:ext cx="4023360" cy="1536192"/>
           </a:xfrm>
           <a:prstGeom prst="rect">
             <a:avLst/>
@@ -5166,13 +4583,13 @@
       </p:sp>
       <p:sp>
         <p:nvSpPr>
-          <p:cNvPr id="30" name="icon square"/>
+          <p:cNvPr id="15" name="icon square"/>
           <p:cNvSpPr/>
           <p:nvPr/>
         </p:nvSpPr>
         <p:spPr>
           <a:xfrm>
-            <a:off x="5138928" y="3364992"/>
+            <a:off x="594360" y="3108960"/>
             <a:ext cx="384048" cy="384048"/>
           </a:xfrm>
           <a:prstGeom prst="rect">
@@ -5191,7 +4608,7 @@
       </p:sp>
       <p:pic>
         <p:nvPicPr>
-          <p:cNvPr id="31" name="tool icon" descr="preencoded.png">    </p:cNvPr>
+          <p:cNvPr id="16" name="lock icon" descr="preencoded.png">    </p:cNvPr>
           <p:cNvPicPr>
             <a:picLocks noChangeAspect="1"/>
           </p:cNvPicPr>
@@ -5205,7 +4622,7 @@
         </p:blipFill>
         <p:spPr>
           <a:xfrm>
-            <a:off x="5223419" y="3449483"/>
+            <a:off x="678851" y="3193451"/>
             <a:ext cx="215067" cy="215067"/>
           </a:xfrm>
           <a:prstGeom prst="rect">
@@ -5215,14 +4632,50 @@
       </p:pic>
       <p:sp>
         <p:nvSpPr>
-          <p:cNvPr id="32" name="Build last text"/>
-          <p:cNvSpPr txBox="1"/>
-          <p:nvPr/>
-        </p:nvSpPr>
-        <p:spPr>
-          <a:xfrm>
-            <a:off x="5623560" y="3273552"/>
-            <a:ext cx="2971800" cy="585216"/>
+          <p:cNvPr id="17" name="Client data stays protected name"/>
+          <p:cNvSpPr txBox="1"/>
+          <p:nvPr/>
+        </p:nvSpPr>
+        <p:spPr>
+          <a:xfrm>
+            <a:off x="1097280" y="3081528"/>
+            <a:ext cx="3246120" cy="438912"/>
+          </a:xfrm>
+          <a:prstGeom prst="rect">
+            <a:avLst/>
+          </a:prstGeom>
+          <a:noFill/>
+          <a:ln/>
+        </p:spPr>
+        <p:txBody>
+          <a:bodyPr wrap="square" lIns="0" tIns="0" rIns="0" bIns="0" rtlCol="0" anchor="ctr"/>
+          <a:lstStyle/>
+          <a:p>
+            <a:pPr indent="0" marL="0">
+              <a:buNone/>
+            </a:pPr>
+            <a:r>
+              <a:rPr lang="en-US" sz="1500" b="1" dirty="0">
+                <a:solidFill>
+                  <a:schemeClr val="tx1"/>
+                </a:solidFill>
+              </a:rPr>
+              <a:t>Client data stays protected</a:t>
+            </a:r>
+            <a:endParaRPr lang="en-US" sz="1500" dirty="0"/>
+          </a:p>
+        </p:txBody>
+      </p:sp>
+      <p:sp>
+        <p:nvSpPr>
+          <p:cNvPr id="18" name="Client data stays protected text"/>
+          <p:cNvSpPr txBox="1"/>
+          <p:nvPr/>
+        </p:nvSpPr>
+        <p:spPr>
+          <a:xfrm>
+            <a:off x="594360" y="3630168"/>
+            <a:ext cx="3749040" cy="822960"/>
           </a:xfrm>
           <a:prstGeom prst="rect">
             <a:avLst/>
@@ -5238,51 +4691,37 @@
               <a:buNone/>
             </a:pPr>
             <a:r>
-              <a:rPr lang="en-US" sz="1200" b="1" dirty="0">
+              <a:rPr lang="en-US" sz="1200" dirty="0">
                 <a:solidFill>
                   <a:schemeClr val="tx1"/>
                 </a:solidFill>
               </a:rPr>
-              <a:t>Build last</a:t>
+              <a:t>Sensitive work runs on the firm's own hardware, nothing is sent out without approval, and ethical walls are enforced in the data.</a:t>
             </a:r>
             <a:endParaRPr lang="en-US" sz="1200" dirty="0"/>
           </a:p>
-          <a:p>
-            <a:pPr indent="0" marL="0">
-              <a:buNone/>
-            </a:pPr>
-            <a:r>
-              <a:rPr lang="en-US" sz="1000" dirty="0">
-                <a:solidFill>
-                  <a:schemeClr val="tx2"/>
-                </a:solidFill>
-              </a:rPr>
-              <a:t>Only where our own data is the advantage.</a:t>
-            </a:r>
-            <a:endParaRPr lang="en-US" sz="1200" dirty="0"/>
-          </a:p>
-        </p:txBody>
-      </p:sp>
-      <p:sp>
-        <p:nvSpPr>
-          <p:cNvPr id="33" name="what IT keeps card"/>
+        </p:txBody>
+      </p:sp>
+      <p:sp>
+        <p:nvSpPr>
+          <p:cNvPr id="19" name="Everything is traceable card"/>
           <p:cNvSpPr/>
           <p:nvPr/>
         </p:nvSpPr>
         <p:spPr>
           <a:xfrm>
-            <a:off x="5029200" y="4041648"/>
-            <a:ext cx="3657600" cy="713232"/>
+            <a:off x="4663440" y="2971800"/>
+            <a:ext cx="4023360" cy="1536192"/>
           </a:xfrm>
           <a:prstGeom prst="rect">
             <a:avLst/>
           </a:prstGeom>
           <a:solidFill>
-            <a:srgbClr val="2D4459"/>
+            <a:schemeClr val="bg2"/>
           </a:solidFill>
           <a:ln w="12700">
             <a:solidFill>
-              <a:srgbClr val="2D4459"/>
+              <a:schemeClr val="bg2"/>
             </a:solidFill>
             <a:prstDash val="solid"/>
           </a:ln>
@@ -5290,14 +4729,63 @@
       </p:sp>
       <p:sp>
         <p:nvSpPr>
-          <p:cNvPr id="34" name="what IT keeps text"/>
-          <p:cNvSpPr txBox="1"/>
-          <p:nvPr/>
-        </p:nvSpPr>
-        <p:spPr>
-          <a:xfrm>
-            <a:off x="5166360" y="4078224"/>
-            <a:ext cx="3383280" cy="640080"/>
+          <p:cNvPr id="20" name="icon square"/>
+          <p:cNvSpPr/>
+          <p:nvPr/>
+        </p:nvSpPr>
+        <p:spPr>
+          <a:xfrm>
+            <a:off x="4800600" y="3108960"/>
+            <a:ext cx="384048" cy="384048"/>
+          </a:xfrm>
+          <a:prstGeom prst="rect">
+            <a:avLst/>
+          </a:prstGeom>
+          <a:solidFill>
+            <a:schemeClr val="accent1"/>
+          </a:solidFill>
+          <a:ln w="12700">
+            <a:solidFill>
+              <a:schemeClr val="accent1"/>
+            </a:solidFill>
+            <a:prstDash val="solid"/>
+          </a:ln>
+        </p:spPr>
+      </p:sp>
+      <p:pic>
+        <p:nvPicPr>
+          <p:cNvPr id="21" name="list icon" descr="preencoded.png">    </p:cNvPr>
+          <p:cNvPicPr>
+            <a:picLocks noChangeAspect="1"/>
+          </p:cNvPicPr>
+          <p:nvPr/>
+        </p:nvPicPr>
+        <p:blipFill>
+          <a:blip r:embed="rId4"/>
+          <a:stretch>
+            <a:fillRect/>
+          </a:stretch>
+        </p:blipFill>
+        <p:spPr>
+          <a:xfrm>
+            <a:off x="4885091" y="3193451"/>
+            <a:ext cx="215067" cy="215067"/>
+          </a:xfrm>
+          <a:prstGeom prst="rect">
+            <a:avLst/>
+          </a:prstGeom>
+        </p:spPr>
+      </p:pic>
+      <p:sp>
+        <p:nvSpPr>
+          <p:cNvPr id="22" name="Everything is traceable name"/>
+          <p:cNvSpPr txBox="1"/>
+          <p:nvPr/>
+        </p:nvSpPr>
+        <p:spPr>
+          <a:xfrm>
+            <a:off x="5303520" y="3081528"/>
+            <a:ext cx="3246120" cy="438912"/>
           </a:xfrm>
           <a:prstGeom prst="rect">
             <a:avLst/>
@@ -5313,25 +4801,86 @@
               <a:buNone/>
             </a:pPr>
             <a:r>
-              <a:rPr lang="en-US" sz="1050" b="1" dirty="0">
-                <a:solidFill>
-                  <a:schemeClr val="bg1"/>
-                </a:solidFill>
-              </a:rPr>
-              <a:t>Every one of these goes through IT review first: </a:t>
-            </a:r>
-            <a:pPr indent="0" marL="0">
-              <a:buNone/>
-            </a:pPr>
-            <a:r>
-              <a:rPr lang="en-US" sz="1050" dirty="0">
-                <a:solidFill>
-                  <a:schemeClr val="bg1"/>
-                </a:solidFill>
-              </a:rPr>
-              <a:t>where it runs, who can see what, and what is logged.</a:t>
-            </a:r>
-            <a:endParaRPr lang="en-US" sz="1050" dirty="0"/>
+              <a:rPr lang="en-US" sz="1500" b="1" dirty="0">
+                <a:solidFill>
+                  <a:schemeClr val="tx1"/>
+                </a:solidFill>
+              </a:rPr>
+              <a:t>Everything is traceable</a:t>
+            </a:r>
+            <a:endParaRPr lang="en-US" sz="1500" dirty="0"/>
+          </a:p>
+        </p:txBody>
+      </p:sp>
+      <p:sp>
+        <p:nvSpPr>
+          <p:cNvPr id="23" name="Everything is traceable text"/>
+          <p:cNvSpPr txBox="1"/>
+          <p:nvPr/>
+        </p:nvSpPr>
+        <p:spPr>
+          <a:xfrm>
+            <a:off x="4800600" y="3630168"/>
+            <a:ext cx="3749040" cy="822960"/>
+          </a:xfrm>
+          <a:prstGeom prst="rect">
+            <a:avLst/>
+          </a:prstGeom>
+          <a:noFill/>
+          <a:ln/>
+        </p:spPr>
+        <p:txBody>
+          <a:bodyPr wrap="square" lIns="0" tIns="0" rIns="0" bIns="0" rtlCol="0" anchor="t"/>
+          <a:lstStyle/>
+          <a:p>
+            <a:pPr indent="0" marL="0">
+              <a:buNone/>
+            </a:pPr>
+            <a:r>
+              <a:rPr lang="en-US" sz="1200" dirty="0">
+                <a:solidFill>
+                  <a:schemeClr val="tx1"/>
+                </a:solidFill>
+              </a:rPr>
+              <a:t>Every finding links to the sentence it rests on, and every decision is written to an audit trail.</a:t>
+            </a:r>
+            <a:endParaRPr lang="en-US" sz="1200" dirty="0"/>
+          </a:p>
+        </p:txBody>
+      </p:sp>
+      <p:sp>
+        <p:nvSpPr>
+          <p:cNvPr id="24" name="IT review line"/>
+          <p:cNvSpPr txBox="1"/>
+          <p:nvPr/>
+        </p:nvSpPr>
+        <p:spPr>
+          <a:xfrm>
+            <a:off x="457200" y="4645152"/>
+            <a:ext cx="8229600" cy="274320"/>
+          </a:xfrm>
+          <a:prstGeom prst="rect">
+            <a:avLst/>
+          </a:prstGeom>
+          <a:noFill/>
+          <a:ln/>
+        </p:spPr>
+        <p:txBody>
+          <a:bodyPr wrap="square" lIns="0" tIns="0" rIns="0" bIns="0" rtlCol="0" anchor="ctr"/>
+          <a:lstStyle/>
+          <a:p>
+            <a:pPr indent="0" marL="0">
+              <a:buNone/>
+            </a:pPr>
+            <a:r>
+              <a:rPr lang="en-US" sz="1100" i="1" dirty="0">
+                <a:solidFill>
+                  <a:schemeClr val="tx2"/>
+                </a:solidFill>
+              </a:rPr>
+              <a:t>And anything the firm chose to use would go through IT review first.</a:t>
+            </a:r>
+            <a:endParaRPr lang="en-US" sz="1100" dirty="0"/>
           </a:p>
         </p:txBody>
       </p:sp>
@@ -5437,7 +4986,7 @@
                   <a:schemeClr val="bg1"/>
                 </a:solidFill>
               </a:rPr>
-              <a:t>A rollout takes about two weeks</a:t>
+              <a:t>Trying one would be small and low-risk</a:t>
             </a:r>
             <a:endParaRPr lang="en-US" sz="2600" dirty="0"/>
           </a:p>
@@ -5475,7 +5024,7 @@
                   <a:schemeClr val="accent3"/>
                 </a:solidFill>
               </a:rPr>
-              <a:t>One example, the client guidelines brief, as I picture it. Nothing new to host.</a:t>
+              <a:t>One example, the client guidelines brief, as I picture it. Nothing new to host, and it can stop at any step.</a:t>
             </a:r>
             <a:endParaRPr lang="en-US" sz="1300" dirty="0"/>
           </a:p>
@@ -5489,8 +5038,8 @@
         </p:nvSpPr>
         <p:spPr>
           <a:xfrm>
-            <a:off x="457200" y="1280160"/>
-            <a:ext cx="1572768" cy="1920240"/>
+            <a:off x="457200" y="1325880"/>
+            <a:ext cx="1572768" cy="1691640"/>
           </a:xfrm>
           <a:prstGeom prst="rect">
             <a:avLst/>
@@ -5514,7 +5063,7 @@
         </p:nvSpPr>
         <p:spPr>
           <a:xfrm>
-            <a:off x="566928" y="1389888"/>
+            <a:off x="566928" y="1435608"/>
             <a:ext cx="310896" cy="310896"/>
           </a:xfrm>
           <a:prstGeom prst="rect">
@@ -5539,7 +5088,7 @@
         </p:nvSpPr>
         <p:spPr>
           <a:xfrm>
-            <a:off x="566928" y="1389888"/>
+            <a:off x="566928" y="1435608"/>
             <a:ext cx="310896" cy="310896"/>
           </a:xfrm>
           <a:prstGeom prst="rect">
@@ -5575,7 +5124,7 @@
         </p:nvSpPr>
         <p:spPr>
           <a:xfrm>
-            <a:off x="950976" y="1371600"/>
+            <a:off x="950976" y="1417320"/>
             <a:ext cx="987552" cy="347472"/>
           </a:xfrm>
           <a:prstGeom prst="rect">
@@ -5605,50 +5154,14 @@
       </p:sp>
       <p:sp>
         <p:nvSpPr>
-          <p:cNvPr id="8" name="step when 1"/>
-          <p:cNvSpPr txBox="1"/>
-          <p:nvPr/>
-        </p:nvSpPr>
-        <p:spPr>
-          <a:xfrm>
-            <a:off x="566928" y="1783080"/>
-            <a:ext cx="1353312" cy="228600"/>
-          </a:xfrm>
-          <a:prstGeom prst="rect">
-            <a:avLst/>
-          </a:prstGeom>
-          <a:noFill/>
-          <a:ln/>
-        </p:spPr>
-        <p:txBody>
-          <a:bodyPr wrap="square" lIns="0" tIns="0" rIns="0" bIns="0" rtlCol="0" anchor="ctr"/>
-          <a:lstStyle/>
-          <a:p>
-            <a:pPr indent="0" marL="0">
-              <a:buNone/>
-            </a:pPr>
-            <a:r>
-              <a:rPr lang="en-US" sz="1000" b="1" dirty="0">
-                <a:solidFill>
-                  <a:schemeClr val="accent2"/>
-                </a:solidFill>
-              </a:rPr>
-              <a:t>Day 1</a:t>
-            </a:r>
-            <a:endParaRPr lang="en-US" sz="1000" dirty="0"/>
-          </a:p>
-        </p:txBody>
-      </p:sp>
-      <p:sp>
-        <p:nvSpPr>
-          <p:cNvPr id="9" name="step text 1"/>
-          <p:cNvSpPr txBox="1"/>
-          <p:nvPr/>
-        </p:nvSpPr>
-        <p:spPr>
-          <a:xfrm>
-            <a:off x="566928" y="2011680"/>
-            <a:ext cx="1353312" cy="1143000"/>
+          <p:cNvPr id="8" name="step text 1"/>
+          <p:cNvSpPr txBox="1"/>
+          <p:nvPr/>
+        </p:nvSpPr>
+        <p:spPr>
+          <a:xfrm>
+            <a:off x="566928" y="1892808"/>
+            <a:ext cx="1353312" cy="1280160"/>
           </a:xfrm>
           <a:prstGeom prst="rect">
             <a:avLst/>
@@ -5664,20 +5177,20 @@
               <a:buNone/>
             </a:pPr>
             <a:r>
-              <a:rPr lang="en-US" sz="1050" dirty="0">
+              <a:rPr lang="en-US" sz="1150" dirty="0">
                 <a:solidFill>
                   <a:schemeClr val="accent3"/>
                 </a:solidFill>
               </a:rPr>
               <a:t>The client guidelines are already in the document system.</a:t>
             </a:r>
-            <a:endParaRPr lang="en-US" sz="1050" dirty="0"/>
+            <a:endParaRPr lang="en-US" sz="1150" dirty="0"/>
           </a:p>
         </p:txBody>
       </p:sp>
       <p:pic>
         <p:nvPicPr>
-          <p:cNvPr id="10" name="step arrow 1" descr="preencoded.png">    </p:cNvPr>
+          <p:cNvPr id="9" name="step arrow 1" descr="preencoded.png">    </p:cNvPr>
           <p:cNvPicPr>
             <a:picLocks noChangeAspect="1"/>
           </p:cNvPicPr>
@@ -5691,7 +5204,7 @@
         </p:blipFill>
         <p:spPr>
           <a:xfrm>
-            <a:off x="1993392" y="2148840"/>
+            <a:off x="1993392" y="2194560"/>
             <a:ext cx="182880" cy="182880"/>
           </a:xfrm>
           <a:prstGeom prst="rect">
@@ -5701,14 +5214,14 @@
       </p:pic>
       <p:sp>
         <p:nvSpPr>
-          <p:cNvPr id="11" name="step 2 card"/>
+          <p:cNvPr id="10" name="step 2 card"/>
           <p:cNvSpPr/>
           <p:nvPr/>
         </p:nvSpPr>
         <p:spPr>
           <a:xfrm>
-            <a:off x="2139696" y="1280160"/>
-            <a:ext cx="1572768" cy="1920240"/>
+            <a:off x="2139696" y="1325880"/>
+            <a:ext cx="1572768" cy="1691640"/>
           </a:xfrm>
           <a:prstGeom prst="rect">
             <a:avLst/>
@@ -5726,13 +5239,13 @@
       </p:sp>
       <p:sp>
         <p:nvSpPr>
-          <p:cNvPr id="12" name="step number 2"/>
+          <p:cNvPr id="11" name="step number 2"/>
           <p:cNvSpPr/>
           <p:nvPr/>
         </p:nvSpPr>
         <p:spPr>
           <a:xfrm>
-            <a:off x="2249424" y="1389888"/>
+            <a:off x="2249424" y="1435608"/>
             <a:ext cx="310896" cy="310896"/>
           </a:xfrm>
           <a:prstGeom prst="rect">
@@ -5751,13 +5264,13 @@
       </p:sp>
       <p:sp>
         <p:nvSpPr>
-          <p:cNvPr id="13" name="step number text 2"/>
-          <p:cNvSpPr txBox="1"/>
-          <p:nvPr/>
-        </p:nvSpPr>
-        <p:spPr>
-          <a:xfrm>
-            <a:off x="2249424" y="1389888"/>
+          <p:cNvPr id="12" name="step number text 2"/>
+          <p:cNvSpPr txBox="1"/>
+          <p:nvPr/>
+        </p:nvSpPr>
+        <p:spPr>
+          <a:xfrm>
+            <a:off x="2249424" y="1435608"/>
             <a:ext cx="310896" cy="310896"/>
           </a:xfrm>
           <a:prstGeom prst="rect">
@@ -5787,13 +5300,13 @@
       </p:sp>
       <p:sp>
         <p:nvSpPr>
-          <p:cNvPr id="14" name="step title 2"/>
-          <p:cNvSpPr txBox="1"/>
-          <p:nvPr/>
-        </p:nvSpPr>
-        <p:spPr>
-          <a:xfrm>
-            <a:off x="2633472" y="1371600"/>
+          <p:cNvPr id="13" name="step title 2"/>
+          <p:cNvSpPr txBox="1"/>
+          <p:nvPr/>
+        </p:nvSpPr>
+        <p:spPr>
+          <a:xfrm>
+            <a:off x="2633472" y="1417320"/>
             <a:ext cx="987552" cy="347472"/>
           </a:xfrm>
           <a:prstGeom prst="rect">
@@ -5823,50 +5336,14 @@
       </p:sp>
       <p:sp>
         <p:nvSpPr>
-          <p:cNvPr id="15" name="step when 2"/>
-          <p:cNvSpPr txBox="1"/>
-          <p:nvPr/>
-        </p:nvSpPr>
-        <p:spPr>
-          <a:xfrm>
-            <a:off x="2249424" y="1783080"/>
-            <a:ext cx="1353312" cy="228600"/>
-          </a:xfrm>
-          <a:prstGeom prst="rect">
-            <a:avLst/>
-          </a:prstGeom>
-          <a:noFill/>
-          <a:ln/>
-        </p:spPr>
-        <p:txBody>
-          <a:bodyPr wrap="square" lIns="0" tIns="0" rIns="0" bIns="0" rtlCol="0" anchor="ctr"/>
-          <a:lstStyle/>
-          <a:p>
-            <a:pPr indent="0" marL="0">
-              <a:buNone/>
-            </a:pPr>
-            <a:r>
-              <a:rPr lang="en-US" sz="1000" b="1" dirty="0">
-                <a:solidFill>
-                  <a:schemeClr val="accent2"/>
-                </a:solidFill>
-              </a:rPr>
-              <a:t>Days 2 to 3</a:t>
-            </a:r>
-            <a:endParaRPr lang="en-US" sz="1000" dirty="0"/>
-          </a:p>
-        </p:txBody>
-      </p:sp>
-      <p:sp>
-        <p:nvSpPr>
-          <p:cNvPr id="16" name="step text 2"/>
-          <p:cNvSpPr txBox="1"/>
-          <p:nvPr/>
-        </p:nvSpPr>
-        <p:spPr>
-          <a:xfrm>
-            <a:off x="2249424" y="2011680"/>
-            <a:ext cx="1353312" cy="1143000"/>
+          <p:cNvPr id="14" name="step text 2"/>
+          <p:cNvSpPr txBox="1"/>
+          <p:nvPr/>
+        </p:nvSpPr>
+        <p:spPr>
+          <a:xfrm>
+            <a:off x="2249424" y="1892808"/>
+            <a:ext cx="1353312" cy="1280160"/>
           </a:xfrm>
           <a:prstGeom prst="rect">
             <a:avLst/>
@@ -5882,20 +5359,20 @@
               <a:buNone/>
             </a:pPr>
             <a:r>
-              <a:rPr lang="en-US" sz="1050" dirty="0">
+              <a:rPr lang="en-US" sz="1150" dirty="0">
                 <a:solidFill>
                   <a:schemeClr val="accent3"/>
                 </a:solidFill>
               </a:rPr>
               <a:t>One page of billing rules per client, each tied to its source paragraph.</a:t>
             </a:r>
-            <a:endParaRPr lang="en-US" sz="1050" dirty="0"/>
+            <a:endParaRPr lang="en-US" sz="1150" dirty="0"/>
           </a:p>
         </p:txBody>
       </p:sp>
       <p:pic>
         <p:nvPicPr>
-          <p:cNvPr id="17" name="step arrow 2" descr="preencoded.png">    </p:cNvPr>
+          <p:cNvPr id="15" name="step arrow 2" descr="preencoded.png">    </p:cNvPr>
           <p:cNvPicPr>
             <a:picLocks noChangeAspect="1"/>
           </p:cNvPicPr>
@@ -5909,7 +5386,7 @@
         </p:blipFill>
         <p:spPr>
           <a:xfrm>
-            <a:off x="3675888" y="2148840"/>
+            <a:off x="3675888" y="2194560"/>
             <a:ext cx="182880" cy="182880"/>
           </a:xfrm>
           <a:prstGeom prst="rect">
@@ -5919,14 +5396,14 @@
       </p:pic>
       <p:sp>
         <p:nvSpPr>
-          <p:cNvPr id="18" name="step 3 card"/>
+          <p:cNvPr id="16" name="step 3 card"/>
           <p:cNvSpPr/>
           <p:nvPr/>
         </p:nvSpPr>
         <p:spPr>
           <a:xfrm>
-            <a:off x="3822192" y="1280160"/>
-            <a:ext cx="1572768" cy="1920240"/>
+            <a:off x="3822192" y="1325880"/>
+            <a:ext cx="1572768" cy="1691640"/>
           </a:xfrm>
           <a:prstGeom prst="rect">
             <a:avLst/>
@@ -5944,13 +5421,13 @@
       </p:sp>
       <p:sp>
         <p:nvSpPr>
-          <p:cNvPr id="19" name="step number 3"/>
+          <p:cNvPr id="17" name="step number 3"/>
           <p:cNvSpPr/>
           <p:nvPr/>
         </p:nvSpPr>
         <p:spPr>
           <a:xfrm>
-            <a:off x="3931920" y="1389888"/>
+            <a:off x="3931920" y="1435608"/>
             <a:ext cx="310896" cy="310896"/>
           </a:xfrm>
           <a:prstGeom prst="rect">
@@ -5969,13 +5446,13 @@
       </p:sp>
       <p:sp>
         <p:nvSpPr>
-          <p:cNvPr id="20" name="step number text 3"/>
-          <p:cNvSpPr txBox="1"/>
-          <p:nvPr/>
-        </p:nvSpPr>
-        <p:spPr>
-          <a:xfrm>
-            <a:off x="3931920" y="1389888"/>
+          <p:cNvPr id="18" name="step number text 3"/>
+          <p:cNvSpPr txBox="1"/>
+          <p:nvPr/>
+        </p:nvSpPr>
+        <p:spPr>
+          <a:xfrm>
+            <a:off x="3931920" y="1435608"/>
             <a:ext cx="310896" cy="310896"/>
           </a:xfrm>
           <a:prstGeom prst="rect">
@@ -6005,13 +5482,13 @@
       </p:sp>
       <p:sp>
         <p:nvSpPr>
-          <p:cNvPr id="21" name="step title 3"/>
-          <p:cNvSpPr txBox="1"/>
-          <p:nvPr/>
-        </p:nvSpPr>
-        <p:spPr>
-          <a:xfrm>
-            <a:off x="4315968" y="1371600"/>
+          <p:cNvPr id="19" name="step title 3"/>
+          <p:cNvSpPr txBox="1"/>
+          <p:nvPr/>
+        </p:nvSpPr>
+        <p:spPr>
+          <a:xfrm>
+            <a:off x="4315968" y="1417320"/>
             <a:ext cx="987552" cy="347472"/>
           </a:xfrm>
           <a:prstGeom prst="rect">
@@ -6041,50 +5518,14 @@
       </p:sp>
       <p:sp>
         <p:nvSpPr>
-          <p:cNvPr id="22" name="step when 3"/>
-          <p:cNvSpPr txBox="1"/>
-          <p:nvPr/>
-        </p:nvSpPr>
-        <p:spPr>
-          <a:xfrm>
-            <a:off x="3931920" y="1783080"/>
-            <a:ext cx="1353312" cy="228600"/>
-          </a:xfrm>
-          <a:prstGeom prst="rect">
-            <a:avLst/>
-          </a:prstGeom>
-          <a:noFill/>
-          <a:ln/>
-        </p:spPr>
-        <p:txBody>
-          <a:bodyPr wrap="square" lIns="0" tIns="0" rIns="0" bIns="0" rtlCol="0" anchor="ctr"/>
-          <a:lstStyle/>
-          <a:p>
-            <a:pPr indent="0" marL="0">
-              <a:buNone/>
-            </a:pPr>
-            <a:r>
-              <a:rPr lang="en-US" sz="1000" b="1" dirty="0">
-                <a:solidFill>
-                  <a:schemeClr val="accent2"/>
-                </a:solidFill>
-              </a:rPr>
-              <a:t>Day 4</a:t>
-            </a:r>
-            <a:endParaRPr lang="en-US" sz="1000" dirty="0"/>
-          </a:p>
-        </p:txBody>
-      </p:sp>
-      <p:sp>
-        <p:nvSpPr>
-          <p:cNvPr id="23" name="step text 3"/>
-          <p:cNvSpPr txBox="1"/>
-          <p:nvPr/>
-        </p:nvSpPr>
-        <p:spPr>
-          <a:xfrm>
-            <a:off x="3931920" y="2011680"/>
-            <a:ext cx="1353312" cy="1143000"/>
+          <p:cNvPr id="20" name="step text 3"/>
+          <p:cNvSpPr txBox="1"/>
+          <p:nvPr/>
+        </p:nvSpPr>
+        <p:spPr>
+          <a:xfrm>
+            <a:off x="3931920" y="1892808"/>
+            <a:ext cx="1353312" cy="1280160"/>
           </a:xfrm>
           <a:prstGeom prst="rect">
             <a:avLst/>
@@ -6100,20 +5541,20 @@
               <a:buNone/>
             </a:pPr>
             <a:r>
-              <a:rPr lang="en-US" sz="1050" dirty="0">
+              <a:rPr lang="en-US" sz="1150" dirty="0">
                 <a:solidFill>
                   <a:schemeClr val="accent3"/>
                 </a:solidFill>
               </a:rPr>
-              <a:t>Runs on firm hardware. Sign-on, roles and audit log shown in one sitting.</a:t>
-            </a:r>
-            <a:endParaRPr lang="en-US" sz="1050" dirty="0"/>
+              <a:t>Where it runs, who can see what, and what is logged.</a:t>
+            </a:r>
+            <a:endParaRPr lang="en-US" sz="1150" dirty="0"/>
           </a:p>
         </p:txBody>
       </p:sp>
       <p:pic>
         <p:nvPicPr>
-          <p:cNvPr id="24" name="step arrow 3" descr="preencoded.png">    </p:cNvPr>
+          <p:cNvPr id="21" name="step arrow 3" descr="preencoded.png">    </p:cNvPr>
           <p:cNvPicPr>
             <a:picLocks noChangeAspect="1"/>
           </p:cNvPicPr>
@@ -6127,7 +5568,7 @@
         </p:blipFill>
         <p:spPr>
           <a:xfrm>
-            <a:off x="5358384" y="2148840"/>
+            <a:off x="5358384" y="2194560"/>
             <a:ext cx="182880" cy="182880"/>
           </a:xfrm>
           <a:prstGeom prst="rect">
@@ -6137,14 +5578,14 @@
       </p:pic>
       <p:sp>
         <p:nvSpPr>
-          <p:cNvPr id="25" name="step 4 card"/>
+          <p:cNvPr id="22" name="step 4 card"/>
           <p:cNvSpPr/>
           <p:nvPr/>
         </p:nvSpPr>
         <p:spPr>
           <a:xfrm>
-            <a:off x="5504688" y="1280160"/>
-            <a:ext cx="1572768" cy="1920240"/>
+            <a:off x="5504688" y="1325880"/>
+            <a:ext cx="1572768" cy="1691640"/>
           </a:xfrm>
           <a:prstGeom prst="rect">
             <a:avLst/>
@@ -6162,13 +5603,13 @@
       </p:sp>
       <p:sp>
         <p:nvSpPr>
-          <p:cNvPr id="26" name="step number 4"/>
+          <p:cNvPr id="23" name="step number 4"/>
           <p:cNvSpPr/>
           <p:nvPr/>
         </p:nvSpPr>
         <p:spPr>
           <a:xfrm>
-            <a:off x="5614416" y="1389888"/>
+            <a:off x="5614416" y="1435608"/>
             <a:ext cx="310896" cy="310896"/>
           </a:xfrm>
           <a:prstGeom prst="rect">
@@ -6187,13 +5628,13 @@
       </p:sp>
       <p:sp>
         <p:nvSpPr>
-          <p:cNvPr id="27" name="step number text 4"/>
-          <p:cNvSpPr txBox="1"/>
-          <p:nvPr/>
-        </p:nvSpPr>
-        <p:spPr>
-          <a:xfrm>
-            <a:off x="5614416" y="1389888"/>
+          <p:cNvPr id="24" name="step number text 4"/>
+          <p:cNvSpPr txBox="1"/>
+          <p:nvPr/>
+        </p:nvSpPr>
+        <p:spPr>
+          <a:xfrm>
+            <a:off x="5614416" y="1435608"/>
             <a:ext cx="310896" cy="310896"/>
           </a:xfrm>
           <a:prstGeom prst="rect">
@@ -6223,13 +5664,13 @@
       </p:sp>
       <p:sp>
         <p:nvSpPr>
-          <p:cNvPr id="28" name="step title 4"/>
-          <p:cNvSpPr txBox="1"/>
-          <p:nvPr/>
-        </p:nvSpPr>
-        <p:spPr>
-          <a:xfrm>
-            <a:off x="5998464" y="1371600"/>
+          <p:cNvPr id="25" name="step title 4"/>
+          <p:cNvSpPr txBox="1"/>
+          <p:nvPr/>
+        </p:nvSpPr>
+        <p:spPr>
+          <a:xfrm>
+            <a:off x="5998464" y="1417320"/>
             <a:ext cx="987552" cy="347472"/>
           </a:xfrm>
           <a:prstGeom prst="rect">
@@ -6259,50 +5700,14 @@
       </p:sp>
       <p:sp>
         <p:nvSpPr>
-          <p:cNvPr id="29" name="step when 4"/>
-          <p:cNvSpPr txBox="1"/>
-          <p:nvPr/>
-        </p:nvSpPr>
-        <p:spPr>
-          <a:xfrm>
-            <a:off x="5614416" y="1783080"/>
-            <a:ext cx="1353312" cy="228600"/>
-          </a:xfrm>
-          <a:prstGeom prst="rect">
-            <a:avLst/>
-          </a:prstGeom>
-          <a:noFill/>
-          <a:ln/>
-        </p:spPr>
-        <p:txBody>
-          <a:bodyPr wrap="square" lIns="0" tIns="0" rIns="0" bIns="0" rtlCol="0" anchor="ctr"/>
-          <a:lstStyle/>
-          <a:p>
-            <a:pPr indent="0" marL="0">
-              <a:buNone/>
-            </a:pPr>
-            <a:r>
-              <a:rPr lang="en-US" sz="1000" b="1" dirty="0">
-                <a:solidFill>
-                  <a:schemeClr val="accent2"/>
-                </a:solidFill>
-              </a:rPr>
-              <a:t>Week 2</a:t>
-            </a:r>
-            <a:endParaRPr lang="en-US" sz="1000" dirty="0"/>
-          </a:p>
-        </p:txBody>
-      </p:sp>
-      <p:sp>
-        <p:nvSpPr>
-          <p:cNvPr id="30" name="step text 4"/>
-          <p:cNvSpPr txBox="1"/>
-          <p:nvPr/>
-        </p:nvSpPr>
-        <p:spPr>
-          <a:xfrm>
-            <a:off x="5614416" y="2011680"/>
-            <a:ext cx="1353312" cy="1143000"/>
+          <p:cNvPr id="26" name="step text 4"/>
+          <p:cNvSpPr txBox="1"/>
+          <p:nvPr/>
+        </p:nvSpPr>
+        <p:spPr>
+          <a:xfrm>
+            <a:off x="5614416" y="1892808"/>
+            <a:ext cx="1353312" cy="1280160"/>
           </a:xfrm>
           <a:prstGeom prst="rect">
             <a:avLst/>
@@ -6318,20 +5723,20 @@
               <a:buNone/>
             </a:pPr>
             <a:r>
-              <a:rPr lang="en-US" sz="1050" dirty="0">
+              <a:rPr lang="en-US" sz="1150" dirty="0">
                 <a:solidFill>
                   <a:schemeClr val="accent3"/>
                 </a:solidFill>
               </a:rPr>
               <a:t>One billing partner, one client's prebills. A person decides every change.</a:t>
             </a:r>
-            <a:endParaRPr lang="en-US" sz="1050" dirty="0"/>
+            <a:endParaRPr lang="en-US" sz="1150" dirty="0"/>
           </a:p>
         </p:txBody>
       </p:sp>
       <p:pic>
         <p:nvPicPr>
-          <p:cNvPr id="31" name="step arrow 4" descr="preencoded.png">    </p:cNvPr>
+          <p:cNvPr id="27" name="step arrow 4" descr="preencoded.png">    </p:cNvPr>
           <p:cNvPicPr>
             <a:picLocks noChangeAspect="1"/>
           </p:cNvPicPr>
@@ -6345,7 +5750,7 @@
         </p:blipFill>
         <p:spPr>
           <a:xfrm>
-            <a:off x="7040880" y="2148840"/>
+            <a:off x="7040880" y="2194560"/>
             <a:ext cx="182880" cy="182880"/>
           </a:xfrm>
           <a:prstGeom prst="rect">
@@ -6355,14 +5760,14 @@
       </p:pic>
       <p:sp>
         <p:nvSpPr>
-          <p:cNvPr id="32" name="step 5 card"/>
+          <p:cNvPr id="28" name="step 5 card"/>
           <p:cNvSpPr/>
           <p:nvPr/>
         </p:nvSpPr>
         <p:spPr>
           <a:xfrm>
-            <a:off x="7187184" y="1280160"/>
-            <a:ext cx="1572768" cy="1920240"/>
+            <a:off x="7187184" y="1325880"/>
+            <a:ext cx="1572768" cy="1691640"/>
           </a:xfrm>
           <a:prstGeom prst="rect">
             <a:avLst/>
@@ -6380,13 +5785,13 @@
       </p:sp>
       <p:sp>
         <p:nvSpPr>
-          <p:cNvPr id="33" name="step number 5"/>
+          <p:cNvPr id="29" name="step number 5"/>
           <p:cNvSpPr/>
           <p:nvPr/>
         </p:nvSpPr>
         <p:spPr>
           <a:xfrm>
-            <a:off x="7296912" y="1389888"/>
+            <a:off x="7296912" y="1435608"/>
             <a:ext cx="310896" cy="310896"/>
           </a:xfrm>
           <a:prstGeom prst="rect">
@@ -6405,13 +5810,13 @@
       </p:sp>
       <p:sp>
         <p:nvSpPr>
-          <p:cNvPr id="34" name="step number text 5"/>
-          <p:cNvSpPr txBox="1"/>
-          <p:nvPr/>
-        </p:nvSpPr>
-        <p:spPr>
-          <a:xfrm>
-            <a:off x="7296912" y="1389888"/>
+          <p:cNvPr id="30" name="step number text 5"/>
+          <p:cNvSpPr txBox="1"/>
+          <p:nvPr/>
+        </p:nvSpPr>
+        <p:spPr>
+          <a:xfrm>
+            <a:off x="7296912" y="1435608"/>
             <a:ext cx="310896" cy="310896"/>
           </a:xfrm>
           <a:prstGeom prst="rect">
@@ -6441,13 +5846,13 @@
       </p:sp>
       <p:sp>
         <p:nvSpPr>
-          <p:cNvPr id="35" name="step title 5"/>
-          <p:cNvSpPr txBox="1"/>
-          <p:nvPr/>
-        </p:nvSpPr>
-        <p:spPr>
-          <a:xfrm>
-            <a:off x="7680960" y="1371600"/>
+          <p:cNvPr id="31" name="step title 5"/>
+          <p:cNvSpPr txBox="1"/>
+          <p:nvPr/>
+        </p:nvSpPr>
+        <p:spPr>
+          <a:xfrm>
+            <a:off x="7680960" y="1417320"/>
             <a:ext cx="987552" cy="347472"/>
           </a:xfrm>
           <a:prstGeom prst="rect">
@@ -6477,50 +5882,14 @@
       </p:sp>
       <p:sp>
         <p:nvSpPr>
-          <p:cNvPr id="36" name="step when 5"/>
-          <p:cNvSpPr txBox="1"/>
-          <p:nvPr/>
-        </p:nvSpPr>
-        <p:spPr>
-          <a:xfrm>
-            <a:off x="7296912" y="1783080"/>
-            <a:ext cx="1353312" cy="228600"/>
-          </a:xfrm>
-          <a:prstGeom prst="rect">
-            <a:avLst/>
-          </a:prstGeom>
-          <a:noFill/>
-          <a:ln/>
-        </p:spPr>
-        <p:txBody>
-          <a:bodyPr wrap="square" lIns="0" tIns="0" rIns="0" bIns="0" rtlCol="0" anchor="ctr"/>
-          <a:lstStyle/>
-          <a:p>
-            <a:pPr indent="0" marL="0">
-              <a:buNone/>
-            </a:pPr>
-            <a:r>
-              <a:rPr lang="en-US" sz="1000" b="1" dirty="0">
-                <a:solidFill>
-                  <a:schemeClr val="accent2"/>
-                </a:solidFill>
-              </a:rPr>
-              <a:t>Week 3 on</a:t>
-            </a:r>
-            <a:endParaRPr lang="en-US" sz="1000" dirty="0"/>
-          </a:p>
-        </p:txBody>
-      </p:sp>
-      <p:sp>
-        <p:nvSpPr>
-          <p:cNvPr id="37" name="step text 5"/>
-          <p:cNvSpPr txBox="1"/>
-          <p:nvPr/>
-        </p:nvSpPr>
-        <p:spPr>
-          <a:xfrm>
-            <a:off x="7296912" y="2011680"/>
-            <a:ext cx="1353312" cy="1143000"/>
+          <p:cNvPr id="32" name="step text 5"/>
+          <p:cNvSpPr txBox="1"/>
+          <p:nvPr/>
+        </p:nvSpPr>
+        <p:spPr>
+          <a:xfrm>
+            <a:off x="7296912" y="1892808"/>
+            <a:ext cx="1353312" cy="1280160"/>
           </a:xfrm>
           <a:prstGeom prst="rect">
             <a:avLst/>
@@ -6536,20 +5905,20 @@
               <a:buNone/>
             </a:pPr>
             <a:r>
-              <a:rPr lang="en-US" sz="1050" dirty="0">
+              <a:rPr lang="en-US" sz="1150" dirty="0">
                 <a:solidFill>
                   <a:schemeClr val="accent3"/>
                 </a:solidFill>
               </a:rPr>
               <a:t>Flags appear in the prebill review that already happens.</a:t>
             </a:r>
-            <a:endParaRPr lang="en-US" sz="1050" dirty="0"/>
-          </a:p>
-        </p:txBody>
-      </p:sp>
-      <p:sp>
-        <p:nvSpPr>
-          <p:cNvPr id="38" name="why easy heading"/>
+            <a:endParaRPr lang="en-US" sz="1150" dirty="0"/>
+          </a:p>
+        </p:txBody>
+      </p:sp>
+      <p:sp>
+        <p:nvSpPr>
+          <p:cNvPr id="33" name="why easy heading"/>
           <p:cNvSpPr txBox="1"/>
           <p:nvPr/>
         </p:nvSpPr>
@@ -6585,7 +5954,7 @@
       </p:sp>
       <p:sp>
         <p:nvSpPr>
-          <p:cNvPr id="39" name="icon square"/>
+          <p:cNvPr id="34" name="icon square"/>
           <p:cNvSpPr/>
           <p:nvPr/>
         </p:nvSpPr>
@@ -6610,7 +5979,7 @@
       </p:sp>
       <p:pic>
         <p:nvPicPr>
-          <p:cNvPr id="40" name="list icon" descr="preencoded.png">    </p:cNvPr>
+          <p:cNvPr id="35" name="list icon" descr="preencoded.png">    </p:cNvPr>
           <p:cNvPicPr>
             <a:picLocks noChangeAspect="1"/>
           </p:cNvPicPr>
@@ -6634,7 +6003,7 @@
       </p:pic>
       <p:sp>
         <p:nvSpPr>
-          <p:cNvPr id="41" name="easy 1"/>
+          <p:cNvPr id="36" name="easy 1"/>
           <p:cNvSpPr txBox="1"/>
           <p:nvPr/>
         </p:nvSpPr>
@@ -6670,7 +6039,7 @@
       </p:sp>
       <p:sp>
         <p:nvSpPr>
-          <p:cNvPr id="42" name="icon square"/>
+          <p:cNvPr id="37" name="icon square"/>
           <p:cNvSpPr/>
           <p:nvPr/>
         </p:nvSpPr>
@@ -6695,7 +6064,7 @@
       </p:sp>
       <p:pic>
         <p:nvPicPr>
-          <p:cNvPr id="43" name="check icon" descr="preencoded.png">    </p:cNvPr>
+          <p:cNvPr id="38" name="check icon" descr="preencoded.png">    </p:cNvPr>
           <p:cNvPicPr>
             <a:picLocks noChangeAspect="1"/>
           </p:cNvPicPr>
@@ -6719,7 +6088,7 @@
       </p:pic>
       <p:sp>
         <p:nvSpPr>
-          <p:cNvPr id="44" name="easy 2"/>
+          <p:cNvPr id="39" name="easy 2"/>
           <p:cNvSpPr txBox="1"/>
           <p:nvPr/>
         </p:nvSpPr>
@@ -6755,7 +6124,7 @@
       </p:sp>
       <p:sp>
         <p:nvSpPr>
-          <p:cNvPr id="45" name="icon square"/>
+          <p:cNvPr id="40" name="icon square"/>
           <p:cNvSpPr/>
           <p:nvPr/>
         </p:nvSpPr>
@@ -6780,7 +6149,7 @@
       </p:sp>
       <p:pic>
         <p:nvPicPr>
-          <p:cNvPr id="46" name="settings icon" descr="preencoded.png">    </p:cNvPr>
+          <p:cNvPr id="41" name="settings icon" descr="preencoded.png">    </p:cNvPr>
           <p:cNvPicPr>
             <a:picLocks noChangeAspect="1"/>
           </p:cNvPicPr>
@@ -6804,7 +6173,7 @@
       </p:pic>
       <p:sp>
         <p:nvSpPr>
-          <p:cNvPr id="47" name="easy 3"/>
+          <p:cNvPr id="42" name="easy 3"/>
           <p:cNvSpPr txBox="1"/>
           <p:nvPr/>
         </p:nvSpPr>
@@ -6840,7 +6209,7 @@
       </p:sp>
       <p:sp>
         <p:nvSpPr>
-          <p:cNvPr id="48" name="icon square"/>
+          <p:cNvPr id="43" name="icon square"/>
           <p:cNvSpPr/>
           <p:nvPr/>
         </p:nvSpPr>
@@ -6865,7 +6234,7 @@
       </p:sp>
       <p:pic>
         <p:nvPicPr>
-          <p:cNvPr id="49" name="shield icon" descr="preencoded.png">    </p:cNvPr>
+          <p:cNvPr id="44" name="shield icon" descr="preencoded.png">    </p:cNvPr>
           <p:cNvPicPr>
             <a:picLocks noChangeAspect="1"/>
           </p:cNvPicPr>
@@ -6889,7 +6258,7 @@
       </p:pic>
       <p:sp>
         <p:nvSpPr>
-          <p:cNvPr id="50" name="easy 4"/>
+          <p:cNvPr id="45" name="easy 4"/>
           <p:cNvSpPr txBox="1"/>
           <p:nvPr/>
         </p:nvSpPr>
@@ -6925,7 +6294,7 @@
       </p:sp>
       <p:sp>
         <p:nvSpPr>
-          <p:cNvPr id="51" name="long-term goal card"/>
+          <p:cNvPr id="46" name="long-term goal card"/>
           <p:cNvSpPr/>
           <p:nvPr/>
         </p:nvSpPr>
@@ -6950,7 +6319,7 @@
       </p:sp>
       <p:sp>
         <p:nvSpPr>
-          <p:cNvPr id="52" name="long-term goal heading"/>
+          <p:cNvPr id="47" name="long-term goal heading"/>
           <p:cNvSpPr txBox="1"/>
           <p:nvPr/>
         </p:nvSpPr>
@@ -6986,7 +6355,7 @@
       </p:sp>
       <p:sp>
         <p:nvSpPr>
-          <p:cNvPr id="53" name="long-term goal text"/>
+          <p:cNvPr id="48" name="long-term goal text"/>
           <p:cNvSpPr txBox="1"/>
           <p:nvPr/>
         </p:nvSpPr>

--- a/downloads/AI-ideas-Myles-Parslow.pptx
+++ b/downloads/AI-ideas-Myles-Parslow.pptx
@@ -111,7 +111,7 @@
   <p:extLst>
     <p:ext uri="{521415D9-36F7-43E2-AB2F-B90AF26B5E84}">
       <p14:sectionLst xmlns:p14="http://schemas.microsoft.com/office/powerpoint/2010/main">
-        <p14:section name="AI for the firm" id="{2fd9f0a0-1808-5e63-c29d-d98df3f3791b}">
+        <p14:section name="AI for the firm" id="{2eabaa70-76fe-eeca-849d-0cb12522227b}">
           <p14:sldIdLst>
             <p14:sldId id="256"/>
             <p14:sldId id="257"/>
@@ -1223,7 +1223,7 @@
                   <a:srgbClr val="2D4459"/>
                 </a:solidFill>
               </a:rPr>
-              <a:t>I have built fifteen working legal tools</a:t>
+              <a:t>What I have built so far: fifteen working legal tools</a:t>
             </a:r>
             <a:endParaRPr lang="en-US" sz="2600" dirty="0"/>
           </a:p>
@@ -1261,7 +1261,7 @@
                   <a:schemeClr val="tx2"/>
                 </a:solidFill>
               </a:rPr>
-              <a:t>Built in my free time with invented clients. Orange marks the three that could be used right away.</a:t>
+              <a:t>Built on my own time with invented clients. Orange marks three that could be used right away.</a:t>
             </a:r>
             <a:endParaRPr lang="en-US" sz="1300" dirty="0"/>
           </a:p>
@@ -2629,7 +2629,7 @@
                   <a:srgbClr val="2D4459"/>
                 </a:solidFill>
               </a:rPr>
-              <a:t>Three of them could be used right away</a:t>
+              <a:t>How I use AI: start with the work, then build and prove it</a:t>
             </a:r>
             <a:endParaRPr lang="en-US" sz="2600" dirty="0"/>
           </a:p>
@@ -2667,7 +2667,7 @@
                   <a:schemeClr val="tx2"/>
                 </a:solidFill>
               </a:rPr>
-              <a:t>None needs a connection to firm systems. Each runs in a browser on an approved account, and a person reviews every output.</a:t>
+              <a:t>The same four steps for every tool, using whichever AI fits the job.</a:t>
             </a:r>
             <a:endParaRPr lang="en-US" sz="1300" dirty="0"/>
           </a:p>
@@ -2675,14 +2675,14 @@
       </p:sp>
       <p:sp>
         <p:nvSpPr>
-          <p:cNvPr id="4" name="Guideline Guard card"/>
+          <p:cNvPr id="4" name="Start with the work card"/>
           <p:cNvSpPr/>
           <p:nvPr/>
         </p:nvSpPr>
         <p:spPr>
           <a:xfrm>
             <a:off x="457200" y="1280160"/>
-            <a:ext cx="2651760" cy="3383280"/>
+            <a:ext cx="1920240" cy="1965960"/>
           </a:xfrm>
           <a:prstGeom prst="rect">
             <a:avLst/>
@@ -2725,7 +2725,7 @@
       </p:sp>
       <p:pic>
         <p:nvPicPr>
-          <p:cNvPr id="6" name="dollar icon" descr="preencoded.png">    </p:cNvPr>
+          <p:cNvPr id="6" name="users icon" descr="preencoded.png">    </p:cNvPr>
           <p:cNvPicPr>
             <a:picLocks noChangeAspect="1"/>
           </p:cNvPicPr>
@@ -2749,14 +2749,14 @@
       </p:pic>
       <p:sp>
         <p:nvSpPr>
-          <p:cNvPr id="7" name="Guideline Guard name"/>
-          <p:cNvSpPr txBox="1"/>
-          <p:nvPr/>
-        </p:nvSpPr>
-        <p:spPr>
-          <a:xfrm>
-            <a:off x="1097280" y="1389888"/>
-            <a:ext cx="1874520" cy="438912"/>
+          <p:cNvPr id="7" name="Start with the work name"/>
+          <p:cNvSpPr txBox="1"/>
+          <p:nvPr/>
+        </p:nvSpPr>
+        <p:spPr>
+          <a:xfrm>
+            <a:off x="594360" y="1874520"/>
+            <a:ext cx="1645920" cy="292608"/>
           </a:xfrm>
           <a:prstGeom prst="rect">
             <a:avLst/>
@@ -2772,27 +2772,27 @@
               <a:buNone/>
             </a:pPr>
             <a:r>
-              <a:rPr lang="en-US" sz="1400" b="1" dirty="0">
+              <a:rPr lang="en-US" sz="1300" b="1" dirty="0">
                 <a:solidFill>
                   <a:schemeClr val="tx1"/>
                 </a:solidFill>
               </a:rPr>
-              <a:t>Guideline Guard</a:t>
-            </a:r>
-            <a:endParaRPr lang="en-US" sz="1400" dirty="0"/>
-          </a:p>
-        </p:txBody>
-      </p:sp>
-      <p:sp>
-        <p:nvSpPr>
-          <p:cNvPr id="8" name="Guideline Guard what"/>
-          <p:cNvSpPr txBox="1"/>
-          <p:nvPr/>
-        </p:nvSpPr>
-        <p:spPr>
-          <a:xfrm>
-            <a:off x="594360" y="1965960"/>
-            <a:ext cx="2377440" cy="1143000"/>
+              <a:t>Start with the work</a:t>
+            </a:r>
+            <a:endParaRPr lang="en-US" sz="1300" dirty="0"/>
+          </a:p>
+        </p:txBody>
+      </p:sp>
+      <p:sp>
+        <p:nvSpPr>
+          <p:cNvPr id="8" name="Start with the work text"/>
+          <p:cNvSpPr txBox="1"/>
+          <p:nvPr/>
+        </p:nvSpPr>
+        <p:spPr>
+          <a:xfrm>
+            <a:off x="594360" y="2194560"/>
+            <a:ext cx="1645920" cy="1005840"/>
           </a:xfrm>
           <a:prstGeom prst="rect">
             <a:avLst/>
@@ -2808,121 +2808,51 @@
               <a:buNone/>
             </a:pPr>
             <a:r>
-              <a:rPr lang="en-US" sz="1150" dirty="0">
+              <a:rPr lang="en-US" sz="1100" dirty="0">
                 <a:solidFill>
                   <a:schemeClr val="tx1"/>
                 </a:solidFill>
               </a:rPr>
-              <a:t>Checks each prebill against that client's outside counsel guidelines, quotes the rule it applies and proposes the fix.</a:t>
-            </a:r>
-            <a:endParaRPr lang="en-US" sz="1150" dirty="0"/>
-          </a:p>
-        </p:txBody>
-      </p:sp>
-      <p:sp>
-        <p:nvSpPr>
-          <p:cNvPr id="9" name="Guideline Guard helps"/>
-          <p:cNvSpPr txBox="1"/>
-          <p:nvPr/>
-        </p:nvSpPr>
-        <p:spPr>
-          <a:xfrm>
-            <a:off x="594360" y="3154680"/>
-            <a:ext cx="2377440" cy="731520"/>
-          </a:xfrm>
-          <a:prstGeom prst="rect">
-            <a:avLst/>
-          </a:prstGeom>
-          <a:noFill/>
-          <a:ln/>
-        </p:spPr>
-        <p:txBody>
-          <a:bodyPr wrap="square" lIns="0" tIns="0" rIns="0" bIns="0" rtlCol="0" anchor="t"/>
-          <a:lstStyle/>
-          <a:p>
-            <a:pPr indent="0" marL="0">
-              <a:buNone/>
-            </a:pPr>
-            <a:r>
-              <a:rPr lang="en-US" sz="1050" b="1" dirty="0">
-                <a:solidFill>
-                  <a:schemeClr val="accent5"/>
-                </a:solidFill>
-              </a:rPr>
-              <a:t>Helps: </a:t>
-            </a:r>
-            <a:pPr indent="0" marL="0">
-              <a:buNone/>
-            </a:pPr>
-            <a:r>
-              <a:rPr lang="en-US" sz="1050" dirty="0">
-                <a:solidFill>
-                  <a:schemeClr val="tx1"/>
-                </a:solidFill>
-              </a:rPr>
-              <a:t>Billing and responsible partners. Fewer write-offs and rejected invoices.</a:t>
-            </a:r>
-            <a:endParaRPr lang="en-US" sz="1050" dirty="0"/>
-          </a:p>
-        </p:txBody>
-      </p:sp>
-      <p:sp>
-        <p:nvSpPr>
-          <p:cNvPr id="10" name="Guideline Guard needs"/>
-          <p:cNvSpPr txBox="1"/>
-          <p:nvPr/>
-        </p:nvSpPr>
-        <p:spPr>
-          <a:xfrm>
-            <a:off x="594360" y="3931920"/>
-            <a:ext cx="2377440" cy="640080"/>
-          </a:xfrm>
-          <a:prstGeom prst="rect">
-            <a:avLst/>
-          </a:prstGeom>
-          <a:noFill/>
-          <a:ln/>
-        </p:spPr>
-        <p:txBody>
-          <a:bodyPr wrap="square" lIns="0" tIns="0" rIns="0" bIns="0" rtlCol="0" anchor="t"/>
-          <a:lstStyle/>
-          <a:p>
-            <a:pPr indent="0" marL="0">
-              <a:buNone/>
-            </a:pPr>
-            <a:r>
-              <a:rPr lang="en-US" sz="1050" b="1" dirty="0">
-                <a:solidFill>
-                  <a:schemeClr val="accent5"/>
-                </a:solidFill>
-              </a:rPr>
-              <a:t>To run it here: </a:t>
-            </a:r>
-            <a:pPr indent="0" marL="0">
-              <a:buNone/>
-            </a:pPr>
-            <a:r>
-              <a:rPr lang="en-US" sz="1050" dirty="0">
-                <a:solidFill>
-                  <a:schemeClr val="tx2"/>
-                </a:solidFill>
-              </a:rPr>
-              <a:t>The client's guidelines and the prebill.</a:t>
-            </a:r>
-            <a:endParaRPr lang="en-US" sz="1050" dirty="0"/>
-          </a:p>
-        </p:txBody>
-      </p:sp>
-      <p:sp>
-        <p:nvSpPr>
-          <p:cNvPr id="11" name="Party Finder card"/>
+              <a:t>Write down how the task is really done here, who touches it and which rules apply, before any screen is built.</a:t>
+            </a:r>
+            <a:endParaRPr lang="en-US" sz="1100" dirty="0"/>
+          </a:p>
+        </p:txBody>
+      </p:sp>
+      <p:pic>
+        <p:nvPicPr>
+          <p:cNvPr id="9" name="how arrow 1" descr="preencoded.png">    </p:cNvPr>
+          <p:cNvPicPr>
+            <a:picLocks noChangeAspect="1"/>
+          </p:cNvPicPr>
+          <p:nvPr/>
+        </p:nvPicPr>
+        <p:blipFill>
+          <a:blip r:embed="rId2"/>
+          <a:stretch>
+            <a:fillRect/>
+          </a:stretch>
+        </p:blipFill>
+        <p:spPr>
+          <a:xfrm>
+            <a:off x="2395728" y="2194560"/>
+            <a:ext cx="146304" cy="146304"/>
+          </a:xfrm>
+          <a:prstGeom prst="rect">
+            <a:avLst/>
+          </a:prstGeom>
+        </p:spPr>
+      </p:pic>
+      <p:sp>
+        <p:nvSpPr>
+          <p:cNvPr id="10" name="Build with AI card"/>
           <p:cNvSpPr/>
           <p:nvPr/>
         </p:nvSpPr>
         <p:spPr>
           <a:xfrm>
-            <a:off x="3291840" y="1280160"/>
-            <a:ext cx="2651760" cy="3383280"/>
+            <a:off x="2560320" y="1280160"/>
+            <a:ext cx="1920240" cy="1965960"/>
           </a:xfrm>
           <a:prstGeom prst="rect">
             <a:avLst/>
@@ -2940,13 +2870,13 @@
       </p:sp>
       <p:sp>
         <p:nvSpPr>
-          <p:cNvPr id="12" name="icon square"/>
+          <p:cNvPr id="11" name="icon square"/>
           <p:cNvSpPr/>
           <p:nvPr/>
         </p:nvSpPr>
         <p:spPr>
           <a:xfrm>
-            <a:off x="3429000" y="1417320"/>
+            <a:off x="2697480" y="1417320"/>
             <a:ext cx="384048" cy="384048"/>
           </a:xfrm>
           <a:prstGeom prst="rect">
@@ -2965,21 +2895,21 @@
       </p:sp>
       <p:pic>
         <p:nvPicPr>
-          <p:cNvPr id="13" name="users icon" descr="preencoded.png">    </p:cNvPr>
+          <p:cNvPr id="12" name="tool icon" descr="preencoded.png">    </p:cNvPr>
           <p:cNvPicPr>
             <a:picLocks noChangeAspect="1"/>
           </p:cNvPicPr>
           <p:nvPr/>
         </p:nvPicPr>
         <p:blipFill>
-          <a:blip r:embed="rId2"/>
+          <a:blip r:embed="rId3"/>
           <a:stretch>
             <a:fillRect/>
           </a:stretch>
         </p:blipFill>
         <p:spPr>
           <a:xfrm>
-            <a:off x="3513491" y="1501811"/>
+            <a:off x="2781971" y="1501811"/>
             <a:ext cx="215067" cy="215067"/>
           </a:xfrm>
           <a:prstGeom prst="rect">
@@ -2989,14 +2919,14 @@
       </p:pic>
       <p:sp>
         <p:nvSpPr>
-          <p:cNvPr id="14" name="Party Finder name"/>
-          <p:cNvSpPr txBox="1"/>
-          <p:nvPr/>
-        </p:nvSpPr>
-        <p:spPr>
-          <a:xfrm>
-            <a:off x="3931920" y="1389888"/>
-            <a:ext cx="1874520" cy="438912"/>
+          <p:cNvPr id="13" name="Build with AI name"/>
+          <p:cNvSpPr txBox="1"/>
+          <p:nvPr/>
+        </p:nvSpPr>
+        <p:spPr>
+          <a:xfrm>
+            <a:off x="2697480" y="1874520"/>
+            <a:ext cx="1645920" cy="292608"/>
           </a:xfrm>
           <a:prstGeom prst="rect">
             <a:avLst/>
@@ -3012,27 +2942,27 @@
               <a:buNone/>
             </a:pPr>
             <a:r>
-              <a:rPr lang="en-US" sz="1400" b="1" dirty="0">
+              <a:rPr lang="en-US" sz="1300" b="1" dirty="0">
                 <a:solidFill>
                   <a:schemeClr val="tx1"/>
                 </a:solidFill>
               </a:rPr>
-              <a:t>Party Finder</a:t>
-            </a:r>
-            <a:endParaRPr lang="en-US" sz="1400" dirty="0"/>
-          </a:p>
-        </p:txBody>
-      </p:sp>
-      <p:sp>
-        <p:nvSpPr>
-          <p:cNvPr id="15" name="Party Finder what"/>
-          <p:cNvSpPr txBox="1"/>
-          <p:nvPr/>
-        </p:nvSpPr>
-        <p:spPr>
-          <a:xfrm>
-            <a:off x="3429000" y="1965960"/>
-            <a:ext cx="2377440" cy="1143000"/>
+              <a:t>Build with AI</a:t>
+            </a:r>
+            <a:endParaRPr lang="en-US" sz="1300" dirty="0"/>
+          </a:p>
+        </p:txBody>
+      </p:sp>
+      <p:sp>
+        <p:nvSpPr>
+          <p:cNvPr id="14" name="Build with AI text"/>
+          <p:cNvSpPr txBox="1"/>
+          <p:nvPr/>
+        </p:nvSpPr>
+        <p:spPr>
+          <a:xfrm>
+            <a:off x="2697480" y="2194560"/>
+            <a:ext cx="1645920" cy="1005840"/>
           </a:xfrm>
           <a:prstGeom prst="rect">
             <a:avLst/>
@@ -3048,121 +2978,51 @@
               <a:buNone/>
             </a:pPr>
             <a:r>
-              <a:rPr lang="en-US" sz="1150" dirty="0">
+              <a:rPr lang="en-US" sz="1100" dirty="0">
                 <a:solidFill>
                   <a:schemeClr val="tx1"/>
                 </a:solidFill>
               </a:rPr>
-              <a:t>Reads the complaint, deal documents or engagement request and lists every name to search, each tied to the sentence it came from.</a:t>
-            </a:r>
-            <a:endParaRPr lang="en-US" sz="1150" dirty="0"/>
-          </a:p>
-        </p:txBody>
-      </p:sp>
-      <p:sp>
-        <p:nvSpPr>
-          <p:cNvPr id="16" name="Party Finder helps"/>
-          <p:cNvSpPr txBox="1"/>
-          <p:nvPr/>
-        </p:nvSpPr>
-        <p:spPr>
-          <a:xfrm>
-            <a:off x="3429000" y="3154680"/>
-            <a:ext cx="2377440" cy="731520"/>
-          </a:xfrm>
-          <a:prstGeom prst="rect">
-            <a:avLst/>
-          </a:prstGeom>
-          <a:noFill/>
-          <a:ln/>
-        </p:spPr>
-        <p:txBody>
-          <a:bodyPr wrap="square" lIns="0" tIns="0" rIns="0" bIns="0" rtlCol="0" anchor="t"/>
-          <a:lstStyle/>
-          <a:p>
-            <a:pPr indent="0" marL="0">
-              <a:buNone/>
-            </a:pPr>
-            <a:r>
-              <a:rPr lang="en-US" sz="1050" b="1" dirty="0">
-                <a:solidFill>
-                  <a:schemeClr val="accent5"/>
-                </a:solidFill>
-              </a:rPr>
-              <a:t>Helps: </a:t>
-            </a:r>
-            <a:pPr indent="0" marL="0">
-              <a:buNone/>
-            </a:pPr>
-            <a:r>
-              <a:rPr lang="en-US" sz="1050" dirty="0">
-                <a:solidFill>
-                  <a:schemeClr val="tx1"/>
-                </a:solidFill>
-              </a:rPr>
-              <a:t>Intake and conflicts staff. Nothing missed that an intake form would not catch.</a:t>
-            </a:r>
-            <a:endParaRPr lang="en-US" sz="1050" dirty="0"/>
-          </a:p>
-        </p:txBody>
-      </p:sp>
-      <p:sp>
-        <p:nvSpPr>
-          <p:cNvPr id="17" name="Party Finder needs"/>
-          <p:cNvSpPr txBox="1"/>
-          <p:nvPr/>
-        </p:nvSpPr>
-        <p:spPr>
-          <a:xfrm>
-            <a:off x="3429000" y="3931920"/>
-            <a:ext cx="2377440" cy="640080"/>
-          </a:xfrm>
-          <a:prstGeom prst="rect">
-            <a:avLst/>
-          </a:prstGeom>
-          <a:noFill/>
-          <a:ln/>
-        </p:spPr>
-        <p:txBody>
-          <a:bodyPr wrap="square" lIns="0" tIns="0" rIns="0" bIns="0" rtlCol="0" anchor="t"/>
-          <a:lstStyle/>
-          <a:p>
-            <a:pPr indent="0" marL="0">
-              <a:buNone/>
-            </a:pPr>
-            <a:r>
-              <a:rPr lang="en-US" sz="1050" b="1" dirty="0">
-                <a:solidFill>
-                  <a:schemeClr val="accent5"/>
-                </a:solidFill>
-              </a:rPr>
-              <a:t>To run it here: </a:t>
-            </a:r>
-            <a:pPr indent="0" marL="0">
-              <a:buNone/>
-            </a:pPr>
-            <a:r>
-              <a:rPr lang="en-US" sz="1050" dirty="0">
-                <a:solidFill>
-                  <a:schemeClr val="tx2"/>
-                </a:solidFill>
-              </a:rPr>
-              <a:t>The documents. Our conflicts system stays the system of record.</a:t>
-            </a:r>
-            <a:endParaRPr lang="en-US" sz="1050" dirty="0"/>
-          </a:p>
-        </p:txBody>
-      </p:sp>
-      <p:sp>
-        <p:nvSpPr>
-          <p:cNvPr id="18" name="Marketing Studio card"/>
+              <a:t>Claude and Claude Code for most building. Open models such as Qwen on local hardware where client data must stay inside.</a:t>
+            </a:r>
+            <a:endParaRPr lang="en-US" sz="1100" dirty="0"/>
+          </a:p>
+        </p:txBody>
+      </p:sp>
+      <p:pic>
+        <p:nvPicPr>
+          <p:cNvPr id="15" name="how arrow 2" descr="preencoded.png">    </p:cNvPr>
+          <p:cNvPicPr>
+            <a:picLocks noChangeAspect="1"/>
+          </p:cNvPicPr>
+          <p:nvPr/>
+        </p:nvPicPr>
+        <p:blipFill>
+          <a:blip r:embed="rId4"/>
+          <a:stretch>
+            <a:fillRect/>
+          </a:stretch>
+        </p:blipFill>
+        <p:spPr>
+          <a:xfrm>
+            <a:off x="4498848" y="2194560"/>
+            <a:ext cx="146304" cy="146304"/>
+          </a:xfrm>
+          <a:prstGeom prst="rect">
+            <a:avLst/>
+          </a:prstGeom>
+        </p:spPr>
+      </p:pic>
+      <p:sp>
+        <p:nvSpPr>
+          <p:cNvPr id="16" name="Test against reality card"/>
           <p:cNvSpPr/>
           <p:nvPr/>
         </p:nvSpPr>
         <p:spPr>
           <a:xfrm>
-            <a:off x="6126480" y="1280160"/>
-            <a:ext cx="2651760" cy="3383280"/>
+            <a:off x="4663440" y="1280160"/>
+            <a:ext cx="1920240" cy="1965960"/>
           </a:xfrm>
           <a:prstGeom prst="rect">
             <a:avLst/>
@@ -3180,13 +3040,13 @@
       </p:sp>
       <p:sp>
         <p:nvSpPr>
-          <p:cNvPr id="19" name="icon square"/>
+          <p:cNvPr id="17" name="icon square"/>
           <p:cNvSpPr/>
           <p:nvPr/>
         </p:nvSpPr>
         <p:spPr>
           <a:xfrm>
-            <a:off x="6263640" y="1417320"/>
+            <a:off x="4800600" y="1417320"/>
             <a:ext cx="384048" cy="384048"/>
           </a:xfrm>
           <a:prstGeom prst="rect">
@@ -3205,21 +3065,21 @@
       </p:sp>
       <p:pic>
         <p:nvPicPr>
-          <p:cNvPr id="20" name="edit icon" descr="preencoded.png">    </p:cNvPr>
+          <p:cNvPr id="18" name="check icon" descr="preencoded.png">    </p:cNvPr>
           <p:cNvPicPr>
             <a:picLocks noChangeAspect="1"/>
           </p:cNvPicPr>
           <p:nvPr/>
         </p:nvPicPr>
         <p:blipFill>
-          <a:blip r:embed="rId3"/>
+          <a:blip r:embed="rId5"/>
           <a:stretch>
             <a:fillRect/>
           </a:stretch>
         </p:blipFill>
         <p:spPr>
           <a:xfrm>
-            <a:off x="6348131" y="1501811"/>
+            <a:off x="4885091" y="1501811"/>
             <a:ext cx="215067" cy="215067"/>
           </a:xfrm>
           <a:prstGeom prst="rect">
@@ -3229,14 +3089,14 @@
       </p:pic>
       <p:sp>
         <p:nvSpPr>
-          <p:cNvPr id="21" name="Marketing Studio name"/>
-          <p:cNvSpPr txBox="1"/>
-          <p:nvPr/>
-        </p:nvSpPr>
-        <p:spPr>
-          <a:xfrm>
-            <a:off x="6766560" y="1389888"/>
-            <a:ext cx="1874520" cy="438912"/>
+          <p:cNvPr id="19" name="Test against reality name"/>
+          <p:cNvSpPr txBox="1"/>
+          <p:nvPr/>
+        </p:nvSpPr>
+        <p:spPr>
+          <a:xfrm>
+            <a:off x="4800600" y="1874520"/>
+            <a:ext cx="1645920" cy="292608"/>
           </a:xfrm>
           <a:prstGeom prst="rect">
             <a:avLst/>
@@ -3252,27 +3112,27 @@
               <a:buNone/>
             </a:pPr>
             <a:r>
-              <a:rPr lang="en-US" sz="1400" b="1" dirty="0">
+              <a:rPr lang="en-US" sz="1300" b="1" dirty="0">
                 <a:solidFill>
                   <a:schemeClr val="tx1"/>
                 </a:solidFill>
               </a:rPr>
-              <a:t>Marketing Studio</a:t>
-            </a:r>
-            <a:endParaRPr lang="en-US" sz="1400" dirty="0"/>
-          </a:p>
-        </p:txBody>
-      </p:sp>
-      <p:sp>
-        <p:nvSpPr>
-          <p:cNvPr id="22" name="Marketing Studio what"/>
-          <p:cNvSpPr txBox="1"/>
-          <p:nvPr/>
-        </p:nvSpPr>
-        <p:spPr>
-          <a:xfrm>
-            <a:off x="6263640" y="1965960"/>
-            <a:ext cx="2377440" cy="1143000"/>
+              <a:t>Test against reality</a:t>
+            </a:r>
+            <a:endParaRPr lang="en-US" sz="1300" dirty="0"/>
+          </a:p>
+        </p:txBody>
+      </p:sp>
+      <p:sp>
+        <p:nvSpPr>
+          <p:cNvPr id="20" name="Test against reality text"/>
+          <p:cNvSpPr txBox="1"/>
+          <p:nvPr/>
+        </p:nvSpPr>
+        <p:spPr>
+          <a:xfrm>
+            <a:off x="4800600" y="2194560"/>
+            <a:ext cx="1645920" cy="1005840"/>
           </a:xfrm>
           <a:prstGeom prst="rect">
             <a:avLst/>
@@ -3288,27 +3148,161 @@
               <a:buNone/>
             </a:pPr>
             <a:r>
-              <a:rPr lang="en-US" sz="1150" dirty="0">
+              <a:rPr lang="en-US" sz="1100" dirty="0">
                 <a:solidFill>
                   <a:schemeClr val="tx1"/>
                 </a:solidFill>
               </a:rPr>
-              <a:t>Drafts attorney bios, client alerts, RFP responses and award submissions in the firm's voice, then checks each draft against its source and the advertising rules.</a:t>
-            </a:r>
-            <a:endParaRPr lang="en-US" sz="1150" dirty="0"/>
-          </a:p>
-        </p:txBody>
-      </p:sp>
-      <p:sp>
-        <p:nvSpPr>
-          <p:cNvPr id="23" name="Marketing Studio helps"/>
-          <p:cNvSpPr txBox="1"/>
-          <p:nvPr/>
-        </p:nvSpPr>
-        <p:spPr>
-          <a:xfrm>
-            <a:off x="6263640" y="3154680"/>
-            <a:ext cx="2377440" cy="731520"/>
+              <a:t>Score the tool against real outcomes, such as public court rulings, and keep a record of every run.</a:t>
+            </a:r>
+            <a:endParaRPr lang="en-US" sz="1100" dirty="0"/>
+          </a:p>
+        </p:txBody>
+      </p:sp>
+      <p:pic>
+        <p:nvPicPr>
+          <p:cNvPr id="21" name="how arrow 3" descr="preencoded.png">    </p:cNvPr>
+          <p:cNvPicPr>
+            <a:picLocks noChangeAspect="1"/>
+          </p:cNvPicPr>
+          <p:nvPr/>
+        </p:nvPicPr>
+        <p:blipFill>
+          <a:blip r:embed="rId6"/>
+          <a:stretch>
+            <a:fillRect/>
+          </a:stretch>
+        </p:blipFill>
+        <p:spPr>
+          <a:xfrm>
+            <a:off x="6601968" y="2194560"/>
+            <a:ext cx="146304" cy="146304"/>
+          </a:xfrm>
+          <a:prstGeom prst="rect">
+            <a:avLst/>
+          </a:prstGeom>
+        </p:spPr>
+      </p:pic>
+      <p:sp>
+        <p:nvSpPr>
+          <p:cNvPr id="22" name="Ship it complete card"/>
+          <p:cNvSpPr/>
+          <p:nvPr/>
+        </p:nvSpPr>
+        <p:spPr>
+          <a:xfrm>
+            <a:off x="6766560" y="1280160"/>
+            <a:ext cx="1920240" cy="1965960"/>
+          </a:xfrm>
+          <a:prstGeom prst="rect">
+            <a:avLst/>
+          </a:prstGeom>
+          <a:solidFill>
+            <a:schemeClr val="bg2"/>
+          </a:solidFill>
+          <a:ln w="12700">
+            <a:solidFill>
+              <a:schemeClr val="bg2"/>
+            </a:solidFill>
+            <a:prstDash val="solid"/>
+          </a:ln>
+        </p:spPr>
+      </p:sp>
+      <p:sp>
+        <p:nvSpPr>
+          <p:cNvPr id="23" name="icon square"/>
+          <p:cNvSpPr/>
+          <p:nvPr/>
+        </p:nvSpPr>
+        <p:spPr>
+          <a:xfrm>
+            <a:off x="6903720" y="1417320"/>
+            <a:ext cx="384048" cy="384048"/>
+          </a:xfrm>
+          <a:prstGeom prst="rect">
+            <a:avLst/>
+          </a:prstGeom>
+          <a:solidFill>
+            <a:schemeClr val="accent1"/>
+          </a:solidFill>
+          <a:ln w="12700">
+            <a:solidFill>
+              <a:schemeClr val="accent1"/>
+            </a:solidFill>
+            <a:prstDash val="solid"/>
+          </a:ln>
+        </p:spPr>
+      </p:sp>
+      <p:pic>
+        <p:nvPicPr>
+          <p:cNvPr id="24" name="list icon" descr="preencoded.png">    </p:cNvPr>
+          <p:cNvPicPr>
+            <a:picLocks noChangeAspect="1"/>
+          </p:cNvPicPr>
+          <p:nvPr/>
+        </p:nvPicPr>
+        <p:blipFill>
+          <a:blip r:embed="rId7"/>
+          <a:stretch>
+            <a:fillRect/>
+          </a:stretch>
+        </p:blipFill>
+        <p:spPr>
+          <a:xfrm>
+            <a:off x="6988211" y="1501811"/>
+            <a:ext cx="215067" cy="215067"/>
+          </a:xfrm>
+          <a:prstGeom prst="rect">
+            <a:avLst/>
+          </a:prstGeom>
+        </p:spPr>
+      </p:pic>
+      <p:sp>
+        <p:nvSpPr>
+          <p:cNvPr id="25" name="Ship it complete name"/>
+          <p:cNvSpPr txBox="1"/>
+          <p:nvPr/>
+        </p:nvSpPr>
+        <p:spPr>
+          <a:xfrm>
+            <a:off x="6903720" y="1874520"/>
+            <a:ext cx="1645920" cy="292608"/>
+          </a:xfrm>
+          <a:prstGeom prst="rect">
+            <a:avLst/>
+          </a:prstGeom>
+          <a:noFill/>
+          <a:ln/>
+        </p:spPr>
+        <p:txBody>
+          <a:bodyPr wrap="square" lIns="0" tIns="0" rIns="0" bIns="0" rtlCol="0" anchor="ctr"/>
+          <a:lstStyle/>
+          <a:p>
+            <a:pPr indent="0" marL="0">
+              <a:buNone/>
+            </a:pPr>
+            <a:r>
+              <a:rPr lang="en-US" sz="1300" b="1" dirty="0">
+                <a:solidFill>
+                  <a:schemeClr val="tx1"/>
+                </a:solidFill>
+              </a:rPr>
+              <a:t>Ship it complete</a:t>
+            </a:r>
+            <a:endParaRPr lang="en-US" sz="1300" dirty="0"/>
+          </a:p>
+        </p:txBody>
+      </p:sp>
+      <p:sp>
+        <p:nvSpPr>
+          <p:cNvPr id="26" name="Ship it complete text"/>
+          <p:cNvSpPr txBox="1"/>
+          <p:nvPr/>
+        </p:nvSpPr>
+        <p:spPr>
+          <a:xfrm>
+            <a:off x="6903720" y="2194560"/>
+            <a:ext cx="1645920" cy="1005840"/>
           </a:xfrm>
           <a:prstGeom prst="rect">
             <a:avLst/>
@@ -3324,38 +3318,163 @@
               <a:buNone/>
             </a:pPr>
             <a:r>
-              <a:rPr lang="en-US" sz="1050" b="1" dirty="0">
+              <a:rPr lang="en-US" sz="1100" dirty="0">
+                <a:solidFill>
+                  <a:schemeClr val="tx1"/>
+                </a:solidFill>
+              </a:rPr>
+              <a:t>Tests, walkthroughs, plain-language guides and a features list for IT, so it can be reviewed and supported.</a:t>
+            </a:r>
+            <a:endParaRPr lang="en-US" sz="1100" dirty="0"/>
+          </a:p>
+        </p:txBody>
+      </p:sp>
+      <p:sp>
+        <p:nvSpPr>
+          <p:cNvPr id="27" name="rules heading"/>
+          <p:cNvSpPr txBox="1"/>
+          <p:nvPr/>
+        </p:nvSpPr>
+        <p:spPr>
+          <a:xfrm>
+            <a:off x="457200" y="3520440"/>
+            <a:ext cx="8229600" cy="219456"/>
+          </a:xfrm>
+          <a:prstGeom prst="rect">
+            <a:avLst/>
+          </a:prstGeom>
+          <a:noFill/>
+          <a:ln/>
+        </p:spPr>
+        <p:txBody>
+          <a:bodyPr wrap="square" lIns="0" tIns="0" rIns="0" bIns="0" rtlCol="0" anchor="ctr"/>
+          <a:lstStyle/>
+          <a:p>
+            <a:pPr indent="0" marL="0">
+              <a:buNone/>
+            </a:pPr>
+            <a:r>
+              <a:rPr lang="en-US" sz="900" b="1" spc="150" kern="0" dirty="0">
                 <a:solidFill>
                   <a:schemeClr val="accent5"/>
                 </a:solidFill>
               </a:rPr>
-              <a:t>Helps: </a:t>
-            </a:r>
-            <a:pPr indent="0" marL="0">
-              <a:buNone/>
-            </a:pPr>
-            <a:r>
-              <a:rPr lang="en-US" sz="1050" dirty="0">
+              <a:t>FOUR RULES EVERY TOOL FOLLOWS</a:t>
+            </a:r>
+            <a:endParaRPr lang="en-US" sz="900" dirty="0"/>
+          </a:p>
+        </p:txBody>
+      </p:sp>
+      <p:sp>
+        <p:nvSpPr>
+          <p:cNvPr id="28" name="rule bar 1"/>
+          <p:cNvSpPr/>
+          <p:nvPr/>
+        </p:nvSpPr>
+        <p:spPr>
+          <a:xfrm>
+            <a:off x="457200" y="3794760"/>
+            <a:ext cx="54864" cy="868680"/>
+          </a:xfrm>
+          <a:prstGeom prst="rect">
+            <a:avLst/>
+          </a:prstGeom>
+          <a:solidFill>
+            <a:schemeClr val="accent2"/>
+          </a:solidFill>
+          <a:ln w="12700">
+            <a:solidFill>
+              <a:schemeClr val="accent2"/>
+            </a:solidFill>
+            <a:prstDash val="solid"/>
+          </a:ln>
+        </p:spPr>
+      </p:sp>
+      <p:sp>
+        <p:nvSpPr>
+          <p:cNvPr id="29" name="Lawyers decide rule"/>
+          <p:cNvSpPr txBox="1"/>
+          <p:nvPr/>
+        </p:nvSpPr>
+        <p:spPr>
+          <a:xfrm>
+            <a:off x="594360" y="3794760"/>
+            <a:ext cx="1783080" cy="868680"/>
+          </a:xfrm>
+          <a:prstGeom prst="rect">
+            <a:avLst/>
+          </a:prstGeom>
+          <a:noFill/>
+          <a:ln/>
+        </p:spPr>
+        <p:txBody>
+          <a:bodyPr wrap="square" lIns="0" tIns="0" rIns="0" bIns="0" rtlCol="0" anchor="t"/>
+          <a:lstStyle/>
+          <a:p>
+            <a:pPr indent="0" marL="0">
+              <a:buNone/>
+            </a:pPr>
+            <a:r>
+              <a:rPr lang="en-US" sz="1100" b="1" dirty="0">
                 <a:solidFill>
                   <a:schemeClr val="tx1"/>
                 </a:solidFill>
               </a:rPr>
-              <a:t>Marketing and the attorneys they chase for drafts. First drafts in minutes, nothing invented.</a:t>
-            </a:r>
-            <a:endParaRPr lang="en-US" sz="1050" dirty="0"/>
-          </a:p>
-        </p:txBody>
-      </p:sp>
-      <p:sp>
-        <p:nvSpPr>
-          <p:cNvPr id="24" name="Marketing Studio needs"/>
-          <p:cNvSpPr txBox="1"/>
-          <p:nvPr/>
-        </p:nvSpPr>
-        <p:spPr>
-          <a:xfrm>
-            <a:off x="6263640" y="3931920"/>
-            <a:ext cx="2377440" cy="640080"/>
+              <a:t>Lawyers decide</a:t>
+            </a:r>
+            <a:endParaRPr lang="en-US" sz="1100" dirty="0"/>
+          </a:p>
+          <a:p>
+            <a:pPr indent="0" marL="0">
+              <a:buNone/>
+            </a:pPr>
+            <a:r>
+              <a:rPr lang="en-US" sz="1100" dirty="0">
+                <a:solidFill>
+                  <a:schemeClr val="tx2"/>
+                </a:solidFill>
+              </a:rPr>
+              <a:t>AI output stays a suggestion until a person confirms it.</a:t>
+            </a:r>
+            <a:endParaRPr lang="en-US" sz="1100" dirty="0"/>
+          </a:p>
+        </p:txBody>
+      </p:sp>
+      <p:sp>
+        <p:nvSpPr>
+          <p:cNvPr id="30" name="rule bar 2"/>
+          <p:cNvSpPr/>
+          <p:nvPr/>
+        </p:nvSpPr>
+        <p:spPr>
+          <a:xfrm>
+            <a:off x="2560320" y="3794760"/>
+            <a:ext cx="54864" cy="868680"/>
+          </a:xfrm>
+          <a:prstGeom prst="rect">
+            <a:avLst/>
+          </a:prstGeom>
+          <a:solidFill>
+            <a:schemeClr val="accent2"/>
+          </a:solidFill>
+          <a:ln w="12700">
+            <a:solidFill>
+              <a:schemeClr val="accent2"/>
+            </a:solidFill>
+            <a:prstDash val="solid"/>
+          </a:ln>
+        </p:spPr>
+      </p:sp>
+      <p:sp>
+        <p:nvSpPr>
+          <p:cNvPr id="31" name="Code checks the model rule"/>
+          <p:cNvSpPr txBox="1"/>
+          <p:nvPr/>
+        </p:nvSpPr>
+        <p:spPr>
+          <a:xfrm>
+            <a:off x="2697480" y="3794760"/>
+            <a:ext cx="1783080" cy="868680"/>
           </a:xfrm>
           <a:prstGeom prst="rect">
             <a:avLst/>
@@ -3371,25 +3490,178 @@
               <a:buNone/>
             </a:pPr>
             <a:r>
-              <a:rPr lang="en-US" sz="1050" b="1" dirty="0">
-                <a:solidFill>
-                  <a:schemeClr val="accent5"/>
-                </a:solidFill>
-              </a:rPr>
-              <a:t>To run it here: </a:t>
-            </a:r>
-            <a:pPr indent="0" marL="0">
-              <a:buNone/>
-            </a:pPr>
-            <a:r>
-              <a:rPr lang="en-US" sz="1050" dirty="0">
+              <a:rPr lang="en-US" sz="1100" b="1" dirty="0">
+                <a:solidFill>
+                  <a:schemeClr val="tx1"/>
+                </a:solidFill>
+              </a:rPr>
+              <a:t>Code checks the model</a:t>
+            </a:r>
+            <a:endParaRPr lang="en-US" sz="1100" dirty="0"/>
+          </a:p>
+          <a:p>
+            <a:pPr indent="0" marL="0">
+              <a:buNone/>
+            </a:pPr>
+            <a:r>
+              <a:rPr lang="en-US" sz="1100" dirty="0">
                 <a:solidFill>
                   <a:schemeClr val="tx2"/>
                 </a:solidFill>
               </a:rPr>
-              <a:t>The source material and the firm's style examples.</a:t>
-            </a:r>
-            <a:endParaRPr lang="en-US" sz="1050" dirty="0"/>
+              <a:t>Quotes, dates and totals are verified in code.</a:t>
+            </a:r>
+            <a:endParaRPr lang="en-US" sz="1100" dirty="0"/>
+          </a:p>
+        </p:txBody>
+      </p:sp>
+      <p:sp>
+        <p:nvSpPr>
+          <p:cNvPr id="32" name="rule bar 3"/>
+          <p:cNvSpPr/>
+          <p:nvPr/>
+        </p:nvSpPr>
+        <p:spPr>
+          <a:xfrm>
+            <a:off x="4663440" y="3794760"/>
+            <a:ext cx="54864" cy="868680"/>
+          </a:xfrm>
+          <a:prstGeom prst="rect">
+            <a:avLst/>
+          </a:prstGeom>
+          <a:solidFill>
+            <a:schemeClr val="accent2"/>
+          </a:solidFill>
+          <a:ln w="12700">
+            <a:solidFill>
+              <a:schemeClr val="accent2"/>
+            </a:solidFill>
+            <a:prstDash val="solid"/>
+          </a:ln>
+        </p:spPr>
+      </p:sp>
+      <p:sp>
+        <p:nvSpPr>
+          <p:cNvPr id="33" name="Client data protected rule"/>
+          <p:cNvSpPr txBox="1"/>
+          <p:nvPr/>
+        </p:nvSpPr>
+        <p:spPr>
+          <a:xfrm>
+            <a:off x="4800600" y="3794760"/>
+            <a:ext cx="1783080" cy="868680"/>
+          </a:xfrm>
+          <a:prstGeom prst="rect">
+            <a:avLst/>
+          </a:prstGeom>
+          <a:noFill/>
+          <a:ln/>
+        </p:spPr>
+        <p:txBody>
+          <a:bodyPr wrap="square" lIns="0" tIns="0" rIns="0" bIns="0" rtlCol="0" anchor="t"/>
+          <a:lstStyle/>
+          <a:p>
+            <a:pPr indent="0" marL="0">
+              <a:buNone/>
+            </a:pPr>
+            <a:r>
+              <a:rPr lang="en-US" sz="1100" b="1" dirty="0">
+                <a:solidFill>
+                  <a:schemeClr val="tx1"/>
+                </a:solidFill>
+              </a:rPr>
+              <a:t>Client data protected</a:t>
+            </a:r>
+            <a:endParaRPr lang="en-US" sz="1100" dirty="0"/>
+          </a:p>
+          <a:p>
+            <a:pPr indent="0" marL="0">
+              <a:buNone/>
+            </a:pPr>
+            <a:r>
+              <a:rPr lang="en-US" sz="1100" dirty="0">
+                <a:solidFill>
+                  <a:schemeClr val="tx2"/>
+                </a:solidFill>
+              </a:rPr>
+              <a:t>Firm hardware, walls in the data, nothing sent without approval.</a:t>
+            </a:r>
+            <a:endParaRPr lang="en-US" sz="1100" dirty="0"/>
+          </a:p>
+        </p:txBody>
+      </p:sp>
+      <p:sp>
+        <p:nvSpPr>
+          <p:cNvPr id="34" name="rule bar 4"/>
+          <p:cNvSpPr/>
+          <p:nvPr/>
+        </p:nvSpPr>
+        <p:spPr>
+          <a:xfrm>
+            <a:off x="6766560" y="3794760"/>
+            <a:ext cx="54864" cy="868680"/>
+          </a:xfrm>
+          <a:prstGeom prst="rect">
+            <a:avLst/>
+          </a:prstGeom>
+          <a:solidFill>
+            <a:schemeClr val="accent2"/>
+          </a:solidFill>
+          <a:ln w="12700">
+            <a:solidFill>
+              <a:schemeClr val="accent2"/>
+            </a:solidFill>
+            <a:prstDash val="solid"/>
+          </a:ln>
+        </p:spPr>
+      </p:sp>
+      <p:sp>
+        <p:nvSpPr>
+          <p:cNvPr id="35" name="Everything is traceable rule"/>
+          <p:cNvSpPr txBox="1"/>
+          <p:nvPr/>
+        </p:nvSpPr>
+        <p:spPr>
+          <a:xfrm>
+            <a:off x="6903720" y="3794760"/>
+            <a:ext cx="1783080" cy="868680"/>
+          </a:xfrm>
+          <a:prstGeom prst="rect">
+            <a:avLst/>
+          </a:prstGeom>
+          <a:noFill/>
+          <a:ln/>
+        </p:spPr>
+        <p:txBody>
+          <a:bodyPr wrap="square" lIns="0" tIns="0" rIns="0" bIns="0" rtlCol="0" anchor="t"/>
+          <a:lstStyle/>
+          <a:p>
+            <a:pPr indent="0" marL="0">
+              <a:buNone/>
+            </a:pPr>
+            <a:r>
+              <a:rPr lang="en-US" sz="1100" b="1" dirty="0">
+                <a:solidFill>
+                  <a:schemeClr val="tx1"/>
+                </a:solidFill>
+              </a:rPr>
+              <a:t>Everything is traceable</a:t>
+            </a:r>
+            <a:endParaRPr lang="en-US" sz="1100" dirty="0"/>
+          </a:p>
+          <a:p>
+            <a:pPr indent="0" marL="0">
+              <a:buNone/>
+            </a:pPr>
+            <a:r>
+              <a:rPr lang="en-US" sz="1100" dirty="0">
+                <a:solidFill>
+                  <a:schemeClr val="tx2"/>
+                </a:solidFill>
+              </a:rPr>
+              <a:t>Each finding cites its source; each decision is logged.</a:t>
+            </a:r>
+            <a:endParaRPr lang="en-US" sz="1100" dirty="0"/>
           </a:p>
         </p:txBody>
       </p:sp>
@@ -3495,7 +3767,7 @@
                   <a:srgbClr val="2D4459"/>
                 </a:solidFill>
               </a:rPr>
-              <a:t>Three bigger ideas, built on what the firm already knows</a:t>
+              <a:t>Conflion shows what a full firm tool looks like</a:t>
             </a:r>
             <a:endParaRPr lang="en-US" sz="2600" dirty="0"/>
           </a:p>
@@ -3533,7 +3805,7 @@
                   <a:schemeClr val="tx2"/>
                 </a:solidFill>
               </a:rPr>
-              <a:t>Directions I find promising. They would need leadership to shape them, and IT to vet them.</a:t>
+              <a:t>A conflicts and intake system that puts all four pieces together.</a:t>
             </a:r>
             <a:endParaRPr lang="en-US" sz="1300" dirty="0"/>
           </a:p>
@@ -3541,38 +3813,13 @@
       </p:sp>
       <p:sp>
         <p:nvSpPr>
-          <p:cNvPr id="4" name="Client risk radar card"/>
+          <p:cNvPr id="4" name="icon square"/>
           <p:cNvSpPr/>
           <p:nvPr/>
         </p:nvSpPr>
         <p:spPr>
           <a:xfrm>
-            <a:off x="457200" y="1325880"/>
-            <a:ext cx="2651760" cy="2743200"/>
-          </a:xfrm>
-          <a:prstGeom prst="rect">
-            <a:avLst/>
-          </a:prstGeom>
-          <a:solidFill>
-            <a:schemeClr val="bg2"/>
-          </a:solidFill>
-          <a:ln w="12700">
-            <a:solidFill>
-              <a:schemeClr val="bg2"/>
-            </a:solidFill>
-            <a:prstDash val="solid"/>
-          </a:ln>
-        </p:spPr>
-      </p:sp>
-      <p:sp>
-        <p:nvSpPr>
-          <p:cNvPr id="5" name="icon square"/>
-          <p:cNvSpPr/>
-          <p:nvPr/>
-        </p:nvSpPr>
-        <p:spPr>
-          <a:xfrm>
-            <a:off x="594360" y="1463040"/>
+            <a:off x="457200" y="1298448"/>
             <a:ext cx="384048" cy="384048"/>
           </a:xfrm>
           <a:prstGeom prst="rect">
@@ -3591,7 +3838,7 @@
       </p:sp>
       <p:pic>
         <p:nvPicPr>
-          <p:cNvPr id="6" name="radio icon" descr="preencoded.png">    </p:cNvPr>
+          <p:cNvPr id="5" name="lock icon" descr="preencoded.png">    </p:cNvPr>
           <p:cNvPicPr>
             <a:picLocks noChangeAspect="1"/>
           </p:cNvPicPr>
@@ -3605,7 +3852,7 @@
         </p:blipFill>
         <p:spPr>
           <a:xfrm>
-            <a:off x="678851" y="1547531"/>
+            <a:off x="541691" y="1382939"/>
             <a:ext cx="215067" cy="215067"/>
           </a:xfrm>
           <a:prstGeom prst="rect">
@@ -3615,157 +3862,63 @@
       </p:pic>
       <p:sp>
         <p:nvSpPr>
-          <p:cNvPr id="7" name="Client risk radar name"/>
-          <p:cNvSpPr txBox="1"/>
-          <p:nvPr/>
-        </p:nvSpPr>
-        <p:spPr>
-          <a:xfrm>
-            <a:off x="1097280" y="1435608"/>
-            <a:ext cx="1874520" cy="438912"/>
-          </a:xfrm>
-          <a:prstGeom prst="rect">
-            <a:avLst/>
-          </a:prstGeom>
-          <a:noFill/>
-          <a:ln/>
-        </p:spPr>
-        <p:txBody>
-          <a:bodyPr wrap="square" lIns="0" tIns="0" rIns="0" bIns="0" rtlCol="0" anchor="ctr"/>
-          <a:lstStyle/>
-          <a:p>
-            <a:pPr indent="0" marL="0">
-              <a:buNone/>
-            </a:pPr>
-            <a:r>
-              <a:rPr lang="en-US" sz="1400" b="1" dirty="0">
+          <p:cNvPr id="6" name="Secure pillar"/>
+          <p:cNvSpPr txBox="1"/>
+          <p:nvPr/>
+        </p:nvSpPr>
+        <p:spPr>
+          <a:xfrm>
+            <a:off x="987552" y="1261872"/>
+            <a:ext cx="3840480" cy="777240"/>
+          </a:xfrm>
+          <a:prstGeom prst="rect">
+            <a:avLst/>
+          </a:prstGeom>
+          <a:noFill/>
+          <a:ln/>
+        </p:spPr>
+        <p:txBody>
+          <a:bodyPr wrap="square" lIns="0" tIns="0" rIns="0" bIns="0" rtlCol="0" anchor="t"/>
+          <a:lstStyle/>
+          <a:p>
+            <a:pPr indent="0" marL="0">
+              <a:buNone/>
+            </a:pPr>
+            <a:r>
+              <a:rPr lang="en-US" sz="1300" b="1" dirty="0">
                 <a:solidFill>
                   <a:schemeClr val="tx1"/>
                 </a:solidFill>
               </a:rPr>
-              <a:t>Client risk radar</a:t>
-            </a:r>
-            <a:endParaRPr lang="en-US" sz="1400" dirty="0"/>
-          </a:p>
-        </p:txBody>
-      </p:sp>
-      <p:sp>
-        <p:nvSpPr>
-          <p:cNvPr id="8" name="Client risk radar what"/>
-          <p:cNvSpPr txBox="1"/>
-          <p:nvPr/>
-        </p:nvSpPr>
-        <p:spPr>
-          <a:xfrm>
-            <a:off x="594360" y="2011680"/>
-            <a:ext cx="2377440" cy="1188720"/>
-          </a:xfrm>
-          <a:prstGeom prst="rect">
-            <a:avLst/>
-          </a:prstGeom>
-          <a:noFill/>
-          <a:ln/>
-        </p:spPr>
-        <p:txBody>
-          <a:bodyPr wrap="square" lIns="0" tIns="0" rIns="0" bIns="0" rtlCol="0" anchor="t"/>
-          <a:lstStyle/>
-          <a:p>
-            <a:pPr indent="0" marL="0">
-              <a:buNone/>
-            </a:pPr>
-            <a:r>
-              <a:rPr lang="en-US" sz="1250" dirty="0">
+              <a:t>Secure</a:t>
+            </a:r>
+            <a:endParaRPr lang="en-US" sz="1300" dirty="0"/>
+          </a:p>
+          <a:p>
+            <a:pPr indent="0" marL="0">
+              <a:buNone/>
+            </a:pPr>
+            <a:r>
+              <a:rPr lang="en-US" sz="1050" dirty="0">
                 <a:solidFill>
                   <a:schemeClr val="tx1"/>
                 </a:solidFill>
               </a:rPr>
-              <a:t>Watches public signals about our clients, such as lawsuits, inspection citations and agency audits.</a:t>
-            </a:r>
-            <a:endParaRPr lang="en-US" sz="1250" dirty="0"/>
-          </a:p>
-        </p:txBody>
-      </p:sp>
-      <p:sp>
-        <p:nvSpPr>
-          <p:cNvPr id="9" name="Client risk radar why"/>
-          <p:cNvSpPr txBox="1"/>
-          <p:nvPr/>
-        </p:nvSpPr>
-        <p:spPr>
-          <a:xfrm>
-            <a:off x="594360" y="3154680"/>
-            <a:ext cx="2377440" cy="822960"/>
-          </a:xfrm>
-          <a:prstGeom prst="rect">
-            <a:avLst/>
-          </a:prstGeom>
-          <a:noFill/>
-          <a:ln/>
-        </p:spPr>
-        <p:txBody>
-          <a:bodyPr wrap="square" lIns="0" tIns="0" rIns="0" bIns="0" rtlCol="0" anchor="t"/>
-          <a:lstStyle/>
-          <a:p>
-            <a:pPr indent="0" marL="0">
-              <a:buNone/>
-            </a:pPr>
-            <a:r>
-              <a:rPr lang="en-US" sz="1200" b="1" dirty="0">
-                <a:solidFill>
-                  <a:schemeClr val="accent5"/>
-                </a:solidFill>
-              </a:rPr>
-              <a:t>Why it matters: </a:t>
-            </a:r>
-            <a:pPr indent="0" marL="0">
-              <a:buNone/>
-            </a:pPr>
-            <a:r>
-              <a:rPr lang="en-US" sz="1200" dirty="0">
-                <a:solidFill>
-                  <a:schemeClr val="tx1"/>
-                </a:solidFill>
-              </a:rPr>
-              <a:t>We call the client before they know they need help. VigilMark already does this for trademarks.</a:t>
-            </a:r>
-            <a:endParaRPr lang="en-US" sz="1200" dirty="0"/>
-          </a:p>
-        </p:txBody>
-      </p:sp>
-      <p:sp>
-        <p:nvSpPr>
-          <p:cNvPr id="10" name="Firm knowledge engine card"/>
+              <a:t>Sign-on and roles. Ethical walls enforced in what each user can see. A tamper-evident audit trail.</a:t>
+            </a:r>
+            <a:endParaRPr lang="en-US" sz="1300" dirty="0"/>
+          </a:p>
+        </p:txBody>
+      </p:sp>
+      <p:sp>
+        <p:nvSpPr>
+          <p:cNvPr id="7" name="icon square"/>
           <p:cNvSpPr/>
           <p:nvPr/>
         </p:nvSpPr>
         <p:spPr>
           <a:xfrm>
-            <a:off x="3291840" y="1325880"/>
-            <a:ext cx="2651760" cy="2743200"/>
-          </a:xfrm>
-          <a:prstGeom prst="rect">
-            <a:avLst/>
-          </a:prstGeom>
-          <a:solidFill>
-            <a:schemeClr val="bg2"/>
-          </a:solidFill>
-          <a:ln w="12700">
-            <a:solidFill>
-              <a:schemeClr val="bg2"/>
-            </a:solidFill>
-            <a:prstDash val="solid"/>
-          </a:ln>
-        </p:spPr>
-      </p:sp>
-      <p:sp>
-        <p:nvSpPr>
-          <p:cNvPr id="11" name="icon square"/>
-          <p:cNvSpPr/>
-          <p:nvPr/>
-        </p:nvSpPr>
-        <p:spPr>
-          <a:xfrm>
-            <a:off x="3429000" y="1463040"/>
+            <a:off x="457200" y="2148840"/>
             <a:ext cx="384048" cy="384048"/>
           </a:xfrm>
           <a:prstGeom prst="rect">
@@ -3784,7 +3937,7 @@
       </p:sp>
       <p:pic>
         <p:nvPicPr>
-          <p:cNvPr id="12" name="search icon" descr="preencoded.png">    </p:cNvPr>
+          <p:cNvPr id="8" name="link icon" descr="preencoded.png">    </p:cNvPr>
           <p:cNvPicPr>
             <a:picLocks noChangeAspect="1"/>
           </p:cNvPicPr>
@@ -3798,7 +3951,7 @@
         </p:blipFill>
         <p:spPr>
           <a:xfrm>
-            <a:off x="3513491" y="1547531"/>
+            <a:off x="541691" y="2233331"/>
             <a:ext cx="215067" cy="215067"/>
           </a:xfrm>
           <a:prstGeom prst="rect">
@@ -3808,157 +3961,63 @@
       </p:pic>
       <p:sp>
         <p:nvSpPr>
-          <p:cNvPr id="13" name="Firm knowledge engine name"/>
-          <p:cNvSpPr txBox="1"/>
-          <p:nvPr/>
-        </p:nvSpPr>
-        <p:spPr>
-          <a:xfrm>
-            <a:off x="3931920" y="1435608"/>
-            <a:ext cx="1874520" cy="438912"/>
-          </a:xfrm>
-          <a:prstGeom prst="rect">
-            <a:avLst/>
-          </a:prstGeom>
-          <a:noFill/>
-          <a:ln/>
-        </p:spPr>
-        <p:txBody>
-          <a:bodyPr wrap="square" lIns="0" tIns="0" rIns="0" bIns="0" rtlCol="0" anchor="ctr"/>
-          <a:lstStyle/>
-          <a:p>
-            <a:pPr indent="0" marL="0">
-              <a:buNone/>
-            </a:pPr>
-            <a:r>
-              <a:rPr lang="en-US" sz="1400" b="1" dirty="0">
+          <p:cNvPr id="9" name="Connected pillar"/>
+          <p:cNvSpPr txBox="1"/>
+          <p:nvPr/>
+        </p:nvSpPr>
+        <p:spPr>
+          <a:xfrm>
+            <a:off x="987552" y="2112264"/>
+            <a:ext cx="3840480" cy="777240"/>
+          </a:xfrm>
+          <a:prstGeom prst="rect">
+            <a:avLst/>
+          </a:prstGeom>
+          <a:noFill/>
+          <a:ln/>
+        </p:spPr>
+        <p:txBody>
+          <a:bodyPr wrap="square" lIns="0" tIns="0" rIns="0" bIns="0" rtlCol="0" anchor="t"/>
+          <a:lstStyle/>
+          <a:p>
+            <a:pPr indent="0" marL="0">
+              <a:buNone/>
+            </a:pPr>
+            <a:r>
+              <a:rPr lang="en-US" sz="1300" b="1" dirty="0">
                 <a:solidFill>
                   <a:schemeClr val="tx1"/>
                 </a:solidFill>
               </a:rPr>
-              <a:t>Firm knowledge engine</a:t>
-            </a:r>
-            <a:endParaRPr lang="en-US" sz="1400" dirty="0"/>
-          </a:p>
-        </p:txBody>
-      </p:sp>
-      <p:sp>
-        <p:nvSpPr>
-          <p:cNvPr id="14" name="Firm knowledge engine what"/>
-          <p:cNvSpPr txBox="1"/>
-          <p:nvPr/>
-        </p:nvSpPr>
-        <p:spPr>
-          <a:xfrm>
-            <a:off x="3429000" y="2011680"/>
-            <a:ext cx="2377440" cy="1188720"/>
-          </a:xfrm>
-          <a:prstGeom prst="rect">
-            <a:avLst/>
-          </a:prstGeom>
-          <a:noFill/>
-          <a:ln/>
-        </p:spPr>
-        <p:txBody>
-          <a:bodyPr wrap="square" lIns="0" tIns="0" rIns="0" bIns="0" rtlCol="0" anchor="t"/>
-          <a:lstStyle/>
-          <a:p>
-            <a:pPr indent="0" marL="0">
-              <a:buNone/>
-            </a:pPr>
-            <a:r>
-              <a:rPr lang="en-US" sz="1250" dirty="0">
+              <a:t>Connected</a:t>
+            </a:r>
+            <a:endParaRPr lang="en-US" sz="1300" dirty="0"/>
+          </a:p>
+          <a:p>
+            <a:pPr indent="0" marL="0">
+              <a:buNone/>
+            </a:pPr>
+            <a:r>
+              <a:rPr lang="en-US" sz="1050" dirty="0">
                 <a:solidFill>
                   <a:schemeClr val="tx1"/>
                 </a:solidFill>
               </a:rPr>
-              <a:t>Ask "who here has handled this?" or "how did we argue this before?" and get an answer from our own files.</a:t>
-            </a:r>
-            <a:endParaRPr lang="en-US" sz="1250" dirty="0"/>
-          </a:p>
-        </p:txBody>
-      </p:sp>
-      <p:sp>
-        <p:nvSpPr>
-          <p:cNvPr id="15" name="Firm knowledge engine why"/>
-          <p:cNvSpPr txBox="1"/>
-          <p:nvPr/>
-        </p:nvSpPr>
-        <p:spPr>
-          <a:xfrm>
-            <a:off x="3429000" y="3154680"/>
-            <a:ext cx="2377440" cy="822960"/>
-          </a:xfrm>
-          <a:prstGeom prst="rect">
-            <a:avLst/>
-          </a:prstGeom>
-          <a:noFill/>
-          <a:ln/>
-        </p:spPr>
-        <p:txBody>
-          <a:bodyPr wrap="square" lIns="0" tIns="0" rIns="0" bIns="0" rtlCol="0" anchor="t"/>
-          <a:lstStyle/>
-          <a:p>
-            <a:pPr indent="0" marL="0">
-              <a:buNone/>
-            </a:pPr>
-            <a:r>
-              <a:rPr lang="en-US" sz="1200" b="1" dirty="0">
-                <a:solidFill>
-                  <a:schemeClr val="accent5"/>
-                </a:solidFill>
-              </a:rPr>
-              <a:t>Why it matters: </a:t>
-            </a:r>
-            <a:pPr indent="0" marL="0">
-              <a:buNone/>
-            </a:pPr>
-            <a:r>
-              <a:rPr lang="en-US" sz="1200" dirty="0">
-                <a:solidFill>
-                  <a:schemeClr val="tx1"/>
-                </a:solidFill>
-              </a:rPr>
-              <a:t>Keeps expertise when senior partners retire. LexAtlas and Skippy are the pieces.</a:t>
-            </a:r>
-            <a:endParaRPr lang="en-US" sz="1200" dirty="0"/>
-          </a:p>
-        </p:txBody>
-      </p:sp>
-      <p:sp>
-        <p:nvSpPr>
-          <p:cNvPr id="16" name="Ask the matter card"/>
+              <a:t>Each intake routes to the right approvers. Walls feed a block list for the document system.</a:t>
+            </a:r>
+            <a:endParaRPr lang="en-US" sz="1300" dirty="0"/>
+          </a:p>
+        </p:txBody>
+      </p:sp>
+      <p:sp>
+        <p:nvSpPr>
+          <p:cNvPr id="10" name="icon square"/>
           <p:cNvSpPr/>
           <p:nvPr/>
         </p:nvSpPr>
         <p:spPr>
           <a:xfrm>
-            <a:off x="6126480" y="1325880"/>
-            <a:ext cx="2651760" cy="2743200"/>
-          </a:xfrm>
-          <a:prstGeom prst="rect">
-            <a:avLst/>
-          </a:prstGeom>
-          <a:solidFill>
-            <a:schemeClr val="bg2"/>
-          </a:solidFill>
-          <a:ln w="12700">
-            <a:solidFill>
-              <a:schemeClr val="bg2"/>
-            </a:solidFill>
-            <a:prstDash val="solid"/>
-          </a:ln>
-        </p:spPr>
-      </p:sp>
-      <p:sp>
-        <p:nvSpPr>
-          <p:cNvPr id="17" name="icon square"/>
-          <p:cNvSpPr/>
-          <p:nvPr/>
-        </p:nvSpPr>
-        <p:spPr>
-          <a:xfrm>
-            <a:off x="6263640" y="1463040"/>
+            <a:off x="457200" y="2999232"/>
             <a:ext cx="384048" cy="384048"/>
           </a:xfrm>
           <a:prstGeom prst="rect">
@@ -3977,7 +4036,7 @@
       </p:sp>
       <p:pic>
         <p:nvPicPr>
-          <p:cNvPr id="18" name="msg icon" descr="preencoded.png">    </p:cNvPr>
+          <p:cNvPr id="11" name="server icon" descr="preencoded.png">    </p:cNvPr>
           <p:cNvPicPr>
             <a:picLocks noChangeAspect="1"/>
           </p:cNvPicPr>
@@ -3991,7 +4050,7 @@
         </p:blipFill>
         <p:spPr>
           <a:xfrm>
-            <a:off x="6348131" y="1547531"/>
+            <a:off x="541691" y="3083723"/>
             <a:ext cx="215067" cy="215067"/>
           </a:xfrm>
           <a:prstGeom prst="rect">
@@ -4001,14 +4060,270 @@
       </p:pic>
       <p:sp>
         <p:nvSpPr>
-          <p:cNvPr id="19" name="Ask the matter name"/>
-          <p:cNvSpPr txBox="1"/>
-          <p:nvPr/>
-        </p:nvSpPr>
-        <p:spPr>
-          <a:xfrm>
-            <a:off x="6766560" y="1435608"/>
-            <a:ext cx="1874520" cy="438912"/>
+          <p:cNvPr id="12" name="Local model pillar"/>
+          <p:cNvSpPr txBox="1"/>
+          <p:nvPr/>
+        </p:nvSpPr>
+        <p:spPr>
+          <a:xfrm>
+            <a:off x="987552" y="2962656"/>
+            <a:ext cx="3840480" cy="777240"/>
+          </a:xfrm>
+          <a:prstGeom prst="rect">
+            <a:avLst/>
+          </a:prstGeom>
+          <a:noFill/>
+          <a:ln/>
+        </p:spPr>
+        <p:txBody>
+          <a:bodyPr wrap="square" lIns="0" tIns="0" rIns="0" bIns="0" rtlCol="0" anchor="t"/>
+          <a:lstStyle/>
+          <a:p>
+            <a:pPr indent="0" marL="0">
+              <a:buNone/>
+            </a:pPr>
+            <a:r>
+              <a:rPr lang="en-US" sz="1300" b="1" dirty="0">
+                <a:solidFill>
+                  <a:schemeClr val="tx1"/>
+                </a:solidFill>
+              </a:rPr>
+              <a:t>Local model</a:t>
+            </a:r>
+            <a:endParaRPr lang="en-US" sz="1300" dirty="0"/>
+          </a:p>
+          <a:p>
+            <a:pPr indent="0" marL="0">
+              <a:buNone/>
+            </a:pPr>
+            <a:r>
+              <a:rPr lang="en-US" sz="1050" dirty="0">
+                <a:solidFill>
+                  <a:schemeClr val="tx1"/>
+                </a:solidFill>
+              </a:rPr>
+              <a:t>The AI runs on the firm's own hardware, so client names never leave the building.</a:t>
+            </a:r>
+            <a:endParaRPr lang="en-US" sz="1300" dirty="0"/>
+          </a:p>
+        </p:txBody>
+      </p:sp>
+      <p:sp>
+        <p:nvSpPr>
+          <p:cNvPr id="13" name="icon square"/>
+          <p:cNvSpPr/>
+          <p:nvPr/>
+        </p:nvSpPr>
+        <p:spPr>
+          <a:xfrm>
+            <a:off x="457200" y="3849624"/>
+            <a:ext cx="384048" cy="384048"/>
+          </a:xfrm>
+          <a:prstGeom prst="rect">
+            <a:avLst/>
+          </a:prstGeom>
+          <a:solidFill>
+            <a:schemeClr val="accent1"/>
+          </a:solidFill>
+          <a:ln w="12700">
+            <a:solidFill>
+              <a:schemeClr val="accent1"/>
+            </a:solidFill>
+            <a:prstDash val="solid"/>
+          </a:ln>
+        </p:spPr>
+      </p:sp>
+      <p:pic>
+        <p:nvPicPr>
+          <p:cNvPr id="14" name="target icon" descr="preencoded.png">    </p:cNvPr>
+          <p:cNvPicPr>
+            <a:picLocks noChangeAspect="1"/>
+          </p:cNvPicPr>
+          <p:nvPr/>
+        </p:nvPicPr>
+        <p:blipFill>
+          <a:blip r:embed="rId4"/>
+          <a:stretch>
+            <a:fillRect/>
+          </a:stretch>
+        </p:blipFill>
+        <p:spPr>
+          <a:xfrm>
+            <a:off x="541691" y="3934115"/>
+            <a:ext cx="215067" cy="215067"/>
+          </a:xfrm>
+          <a:prstGeom prst="rect">
+            <a:avLst/>
+          </a:prstGeom>
+        </p:spPr>
+      </p:pic>
+      <p:sp>
+        <p:nvSpPr>
+          <p:cNvPr id="15" name="Built to our rules pillar"/>
+          <p:cNvSpPr txBox="1"/>
+          <p:nvPr/>
+        </p:nvSpPr>
+        <p:spPr>
+          <a:xfrm>
+            <a:off x="987552" y="3813048"/>
+            <a:ext cx="3840480" cy="777240"/>
+          </a:xfrm>
+          <a:prstGeom prst="rect">
+            <a:avLst/>
+          </a:prstGeom>
+          <a:noFill/>
+          <a:ln/>
+        </p:spPr>
+        <p:txBody>
+          <a:bodyPr wrap="square" lIns="0" tIns="0" rIns="0" bIns="0" rtlCol="0" anchor="t"/>
+          <a:lstStyle/>
+          <a:p>
+            <a:pPr indent="0" marL="0">
+              <a:buNone/>
+            </a:pPr>
+            <a:r>
+              <a:rPr lang="en-US" sz="1300" b="1" dirty="0">
+                <a:solidFill>
+                  <a:schemeClr val="tx1"/>
+                </a:solidFill>
+              </a:rPr>
+              <a:t>Built to our rules</a:t>
+            </a:r>
+            <a:endParaRPr lang="en-US" sz="1300" dirty="0"/>
+          </a:p>
+          <a:p>
+            <a:pPr indent="0" marL="0">
+              <a:buNone/>
+            </a:pPr>
+            <a:r>
+              <a:rPr lang="en-US" sz="1050" dirty="0">
+                <a:solidFill>
+                  <a:schemeClr val="tx1"/>
+                </a:solidFill>
+              </a:rPr>
+              <a:t>Catches what a letter-for-letter search misses (Smyth, Kate for Katherine, parent companies) and cites the conduct rule.</a:t>
+            </a:r>
+            <a:endParaRPr lang="en-US" sz="1300" dirty="0"/>
+          </a:p>
+        </p:txBody>
+      </p:sp>
+      <p:pic>
+        <p:nvPicPr>
+          <p:cNvPr id="16" name="Conflion hit review screenshot" descr="/mnt/project-files/legal-site/assets/conflion-hits.jpg">    </p:cNvPr>
+          <p:cNvPicPr>
+            <a:picLocks noChangeAspect="1"/>
+          </p:cNvPicPr>
+          <p:nvPr/>
+        </p:nvPicPr>
+        <p:blipFill>
+          <a:blip r:embed="rId5"/>
+          <a:stretch>
+            <a:fillRect/>
+          </a:stretch>
+        </p:blipFill>
+        <p:spPr>
+          <a:xfrm>
+            <a:off x="4983480" y="1280160"/>
+            <a:ext cx="3703320" cy="2313432"/>
+          </a:xfrm>
+          <a:prstGeom prst="rect">
+            <a:avLst/>
+          </a:prstGeom>
+        </p:spPr>
+      </p:pic>
+      <p:sp>
+        <p:nvSpPr>
+          <p:cNvPr id="17" name="screenshot border"/>
+          <p:cNvSpPr/>
+          <p:nvPr/>
+        </p:nvSpPr>
+        <p:spPr>
+          <a:xfrm>
+            <a:off x="4983480" y="1280160"/>
+            <a:ext cx="3703320" cy="2313432"/>
+          </a:xfrm>
+          <a:prstGeom prst="rect">
+            <a:avLst/>
+          </a:prstGeom>
+          <a:ln w="9525">
+            <a:solidFill>
+              <a:srgbClr val="D0D0D0"/>
+            </a:solidFill>
+            <a:prstDash val="solid"/>
+          </a:ln>
+        </p:spPr>
+      </p:sp>
+      <p:sp>
+        <p:nvSpPr>
+          <p:cNvPr id="18" name="screenshot caption"/>
+          <p:cNvSpPr txBox="1"/>
+          <p:nvPr/>
+        </p:nvSpPr>
+        <p:spPr>
+          <a:xfrm>
+            <a:off x="4983480" y="3657600"/>
+            <a:ext cx="3703320" cy="457200"/>
+          </a:xfrm>
+          <a:prstGeom prst="rect">
+            <a:avLst/>
+          </a:prstGeom>
+          <a:noFill/>
+          <a:ln/>
+        </p:spPr>
+        <p:txBody>
+          <a:bodyPr wrap="square" lIns="0" tIns="0" rIns="0" bIns="0" rtlCol="0" anchor="t"/>
+          <a:lstStyle/>
+          <a:p>
+            <a:pPr indent="0" marL="0">
+              <a:buNone/>
+            </a:pPr>
+            <a:r>
+              <a:rPr lang="en-US" sz="950" i="1" dirty="0">
+                <a:solidFill>
+                  <a:schemeClr val="tx2"/>
+                </a:solidFill>
+              </a:rPr>
+              <a:t>Hit review: each match explained in plain English. The AI note is marked advisory; a person decides.</a:t>
+            </a:r>
+            <a:endParaRPr lang="en-US" sz="950" dirty="0"/>
+          </a:p>
+        </p:txBody>
+      </p:sp>
+      <p:sp>
+        <p:nvSpPr>
+          <p:cNvPr id="19" name="pattern card"/>
+          <p:cNvSpPr/>
+          <p:nvPr/>
+        </p:nvSpPr>
+        <p:spPr>
+          <a:xfrm>
+            <a:off x="4983480" y="4206240"/>
+            <a:ext cx="3703320" cy="548640"/>
+          </a:xfrm>
+          <a:prstGeom prst="rect">
+            <a:avLst/>
+          </a:prstGeom>
+          <a:solidFill>
+            <a:schemeClr val="accent1"/>
+          </a:solidFill>
+          <a:ln w="12700">
+            <a:solidFill>
+              <a:schemeClr val="accent1"/>
+            </a:solidFill>
+            <a:prstDash val="solid"/>
+          </a:ln>
+        </p:spPr>
+      </p:sp>
+      <p:sp>
+        <p:nvSpPr>
+          <p:cNvPr id="20" name="pattern line"/>
+          <p:cNvSpPr txBox="1"/>
+          <p:nvPr/>
+        </p:nvSpPr>
+        <p:spPr>
+          <a:xfrm>
+            <a:off x="5120640" y="4206240"/>
+            <a:ext cx="3474720" cy="548640"/>
           </a:xfrm>
           <a:prstGeom prst="rect">
             <a:avLst/>
@@ -4024,97 +4339,14 @@
               <a:buNone/>
             </a:pPr>
             <a:r>
-              <a:rPr lang="en-US" sz="1400" b="1" dirty="0">
-                <a:solidFill>
-                  <a:schemeClr val="tx1"/>
-                </a:solidFill>
-              </a:rPr>
-              <a:t>Ask the matter</a:t>
-            </a:r>
-            <a:endParaRPr lang="en-US" sz="1400" dirty="0"/>
-          </a:p>
-        </p:txBody>
-      </p:sp>
-      <p:sp>
-        <p:nvSpPr>
-          <p:cNvPr id="20" name="Ask the matter what"/>
-          <p:cNvSpPr txBox="1"/>
-          <p:nvPr/>
-        </p:nvSpPr>
-        <p:spPr>
-          <a:xfrm>
-            <a:off x="6263640" y="2011680"/>
-            <a:ext cx="2377440" cy="1188720"/>
-          </a:xfrm>
-          <a:prstGeom prst="rect">
-            <a:avLst/>
-          </a:prstGeom>
-          <a:noFill/>
-          <a:ln/>
-        </p:spPr>
-        <p:txBody>
-          <a:bodyPr wrap="square" lIns="0" tIns="0" rIns="0" bIns="0" rtlCol="0" anchor="t"/>
-          <a:lstStyle/>
-          <a:p>
-            <a:pPr indent="0" marL="0">
-              <a:buNone/>
-            </a:pPr>
-            <a:r>
-              <a:rPr lang="en-US" sz="1250" dirty="0">
-                <a:solidFill>
-                  <a:schemeClr val="tx1"/>
-                </a:solidFill>
-              </a:rPr>
-              <a:t>Questions over one matter's files, every answer cited to the page.</a:t>
-            </a:r>
-            <a:endParaRPr lang="en-US" sz="1250" dirty="0"/>
-          </a:p>
-        </p:txBody>
-      </p:sp>
-      <p:sp>
-        <p:nvSpPr>
-          <p:cNvPr id="21" name="Ask the matter why"/>
-          <p:cNvSpPr txBox="1"/>
-          <p:nvPr/>
-        </p:nvSpPr>
-        <p:spPr>
-          <a:xfrm>
-            <a:off x="6263640" y="3154680"/>
-            <a:ext cx="2377440" cy="822960"/>
-          </a:xfrm>
-          <a:prstGeom prst="rect">
-            <a:avLst/>
-          </a:prstGeom>
-          <a:noFill/>
-          <a:ln/>
-        </p:spPr>
-        <p:txBody>
-          <a:bodyPr wrap="square" lIns="0" tIns="0" rIns="0" bIns="0" rtlCol="0" anchor="t"/>
-          <a:lstStyle/>
-          <a:p>
-            <a:pPr indent="0" marL="0">
-              <a:buNone/>
-            </a:pPr>
-            <a:r>
-              <a:rPr lang="en-US" sz="1200" b="1" dirty="0">
-                <a:solidFill>
-                  <a:schemeClr val="accent5"/>
-                </a:solidFill>
-              </a:rPr>
-              <a:t>Why it matters: </a:t>
-            </a:r>
-            <a:pPr indent="0" marL="0">
-              <a:buNone/>
-            </a:pPr>
-            <a:r>
-              <a:rPr lang="en-US" sz="1200" dirty="0">
-                <a:solidFill>
-                  <a:schemeClr val="tx1"/>
-                </a:solidFill>
-              </a:rPr>
-              <a:t>A contained first step toward the knowledge engine. Skippy does this today, one matter at a time.</a:t>
-            </a:r>
-            <a:endParaRPr lang="en-US" sz="1200" dirty="0"/>
+              <a:rPr lang="en-US" sz="1150" b="1" dirty="0">
+                <a:solidFill>
+                  <a:schemeClr val="bg1"/>
+                </a:solidFill>
+              </a:rPr>
+              <a:t>The same pattern could serve any workflow at the firm.</a:t>
+            </a:r>
+            <a:endParaRPr lang="en-US" sz="1150" dirty="0"/>
           </a:p>
         </p:txBody>
       </p:sp>
@@ -4220,7 +4452,7 @@
                   <a:srgbClr val="2D4459"/>
                 </a:solidFill>
               </a:rPr>
-              <a:t>Four rules every tool I build follows</a:t>
+              <a:t>What I could build next, from small to firm-wide</a:t>
             </a:r>
             <a:endParaRPr lang="en-US" sz="2600" dirty="0"/>
           </a:p>
@@ -4258,7 +4490,7 @@
                   <a:schemeClr val="tx2"/>
                 </a:solidFill>
               </a:rPr>
-              <a:t>These are what make AI safe to use on client work. They hold for all fifteen tools.</a:t>
+              <a:t>Ideas I think are worth exploring. Which ones, and in what order, is leadership's call.</a:t>
             </a:r>
             <a:endParaRPr lang="en-US" sz="1300" dirty="0"/>
           </a:p>
@@ -4266,14 +4498,14 @@
       </p:sp>
       <p:sp>
         <p:nvSpPr>
-          <p:cNvPr id="4" name="Lawyers decide card"/>
+          <p:cNvPr id="4" name="Start small card"/>
           <p:cNvSpPr/>
           <p:nvPr/>
         </p:nvSpPr>
         <p:spPr>
           <a:xfrm>
             <a:off x="457200" y="1280160"/>
-            <a:ext cx="4023360" cy="1536192"/>
+            <a:ext cx="2651760" cy="3291840"/>
           </a:xfrm>
           <a:prstGeom prst="rect">
             <a:avLst/>
@@ -4316,7 +4548,7 @@
       </p:sp>
       <p:pic>
         <p:nvPicPr>
-          <p:cNvPr id="6" name="users icon" descr="preencoded.png">    </p:cNvPr>
+          <p:cNvPr id="6" name="play icon" descr="preencoded.png">    </p:cNvPr>
           <p:cNvPicPr>
             <a:picLocks noChangeAspect="1"/>
           </p:cNvPicPr>
@@ -4340,14 +4572,14 @@
       </p:pic>
       <p:sp>
         <p:nvSpPr>
-          <p:cNvPr id="7" name="Lawyers decide name"/>
+          <p:cNvPr id="7" name="Start small name"/>
           <p:cNvSpPr txBox="1"/>
           <p:nvPr/>
         </p:nvSpPr>
         <p:spPr>
           <a:xfrm>
             <a:off x="1097280" y="1389888"/>
-            <a:ext cx="3246120" cy="438912"/>
+            <a:ext cx="1874520" cy="438912"/>
           </a:xfrm>
           <a:prstGeom prst="rect">
             <a:avLst/>
@@ -4363,27 +4595,27 @@
               <a:buNone/>
             </a:pPr>
             <a:r>
-              <a:rPr lang="en-US" sz="1500" b="1" dirty="0">
+              <a:rPr lang="en-US" sz="1400" b="1" dirty="0">
                 <a:solidFill>
                   <a:schemeClr val="tx1"/>
                 </a:solidFill>
               </a:rPr>
-              <a:t>Lawyers decide</a:t>
-            </a:r>
-            <a:endParaRPr lang="en-US" sz="1500" dirty="0"/>
-          </a:p>
-        </p:txBody>
-      </p:sp>
-      <p:sp>
-        <p:nvSpPr>
-          <p:cNvPr id="8" name="Lawyers decide text"/>
+              <a:t>Start small</a:t>
+            </a:r>
+            <a:endParaRPr lang="en-US" sz="1400" dirty="0"/>
+          </a:p>
+        </p:txBody>
+      </p:sp>
+      <p:sp>
+        <p:nvSpPr>
+          <p:cNvPr id="8" name="Start small sub"/>
           <p:cNvSpPr txBox="1"/>
           <p:nvPr/>
         </p:nvSpPr>
         <p:spPr>
           <a:xfrm>
             <a:off x="594360" y="1938528"/>
-            <a:ext cx="3749040" cy="822960"/>
+            <a:ext cx="2377440" cy="292608"/>
           </a:xfrm>
           <a:prstGeom prst="rect">
             <a:avLst/>
@@ -4399,27 +4631,127 @@
               <a:buNone/>
             </a:pPr>
             <a:r>
-              <a:rPr lang="en-US" sz="1200" dirty="0">
+              <a:rPr lang="en-US" sz="1150" i="1" dirty="0">
+                <a:solidFill>
+                  <a:schemeClr val="accent5"/>
+                </a:solidFill>
+              </a:rPr>
+              <a:t>Use what already works</a:t>
+            </a:r>
+            <a:endParaRPr lang="en-US" sz="1150" dirty="0"/>
+          </a:p>
+        </p:txBody>
+      </p:sp>
+      <p:sp>
+        <p:nvSpPr>
+          <p:cNvPr id="9" name="Start small bullets"/>
+          <p:cNvSpPr txBox="1"/>
+          <p:nvPr/>
+        </p:nvSpPr>
+        <p:spPr>
+          <a:xfrm>
+            <a:off x="594360" y="2304288"/>
+            <a:ext cx="2377440" cy="2194560"/>
+          </a:xfrm>
+          <a:prstGeom prst="rect">
+            <a:avLst/>
+          </a:prstGeom>
+          <a:noFill/>
+          <a:ln/>
+        </p:spPr>
+        <p:txBody>
+          <a:bodyPr wrap="square" lIns="0" tIns="0" rIns="0" bIns="0" rtlCol="0" anchor="t"/>
+          <a:lstStyle/>
+          <a:p>
+            <a:pPr marL="342900" indent="-342900">
+              <a:spcAft>
+                <a:spcPts val="1000"/>
+              </a:spcAft>
+              <a:buSzPct val="100000"/>
+              <a:buChar char="•"/>
+            </a:pPr>
+            <a:r>
+              <a:rPr lang="en-US" sz="1250" dirty="0">
                 <a:solidFill>
                   <a:schemeClr val="tx1"/>
                 </a:solidFill>
               </a:rPr>
-              <a:t>AI suggestions stay marked as suggestions until a person confirms them. No tool clears a conflict, files a brief or posts time on its own.</a:t>
-            </a:r>
-            <a:endParaRPr lang="en-US" sz="1200" dirty="0"/>
-          </a:p>
-        </p:txBody>
-      </p:sp>
-      <p:sp>
-        <p:nvSpPr>
-          <p:cNvPr id="9" name="Code checks the model card"/>
+              <a:t>Pilot Guideline Guard, Party Finder or Marketing Studio with our own documents.</a:t>
+            </a:r>
+            <a:endParaRPr lang="en-US" sz="1250" dirty="0"/>
+          </a:p>
+          <a:p>
+            <a:pPr marL="342900" indent="-342900">
+              <a:spcAft>
+                <a:spcPts val="1000"/>
+              </a:spcAft>
+              <a:buSzPct val="100000"/>
+              <a:buChar char="•"/>
+            </a:pPr>
+            <a:r>
+              <a:rPr lang="en-US" sz="1250" dirty="0">
+                <a:solidFill>
+                  <a:schemeClr val="tx1"/>
+                </a:solidFill>
+              </a:rPr>
+              <a:t>No connection to firm systems needed.</a:t>
+            </a:r>
+            <a:endParaRPr lang="en-US" sz="1250" dirty="0"/>
+          </a:p>
+          <a:p>
+            <a:pPr marL="342900" indent="-342900">
+              <a:spcAft>
+                <a:spcPts val="1000"/>
+              </a:spcAft>
+              <a:buSzPct val="100000"/>
+              <a:buChar char="•"/>
+            </a:pPr>
+            <a:r>
+              <a:rPr lang="en-US" sz="1250" dirty="0">
+                <a:solidFill>
+                  <a:schemeClr val="tx1"/>
+                </a:solidFill>
+              </a:rPr>
+              <a:t>A person reviews every output.</a:t>
+            </a:r>
+            <a:endParaRPr lang="en-US" sz="1250" dirty="0"/>
+          </a:p>
+        </p:txBody>
+      </p:sp>
+      <p:pic>
+        <p:nvPicPr>
+          <p:cNvPr id="10" name="next arrow 1" descr="preencoded.png">    </p:cNvPr>
+          <p:cNvPicPr>
+            <a:picLocks noChangeAspect="1"/>
+          </p:cNvPicPr>
+          <p:nvPr/>
+        </p:nvPicPr>
+        <p:blipFill>
+          <a:blip r:embed="rId2"/>
+          <a:stretch>
+            <a:fillRect/>
+          </a:stretch>
+        </p:blipFill>
+        <p:spPr>
+          <a:xfrm>
+            <a:off x="3127248" y="2852928"/>
+            <a:ext cx="146304" cy="146304"/>
+          </a:xfrm>
+          <a:prstGeom prst="rect">
+            <a:avLst/>
+          </a:prstGeom>
+        </p:spPr>
+      </p:pic>
+      <p:sp>
+        <p:nvSpPr>
+          <p:cNvPr id="11" name="Connect card"/>
           <p:cNvSpPr/>
           <p:nvPr/>
         </p:nvSpPr>
         <p:spPr>
           <a:xfrm>
-            <a:off x="4663440" y="1280160"/>
-            <a:ext cx="4023360" cy="1536192"/>
+            <a:off x="3291840" y="1280160"/>
+            <a:ext cx="2651760" cy="3291840"/>
           </a:xfrm>
           <a:prstGeom prst="rect">
             <a:avLst/>
@@ -4437,13 +4769,13 @@
       </p:sp>
       <p:sp>
         <p:nvSpPr>
-          <p:cNvPr id="10" name="icon square"/>
+          <p:cNvPr id="12" name="icon square"/>
           <p:cNvSpPr/>
           <p:nvPr/>
         </p:nvSpPr>
         <p:spPr>
           <a:xfrm>
-            <a:off x="4800600" y="1417320"/>
+            <a:off x="3429000" y="1417320"/>
             <a:ext cx="384048" cy="384048"/>
           </a:xfrm>
           <a:prstGeom prst="rect">
@@ -4462,21 +4794,21 @@
       </p:sp>
       <p:pic>
         <p:nvPicPr>
-          <p:cNvPr id="11" name="check icon" descr="preencoded.png">    </p:cNvPr>
+          <p:cNvPr id="13" name="link icon" descr="preencoded.png">    </p:cNvPr>
           <p:cNvPicPr>
             <a:picLocks noChangeAspect="1"/>
           </p:cNvPicPr>
           <p:nvPr/>
         </p:nvPicPr>
         <p:blipFill>
-          <a:blip r:embed="rId2"/>
+          <a:blip r:embed="rId3"/>
           <a:stretch>
             <a:fillRect/>
           </a:stretch>
         </p:blipFill>
         <p:spPr>
           <a:xfrm>
-            <a:off x="4885091" y="1501811"/>
+            <a:off x="3513491" y="1501811"/>
             <a:ext cx="215067" cy="215067"/>
           </a:xfrm>
           <a:prstGeom prst="rect">
@@ -4486,14 +4818,14 @@
       </p:pic>
       <p:sp>
         <p:nvSpPr>
-          <p:cNvPr id="12" name="Code checks the model name"/>
-          <p:cNvSpPr txBox="1"/>
-          <p:nvPr/>
-        </p:nvSpPr>
-        <p:spPr>
-          <a:xfrm>
-            <a:off x="5303520" y="1389888"/>
-            <a:ext cx="3246120" cy="438912"/>
+          <p:cNvPr id="14" name="Connect name"/>
+          <p:cNvSpPr txBox="1"/>
+          <p:nvPr/>
+        </p:nvSpPr>
+        <p:spPr>
+          <a:xfrm>
+            <a:off x="3931920" y="1389888"/>
+            <a:ext cx="1874520" cy="438912"/>
           </a:xfrm>
           <a:prstGeom prst="rect">
             <a:avLst/>
@@ -4509,27 +4841,27 @@
               <a:buNone/>
             </a:pPr>
             <a:r>
-              <a:rPr lang="en-US" sz="1500" b="1" dirty="0">
+              <a:rPr lang="en-US" sz="1400" b="1" dirty="0">
                 <a:solidFill>
                   <a:schemeClr val="tx1"/>
                 </a:solidFill>
               </a:rPr>
-              <a:t>Code checks the model</a:t>
-            </a:r>
-            <a:endParaRPr lang="en-US" sz="1500" dirty="0"/>
-          </a:p>
-        </p:txBody>
-      </p:sp>
-      <p:sp>
-        <p:nvSpPr>
-          <p:cNvPr id="13" name="Code checks the model text"/>
-          <p:cNvSpPr txBox="1"/>
-          <p:nvPr/>
-        </p:nvSpPr>
-        <p:spPr>
-          <a:xfrm>
-            <a:off x="4800600" y="1938528"/>
-            <a:ext cx="3749040" cy="822960"/>
+              <a:t>Connect</a:t>
+            </a:r>
+            <a:endParaRPr lang="en-US" sz="1400" dirty="0"/>
+          </a:p>
+        </p:txBody>
+      </p:sp>
+      <p:sp>
+        <p:nvSpPr>
+          <p:cNvPr id="15" name="Connect sub"/>
+          <p:cNvSpPr txBox="1"/>
+          <p:nvPr/>
+        </p:nvSpPr>
+        <p:spPr>
+          <a:xfrm>
+            <a:off x="3429000" y="1938528"/>
+            <a:ext cx="2377440" cy="292608"/>
           </a:xfrm>
           <a:prstGeom prst="rect">
             <a:avLst/>
@@ -4545,52 +4877,127 @@
               <a:buNone/>
             </a:pPr>
             <a:r>
-              <a:rPr lang="en-US" sz="1200" dirty="0">
+              <a:rPr lang="en-US" sz="1150" i="1" dirty="0">
+                <a:solidFill>
+                  <a:schemeClr val="accent5"/>
+                </a:solidFill>
+              </a:rPr>
+              <a:t>Plug proven tools into firm systems</a:t>
+            </a:r>
+            <a:endParaRPr lang="en-US" sz="1150" dirty="0"/>
+          </a:p>
+        </p:txBody>
+      </p:sp>
+      <p:sp>
+        <p:nvSpPr>
+          <p:cNvPr id="16" name="Connect bullets"/>
+          <p:cNvSpPr txBox="1"/>
+          <p:nvPr/>
+        </p:nvSpPr>
+        <p:spPr>
+          <a:xfrm>
+            <a:off x="3429000" y="2304288"/>
+            <a:ext cx="2377440" cy="2194560"/>
+          </a:xfrm>
+          <a:prstGeom prst="rect">
+            <a:avLst/>
+          </a:prstGeom>
+          <a:noFill/>
+          <a:ln/>
+        </p:spPr>
+        <p:txBody>
+          <a:bodyPr wrap="square" lIns="0" tIns="0" rIns="0" bIns="0" rtlCol="0" anchor="t"/>
+          <a:lstStyle/>
+          <a:p>
+            <a:pPr marL="342900" indent="-342900">
+              <a:spcAft>
+                <a:spcPts val="1000"/>
+              </a:spcAft>
+              <a:buSzPct val="100000"/>
+              <a:buChar char="•"/>
+            </a:pPr>
+            <a:r>
+              <a:rPr lang="en-US" sz="1250" dirty="0">
                 <a:solidFill>
                   <a:schemeClr val="tx1"/>
                 </a:solidFill>
               </a:rPr>
-              <a:t>Quotations are matched word for word against the source. Deadlines, totals and redlines are computed in code, not guessed by the model.</a:t>
-            </a:r>
-            <a:endParaRPr lang="en-US" sz="1200" dirty="0"/>
-          </a:p>
-        </p:txBody>
-      </p:sp>
-      <p:sp>
-        <p:nvSpPr>
-          <p:cNvPr id="14" name="Client data stays protected card"/>
+              <a:t>Ask the matter: questions over a matter's files, answered with page cites.</a:t>
+            </a:r>
+            <a:endParaRPr lang="en-US" sz="1250" dirty="0"/>
+          </a:p>
+          <a:p>
+            <a:pPr marL="342900" indent="-342900">
+              <a:spcAft>
+                <a:spcPts val="1000"/>
+              </a:spcAft>
+              <a:buSzPct val="100000"/>
+              <a:buChar char="•"/>
+            </a:pPr>
+            <a:r>
+              <a:rPr lang="en-US" sz="1250" dirty="0">
+                <a:solidFill>
+                  <a:schemeClr val="tx1"/>
+                </a:solidFill>
+              </a:rPr>
+              <a:t>Hour Catch: draft time entries from Outlook and Teams.</a:t>
+            </a:r>
+            <a:endParaRPr lang="en-US" sz="1250" dirty="0"/>
+          </a:p>
+          <a:p>
+            <a:pPr marL="342900" indent="-342900">
+              <a:spcAft>
+                <a:spcPts val="1000"/>
+              </a:spcAft>
+              <a:buSzPct val="100000"/>
+              <a:buChar char="•"/>
+            </a:pPr>
+            <a:r>
+              <a:rPr lang="en-US" sz="1250" dirty="0">
+                <a:solidFill>
+                  <a:schemeClr val="tx1"/>
+                </a:solidFill>
+              </a:rPr>
+              <a:t>Client risk radar: flag lawsuits and audits hitting our clients.</a:t>
+            </a:r>
+            <a:endParaRPr lang="en-US" sz="1250" dirty="0"/>
+          </a:p>
+        </p:txBody>
+      </p:sp>
+      <p:pic>
+        <p:nvPicPr>
+          <p:cNvPr id="17" name="next arrow 2" descr="preencoded.png">    </p:cNvPr>
+          <p:cNvPicPr>
+            <a:picLocks noChangeAspect="1"/>
+          </p:cNvPicPr>
+          <p:nvPr/>
+        </p:nvPicPr>
+        <p:blipFill>
+          <a:blip r:embed="rId4"/>
+          <a:stretch>
+            <a:fillRect/>
+          </a:stretch>
+        </p:blipFill>
+        <p:spPr>
+          <a:xfrm>
+            <a:off x="5961888" y="2852928"/>
+            <a:ext cx="146304" cy="146304"/>
+          </a:xfrm>
+          <a:prstGeom prst="rect">
+            <a:avLst/>
+          </a:prstGeom>
+        </p:spPr>
+      </p:pic>
+      <p:sp>
+        <p:nvSpPr>
+          <p:cNvPr id="18" name="Firm-wide, for discussion card"/>
           <p:cNvSpPr/>
           <p:nvPr/>
         </p:nvSpPr>
         <p:spPr>
           <a:xfrm>
-            <a:off x="457200" y="2971800"/>
-            <a:ext cx="4023360" cy="1536192"/>
-          </a:xfrm>
-          <a:prstGeom prst="rect">
-            <a:avLst/>
-          </a:prstGeom>
-          <a:solidFill>
-            <a:schemeClr val="bg2"/>
-          </a:solidFill>
-          <a:ln w="12700">
-            <a:solidFill>
-              <a:schemeClr val="bg2"/>
-            </a:solidFill>
-            <a:prstDash val="solid"/>
-          </a:ln>
-        </p:spPr>
-      </p:sp>
-      <p:sp>
-        <p:nvSpPr>
-          <p:cNvPr id="15" name="icon square"/>
-          <p:cNvSpPr/>
-          <p:nvPr/>
-        </p:nvSpPr>
-        <p:spPr>
-          <a:xfrm>
-            <a:off x="594360" y="3108960"/>
-            <a:ext cx="384048" cy="384048"/>
+            <a:off x="6126480" y="1280160"/>
+            <a:ext cx="2651760" cy="3291840"/>
           </a:xfrm>
           <a:prstGeom prst="rect">
             <a:avLst/>
@@ -4606,24 +5013,49 @@
           </a:ln>
         </p:spPr>
       </p:sp>
+      <p:sp>
+        <p:nvSpPr>
+          <p:cNvPr id="19" name="icon square"/>
+          <p:cNvSpPr/>
+          <p:nvPr/>
+        </p:nvSpPr>
+        <p:spPr>
+          <a:xfrm>
+            <a:off x="6263640" y="1417320"/>
+            <a:ext cx="384048" cy="384048"/>
+          </a:xfrm>
+          <a:prstGeom prst="rect">
+            <a:avLst/>
+          </a:prstGeom>
+          <a:solidFill>
+            <a:schemeClr val="bg1"/>
+          </a:solidFill>
+          <a:ln w="12700">
+            <a:solidFill>
+              <a:schemeClr val="bg1"/>
+            </a:solidFill>
+            <a:prstDash val="solid"/>
+          </a:ln>
+        </p:spPr>
+      </p:sp>
       <p:pic>
         <p:nvPicPr>
-          <p:cNvPr id="16" name="lock icon" descr="preencoded.png">    </p:cNvPr>
+          <p:cNvPr id="20" name="layers icon" descr="preencoded.png">    </p:cNvPr>
           <p:cNvPicPr>
             <a:picLocks noChangeAspect="1"/>
           </p:cNvPicPr>
           <p:nvPr/>
         </p:nvPicPr>
         <p:blipFill>
-          <a:blip r:embed="rId3"/>
+          <a:blip r:embed="rId5"/>
           <a:stretch>
             <a:fillRect/>
           </a:stretch>
         </p:blipFill>
         <p:spPr>
           <a:xfrm>
-            <a:off x="678851" y="3193451"/>
-            <a:ext cx="215067" cy="215067"/>
+            <a:off x="6345936" y="1499616"/>
+            <a:ext cx="219456" cy="219456"/>
           </a:xfrm>
           <a:prstGeom prst="rect">
             <a:avLst/>
@@ -4632,14 +5064,14 @@
       </p:pic>
       <p:sp>
         <p:nvSpPr>
-          <p:cNvPr id="17" name="Client data stays protected name"/>
-          <p:cNvSpPr txBox="1"/>
-          <p:nvPr/>
-        </p:nvSpPr>
-        <p:spPr>
-          <a:xfrm>
-            <a:off x="1097280" y="3081528"/>
-            <a:ext cx="3246120" cy="438912"/>
+          <p:cNvPr id="21" name="Firm-wide, for discussion name"/>
+          <p:cNvSpPr txBox="1"/>
+          <p:nvPr/>
+        </p:nvSpPr>
+        <p:spPr>
+          <a:xfrm>
+            <a:off x="6766560" y="1389888"/>
+            <a:ext cx="1874520" cy="438912"/>
           </a:xfrm>
           <a:prstGeom prst="rect">
             <a:avLst/>
@@ -4655,27 +5087,27 @@
               <a:buNone/>
             </a:pPr>
             <a:r>
-              <a:rPr lang="en-US" sz="1500" b="1" dirty="0">
-                <a:solidFill>
-                  <a:schemeClr val="tx1"/>
-                </a:solidFill>
-              </a:rPr>
-              <a:t>Client data stays protected</a:t>
-            </a:r>
-            <a:endParaRPr lang="en-US" sz="1500" dirty="0"/>
-          </a:p>
-        </p:txBody>
-      </p:sp>
-      <p:sp>
-        <p:nvSpPr>
-          <p:cNvPr id="18" name="Client data stays protected text"/>
-          <p:cNvSpPr txBox="1"/>
-          <p:nvPr/>
-        </p:nvSpPr>
-        <p:spPr>
-          <a:xfrm>
-            <a:off x="594360" y="3630168"/>
-            <a:ext cx="3749040" cy="822960"/>
+              <a:rPr lang="en-US" sz="1400" b="1" dirty="0">
+                <a:solidFill>
+                  <a:schemeClr val="bg1"/>
+                </a:solidFill>
+              </a:rPr>
+              <a:t>Firm-wide, for discussion</a:t>
+            </a:r>
+            <a:endParaRPr lang="en-US" sz="1400" dirty="0"/>
+          </a:p>
+        </p:txBody>
+      </p:sp>
+      <p:sp>
+        <p:nvSpPr>
+          <p:cNvPr id="22" name="Firm-wide, for discussion sub"/>
+          <p:cNvSpPr txBox="1"/>
+          <p:nvPr/>
+        </p:nvSpPr>
+        <p:spPr>
+          <a:xfrm>
+            <a:off x="6263640" y="1938528"/>
+            <a:ext cx="2377440" cy="292608"/>
           </a:xfrm>
           <a:prstGeom prst="rect">
             <a:avLst/>
@@ -4691,137 +5123,27 @@
               <a:buNone/>
             </a:pPr>
             <a:r>
-              <a:rPr lang="en-US" sz="1200" dirty="0">
-                <a:solidFill>
-                  <a:schemeClr val="tx1"/>
-                </a:solidFill>
-              </a:rPr>
-              <a:t>Sensitive work runs on the firm's own hardware, nothing is sent out without approval, and ethical walls are enforced in the data.</a:t>
-            </a:r>
-            <a:endParaRPr lang="en-US" sz="1200" dirty="0"/>
-          </a:p>
-        </p:txBody>
-      </p:sp>
-      <p:sp>
-        <p:nvSpPr>
-          <p:cNvPr id="19" name="Everything is traceable card"/>
-          <p:cNvSpPr/>
-          <p:nvPr/>
-        </p:nvSpPr>
-        <p:spPr>
-          <a:xfrm>
-            <a:off x="4663440" y="2971800"/>
-            <a:ext cx="4023360" cy="1536192"/>
-          </a:xfrm>
-          <a:prstGeom prst="rect">
-            <a:avLst/>
-          </a:prstGeom>
-          <a:solidFill>
-            <a:schemeClr val="bg2"/>
-          </a:solidFill>
-          <a:ln w="12700">
-            <a:solidFill>
-              <a:schemeClr val="bg2"/>
-            </a:solidFill>
-            <a:prstDash val="solid"/>
-          </a:ln>
-        </p:spPr>
-      </p:sp>
-      <p:sp>
-        <p:nvSpPr>
-          <p:cNvPr id="20" name="icon square"/>
-          <p:cNvSpPr/>
-          <p:nvPr/>
-        </p:nvSpPr>
-        <p:spPr>
-          <a:xfrm>
-            <a:off x="4800600" y="3108960"/>
-            <a:ext cx="384048" cy="384048"/>
-          </a:xfrm>
-          <a:prstGeom prst="rect">
-            <a:avLst/>
-          </a:prstGeom>
-          <a:solidFill>
-            <a:schemeClr val="accent1"/>
-          </a:solidFill>
-          <a:ln w="12700">
-            <a:solidFill>
-              <a:schemeClr val="accent1"/>
-            </a:solidFill>
-            <a:prstDash val="solid"/>
-          </a:ln>
-        </p:spPr>
-      </p:sp>
-      <p:pic>
-        <p:nvPicPr>
-          <p:cNvPr id="21" name="list icon" descr="preencoded.png">    </p:cNvPr>
-          <p:cNvPicPr>
-            <a:picLocks noChangeAspect="1"/>
-          </p:cNvPicPr>
-          <p:nvPr/>
-        </p:nvPicPr>
-        <p:blipFill>
-          <a:blip r:embed="rId4"/>
-          <a:stretch>
-            <a:fillRect/>
-          </a:stretch>
-        </p:blipFill>
-        <p:spPr>
-          <a:xfrm>
-            <a:off x="4885091" y="3193451"/>
-            <a:ext cx="215067" cy="215067"/>
-          </a:xfrm>
-          <a:prstGeom prst="rect">
-            <a:avLst/>
-          </a:prstGeom>
-        </p:spPr>
-      </p:pic>
-      <p:sp>
-        <p:nvSpPr>
-          <p:cNvPr id="22" name="Everything is traceable name"/>
-          <p:cNvSpPr txBox="1"/>
-          <p:nvPr/>
-        </p:nvSpPr>
-        <p:spPr>
-          <a:xfrm>
-            <a:off x="5303520" y="3081528"/>
-            <a:ext cx="3246120" cy="438912"/>
-          </a:xfrm>
-          <a:prstGeom prst="rect">
-            <a:avLst/>
-          </a:prstGeom>
-          <a:noFill/>
-          <a:ln/>
-        </p:spPr>
-        <p:txBody>
-          <a:bodyPr wrap="square" lIns="0" tIns="0" rIns="0" bIns="0" rtlCol="0" anchor="ctr"/>
-          <a:lstStyle/>
-          <a:p>
-            <a:pPr indent="0" marL="0">
-              <a:buNone/>
-            </a:pPr>
-            <a:r>
-              <a:rPr lang="en-US" sz="1500" b="1" dirty="0">
-                <a:solidFill>
-                  <a:schemeClr val="tx1"/>
-                </a:solidFill>
-              </a:rPr>
-              <a:t>Everything is traceable</a:t>
-            </a:r>
-            <a:endParaRPr lang="en-US" sz="1500" dirty="0"/>
-          </a:p>
-        </p:txBody>
-      </p:sp>
-      <p:sp>
-        <p:nvSpPr>
-          <p:cNvPr id="23" name="Everything is traceable text"/>
-          <p:cNvSpPr txBox="1"/>
-          <p:nvPr/>
-        </p:nvSpPr>
-        <p:spPr>
-          <a:xfrm>
-            <a:off x="4800600" y="3630168"/>
-            <a:ext cx="3749040" cy="822960"/>
+              <a:rPr lang="en-US" sz="1150" i="1" dirty="0">
+                <a:solidFill>
+                  <a:schemeClr val="accent3"/>
+                </a:solidFill>
+              </a:rPr>
+              <a:t>One firm-owned platform</a:t>
+            </a:r>
+            <a:endParaRPr lang="en-US" sz="1150" dirty="0"/>
+          </a:p>
+        </p:txBody>
+      </p:sp>
+      <p:sp>
+        <p:nvSpPr>
+          <p:cNvPr id="23" name="Firm-wide, for discussion bullets"/>
+          <p:cNvSpPr txBox="1"/>
+          <p:nvPr/>
+        </p:nvSpPr>
+        <p:spPr>
+          <a:xfrm>
+            <a:off x="6263640" y="2304288"/>
+            <a:ext cx="2377440" cy="2194560"/>
           </a:xfrm>
           <a:prstGeom prst="rect">
             <a:avLst/>
@@ -4833,54 +5155,58 @@
           <a:bodyPr wrap="square" lIns="0" tIns="0" rIns="0" bIns="0" rtlCol="0" anchor="t"/>
           <a:lstStyle/>
           <a:p>
-            <a:pPr indent="0" marL="0">
-              <a:buNone/>
-            </a:pPr>
-            <a:r>
-              <a:rPr lang="en-US" sz="1200" dirty="0">
-                <a:solidFill>
-                  <a:schemeClr val="tx1"/>
-                </a:solidFill>
-              </a:rPr>
-              <a:t>Every finding links to the sentence it rests on, and every decision is written to an audit trail.</a:t>
-            </a:r>
-            <a:endParaRPr lang="en-US" sz="1200" dirty="0"/>
-          </a:p>
-        </p:txBody>
-      </p:sp>
-      <p:sp>
-        <p:nvSpPr>
-          <p:cNvPr id="24" name="IT review line"/>
-          <p:cNvSpPr txBox="1"/>
-          <p:nvPr/>
-        </p:nvSpPr>
-        <p:spPr>
-          <a:xfrm>
-            <a:off x="457200" y="4645152"/>
-            <a:ext cx="8229600" cy="274320"/>
-          </a:xfrm>
-          <a:prstGeom prst="rect">
-            <a:avLst/>
-          </a:prstGeom>
-          <a:noFill/>
-          <a:ln/>
-        </p:spPr>
-        <p:txBody>
-          <a:bodyPr wrap="square" lIns="0" tIns="0" rIns="0" bIns="0" rtlCol="0" anchor="ctr"/>
-          <a:lstStyle/>
-          <a:p>
-            <a:pPr indent="0" marL="0">
-              <a:buNone/>
-            </a:pPr>
-            <a:r>
-              <a:rPr lang="en-US" sz="1100" i="1" dirty="0">
-                <a:solidFill>
-                  <a:schemeClr val="tx2"/>
-                </a:solidFill>
-              </a:rPr>
-              <a:t>And anything the firm chose to use would go through IT review first.</a:t>
-            </a:r>
-            <a:endParaRPr lang="en-US" sz="1100" dirty="0"/>
+            <a:pPr marL="342900" indent="-342900">
+              <a:spcAft>
+                <a:spcPts val="1000"/>
+              </a:spcAft>
+              <a:buSzPct val="100000"/>
+              <a:buChar char="•"/>
+            </a:pPr>
+            <a:r>
+              <a:rPr lang="en-US" sz="1250" dirty="0">
+                <a:solidFill>
+                  <a:schemeClr val="bg1"/>
+                </a:solidFill>
+              </a:rPr>
+              <a:t>Every tool as a module over all files, matters and systems.</a:t>
+            </a:r>
+            <a:endParaRPr lang="en-US" sz="1250" dirty="0"/>
+          </a:p>
+          <a:p>
+            <a:pPr marL="342900" indent="-342900">
+              <a:spcAft>
+                <a:spcPts val="1000"/>
+              </a:spcAft>
+              <a:buSzPct val="100000"/>
+              <a:buChar char="•"/>
+            </a:pPr>
+            <a:r>
+              <a:rPr lang="en-US" sz="1250" dirty="0">
+                <a:solidFill>
+                  <a:schemeClr val="bg1"/>
+                </a:solidFill>
+              </a:rPr>
+              <a:t>One set of permissions, one audit trail, models on firm hardware.</a:t>
+            </a:r>
+            <a:endParaRPr lang="en-US" sz="1250" dirty="0"/>
+          </a:p>
+          <a:p>
+            <a:pPr marL="342900" indent="-342900">
+              <a:spcAft>
+                <a:spcPts val="1000"/>
+              </a:spcAft>
+              <a:buSzPct val="100000"/>
+              <a:buChar char="•"/>
+            </a:pPr>
+            <a:r>
+              <a:rPr lang="en-US" sz="1250" dirty="0">
+                <a:solidFill>
+                  <a:schemeClr val="bg1"/>
+                </a:solidFill>
+              </a:rPr>
+              <a:t>Includes a knowledge engine: "who here has handled this?"</a:t>
+            </a:r>
+            <a:endParaRPr lang="en-US" sz="1250" dirty="0"/>
           </a:p>
         </p:txBody>
       </p:sp>
@@ -4986,7 +5312,7 @@
                   <a:schemeClr val="bg1"/>
                 </a:solidFill>
               </a:rPr>
-              <a:t>Trying one would be small and low-risk</a:t>
+              <a:t>Where I think my AI skills are strongest</a:t>
             </a:r>
             <a:endParaRPr lang="en-US" sz="2600" dirty="0"/>
           </a:p>
@@ -5024,7 +5350,7 @@
                   <a:schemeClr val="accent3"/>
                 </a:solidFill>
               </a:rPr>
-              <a:t>One example, the client guidelines brief, as I picture it. Nothing new to host, and it can stop at any step.</a:t>
+              <a:t>And the value each could bring to the firm.</a:t>
             </a:r>
             <a:endParaRPr lang="en-US" sz="1300" dirty="0"/>
           </a:p>
@@ -5032,14 +5358,14 @@
       </p:sp>
       <p:sp>
         <p:nvSpPr>
-          <p:cNvPr id="4" name="step 1 card"/>
+          <p:cNvPr id="4" name="Turning legal work into tools card"/>
           <p:cNvSpPr/>
           <p:nvPr/>
         </p:nvSpPr>
         <p:spPr>
           <a:xfrm>
-            <a:off x="457200" y="1325880"/>
-            <a:ext cx="1572768" cy="1691640"/>
+            <a:off x="457200" y="1280160"/>
+            <a:ext cx="4023360" cy="960120"/>
           </a:xfrm>
           <a:prstGeom prst="rect">
             <a:avLst/>
@@ -5057,140 +5383,32 @@
       </p:sp>
       <p:sp>
         <p:nvSpPr>
-          <p:cNvPr id="5" name="step number 1"/>
+          <p:cNvPr id="5" name="icon square"/>
           <p:cNvSpPr/>
           <p:nvPr/>
         </p:nvSpPr>
         <p:spPr>
           <a:xfrm>
-            <a:off x="566928" y="1435608"/>
-            <a:ext cx="310896" cy="310896"/>
+            <a:off x="594360" y="1417320"/>
+            <a:ext cx="384048" cy="384048"/>
           </a:xfrm>
           <a:prstGeom prst="rect">
             <a:avLst/>
           </a:prstGeom>
           <a:solidFill>
-            <a:schemeClr val="accent2"/>
+            <a:schemeClr val="accent1"/>
           </a:solidFill>
           <a:ln w="12700">
             <a:solidFill>
-              <a:schemeClr val="accent2"/>
+              <a:schemeClr val="accent1"/>
             </a:solidFill>
             <a:prstDash val="solid"/>
           </a:ln>
         </p:spPr>
       </p:sp>
-      <p:sp>
-        <p:nvSpPr>
-          <p:cNvPr id="6" name="step number text 1"/>
-          <p:cNvSpPr txBox="1"/>
-          <p:nvPr/>
-        </p:nvSpPr>
-        <p:spPr>
-          <a:xfrm>
-            <a:off x="566928" y="1435608"/>
-            <a:ext cx="310896" cy="310896"/>
-          </a:xfrm>
-          <a:prstGeom prst="rect">
-            <a:avLst/>
-          </a:prstGeom>
-          <a:noFill/>
-          <a:ln/>
-        </p:spPr>
-        <p:txBody>
-          <a:bodyPr wrap="square" lIns="0" tIns="0" rIns="0" bIns="0" rtlCol="0" anchor="ctr"/>
-          <a:lstStyle/>
-          <a:p>
-            <a:pPr algn="ctr" indent="0" marL="0">
-              <a:buNone/>
-            </a:pPr>
-            <a:r>
-              <a:rPr lang="en-US" sz="1200" b="1" dirty="0">
-                <a:solidFill>
-                  <a:schemeClr val="bg1"/>
-                </a:solidFill>
-              </a:rPr>
-              <a:t>1</a:t>
-            </a:r>
-            <a:endParaRPr lang="en-US" sz="1200" dirty="0"/>
-          </a:p>
-        </p:txBody>
-      </p:sp>
-      <p:sp>
-        <p:nvSpPr>
-          <p:cNvPr id="7" name="step title 1"/>
-          <p:cNvSpPr txBox="1"/>
-          <p:nvPr/>
-        </p:nvSpPr>
-        <p:spPr>
-          <a:xfrm>
-            <a:off x="950976" y="1417320"/>
-            <a:ext cx="987552" cy="347472"/>
-          </a:xfrm>
-          <a:prstGeom prst="rect">
-            <a:avLst/>
-          </a:prstGeom>
-          <a:noFill/>
-          <a:ln/>
-        </p:spPr>
-        <p:txBody>
-          <a:bodyPr wrap="square" lIns="0" tIns="0" rIns="0" bIns="0" rtlCol="0" anchor="ctr"/>
-          <a:lstStyle/>
-          <a:p>
-            <a:pPr indent="0" marL="0">
-              <a:buNone/>
-            </a:pPr>
-            <a:r>
-              <a:rPr lang="en-US" sz="1400" b="1" dirty="0">
-                <a:solidFill>
-                  <a:schemeClr val="bg1"/>
-                </a:solidFill>
-              </a:rPr>
-              <a:t>Collect</a:t>
-            </a:r>
-            <a:endParaRPr lang="en-US" sz="1400" dirty="0"/>
-          </a:p>
-        </p:txBody>
-      </p:sp>
-      <p:sp>
-        <p:nvSpPr>
-          <p:cNvPr id="8" name="step text 1"/>
-          <p:cNvSpPr txBox="1"/>
-          <p:nvPr/>
-        </p:nvSpPr>
-        <p:spPr>
-          <a:xfrm>
-            <a:off x="566928" y="1892808"/>
-            <a:ext cx="1353312" cy="1280160"/>
-          </a:xfrm>
-          <a:prstGeom prst="rect">
-            <a:avLst/>
-          </a:prstGeom>
-          <a:noFill/>
-          <a:ln/>
-        </p:spPr>
-        <p:txBody>
-          <a:bodyPr wrap="square" lIns="0" tIns="0" rIns="0" bIns="0" rtlCol="0" anchor="t"/>
-          <a:lstStyle/>
-          <a:p>
-            <a:pPr indent="0" marL="0">
-              <a:buNone/>
-            </a:pPr>
-            <a:r>
-              <a:rPr lang="en-US" sz="1150" dirty="0">
-                <a:solidFill>
-                  <a:schemeClr val="accent3"/>
-                </a:solidFill>
-              </a:rPr>
-              <a:t>The client guidelines are already in the document system.</a:t>
-            </a:r>
-            <a:endParaRPr lang="en-US" sz="1150" dirty="0"/>
-          </a:p>
-        </p:txBody>
-      </p:sp>
       <p:pic>
         <p:nvPicPr>
-          <p:cNvPr id="9" name="step arrow 1" descr="preencoded.png">    </p:cNvPr>
+          <p:cNvPr id="6" name="users icon" descr="preencoded.png">    </p:cNvPr>
           <p:cNvPicPr>
             <a:picLocks noChangeAspect="1"/>
           </p:cNvPicPr>
@@ -5204,8 +5422,8 @@
         </p:blipFill>
         <p:spPr>
           <a:xfrm>
-            <a:off x="1993392" y="2194560"/>
-            <a:ext cx="182880" cy="182880"/>
+            <a:off x="678851" y="1501811"/>
+            <a:ext cx="215067" cy="215067"/>
           </a:xfrm>
           <a:prstGeom prst="rect">
             <a:avLst/>
@@ -5214,14 +5432,64 @@
       </p:pic>
       <p:sp>
         <p:nvSpPr>
-          <p:cNvPr id="10" name="step 2 card"/>
+          <p:cNvPr id="7" name="Turning legal work into tools text"/>
+          <p:cNvSpPr txBox="1"/>
+          <p:nvPr/>
+        </p:nvSpPr>
+        <p:spPr>
+          <a:xfrm>
+            <a:off x="1097280" y="1389888"/>
+            <a:ext cx="3246120" cy="777240"/>
+          </a:xfrm>
+          <a:prstGeom prst="rect">
+            <a:avLst/>
+          </a:prstGeom>
+          <a:noFill/>
+          <a:ln/>
+        </p:spPr>
+        <p:txBody>
+          <a:bodyPr wrap="square" lIns="0" tIns="0" rIns="0" bIns="0" rtlCol="0" anchor="t"/>
+          <a:lstStyle/>
+          <a:p>
+            <a:pPr indent="0" marL="0">
+              <a:buNone/>
+            </a:pPr>
+            <a:r>
+              <a:rPr lang="en-US" sz="1300" b="1" dirty="0">
+                <a:solidFill>
+                  <a:schemeClr val="bg1"/>
+                </a:solidFill>
+              </a:rPr>
+              <a:t>Turning legal work into tools</a:t>
+            </a:r>
+            <a:endParaRPr lang="en-US" sz="1300" dirty="0"/>
+          </a:p>
+          <a:p>
+            <a:pPr indent="0" marL="0">
+              <a:buNone/>
+            </a:pPr>
+            <a:r>
+              <a:rPr lang="en-US" sz="1150" dirty="0">
+                <a:solidFill>
+                  <a:schemeClr val="accent3"/>
+                </a:solidFill>
+              </a:rPr>
+              <a:t>Each tool starts from how the task is really done, so people actually use it.</a:t>
+            </a:r>
+            <a:endParaRPr lang="en-US" sz="1300" dirty="0"/>
+          </a:p>
+        </p:txBody>
+      </p:sp>
+      <p:sp>
+        <p:nvSpPr>
+          <p:cNvPr id="8" name="Building it safely card"/>
           <p:cNvSpPr/>
           <p:nvPr/>
         </p:nvSpPr>
         <p:spPr>
           <a:xfrm>
-            <a:off x="2139696" y="1325880"/>
-            <a:ext cx="1572768" cy="1691640"/>
+            <a:off x="4663440" y="1280160"/>
+            <a:ext cx="4023360" cy="960120"/>
           </a:xfrm>
           <a:prstGeom prst="rect">
             <a:avLst/>
@@ -5239,140 +5507,32 @@
       </p:sp>
       <p:sp>
         <p:nvSpPr>
-          <p:cNvPr id="11" name="step number 2"/>
+          <p:cNvPr id="9" name="icon square"/>
           <p:cNvSpPr/>
           <p:nvPr/>
         </p:nvSpPr>
         <p:spPr>
           <a:xfrm>
-            <a:off x="2249424" y="1435608"/>
-            <a:ext cx="310896" cy="310896"/>
+            <a:off x="4800600" y="1417320"/>
+            <a:ext cx="384048" cy="384048"/>
           </a:xfrm>
           <a:prstGeom prst="rect">
             <a:avLst/>
           </a:prstGeom>
           <a:solidFill>
-            <a:schemeClr val="accent2"/>
+            <a:schemeClr val="accent1"/>
           </a:solidFill>
           <a:ln w="12700">
             <a:solidFill>
-              <a:schemeClr val="accent2"/>
+              <a:schemeClr val="accent1"/>
             </a:solidFill>
             <a:prstDash val="solid"/>
           </a:ln>
         </p:spPr>
       </p:sp>
-      <p:sp>
-        <p:nvSpPr>
-          <p:cNvPr id="12" name="step number text 2"/>
-          <p:cNvSpPr txBox="1"/>
-          <p:nvPr/>
-        </p:nvSpPr>
-        <p:spPr>
-          <a:xfrm>
-            <a:off x="2249424" y="1435608"/>
-            <a:ext cx="310896" cy="310896"/>
-          </a:xfrm>
-          <a:prstGeom prst="rect">
-            <a:avLst/>
-          </a:prstGeom>
-          <a:noFill/>
-          <a:ln/>
-        </p:spPr>
-        <p:txBody>
-          <a:bodyPr wrap="square" lIns="0" tIns="0" rIns="0" bIns="0" rtlCol="0" anchor="ctr"/>
-          <a:lstStyle/>
-          <a:p>
-            <a:pPr algn="ctr" indent="0" marL="0">
-              <a:buNone/>
-            </a:pPr>
-            <a:r>
-              <a:rPr lang="en-US" sz="1200" b="1" dirty="0">
-                <a:solidFill>
-                  <a:schemeClr val="bg1"/>
-                </a:solidFill>
-              </a:rPr>
-              <a:t>2</a:t>
-            </a:r>
-            <a:endParaRPr lang="en-US" sz="1200" dirty="0"/>
-          </a:p>
-        </p:txBody>
-      </p:sp>
-      <p:sp>
-        <p:nvSpPr>
-          <p:cNvPr id="13" name="step title 2"/>
-          <p:cNvSpPr txBox="1"/>
-          <p:nvPr/>
-        </p:nvSpPr>
-        <p:spPr>
-          <a:xfrm>
-            <a:off x="2633472" y="1417320"/>
-            <a:ext cx="987552" cy="347472"/>
-          </a:xfrm>
-          <a:prstGeom prst="rect">
-            <a:avLst/>
-          </a:prstGeom>
-          <a:noFill/>
-          <a:ln/>
-        </p:spPr>
-        <p:txBody>
-          <a:bodyPr wrap="square" lIns="0" tIns="0" rIns="0" bIns="0" rtlCol="0" anchor="ctr"/>
-          <a:lstStyle/>
-          <a:p>
-            <a:pPr indent="0" marL="0">
-              <a:buNone/>
-            </a:pPr>
-            <a:r>
-              <a:rPr lang="en-US" sz="1400" b="1" dirty="0">
-                <a:solidFill>
-                  <a:schemeClr val="bg1"/>
-                </a:solidFill>
-              </a:rPr>
-              <a:t>Build</a:t>
-            </a:r>
-            <a:endParaRPr lang="en-US" sz="1400" dirty="0"/>
-          </a:p>
-        </p:txBody>
-      </p:sp>
-      <p:sp>
-        <p:nvSpPr>
-          <p:cNvPr id="14" name="step text 2"/>
-          <p:cNvSpPr txBox="1"/>
-          <p:nvPr/>
-        </p:nvSpPr>
-        <p:spPr>
-          <a:xfrm>
-            <a:off x="2249424" y="1892808"/>
-            <a:ext cx="1353312" cy="1280160"/>
-          </a:xfrm>
-          <a:prstGeom prst="rect">
-            <a:avLst/>
-          </a:prstGeom>
-          <a:noFill/>
-          <a:ln/>
-        </p:spPr>
-        <p:txBody>
-          <a:bodyPr wrap="square" lIns="0" tIns="0" rIns="0" bIns="0" rtlCol="0" anchor="t"/>
-          <a:lstStyle/>
-          <a:p>
-            <a:pPr indent="0" marL="0">
-              <a:buNone/>
-            </a:pPr>
-            <a:r>
-              <a:rPr lang="en-US" sz="1150" dirty="0">
-                <a:solidFill>
-                  <a:schemeClr val="accent3"/>
-                </a:solidFill>
-              </a:rPr>
-              <a:t>One page of billing rules per client, each tied to its source paragraph.</a:t>
-            </a:r>
-            <a:endParaRPr lang="en-US" sz="1150" dirty="0"/>
-          </a:p>
-        </p:txBody>
-      </p:sp>
       <p:pic>
         <p:nvPicPr>
-          <p:cNvPr id="15" name="step arrow 2" descr="preencoded.png">    </p:cNvPr>
+          <p:cNvPr id="10" name="shield icon" descr="preencoded.png">    </p:cNvPr>
           <p:cNvPicPr>
             <a:picLocks noChangeAspect="1"/>
           </p:cNvPicPr>
@@ -5386,8 +5546,8 @@
         </p:blipFill>
         <p:spPr>
           <a:xfrm>
-            <a:off x="3675888" y="2194560"/>
-            <a:ext cx="182880" cy="182880"/>
+            <a:off x="4885091" y="1501811"/>
+            <a:ext cx="215067" cy="215067"/>
           </a:xfrm>
           <a:prstGeom prst="rect">
             <a:avLst/>
@@ -5396,14 +5556,64 @@
       </p:pic>
       <p:sp>
         <p:nvSpPr>
-          <p:cNvPr id="16" name="step 3 card"/>
+          <p:cNvPr id="11" name="Building it safely text"/>
+          <p:cNvSpPr txBox="1"/>
+          <p:nvPr/>
+        </p:nvSpPr>
+        <p:spPr>
+          <a:xfrm>
+            <a:off x="5303520" y="1389888"/>
+            <a:ext cx="3246120" cy="777240"/>
+          </a:xfrm>
+          <a:prstGeom prst="rect">
+            <a:avLst/>
+          </a:prstGeom>
+          <a:noFill/>
+          <a:ln/>
+        </p:spPr>
+        <p:txBody>
+          <a:bodyPr wrap="square" lIns="0" tIns="0" rIns="0" bIns="0" rtlCol="0" anchor="t"/>
+          <a:lstStyle/>
+          <a:p>
+            <a:pPr indent="0" marL="0">
+              <a:buNone/>
+            </a:pPr>
+            <a:r>
+              <a:rPr lang="en-US" sz="1300" b="1" dirty="0">
+                <a:solidFill>
+                  <a:schemeClr val="bg1"/>
+                </a:solidFill>
+              </a:rPr>
+              <a:t>Building it safely</a:t>
+            </a:r>
+            <a:endParaRPr lang="en-US" sz="1300" dirty="0"/>
+          </a:p>
+          <a:p>
+            <a:pPr indent="0" marL="0">
+              <a:buNone/>
+            </a:pPr>
+            <a:r>
+              <a:rPr lang="en-US" sz="1150" dirty="0">
+                <a:solidFill>
+                  <a:schemeClr val="accent3"/>
+                </a:solidFill>
+              </a:rPr>
+              <a:t>Local models, walls, audit trails and human sign-off, designed in from day one.</a:t>
+            </a:r>
+            <a:endParaRPr lang="en-US" sz="1300" dirty="0"/>
+          </a:p>
+        </p:txBody>
+      </p:sp>
+      <p:sp>
+        <p:nvSpPr>
+          <p:cNvPr id="12" name="Choosing what is worth building card"/>
           <p:cNvSpPr/>
           <p:nvPr/>
         </p:nvSpPr>
         <p:spPr>
           <a:xfrm>
-            <a:off x="3822192" y="1325880"/>
-            <a:ext cx="1572768" cy="1691640"/>
+            <a:off x="457200" y="2377440"/>
+            <a:ext cx="4023360" cy="960120"/>
           </a:xfrm>
           <a:prstGeom prst="rect">
             <a:avLst/>
@@ -5421,140 +5631,32 @@
       </p:sp>
       <p:sp>
         <p:nvSpPr>
-          <p:cNvPr id="17" name="step number 3"/>
+          <p:cNvPr id="13" name="icon square"/>
           <p:cNvSpPr/>
           <p:nvPr/>
         </p:nvSpPr>
         <p:spPr>
           <a:xfrm>
-            <a:off x="3931920" y="1435608"/>
-            <a:ext cx="310896" cy="310896"/>
+            <a:off x="594360" y="2514600"/>
+            <a:ext cx="384048" cy="384048"/>
           </a:xfrm>
           <a:prstGeom prst="rect">
             <a:avLst/>
           </a:prstGeom>
           <a:solidFill>
-            <a:schemeClr val="accent2"/>
+            <a:schemeClr val="accent1"/>
           </a:solidFill>
           <a:ln w="12700">
             <a:solidFill>
-              <a:schemeClr val="accent2"/>
+              <a:schemeClr val="accent1"/>
             </a:solidFill>
             <a:prstDash val="solid"/>
           </a:ln>
         </p:spPr>
       </p:sp>
-      <p:sp>
-        <p:nvSpPr>
-          <p:cNvPr id="18" name="step number text 3"/>
-          <p:cNvSpPr txBox="1"/>
-          <p:nvPr/>
-        </p:nvSpPr>
-        <p:spPr>
-          <a:xfrm>
-            <a:off x="3931920" y="1435608"/>
-            <a:ext cx="310896" cy="310896"/>
-          </a:xfrm>
-          <a:prstGeom prst="rect">
-            <a:avLst/>
-          </a:prstGeom>
-          <a:noFill/>
-          <a:ln/>
-        </p:spPr>
-        <p:txBody>
-          <a:bodyPr wrap="square" lIns="0" tIns="0" rIns="0" bIns="0" rtlCol="0" anchor="ctr"/>
-          <a:lstStyle/>
-          <a:p>
-            <a:pPr algn="ctr" indent="0" marL="0">
-              <a:buNone/>
-            </a:pPr>
-            <a:r>
-              <a:rPr lang="en-US" sz="1200" b="1" dirty="0">
-                <a:solidFill>
-                  <a:schemeClr val="bg1"/>
-                </a:solidFill>
-              </a:rPr>
-              <a:t>3</a:t>
-            </a:r>
-            <a:endParaRPr lang="en-US" sz="1200" dirty="0"/>
-          </a:p>
-        </p:txBody>
-      </p:sp>
-      <p:sp>
-        <p:nvSpPr>
-          <p:cNvPr id="19" name="step title 3"/>
-          <p:cNvSpPr txBox="1"/>
-          <p:nvPr/>
-        </p:nvSpPr>
-        <p:spPr>
-          <a:xfrm>
-            <a:off x="4315968" y="1417320"/>
-            <a:ext cx="987552" cy="347472"/>
-          </a:xfrm>
-          <a:prstGeom prst="rect">
-            <a:avLst/>
-          </a:prstGeom>
-          <a:noFill/>
-          <a:ln/>
-        </p:spPr>
-        <p:txBody>
-          <a:bodyPr wrap="square" lIns="0" tIns="0" rIns="0" bIns="0" rtlCol="0" anchor="ctr"/>
-          <a:lstStyle/>
-          <a:p>
-            <a:pPr indent="0" marL="0">
-              <a:buNone/>
-            </a:pPr>
-            <a:r>
-              <a:rPr lang="en-US" sz="1400" b="1" dirty="0">
-                <a:solidFill>
-                  <a:schemeClr val="bg1"/>
-                </a:solidFill>
-              </a:rPr>
-              <a:t>IT review</a:t>
-            </a:r>
-            <a:endParaRPr lang="en-US" sz="1400" dirty="0"/>
-          </a:p>
-        </p:txBody>
-      </p:sp>
-      <p:sp>
-        <p:nvSpPr>
-          <p:cNvPr id="20" name="step text 3"/>
-          <p:cNvSpPr txBox="1"/>
-          <p:nvPr/>
-        </p:nvSpPr>
-        <p:spPr>
-          <a:xfrm>
-            <a:off x="3931920" y="1892808"/>
-            <a:ext cx="1353312" cy="1280160"/>
-          </a:xfrm>
-          <a:prstGeom prst="rect">
-            <a:avLst/>
-          </a:prstGeom>
-          <a:noFill/>
-          <a:ln/>
-        </p:spPr>
-        <p:txBody>
-          <a:bodyPr wrap="square" lIns="0" tIns="0" rIns="0" bIns="0" rtlCol="0" anchor="t"/>
-          <a:lstStyle/>
-          <a:p>
-            <a:pPr indent="0" marL="0">
-              <a:buNone/>
-            </a:pPr>
-            <a:r>
-              <a:rPr lang="en-US" sz="1150" dirty="0">
-                <a:solidFill>
-                  <a:schemeClr val="accent3"/>
-                </a:solidFill>
-              </a:rPr>
-              <a:t>Where it runs, who can see what, and what is logged.</a:t>
-            </a:r>
-            <a:endParaRPr lang="en-US" sz="1150" dirty="0"/>
-          </a:p>
-        </p:txBody>
-      </p:sp>
       <p:pic>
         <p:nvPicPr>
-          <p:cNvPr id="21" name="step arrow 3" descr="preencoded.png">    </p:cNvPr>
+          <p:cNvPr id="14" name="compass icon" descr="preencoded.png">    </p:cNvPr>
           <p:cNvPicPr>
             <a:picLocks noChangeAspect="1"/>
           </p:cNvPicPr>
@@ -5568,8 +5670,8 @@
         </p:blipFill>
         <p:spPr>
           <a:xfrm>
-            <a:off x="5358384" y="2194560"/>
-            <a:ext cx="182880" cy="182880"/>
+            <a:off x="678851" y="2599091"/>
+            <a:ext cx="215067" cy="215067"/>
           </a:xfrm>
           <a:prstGeom prst="rect">
             <a:avLst/>
@@ -5578,14 +5680,64 @@
       </p:pic>
       <p:sp>
         <p:nvSpPr>
-          <p:cNvPr id="22" name="step 4 card"/>
+          <p:cNvPr id="15" name="Choosing what is worth building text"/>
+          <p:cNvSpPr txBox="1"/>
+          <p:nvPr/>
+        </p:nvSpPr>
+        <p:spPr>
+          <a:xfrm>
+            <a:off x="1097280" y="2487168"/>
+            <a:ext cx="3246120" cy="777240"/>
+          </a:xfrm>
+          <a:prstGeom prst="rect">
+            <a:avLst/>
+          </a:prstGeom>
+          <a:noFill/>
+          <a:ln/>
+        </p:spPr>
+        <p:txBody>
+          <a:bodyPr wrap="square" lIns="0" tIns="0" rIns="0" bIns="0" rtlCol="0" anchor="t"/>
+          <a:lstStyle/>
+          <a:p>
+            <a:pPr indent="0" marL="0">
+              <a:buNone/>
+            </a:pPr>
+            <a:r>
+              <a:rPr lang="en-US" sz="1300" b="1" dirty="0">
+                <a:solidFill>
+                  <a:schemeClr val="bg1"/>
+                </a:solidFill>
+              </a:rPr>
+              <a:t>Choosing what is worth building</a:t>
+            </a:r>
+            <a:endParaRPr lang="en-US" sz="1300" dirty="0"/>
+          </a:p>
+          <a:p>
+            <a:pPr indent="0" marL="0">
+              <a:buNone/>
+            </a:pPr>
+            <a:r>
+              <a:rPr lang="en-US" sz="1150" dirty="0">
+                <a:solidFill>
+                  <a:schemeClr val="accent3"/>
+                </a:solidFill>
+              </a:rPr>
+              <a:t>Weighing impact against effort, data readiness, risk, adoption and who supports it.</a:t>
+            </a:r>
+            <a:endParaRPr lang="en-US" sz="1300" dirty="0"/>
+          </a:p>
+        </p:txBody>
+      </p:sp>
+      <p:sp>
+        <p:nvSpPr>
+          <p:cNvPr id="16" name="Helping people use it card"/>
           <p:cNvSpPr/>
           <p:nvPr/>
         </p:nvSpPr>
         <p:spPr>
           <a:xfrm>
-            <a:off x="5504688" y="1325880"/>
-            <a:ext cx="1572768" cy="1691640"/>
+            <a:off x="4663440" y="2377440"/>
+            <a:ext cx="4023360" cy="960120"/>
           </a:xfrm>
           <a:prstGeom prst="rect">
             <a:avLst/>
@@ -5603,365 +5755,14 @@
       </p:sp>
       <p:sp>
         <p:nvSpPr>
-          <p:cNvPr id="23" name="step number 4"/>
+          <p:cNvPr id="17" name="icon square"/>
           <p:cNvSpPr/>
           <p:nvPr/>
         </p:nvSpPr>
         <p:spPr>
           <a:xfrm>
-            <a:off x="5614416" y="1435608"/>
-            <a:ext cx="310896" cy="310896"/>
-          </a:xfrm>
-          <a:prstGeom prst="rect">
-            <a:avLst/>
-          </a:prstGeom>
-          <a:solidFill>
-            <a:schemeClr val="accent2"/>
-          </a:solidFill>
-          <a:ln w="12700">
-            <a:solidFill>
-              <a:schemeClr val="accent2"/>
-            </a:solidFill>
-            <a:prstDash val="solid"/>
-          </a:ln>
-        </p:spPr>
-      </p:sp>
-      <p:sp>
-        <p:nvSpPr>
-          <p:cNvPr id="24" name="step number text 4"/>
-          <p:cNvSpPr txBox="1"/>
-          <p:nvPr/>
-        </p:nvSpPr>
-        <p:spPr>
-          <a:xfrm>
-            <a:off x="5614416" y="1435608"/>
-            <a:ext cx="310896" cy="310896"/>
-          </a:xfrm>
-          <a:prstGeom prst="rect">
-            <a:avLst/>
-          </a:prstGeom>
-          <a:noFill/>
-          <a:ln/>
-        </p:spPr>
-        <p:txBody>
-          <a:bodyPr wrap="square" lIns="0" tIns="0" rIns="0" bIns="0" rtlCol="0" anchor="ctr"/>
-          <a:lstStyle/>
-          <a:p>
-            <a:pPr algn="ctr" indent="0" marL="0">
-              <a:buNone/>
-            </a:pPr>
-            <a:r>
-              <a:rPr lang="en-US" sz="1200" b="1" dirty="0">
-                <a:solidFill>
-                  <a:schemeClr val="bg1"/>
-                </a:solidFill>
-              </a:rPr>
-              <a:t>4</a:t>
-            </a:r>
-            <a:endParaRPr lang="en-US" sz="1200" dirty="0"/>
-          </a:p>
-        </p:txBody>
-      </p:sp>
-      <p:sp>
-        <p:nvSpPr>
-          <p:cNvPr id="25" name="step title 4"/>
-          <p:cNvSpPr txBox="1"/>
-          <p:nvPr/>
-        </p:nvSpPr>
-        <p:spPr>
-          <a:xfrm>
-            <a:off x="5998464" y="1417320"/>
-            <a:ext cx="987552" cy="347472"/>
-          </a:xfrm>
-          <a:prstGeom prst="rect">
-            <a:avLst/>
-          </a:prstGeom>
-          <a:noFill/>
-          <a:ln/>
-        </p:spPr>
-        <p:txBody>
-          <a:bodyPr wrap="square" lIns="0" tIns="0" rIns="0" bIns="0" rtlCol="0" anchor="ctr"/>
-          <a:lstStyle/>
-          <a:p>
-            <a:pPr indent="0" marL="0">
-              <a:buNone/>
-            </a:pPr>
-            <a:r>
-              <a:rPr lang="en-US" sz="1400" b="1" dirty="0">
-                <a:solidFill>
-                  <a:schemeClr val="bg1"/>
-                </a:solidFill>
-              </a:rPr>
-              <a:t>Pilot</a:t>
-            </a:r>
-            <a:endParaRPr lang="en-US" sz="1400" dirty="0"/>
-          </a:p>
-        </p:txBody>
-      </p:sp>
-      <p:sp>
-        <p:nvSpPr>
-          <p:cNvPr id="26" name="step text 4"/>
-          <p:cNvSpPr txBox="1"/>
-          <p:nvPr/>
-        </p:nvSpPr>
-        <p:spPr>
-          <a:xfrm>
-            <a:off x="5614416" y="1892808"/>
-            <a:ext cx="1353312" cy="1280160"/>
-          </a:xfrm>
-          <a:prstGeom prst="rect">
-            <a:avLst/>
-          </a:prstGeom>
-          <a:noFill/>
-          <a:ln/>
-        </p:spPr>
-        <p:txBody>
-          <a:bodyPr wrap="square" lIns="0" tIns="0" rIns="0" bIns="0" rtlCol="0" anchor="t"/>
-          <a:lstStyle/>
-          <a:p>
-            <a:pPr indent="0" marL="0">
-              <a:buNone/>
-            </a:pPr>
-            <a:r>
-              <a:rPr lang="en-US" sz="1150" dirty="0">
-                <a:solidFill>
-                  <a:schemeClr val="accent3"/>
-                </a:solidFill>
-              </a:rPr>
-              <a:t>One billing partner, one client's prebills. A person decides every change.</a:t>
-            </a:r>
-            <a:endParaRPr lang="en-US" sz="1150" dirty="0"/>
-          </a:p>
-        </p:txBody>
-      </p:sp>
-      <p:pic>
-        <p:nvPicPr>
-          <p:cNvPr id="27" name="step arrow 4" descr="preencoded.png">    </p:cNvPr>
-          <p:cNvPicPr>
-            <a:picLocks noChangeAspect="1"/>
-          </p:cNvPicPr>
-          <p:nvPr/>
-        </p:nvPicPr>
-        <p:blipFill>
-          <a:blip r:embed="rId4"/>
-          <a:stretch>
-            <a:fillRect/>
-          </a:stretch>
-        </p:blipFill>
-        <p:spPr>
-          <a:xfrm>
-            <a:off x="7040880" y="2194560"/>
-            <a:ext cx="182880" cy="182880"/>
-          </a:xfrm>
-          <a:prstGeom prst="rect">
-            <a:avLst/>
-          </a:prstGeom>
-        </p:spPr>
-      </p:pic>
-      <p:sp>
-        <p:nvSpPr>
-          <p:cNvPr id="28" name="step 5 card"/>
-          <p:cNvSpPr/>
-          <p:nvPr/>
-        </p:nvSpPr>
-        <p:spPr>
-          <a:xfrm>
-            <a:off x="7187184" y="1325880"/>
-            <a:ext cx="1572768" cy="1691640"/>
-          </a:xfrm>
-          <a:prstGeom prst="rect">
-            <a:avLst/>
-          </a:prstGeom>
-          <a:solidFill>
-            <a:srgbClr val="3A5368"/>
-          </a:solidFill>
-          <a:ln w="12700">
-            <a:solidFill>
-              <a:srgbClr val="3A5368"/>
-            </a:solidFill>
-            <a:prstDash val="solid"/>
-          </a:ln>
-        </p:spPr>
-      </p:sp>
-      <p:sp>
-        <p:nvSpPr>
-          <p:cNvPr id="29" name="step number 5"/>
-          <p:cNvSpPr/>
-          <p:nvPr/>
-        </p:nvSpPr>
-        <p:spPr>
-          <a:xfrm>
-            <a:off x="7296912" y="1435608"/>
-            <a:ext cx="310896" cy="310896"/>
-          </a:xfrm>
-          <a:prstGeom prst="rect">
-            <a:avLst/>
-          </a:prstGeom>
-          <a:solidFill>
-            <a:schemeClr val="accent2"/>
-          </a:solidFill>
-          <a:ln w="12700">
-            <a:solidFill>
-              <a:schemeClr val="accent2"/>
-            </a:solidFill>
-            <a:prstDash val="solid"/>
-          </a:ln>
-        </p:spPr>
-      </p:sp>
-      <p:sp>
-        <p:nvSpPr>
-          <p:cNvPr id="30" name="step number text 5"/>
-          <p:cNvSpPr txBox="1"/>
-          <p:nvPr/>
-        </p:nvSpPr>
-        <p:spPr>
-          <a:xfrm>
-            <a:off x="7296912" y="1435608"/>
-            <a:ext cx="310896" cy="310896"/>
-          </a:xfrm>
-          <a:prstGeom prst="rect">
-            <a:avLst/>
-          </a:prstGeom>
-          <a:noFill/>
-          <a:ln/>
-        </p:spPr>
-        <p:txBody>
-          <a:bodyPr wrap="square" lIns="0" tIns="0" rIns="0" bIns="0" rtlCol="0" anchor="ctr"/>
-          <a:lstStyle/>
-          <a:p>
-            <a:pPr algn="ctr" indent="0" marL="0">
-              <a:buNone/>
-            </a:pPr>
-            <a:r>
-              <a:rPr lang="en-US" sz="1200" b="1" dirty="0">
-                <a:solidFill>
-                  <a:schemeClr val="bg1"/>
-                </a:solidFill>
-              </a:rPr>
-              <a:t>5</a:t>
-            </a:r>
-            <a:endParaRPr lang="en-US" sz="1200" dirty="0"/>
-          </a:p>
-        </p:txBody>
-      </p:sp>
-      <p:sp>
-        <p:nvSpPr>
-          <p:cNvPr id="31" name="step title 5"/>
-          <p:cNvSpPr txBox="1"/>
-          <p:nvPr/>
-        </p:nvSpPr>
-        <p:spPr>
-          <a:xfrm>
-            <a:off x="7680960" y="1417320"/>
-            <a:ext cx="987552" cy="347472"/>
-          </a:xfrm>
-          <a:prstGeom prst="rect">
-            <a:avLst/>
-          </a:prstGeom>
-          <a:noFill/>
-          <a:ln/>
-        </p:spPr>
-        <p:txBody>
-          <a:bodyPr wrap="square" lIns="0" tIns="0" rIns="0" bIns="0" rtlCol="0" anchor="ctr"/>
-          <a:lstStyle/>
-          <a:p>
-            <a:pPr indent="0" marL="0">
-              <a:buNone/>
-            </a:pPr>
-            <a:r>
-              <a:rPr lang="en-US" sz="1400" b="1" dirty="0">
-                <a:solidFill>
-                  <a:schemeClr val="bg1"/>
-                </a:solidFill>
-              </a:rPr>
-              <a:t>In use</a:t>
-            </a:r>
-            <a:endParaRPr lang="en-US" sz="1400" dirty="0"/>
-          </a:p>
-        </p:txBody>
-      </p:sp>
-      <p:sp>
-        <p:nvSpPr>
-          <p:cNvPr id="32" name="step text 5"/>
-          <p:cNvSpPr txBox="1"/>
-          <p:nvPr/>
-        </p:nvSpPr>
-        <p:spPr>
-          <a:xfrm>
-            <a:off x="7296912" y="1892808"/>
-            <a:ext cx="1353312" cy="1280160"/>
-          </a:xfrm>
-          <a:prstGeom prst="rect">
-            <a:avLst/>
-          </a:prstGeom>
-          <a:noFill/>
-          <a:ln/>
-        </p:spPr>
-        <p:txBody>
-          <a:bodyPr wrap="square" lIns="0" tIns="0" rIns="0" bIns="0" rtlCol="0" anchor="t"/>
-          <a:lstStyle/>
-          <a:p>
-            <a:pPr indent="0" marL="0">
-              <a:buNone/>
-            </a:pPr>
-            <a:r>
-              <a:rPr lang="en-US" sz="1150" dirty="0">
-                <a:solidFill>
-                  <a:schemeClr val="accent3"/>
-                </a:solidFill>
-              </a:rPr>
-              <a:t>Flags appear in the prebill review that already happens.</a:t>
-            </a:r>
-            <a:endParaRPr lang="en-US" sz="1150" dirty="0"/>
-          </a:p>
-        </p:txBody>
-      </p:sp>
-      <p:sp>
-        <p:nvSpPr>
-          <p:cNvPr id="33" name="why easy heading"/>
-          <p:cNvSpPr txBox="1"/>
-          <p:nvPr/>
-        </p:nvSpPr>
-        <p:spPr>
-          <a:xfrm>
-            <a:off x="457200" y="3310128"/>
-            <a:ext cx="1554480" cy="292608"/>
-          </a:xfrm>
-          <a:prstGeom prst="rect">
-            <a:avLst/>
-          </a:prstGeom>
-          <a:noFill/>
-          <a:ln/>
-        </p:spPr>
-        <p:txBody>
-          <a:bodyPr wrap="square" lIns="0" tIns="0" rIns="0" bIns="0" rtlCol="0" anchor="ctr"/>
-          <a:lstStyle/>
-          <a:p>
-            <a:pPr indent="0" marL="0">
-              <a:buNone/>
-            </a:pPr>
-            <a:r>
-              <a:rPr lang="en-US" sz="1100" b="1" dirty="0">
-                <a:solidFill>
-                  <a:schemeClr val="accent2"/>
-                </a:solidFill>
-              </a:rPr>
-              <a:t>Why I would pick it:</a:t>
-            </a:r>
-            <a:endParaRPr lang="en-US" sz="1100" dirty="0"/>
-          </a:p>
-        </p:txBody>
-      </p:sp>
-      <p:sp>
-        <p:nvSpPr>
-          <p:cNvPr id="34" name="icon square"/>
-          <p:cNvSpPr/>
-          <p:nvPr/>
-        </p:nvSpPr>
-        <p:spPr>
-          <a:xfrm>
-            <a:off x="2011680" y="3328416"/>
-            <a:ext cx="256032" cy="256032"/>
+            <a:off x="4800600" y="2514600"/>
+            <a:ext cx="384048" cy="384048"/>
           </a:xfrm>
           <a:prstGeom prst="rect">
             <a:avLst/>
@@ -5979,22 +5780,22 @@
       </p:sp>
       <p:pic>
         <p:nvPicPr>
-          <p:cNvPr id="35" name="list icon" descr="preencoded.png">    </p:cNvPr>
+          <p:cNvPr id="18" name="book icon" descr="preencoded.png">    </p:cNvPr>
           <p:cNvPicPr>
             <a:picLocks noChangeAspect="1"/>
           </p:cNvPicPr>
           <p:nvPr/>
         </p:nvPicPr>
         <p:blipFill>
-          <a:blip r:embed="rId5"/>
+          <a:blip r:embed="rId4"/>
           <a:stretch>
             <a:fillRect/>
           </a:stretch>
         </p:blipFill>
         <p:spPr>
           <a:xfrm>
-            <a:off x="2068007" y="3384743"/>
-            <a:ext cx="143378" cy="143378"/>
+            <a:off x="4885091" y="2599091"/>
+            <a:ext cx="215067" cy="215067"/>
           </a:xfrm>
           <a:prstGeom prst="rect">
             <a:avLst/>
@@ -6003,50 +5804,64 @@
       </p:pic>
       <p:sp>
         <p:nvSpPr>
-          <p:cNvPr id="36" name="easy 1"/>
-          <p:cNvSpPr txBox="1"/>
-          <p:nvPr/>
-        </p:nvSpPr>
-        <p:spPr>
-          <a:xfrm>
-            <a:off x="2322576" y="3310128"/>
-            <a:ext cx="1371600" cy="292608"/>
-          </a:xfrm>
-          <a:prstGeom prst="rect">
-            <a:avLst/>
-          </a:prstGeom>
-          <a:noFill/>
-          <a:ln/>
-        </p:spPr>
-        <p:txBody>
-          <a:bodyPr wrap="square" lIns="0" tIns="0" rIns="0" bIns="0" rtlCol="0" anchor="ctr"/>
-          <a:lstStyle/>
-          <a:p>
-            <a:pPr indent="0" marL="0">
-              <a:buNone/>
-            </a:pPr>
-            <a:r>
-              <a:rPr lang="en-US" sz="1050" dirty="0">
+          <p:cNvPr id="19" name="Helping people use it text"/>
+          <p:cNvSpPr txBox="1"/>
+          <p:nvPr/>
+        </p:nvSpPr>
+        <p:spPr>
+          <a:xfrm>
+            <a:off x="5303520" y="2487168"/>
+            <a:ext cx="3246120" cy="777240"/>
+          </a:xfrm>
+          <a:prstGeom prst="rect">
+            <a:avLst/>
+          </a:prstGeom>
+          <a:noFill/>
+          <a:ln/>
+        </p:spPr>
+        <p:txBody>
+          <a:bodyPr wrap="square" lIns="0" tIns="0" rIns="0" bIns="0" rtlCol="0" anchor="t"/>
+          <a:lstStyle/>
+          <a:p>
+            <a:pPr indent="0" marL="0">
+              <a:buNone/>
+            </a:pPr>
+            <a:r>
+              <a:rPr lang="en-US" sz="1300" b="1" dirty="0">
                 <a:solidFill>
                   <a:schemeClr val="bg1"/>
                 </a:solidFill>
               </a:rPr>
-              <a:t>Inputs already exist</a:t>
-            </a:r>
-            <a:endParaRPr lang="en-US" sz="1050" dirty="0"/>
-          </a:p>
-        </p:txBody>
-      </p:sp>
-      <p:sp>
-        <p:nvSpPr>
-          <p:cNvPr id="37" name="icon square"/>
+              <a:t>Helping people use it</a:t>
+            </a:r>
+            <a:endParaRPr lang="en-US" sz="1300" dirty="0"/>
+          </a:p>
+          <a:p>
+            <a:pPr indent="0" marL="0">
+              <a:buNone/>
+            </a:pPr>
+            <a:r>
+              <a:rPr lang="en-US" sz="1150" dirty="0">
+                <a:solidFill>
+                  <a:schemeClr val="accent3"/>
+                </a:solidFill>
+              </a:rPr>
+              <a:t>Walkthroughs, plain-language guides and an IT features list with every tool.</a:t>
+            </a:r>
+            <a:endParaRPr lang="en-US" sz="1300" dirty="0"/>
+          </a:p>
+        </p:txBody>
+      </p:sp>
+      <p:sp>
+        <p:nvSpPr>
+          <p:cNvPr id="20" name="discussion card"/>
           <p:cNvSpPr/>
           <p:nvPr/>
         </p:nvSpPr>
         <p:spPr>
           <a:xfrm>
-            <a:off x="3703320" y="3328416"/>
-            <a:ext cx="256032" cy="256032"/>
+            <a:off x="457200" y="3611880"/>
+            <a:ext cx="8229600" cy="1097280"/>
           </a:xfrm>
           <a:prstGeom prst="rect">
             <a:avLst/>
@@ -6062,76 +5877,16 @@
           </a:ln>
         </p:spPr>
       </p:sp>
-      <p:pic>
-        <p:nvPicPr>
-          <p:cNvPr id="38" name="check icon" descr="preencoded.png">    </p:cNvPr>
-          <p:cNvPicPr>
-            <a:picLocks noChangeAspect="1"/>
-          </p:cNvPicPr>
-          <p:nvPr/>
-        </p:nvPicPr>
-        <p:blipFill>
-          <a:blip r:embed="rId6"/>
-          <a:stretch>
-            <a:fillRect/>
-          </a:stretch>
-        </p:blipFill>
-        <p:spPr>
-          <a:xfrm>
-            <a:off x="3759647" y="3384743"/>
-            <a:ext cx="143378" cy="143378"/>
-          </a:xfrm>
-          <a:prstGeom prst="rect">
-            <a:avLst/>
-          </a:prstGeom>
-        </p:spPr>
-      </p:pic>
-      <p:sp>
-        <p:nvSpPr>
-          <p:cNvPr id="39" name="easy 2"/>
-          <p:cNvSpPr txBox="1"/>
-          <p:nvPr/>
-        </p:nvSpPr>
-        <p:spPr>
-          <a:xfrm>
-            <a:off x="4014216" y="3310128"/>
-            <a:ext cx="1371600" cy="292608"/>
-          </a:xfrm>
-          <a:prstGeom prst="rect">
-            <a:avLst/>
-          </a:prstGeom>
-          <a:noFill/>
-          <a:ln/>
-        </p:spPr>
-        <p:txBody>
-          <a:bodyPr wrap="square" lIns="0" tIns="0" rIns="0" bIns="0" rtlCol="0" anchor="ctr"/>
-          <a:lstStyle/>
-          <a:p>
-            <a:pPr indent="0" marL="0">
-              <a:buNone/>
-            </a:pPr>
-            <a:r>
-              <a:rPr lang="en-US" sz="1050" dirty="0">
-                <a:solidFill>
-                  <a:schemeClr val="bg1"/>
-                </a:solidFill>
-              </a:rPr>
-              <a:t>A person reviews it</a:t>
-            </a:r>
-            <a:endParaRPr lang="en-US" sz="1050" dirty="0"/>
-          </a:p>
-        </p:txBody>
-      </p:sp>
-      <p:sp>
-        <p:nvSpPr>
-          <p:cNvPr id="40" name="icon square"/>
+      <p:sp>
+        <p:nvSpPr>
+          <p:cNvPr id="21" name="icon square"/>
           <p:cNvSpPr/>
           <p:nvPr/>
         </p:nvSpPr>
         <p:spPr>
           <a:xfrm>
-            <a:off x="5394960" y="3328416"/>
-            <a:ext cx="256032" cy="256032"/>
+            <a:off x="640080" y="3767328"/>
+            <a:ext cx="384048" cy="384048"/>
           </a:xfrm>
           <a:prstGeom prst="rect">
             <a:avLst/>
@@ -6149,22 +5904,22 @@
       </p:sp>
       <p:pic>
         <p:nvPicPr>
-          <p:cNvPr id="41" name="settings icon" descr="preencoded.png">    </p:cNvPr>
+          <p:cNvPr id="22" name="help icon" descr="preencoded.png">    </p:cNvPr>
           <p:cNvPicPr>
             <a:picLocks noChangeAspect="1"/>
           </p:cNvPicPr>
           <p:nvPr/>
         </p:nvPicPr>
         <p:blipFill>
-          <a:blip r:embed="rId7"/>
+          <a:blip r:embed="rId5"/>
           <a:stretch>
             <a:fillRect/>
           </a:stretch>
         </p:blipFill>
         <p:spPr>
           <a:xfrm>
-            <a:off x="5451287" y="3384743"/>
-            <a:ext cx="143378" cy="143378"/>
+            <a:off x="724571" y="3851819"/>
+            <a:ext cx="215067" cy="215067"/>
           </a:xfrm>
           <a:prstGeom prst="rect">
             <a:avLst/>
@@ -6173,14 +5928,14 @@
       </p:pic>
       <p:sp>
         <p:nvSpPr>
-          <p:cNvPr id="42" name="easy 3"/>
-          <p:cNvSpPr txBox="1"/>
-          <p:nvPr/>
-        </p:nvSpPr>
-        <p:spPr>
-          <a:xfrm>
-            <a:off x="5705856" y="3310128"/>
-            <a:ext cx="1371600" cy="292608"/>
+          <p:cNvPr id="23" name="discussion heading"/>
+          <p:cNvSpPr txBox="1"/>
+          <p:nvPr/>
+        </p:nvSpPr>
+        <p:spPr>
+          <a:xfrm>
+            <a:off x="1188720" y="3721608"/>
+            <a:ext cx="7223760" cy="292608"/>
           </a:xfrm>
           <a:prstGeom prst="rect">
             <a:avLst/>
@@ -6196,196 +5951,50 @@
               <a:buNone/>
             </a:pPr>
             <a:r>
-              <a:rPr lang="en-US" sz="1050" dirty="0">
+              <a:rPr lang="en-US" sz="1100" b="1" dirty="0">
+                <a:solidFill>
+                  <a:schemeClr val="accent3"/>
+                </a:solidFill>
+              </a:rPr>
+              <a:t>For discussion</a:t>
+            </a:r>
+            <a:endParaRPr lang="en-US" sz="1100" dirty="0"/>
+          </a:p>
+        </p:txBody>
+      </p:sp>
+      <p:sp>
+        <p:nvSpPr>
+          <p:cNvPr id="24" name="discussion question"/>
+          <p:cNvSpPr txBox="1"/>
+          <p:nvPr/>
+        </p:nvSpPr>
+        <p:spPr>
+          <a:xfrm>
+            <a:off x="1188720" y="4023360"/>
+            <a:ext cx="7269480" cy="640080"/>
+          </a:xfrm>
+          <a:prstGeom prst="rect">
+            <a:avLst/>
+          </a:prstGeom>
+          <a:noFill/>
+          <a:ln/>
+        </p:spPr>
+        <p:txBody>
+          <a:bodyPr wrap="square" lIns="0" tIns="0" rIns="0" bIns="0" rtlCol="0" anchor="t"/>
+          <a:lstStyle/>
+          <a:p>
+            <a:pPr indent="0" marL="0">
+              <a:buNone/>
+            </a:pPr>
+            <a:r>
+              <a:rPr lang="en-US" sz="1500" dirty="0">
                 <a:solidFill>
                   <a:schemeClr val="bg1"/>
                 </a:solidFill>
               </a:rPr>
-              <a:t>No new habits</a:t>
-            </a:r>
-            <a:endParaRPr lang="en-US" sz="1050" dirty="0"/>
-          </a:p>
-        </p:txBody>
-      </p:sp>
-      <p:sp>
-        <p:nvSpPr>
-          <p:cNvPr id="43" name="icon square"/>
-          <p:cNvSpPr/>
-          <p:nvPr/>
-        </p:nvSpPr>
-        <p:spPr>
-          <a:xfrm>
-            <a:off x="7086600" y="3328416"/>
-            <a:ext cx="256032" cy="256032"/>
-          </a:xfrm>
-          <a:prstGeom prst="rect">
-            <a:avLst/>
-          </a:prstGeom>
-          <a:solidFill>
-            <a:schemeClr val="accent1"/>
-          </a:solidFill>
-          <a:ln w="12700">
-            <a:solidFill>
-              <a:schemeClr val="accent1"/>
-            </a:solidFill>
-            <a:prstDash val="solid"/>
-          </a:ln>
-        </p:spPr>
-      </p:sp>
-      <p:pic>
-        <p:nvPicPr>
-          <p:cNvPr id="44" name="shield icon" descr="preencoded.png">    </p:cNvPr>
-          <p:cNvPicPr>
-            <a:picLocks noChangeAspect="1"/>
-          </p:cNvPicPr>
-          <p:nvPr/>
-        </p:nvPicPr>
-        <p:blipFill>
-          <a:blip r:embed="rId8"/>
-          <a:stretch>
-            <a:fillRect/>
-          </a:stretch>
-        </p:blipFill>
-        <p:spPr>
-          <a:xfrm>
-            <a:off x="7142927" y="3384743"/>
-            <a:ext cx="143378" cy="143378"/>
-          </a:xfrm>
-          <a:prstGeom prst="rect">
-            <a:avLst/>
-          </a:prstGeom>
-        </p:spPr>
-      </p:pic>
-      <p:sp>
-        <p:nvSpPr>
-          <p:cNvPr id="45" name="easy 4"/>
-          <p:cNvSpPr txBox="1"/>
-          <p:nvPr/>
-        </p:nvSpPr>
-        <p:spPr>
-          <a:xfrm>
-            <a:off x="7397496" y="3310128"/>
-            <a:ext cx="1371600" cy="292608"/>
-          </a:xfrm>
-          <a:prstGeom prst="rect">
-            <a:avLst/>
-          </a:prstGeom>
-          <a:noFill/>
-          <a:ln/>
-        </p:spPr>
-        <p:txBody>
-          <a:bodyPr wrap="square" lIns="0" tIns="0" rIns="0" bIns="0" rtlCol="0" anchor="ctr"/>
-          <a:lstStyle/>
-          <a:p>
-            <a:pPr indent="0" marL="0">
-              <a:buNone/>
-            </a:pPr>
-            <a:r>
-              <a:rPr lang="en-US" sz="1050" dirty="0">
-                <a:solidFill>
-                  <a:schemeClr val="bg1"/>
-                </a:solidFill>
-              </a:rPr>
-              <a:t>Easy to stop</a:t>
-            </a:r>
-            <a:endParaRPr lang="en-US" sz="1050" dirty="0"/>
-          </a:p>
-        </p:txBody>
-      </p:sp>
-      <p:sp>
-        <p:nvSpPr>
-          <p:cNvPr id="46" name="long-term goal card"/>
-          <p:cNvSpPr/>
-          <p:nvPr/>
-        </p:nvSpPr>
-        <p:spPr>
-          <a:xfrm>
-            <a:off x="457200" y="3749040"/>
-            <a:ext cx="8229600" cy="1051560"/>
-          </a:xfrm>
-          <a:prstGeom prst="rect">
-            <a:avLst/>
-          </a:prstGeom>
-          <a:solidFill>
-            <a:schemeClr val="accent1"/>
-          </a:solidFill>
-          <a:ln w="12700">
-            <a:solidFill>
-              <a:schemeClr val="accent1"/>
-            </a:solidFill>
-            <a:prstDash val="solid"/>
-          </a:ln>
-        </p:spPr>
-      </p:sp>
-      <p:sp>
-        <p:nvSpPr>
-          <p:cNvPr id="47" name="long-term goal heading"/>
-          <p:cNvSpPr txBox="1"/>
-          <p:nvPr/>
-        </p:nvSpPr>
-        <p:spPr>
-          <a:xfrm>
-            <a:off x="640080" y="3813048"/>
-            <a:ext cx="7863840" cy="292608"/>
-          </a:xfrm>
-          <a:prstGeom prst="rect">
-            <a:avLst/>
-          </a:prstGeom>
-          <a:noFill/>
-          <a:ln/>
-        </p:spPr>
-        <p:txBody>
-          <a:bodyPr wrap="square" lIns="0" tIns="0" rIns="0" bIns="0" rtlCol="0" anchor="ctr"/>
-          <a:lstStyle/>
-          <a:p>
-            <a:pPr indent="0" marL="0">
-              <a:buNone/>
-            </a:pPr>
-            <a:r>
-              <a:rPr lang="en-US" sz="1400" b="1" dirty="0">
-                <a:solidFill>
-                  <a:schemeClr val="bg1"/>
-                </a:solidFill>
-              </a:rPr>
-              <a:t>A longer view, for discussion: one firm-owned platform that touches everything</a:t>
-            </a:r>
-            <a:endParaRPr lang="en-US" sz="1400" dirty="0"/>
-          </a:p>
-        </p:txBody>
-      </p:sp>
-      <p:sp>
-        <p:nvSpPr>
-          <p:cNvPr id="48" name="long-term goal text"/>
-          <p:cNvSpPr txBox="1"/>
-          <p:nvPr/>
-        </p:nvSpPr>
-        <p:spPr>
-          <a:xfrm>
-            <a:off x="640080" y="4114800"/>
-            <a:ext cx="7863840" cy="658368"/>
-          </a:xfrm>
-          <a:prstGeom prst="rect">
-            <a:avLst/>
-          </a:prstGeom>
-          <a:noFill/>
-          <a:ln/>
-        </p:spPr>
-        <p:txBody>
-          <a:bodyPr wrap="square" lIns="0" tIns="0" rIns="0" bIns="0" rtlCol="0" anchor="t"/>
-          <a:lstStyle/>
-          <a:p>
-            <a:pPr indent="0" marL="0">
-              <a:buNone/>
-            </a:pPr>
-            <a:r>
-              <a:rPr lang="en-US" sz="1050" dirty="0">
-                <a:solidFill>
-                  <a:schemeClr val="bg1"/>
-                </a:solidFill>
-              </a:rPr>
-              <a:t>Over time, one in-house system could touch every file, matter and system the firm runs, with each tool as a module, one set of permissions, one audit trail, and the firm owning the code and the data. That is leadership's call and a long way off. I raise it so the quick wins can be built to add up to it.</a:t>
-            </a:r>
-            <a:endParaRPr lang="en-US" sz="1050" dirty="0"/>
+              <a:t>Which problems would you most like AI to solve here, and what would you need to see before trying one?</a:t>
+            </a:r>
+            <a:endParaRPr lang="en-US" sz="1500" dirty="0"/>
           </a:p>
         </p:txBody>
       </p:sp>

--- a/downloads/AI-ideas-Myles-Parslow.pptx
+++ b/downloads/AI-ideas-Myles-Parslow.pptx
@@ -111,7 +111,7 @@
   <p:extLst>
     <p:ext uri="{521415D9-36F7-43E2-AB2F-B90AF26B5E84}">
       <p14:sectionLst xmlns:p14="http://schemas.microsoft.com/office/powerpoint/2010/main">
-        <p14:section name="AI for the firm" id="{2eabaa70-76fe-eeca-849d-0cb12522227b}">
+        <p14:section name="AI for the firm" id="{470f39f0-161d-5570-0126-d253d7be837e}">
           <p14:sldIdLst>
             <p14:sldId id="256"/>
             <p14:sldId id="257"/>
@@ -5312,7 +5312,7 @@
                   <a:schemeClr val="bg1"/>
                 </a:solidFill>
               </a:rPr>
-              <a:t>Where I think my AI skills are strongest</a:t>
+              <a:t>How I can help the firm with AI</a:t>
             </a:r>
             <a:endParaRPr lang="en-US" sz="2600" dirty="0"/>
           </a:p>
@@ -5350,7 +5350,7 @@
                   <a:schemeClr val="accent3"/>
                 </a:solidFill>
               </a:rPr>
-              <a:t>And the value each could bring to the firm.</a:t>
+              <a:t>Two ways I can be an asset, each backed by work already done.</a:t>
             </a:r>
             <a:endParaRPr lang="en-US" sz="1300" dirty="0"/>
           </a:p>
@@ -5358,14 +5358,14 @@
       </p:sp>
       <p:sp>
         <p:nvSpPr>
-          <p:cNvPr id="4" name="Turning legal work into tools card"/>
+          <p:cNvPr id="4" name="AI tools and implementation card"/>
           <p:cNvSpPr/>
           <p:nvPr/>
         </p:nvSpPr>
         <p:spPr>
           <a:xfrm>
             <a:off x="457200" y="1280160"/>
-            <a:ext cx="4023360" cy="960120"/>
+            <a:ext cx="4023360" cy="2377440"/>
           </a:xfrm>
           <a:prstGeom prst="rect">
             <a:avLst/>
@@ -5408,7 +5408,7 @@
       </p:sp>
       <p:pic>
         <p:nvPicPr>
-          <p:cNvPr id="6" name="users icon" descr="preencoded.png">    </p:cNvPr>
+          <p:cNvPr id="6" name="tool icon" descr="preencoded.png">    </p:cNvPr>
           <p:cNvPicPr>
             <a:picLocks noChangeAspect="1"/>
           </p:cNvPicPr>
@@ -5432,14 +5432,50 @@
       </p:pic>
       <p:sp>
         <p:nvSpPr>
-          <p:cNvPr id="7" name="Turning legal work into tools text"/>
+          <p:cNvPr id="7" name="AI tools and implementation name"/>
           <p:cNvSpPr txBox="1"/>
           <p:nvPr/>
         </p:nvSpPr>
         <p:spPr>
           <a:xfrm>
             <a:off x="1097280" y="1389888"/>
-            <a:ext cx="3246120" cy="777240"/>
+            <a:ext cx="3246120" cy="438912"/>
+          </a:xfrm>
+          <a:prstGeom prst="rect">
+            <a:avLst/>
+          </a:prstGeom>
+          <a:noFill/>
+          <a:ln/>
+        </p:spPr>
+        <p:txBody>
+          <a:bodyPr wrap="square" lIns="0" tIns="0" rIns="0" bIns="0" rtlCol="0" anchor="ctr"/>
+          <a:lstStyle/>
+          <a:p>
+            <a:pPr indent="0" marL="0">
+              <a:buNone/>
+            </a:pPr>
+            <a:r>
+              <a:rPr lang="en-US" sz="1500" b="1" dirty="0">
+                <a:solidFill>
+                  <a:schemeClr val="bg1"/>
+                </a:solidFill>
+              </a:rPr>
+              <a:t>AI tools and implementation</a:t>
+            </a:r>
+            <a:endParaRPr lang="en-US" sz="1500" dirty="0"/>
+          </a:p>
+        </p:txBody>
+      </p:sp>
+      <p:sp>
+        <p:nvSpPr>
+          <p:cNvPr id="8" name="AI tools and implementation sub"/>
+          <p:cNvSpPr txBox="1"/>
+          <p:nvPr/>
+        </p:nvSpPr>
+        <p:spPr>
+          <a:xfrm>
+            <a:off x="594360" y="1920240"/>
+            <a:ext cx="3749040" cy="274320"/>
           </a:xfrm>
           <a:prstGeom prst="rect">
             <a:avLst/>
@@ -5455,41 +5491,103 @@
               <a:buNone/>
             </a:pPr>
             <a:r>
-              <a:rPr lang="en-US" sz="1300" b="1" dirty="0">
+              <a:rPr lang="en-US" sz="1150" i="1" dirty="0">
+                <a:solidFill>
+                  <a:schemeClr val="accent3"/>
+                </a:solidFill>
+              </a:rPr>
+              <a:t>Building, testing and rolling out tools</a:t>
+            </a:r>
+            <a:endParaRPr lang="en-US" sz="1150" dirty="0"/>
+          </a:p>
+        </p:txBody>
+      </p:sp>
+      <p:sp>
+        <p:nvSpPr>
+          <p:cNvPr id="9" name="AI tools and implementation bullets"/>
+          <p:cNvSpPr txBox="1"/>
+          <p:nvPr/>
+        </p:nvSpPr>
+        <p:spPr>
+          <a:xfrm>
+            <a:off x="594360" y="2240280"/>
+            <a:ext cx="3749040" cy="1234440"/>
+          </a:xfrm>
+          <a:prstGeom prst="rect">
+            <a:avLst/>
+          </a:prstGeom>
+          <a:noFill/>
+          <a:ln/>
+        </p:spPr>
+        <p:txBody>
+          <a:bodyPr wrap="square" lIns="0" tIns="0" rIns="0" bIns="0" rtlCol="0" anchor="t"/>
+          <a:lstStyle/>
+          <a:p>
+            <a:pPr marL="342900" indent="-342900">
+              <a:spcAft>
+                <a:spcPts val="600"/>
+              </a:spcAft>
+              <a:buSzPct val="100000"/>
+              <a:buChar char="•"/>
+            </a:pPr>
+            <a:r>
+              <a:rPr lang="en-US" sz="1150" dirty="0">
                 <a:solidFill>
                   <a:schemeClr val="bg1"/>
                 </a:solidFill>
               </a:rPr>
-              <a:t>Turning legal work into tools</a:t>
-            </a:r>
-            <a:endParaRPr lang="en-US" sz="1300" dirty="0"/>
-          </a:p>
-          <a:p>
-            <a:pPr indent="0" marL="0">
-              <a:buNone/>
+              <a:t>Fifteen working legal tools, each built and tested end to end.</a:t>
+            </a:r>
+            <a:endParaRPr lang="en-US" sz="1150" dirty="0"/>
+          </a:p>
+          <a:p>
+            <a:pPr marL="342900" indent="-342900">
+              <a:spcAft>
+                <a:spcPts val="600"/>
+              </a:spcAft>
+              <a:buSzPct val="100000"/>
+              <a:buChar char="•"/>
             </a:pPr>
             <a:r>
               <a:rPr lang="en-US" sz="1150" dirty="0">
                 <a:solidFill>
-                  <a:schemeClr val="accent3"/>
-                </a:solidFill>
-              </a:rPr>
-              <a:t>Each tool starts from how the task is really done, so people actually use it.</a:t>
-            </a:r>
-            <a:endParaRPr lang="en-US" sz="1300" dirty="0"/>
-          </a:p>
-        </p:txBody>
-      </p:sp>
-      <p:sp>
-        <p:nvSpPr>
-          <p:cNvPr id="8" name="Building it safely card"/>
+                  <a:schemeClr val="bg1"/>
+                </a:solidFill>
+              </a:rPr>
+              <a:t>Built for client data: local models, ethical walls, audit trails (Conflion).</a:t>
+            </a:r>
+            <a:endParaRPr lang="en-US" sz="1150" dirty="0"/>
+          </a:p>
+          <a:p>
+            <a:pPr marL="342900" indent="-342900">
+              <a:spcAft>
+                <a:spcPts val="600"/>
+              </a:spcAft>
+              <a:buSzPct val="100000"/>
+              <a:buChar char="•"/>
+            </a:pPr>
+            <a:r>
+              <a:rPr lang="en-US" sz="1150" dirty="0">
+                <a:solidFill>
+                  <a:schemeClr val="bg1"/>
+                </a:solidFill>
+              </a:rPr>
+              <a:t>Rollout that sticks: walkthroughs, plain-language guides and training.</a:t>
+            </a:r>
+            <a:endParaRPr lang="en-US" sz="1150" dirty="0"/>
+          </a:p>
+        </p:txBody>
+      </p:sp>
+      <p:sp>
+        <p:nvSpPr>
+          <p:cNvPr id="10" name="AI strategy going forward card"/>
           <p:cNvSpPr/>
           <p:nvPr/>
         </p:nvSpPr>
         <p:spPr>
           <a:xfrm>
             <a:off x="4663440" y="1280160"/>
-            <a:ext cx="4023360" cy="960120"/>
+            <a:ext cx="4023360" cy="2377440"/>
           </a:xfrm>
           <a:prstGeom prst="rect">
             <a:avLst/>
@@ -5507,7 +5605,7 @@
       </p:sp>
       <p:sp>
         <p:nvSpPr>
-          <p:cNvPr id="9" name="icon square"/>
+          <p:cNvPr id="11" name="icon square"/>
           <p:cNvSpPr/>
           <p:nvPr/>
         </p:nvSpPr>
@@ -5532,7 +5630,7 @@
       </p:sp>
       <p:pic>
         <p:nvPicPr>
-          <p:cNvPr id="10" name="shield icon" descr="preencoded.png">    </p:cNvPr>
+          <p:cNvPr id="12" name="compass icon" descr="preencoded.png">    </p:cNvPr>
           <p:cNvPicPr>
             <a:picLocks noChangeAspect="1"/>
           </p:cNvPicPr>
@@ -5556,14 +5654,50 @@
       </p:pic>
       <p:sp>
         <p:nvSpPr>
-          <p:cNvPr id="11" name="Building it safely text"/>
+          <p:cNvPr id="13" name="AI strategy going forward name"/>
           <p:cNvSpPr txBox="1"/>
           <p:nvPr/>
         </p:nvSpPr>
         <p:spPr>
           <a:xfrm>
             <a:off x="5303520" y="1389888"/>
-            <a:ext cx="3246120" cy="777240"/>
+            <a:ext cx="3246120" cy="438912"/>
+          </a:xfrm>
+          <a:prstGeom prst="rect">
+            <a:avLst/>
+          </a:prstGeom>
+          <a:noFill/>
+          <a:ln/>
+        </p:spPr>
+        <p:txBody>
+          <a:bodyPr wrap="square" lIns="0" tIns="0" rIns="0" bIns="0" rtlCol="0" anchor="ctr"/>
+          <a:lstStyle/>
+          <a:p>
+            <a:pPr indent="0" marL="0">
+              <a:buNone/>
+            </a:pPr>
+            <a:r>
+              <a:rPr lang="en-US" sz="1500" b="1" dirty="0">
+                <a:solidFill>
+                  <a:schemeClr val="bg1"/>
+                </a:solidFill>
+              </a:rPr>
+              <a:t>AI strategy going forward</a:t>
+            </a:r>
+            <a:endParaRPr lang="en-US" sz="1500" dirty="0"/>
+          </a:p>
+        </p:txBody>
+      </p:sp>
+      <p:sp>
+        <p:nvSpPr>
+          <p:cNvPr id="14" name="AI strategy going forward sub"/>
+          <p:cNvSpPr txBox="1"/>
+          <p:nvPr/>
+        </p:nvSpPr>
+        <p:spPr>
+          <a:xfrm>
+            <a:off x="4800600" y="1920240"/>
+            <a:ext cx="3749040" cy="274320"/>
           </a:xfrm>
           <a:prstGeom prst="rect">
             <a:avLst/>
@@ -5579,66 +5713,103 @@
               <a:buNone/>
             </a:pPr>
             <a:r>
-              <a:rPr lang="en-US" sz="1300" b="1" dirty="0">
+              <a:rPr lang="en-US" sz="1150" i="1" dirty="0">
+                <a:solidFill>
+                  <a:schemeClr val="accent3"/>
+                </a:solidFill>
+              </a:rPr>
+              <a:t>Choosing what to pursue, and how</a:t>
+            </a:r>
+            <a:endParaRPr lang="en-US" sz="1150" dirty="0"/>
+          </a:p>
+        </p:txBody>
+      </p:sp>
+      <p:sp>
+        <p:nvSpPr>
+          <p:cNvPr id="15" name="AI strategy going forward bullets"/>
+          <p:cNvSpPr txBox="1"/>
+          <p:nvPr/>
+        </p:nvSpPr>
+        <p:spPr>
+          <a:xfrm>
+            <a:off x="4800600" y="2240280"/>
+            <a:ext cx="3749040" cy="1234440"/>
+          </a:xfrm>
+          <a:prstGeom prst="rect">
+            <a:avLst/>
+          </a:prstGeom>
+          <a:noFill/>
+          <a:ln/>
+        </p:spPr>
+        <p:txBody>
+          <a:bodyPr wrap="square" lIns="0" tIns="0" rIns="0" bIns="0" rtlCol="0" anchor="t"/>
+          <a:lstStyle/>
+          <a:p>
+            <a:pPr marL="342900" indent="-342900">
+              <a:spcAft>
+                <a:spcPts val="600"/>
+              </a:spcAft>
+              <a:buSzPct val="100000"/>
+              <a:buChar char="•"/>
+            </a:pPr>
+            <a:r>
+              <a:rPr lang="en-US" sz="1150" dirty="0">
                 <a:solidFill>
                   <a:schemeClr val="bg1"/>
                 </a:solidFill>
               </a:rPr>
-              <a:t>Building it safely</a:t>
-            </a:r>
-            <a:endParaRPr lang="en-US" sz="1300" dirty="0"/>
-          </a:p>
-          <a:p>
-            <a:pPr indent="0" marL="0">
-              <a:buNone/>
+              <a:t>Picking ideas on impact, effort, data readiness, risk and adoption.</a:t>
+            </a:r>
+            <a:endParaRPr lang="en-US" sz="1150" dirty="0"/>
+          </a:p>
+          <a:p>
+            <a:pPr marL="342900" indent="-342900">
+              <a:spcAft>
+                <a:spcPts val="600"/>
+              </a:spcAft>
+              <a:buSzPct val="100000"/>
+              <a:buChar char="•"/>
             </a:pPr>
             <a:r>
               <a:rPr lang="en-US" sz="1150" dirty="0">
                 <a:solidFill>
-                  <a:schemeClr val="accent3"/>
-                </a:solidFill>
-              </a:rPr>
-              <a:t>Local models, walls, audit trails and human sign-off, designed in from day one.</a:t>
-            </a:r>
-            <a:endParaRPr lang="en-US" sz="1300" dirty="0"/>
-          </a:p>
-        </p:txBody>
-      </p:sp>
-      <p:sp>
-        <p:nvSpPr>
-          <p:cNvPr id="12" name="Choosing what is worth building card"/>
+                  <a:schemeClr val="bg1"/>
+                </a:solidFill>
+              </a:rPr>
+              <a:t>Matching each job to the right AI, and knowing where client data can go.</a:t>
+            </a:r>
+            <a:endParaRPr lang="en-US" sz="1150" dirty="0"/>
+          </a:p>
+          <a:p>
+            <a:pPr marL="342900" indent="-342900">
+              <a:spcAft>
+                <a:spcPts val="600"/>
+              </a:spcAft>
+              <a:buSzPct val="100000"/>
+              <a:buChar char="•"/>
+            </a:pPr>
+            <a:r>
+              <a:rPr lang="en-US" sz="1150" dirty="0">
+                <a:solidFill>
+                  <a:schemeClr val="bg1"/>
+                </a:solidFill>
+              </a:rPr>
+              <a:t>A practical path from quick wins to a firm-owned platform.</a:t>
+            </a:r>
+            <a:endParaRPr lang="en-US" sz="1150" dirty="0"/>
+          </a:p>
+        </p:txBody>
+      </p:sp>
+      <p:sp>
+        <p:nvSpPr>
+          <p:cNvPr id="16" name="discussion card"/>
           <p:cNvSpPr/>
           <p:nvPr/>
         </p:nvSpPr>
         <p:spPr>
           <a:xfrm>
-            <a:off x="457200" y="2377440"/>
-            <a:ext cx="4023360" cy="960120"/>
-          </a:xfrm>
-          <a:prstGeom prst="rect">
-            <a:avLst/>
-          </a:prstGeom>
-          <a:solidFill>
-            <a:srgbClr val="3A5368"/>
-          </a:solidFill>
-          <a:ln w="12700">
-            <a:solidFill>
-              <a:srgbClr val="3A5368"/>
-            </a:solidFill>
-            <a:prstDash val="solid"/>
-          </a:ln>
-        </p:spPr>
-      </p:sp>
-      <p:sp>
-        <p:nvSpPr>
-          <p:cNvPr id="13" name="icon square"/>
-          <p:cNvSpPr/>
-          <p:nvPr/>
-        </p:nvSpPr>
-        <p:spPr>
-          <a:xfrm>
-            <a:off x="594360" y="2514600"/>
-            <a:ext cx="384048" cy="384048"/>
+            <a:off x="457200" y="3840480"/>
+            <a:ext cx="8229600" cy="868680"/>
           </a:xfrm>
           <a:prstGeom prst="rect">
             <a:avLst/>
@@ -5654,105 +5825,6 @@
           </a:ln>
         </p:spPr>
       </p:sp>
-      <p:pic>
-        <p:nvPicPr>
-          <p:cNvPr id="14" name="compass icon" descr="preencoded.png">    </p:cNvPr>
-          <p:cNvPicPr>
-            <a:picLocks noChangeAspect="1"/>
-          </p:cNvPicPr>
-          <p:nvPr/>
-        </p:nvPicPr>
-        <p:blipFill>
-          <a:blip r:embed="rId3"/>
-          <a:stretch>
-            <a:fillRect/>
-          </a:stretch>
-        </p:blipFill>
-        <p:spPr>
-          <a:xfrm>
-            <a:off x="678851" y="2599091"/>
-            <a:ext cx="215067" cy="215067"/>
-          </a:xfrm>
-          <a:prstGeom prst="rect">
-            <a:avLst/>
-          </a:prstGeom>
-        </p:spPr>
-      </p:pic>
-      <p:sp>
-        <p:nvSpPr>
-          <p:cNvPr id="15" name="Choosing what is worth building text"/>
-          <p:cNvSpPr txBox="1"/>
-          <p:nvPr/>
-        </p:nvSpPr>
-        <p:spPr>
-          <a:xfrm>
-            <a:off x="1097280" y="2487168"/>
-            <a:ext cx="3246120" cy="777240"/>
-          </a:xfrm>
-          <a:prstGeom prst="rect">
-            <a:avLst/>
-          </a:prstGeom>
-          <a:noFill/>
-          <a:ln/>
-        </p:spPr>
-        <p:txBody>
-          <a:bodyPr wrap="square" lIns="0" tIns="0" rIns="0" bIns="0" rtlCol="0" anchor="t"/>
-          <a:lstStyle/>
-          <a:p>
-            <a:pPr indent="0" marL="0">
-              <a:buNone/>
-            </a:pPr>
-            <a:r>
-              <a:rPr lang="en-US" sz="1300" b="1" dirty="0">
-                <a:solidFill>
-                  <a:schemeClr val="bg1"/>
-                </a:solidFill>
-              </a:rPr>
-              <a:t>Choosing what is worth building</a:t>
-            </a:r>
-            <a:endParaRPr lang="en-US" sz="1300" dirty="0"/>
-          </a:p>
-          <a:p>
-            <a:pPr indent="0" marL="0">
-              <a:buNone/>
-            </a:pPr>
-            <a:r>
-              <a:rPr lang="en-US" sz="1150" dirty="0">
-                <a:solidFill>
-                  <a:schemeClr val="accent3"/>
-                </a:solidFill>
-              </a:rPr>
-              <a:t>Weighing impact against effort, data readiness, risk, adoption and who supports it.</a:t>
-            </a:r>
-            <a:endParaRPr lang="en-US" sz="1300" dirty="0"/>
-          </a:p>
-        </p:txBody>
-      </p:sp>
-      <p:sp>
-        <p:nvSpPr>
-          <p:cNvPr id="16" name="Helping people use it card"/>
-          <p:cNvSpPr/>
-          <p:nvPr/>
-        </p:nvSpPr>
-        <p:spPr>
-          <a:xfrm>
-            <a:off x="4663440" y="2377440"/>
-            <a:ext cx="4023360" cy="960120"/>
-          </a:xfrm>
-          <a:prstGeom prst="rect">
-            <a:avLst/>
-          </a:prstGeom>
-          <a:solidFill>
-            <a:srgbClr val="3A5368"/>
-          </a:solidFill>
-          <a:ln w="12700">
-            <a:solidFill>
-              <a:srgbClr val="3A5368"/>
-            </a:solidFill>
-            <a:prstDash val="solid"/>
-          </a:ln>
-        </p:spPr>
-      </p:sp>
       <p:sp>
         <p:nvSpPr>
           <p:cNvPr id="17" name="icon square"/>
@@ -5761,7 +5833,7 @@
         </p:nvSpPr>
         <p:spPr>
           <a:xfrm>
-            <a:off x="4800600" y="2514600"/>
+            <a:off x="640080" y="4087368"/>
             <a:ext cx="384048" cy="384048"/>
           </a:xfrm>
           <a:prstGeom prst="rect">
@@ -5780,21 +5852,21 @@
       </p:sp>
       <p:pic>
         <p:nvPicPr>
-          <p:cNvPr id="18" name="book icon" descr="preencoded.png">    </p:cNvPr>
+          <p:cNvPr id="18" name="help icon" descr="preencoded.png">    </p:cNvPr>
           <p:cNvPicPr>
             <a:picLocks noChangeAspect="1"/>
           </p:cNvPicPr>
           <p:nvPr/>
         </p:nvPicPr>
         <p:blipFill>
-          <a:blip r:embed="rId4"/>
+          <a:blip r:embed="rId3"/>
           <a:stretch>
             <a:fillRect/>
           </a:stretch>
         </p:blipFill>
         <p:spPr>
           <a:xfrm>
-            <a:off x="4885091" y="2599091"/>
+            <a:off x="724571" y="4171859"/>
             <a:ext cx="215067" cy="215067"/>
           </a:xfrm>
           <a:prstGeom prst="rect">
@@ -5804,14 +5876,50 @@
       </p:pic>
       <p:sp>
         <p:nvSpPr>
-          <p:cNvPr id="19" name="Helping people use it text"/>
-          <p:cNvSpPr txBox="1"/>
-          <p:nvPr/>
-        </p:nvSpPr>
-        <p:spPr>
-          <a:xfrm>
-            <a:off x="5303520" y="2487168"/>
-            <a:ext cx="3246120" cy="777240"/>
+          <p:cNvPr id="19" name="discussion heading"/>
+          <p:cNvSpPr txBox="1"/>
+          <p:nvPr/>
+        </p:nvSpPr>
+        <p:spPr>
+          <a:xfrm>
+            <a:off x="1188720" y="3931920"/>
+            <a:ext cx="7223760" cy="274320"/>
+          </a:xfrm>
+          <a:prstGeom prst="rect">
+            <a:avLst/>
+          </a:prstGeom>
+          <a:noFill/>
+          <a:ln/>
+        </p:spPr>
+        <p:txBody>
+          <a:bodyPr wrap="square" lIns="0" tIns="0" rIns="0" bIns="0" rtlCol="0" anchor="ctr"/>
+          <a:lstStyle/>
+          <a:p>
+            <a:pPr indent="0" marL="0">
+              <a:buNone/>
+            </a:pPr>
+            <a:r>
+              <a:rPr lang="en-US" sz="1100" b="1" dirty="0">
+                <a:solidFill>
+                  <a:schemeClr val="accent3"/>
+                </a:solidFill>
+              </a:rPr>
+              <a:t>For discussion</a:t>
+            </a:r>
+            <a:endParaRPr lang="en-US" sz="1100" dirty="0"/>
+          </a:p>
+        </p:txBody>
+      </p:sp>
+      <p:sp>
+        <p:nvSpPr>
+          <p:cNvPr id="20" name="discussion question"/>
+          <p:cNvSpPr txBox="1"/>
+          <p:nvPr/>
+        </p:nvSpPr>
+        <p:spPr>
+          <a:xfrm>
+            <a:off x="1188720" y="4206240"/>
+            <a:ext cx="7269480" cy="411480"/>
           </a:xfrm>
           <a:prstGeom prst="rect">
             <a:avLst/>
@@ -5827,172 +5935,12 @@
               <a:buNone/>
             </a:pPr>
             <a:r>
-              <a:rPr lang="en-US" sz="1300" b="1" dirty="0">
+              <a:rPr lang="en-US" sz="1500" dirty="0">
                 <a:solidFill>
                   <a:schemeClr val="bg1"/>
                 </a:solidFill>
               </a:rPr>
-              <a:t>Helping people use it</a:t>
-            </a:r>
-            <a:endParaRPr lang="en-US" sz="1300" dirty="0"/>
-          </a:p>
-          <a:p>
-            <a:pPr indent="0" marL="0">
-              <a:buNone/>
-            </a:pPr>
-            <a:r>
-              <a:rPr lang="en-US" sz="1150" dirty="0">
-                <a:solidFill>
-                  <a:schemeClr val="accent3"/>
-                </a:solidFill>
-              </a:rPr>
-              <a:t>Walkthroughs, plain-language guides and an IT features list with every tool.</a:t>
-            </a:r>
-            <a:endParaRPr lang="en-US" sz="1300" dirty="0"/>
-          </a:p>
-        </p:txBody>
-      </p:sp>
-      <p:sp>
-        <p:nvSpPr>
-          <p:cNvPr id="20" name="discussion card"/>
-          <p:cNvSpPr/>
-          <p:nvPr/>
-        </p:nvSpPr>
-        <p:spPr>
-          <a:xfrm>
-            <a:off x="457200" y="3611880"/>
-            <a:ext cx="8229600" cy="1097280"/>
-          </a:xfrm>
-          <a:prstGeom prst="rect">
-            <a:avLst/>
-          </a:prstGeom>
-          <a:solidFill>
-            <a:schemeClr val="accent1"/>
-          </a:solidFill>
-          <a:ln w="12700">
-            <a:solidFill>
-              <a:schemeClr val="accent1"/>
-            </a:solidFill>
-            <a:prstDash val="solid"/>
-          </a:ln>
-        </p:spPr>
-      </p:sp>
-      <p:sp>
-        <p:nvSpPr>
-          <p:cNvPr id="21" name="icon square"/>
-          <p:cNvSpPr/>
-          <p:nvPr/>
-        </p:nvSpPr>
-        <p:spPr>
-          <a:xfrm>
-            <a:off x="640080" y="3767328"/>
-            <a:ext cx="384048" cy="384048"/>
-          </a:xfrm>
-          <a:prstGeom prst="rect">
-            <a:avLst/>
-          </a:prstGeom>
-          <a:solidFill>
-            <a:schemeClr val="accent1"/>
-          </a:solidFill>
-          <a:ln w="12700">
-            <a:solidFill>
-              <a:schemeClr val="accent1"/>
-            </a:solidFill>
-            <a:prstDash val="solid"/>
-          </a:ln>
-        </p:spPr>
-      </p:sp>
-      <p:pic>
-        <p:nvPicPr>
-          <p:cNvPr id="22" name="help icon" descr="preencoded.png">    </p:cNvPr>
-          <p:cNvPicPr>
-            <a:picLocks noChangeAspect="1"/>
-          </p:cNvPicPr>
-          <p:nvPr/>
-        </p:nvPicPr>
-        <p:blipFill>
-          <a:blip r:embed="rId5"/>
-          <a:stretch>
-            <a:fillRect/>
-          </a:stretch>
-        </p:blipFill>
-        <p:spPr>
-          <a:xfrm>
-            <a:off x="724571" y="3851819"/>
-            <a:ext cx="215067" cy="215067"/>
-          </a:xfrm>
-          <a:prstGeom prst="rect">
-            <a:avLst/>
-          </a:prstGeom>
-        </p:spPr>
-      </p:pic>
-      <p:sp>
-        <p:nvSpPr>
-          <p:cNvPr id="23" name="discussion heading"/>
-          <p:cNvSpPr txBox="1"/>
-          <p:nvPr/>
-        </p:nvSpPr>
-        <p:spPr>
-          <a:xfrm>
-            <a:off x="1188720" y="3721608"/>
-            <a:ext cx="7223760" cy="292608"/>
-          </a:xfrm>
-          <a:prstGeom prst="rect">
-            <a:avLst/>
-          </a:prstGeom>
-          <a:noFill/>
-          <a:ln/>
-        </p:spPr>
-        <p:txBody>
-          <a:bodyPr wrap="square" lIns="0" tIns="0" rIns="0" bIns="0" rtlCol="0" anchor="ctr"/>
-          <a:lstStyle/>
-          <a:p>
-            <a:pPr indent="0" marL="0">
-              <a:buNone/>
-            </a:pPr>
-            <a:r>
-              <a:rPr lang="en-US" sz="1100" b="1" dirty="0">
-                <a:solidFill>
-                  <a:schemeClr val="accent3"/>
-                </a:solidFill>
-              </a:rPr>
-              <a:t>For discussion</a:t>
-            </a:r>
-            <a:endParaRPr lang="en-US" sz="1100" dirty="0"/>
-          </a:p>
-        </p:txBody>
-      </p:sp>
-      <p:sp>
-        <p:nvSpPr>
-          <p:cNvPr id="24" name="discussion question"/>
-          <p:cNvSpPr txBox="1"/>
-          <p:nvPr/>
-        </p:nvSpPr>
-        <p:spPr>
-          <a:xfrm>
-            <a:off x="1188720" y="4023360"/>
-            <a:ext cx="7269480" cy="640080"/>
-          </a:xfrm>
-          <a:prstGeom prst="rect">
-            <a:avLst/>
-          </a:prstGeom>
-          <a:noFill/>
-          <a:ln/>
-        </p:spPr>
-        <p:txBody>
-          <a:bodyPr wrap="square" lIns="0" tIns="0" rIns="0" bIns="0" rtlCol="0" anchor="t"/>
-          <a:lstStyle/>
-          <a:p>
-            <a:pPr indent="0" marL="0">
-              <a:buNone/>
-            </a:pPr>
-            <a:r>
-              <a:rPr lang="en-US" sz="1500" dirty="0">
-                <a:solidFill>
-                  <a:schemeClr val="bg1"/>
-                </a:solidFill>
-              </a:rPr>
-              <a:t>Which problems would you most like AI to solve here, and what would you need to see before trying one?</a:t>
+              <a:t>Which problems would you most like AI to solve here, and how could I help?</a:t>
             </a:r>
             <a:endParaRPr lang="en-US" sz="1500" dirty="0"/>
           </a:p>

--- a/downloads/AI-ideas-Myles-Parslow.pptx
+++ b/downloads/AI-ideas-Myles-Parslow.pptx
@@ -111,7 +111,7 @@
   <p:extLst>
     <p:ext uri="{521415D9-36F7-43E2-AB2F-B90AF26B5E84}">
       <p14:sectionLst xmlns:p14="http://schemas.microsoft.com/office/powerpoint/2010/main">
-        <p14:section name="AI for the firm" id="{470f39f0-161d-5570-0126-d253d7be837e}">
+        <p14:section name="AI for the firm" id="{b6e8bbcc-cee5-edb3-6e10-9afa7f2a1ab2}">
           <p14:sldIdLst>
             <p14:sldId id="256"/>
             <p14:sldId id="257"/>
@@ -1261,7 +1261,7 @@
                   <a:schemeClr val="tx2"/>
                 </a:solidFill>
               </a:rPr>
-              <a:t>Built on my own time with invented clients. Orange marks three that could be used right away.</a:t>
+              <a:t>Built on my own time with invented clients. Orange: usable right away. I will demo two.</a:t>
             </a:r>
             <a:endParaRPr lang="en-US" sz="1300" dirty="0"/>
           </a:p>
@@ -2629,7 +2629,7 @@
                   <a:srgbClr val="2D4459"/>
                 </a:solidFill>
               </a:rPr>
-              <a:t>How I use AI: start with the work, then build and prove it</a:t>
+              <a:t>How I use AI: three layers, from chat to automation</a:t>
             </a:r>
             <a:endParaRPr lang="en-US" sz="2600" dirty="0"/>
           </a:p>
@@ -2667,7 +2667,7 @@
                   <a:schemeClr val="tx2"/>
                 </a:solidFill>
               </a:rPr>
-              <a:t>The same four steps for every tool, using whichever AI fits the job.</a:t>
+              <a:t>Each layer does more on its own, so each needs more care around it.</a:t>
             </a:r>
             <a:endParaRPr lang="en-US" sz="1300" dirty="0"/>
           </a:p>
@@ -2675,14 +2675,14 @@
       </p:sp>
       <p:sp>
         <p:nvSpPr>
-          <p:cNvPr id="4" name="Start with the work card"/>
+          <p:cNvPr id="4" name="1  Chat card"/>
           <p:cNvSpPr/>
           <p:nvPr/>
         </p:nvSpPr>
         <p:spPr>
           <a:xfrm>
             <a:off x="457200" y="1280160"/>
-            <a:ext cx="1920240" cy="1965960"/>
+            <a:ext cx="2624328" cy="2148840"/>
           </a:xfrm>
           <a:prstGeom prst="rect">
             <a:avLst/>
@@ -2725,7 +2725,7 @@
       </p:sp>
       <p:pic>
         <p:nvPicPr>
-          <p:cNvPr id="6" name="users icon" descr="preencoded.png">    </p:cNvPr>
+          <p:cNvPr id="6" name="msg icon" descr="preencoded.png">    </p:cNvPr>
           <p:cNvPicPr>
             <a:picLocks noChangeAspect="1"/>
           </p:cNvPicPr>
@@ -2749,14 +2749,14 @@
       </p:pic>
       <p:sp>
         <p:nvSpPr>
-          <p:cNvPr id="7" name="Start with the work name"/>
-          <p:cNvSpPr txBox="1"/>
-          <p:nvPr/>
-        </p:nvSpPr>
-        <p:spPr>
-          <a:xfrm>
-            <a:off x="594360" y="1874520"/>
-            <a:ext cx="1645920" cy="292608"/>
+          <p:cNvPr id="7" name="1  Chat name"/>
+          <p:cNvSpPr txBox="1"/>
+          <p:nvPr/>
+        </p:nvSpPr>
+        <p:spPr>
+          <a:xfrm>
+            <a:off x="1097280" y="1389888"/>
+            <a:ext cx="1847088" cy="438912"/>
           </a:xfrm>
           <a:prstGeom prst="rect">
             <a:avLst/>
@@ -2772,27 +2772,27 @@
               <a:buNone/>
             </a:pPr>
             <a:r>
-              <a:rPr lang="en-US" sz="1300" b="1" dirty="0">
+              <a:rPr lang="en-US" sz="1400" b="1" dirty="0">
                 <a:solidFill>
                   <a:schemeClr val="tx1"/>
                 </a:solidFill>
               </a:rPr>
-              <a:t>Start with the work</a:t>
-            </a:r>
-            <a:endParaRPr lang="en-US" sz="1300" dirty="0"/>
-          </a:p>
-        </p:txBody>
-      </p:sp>
-      <p:sp>
-        <p:nvSpPr>
-          <p:cNvPr id="8" name="Start with the work text"/>
-          <p:cNvSpPr txBox="1"/>
-          <p:nvPr/>
-        </p:nvSpPr>
-        <p:spPr>
-          <a:xfrm>
-            <a:off x="594360" y="2194560"/>
-            <a:ext cx="1645920" cy="1005840"/>
+              <a:t>1  Chat</a:t>
+            </a:r>
+            <a:endParaRPr lang="en-US" sz="1400" dirty="0"/>
+          </a:p>
+        </p:txBody>
+      </p:sp>
+      <p:sp>
+        <p:nvSpPr>
+          <p:cNvPr id="8" name="1  Chat sub"/>
+          <p:cNvSpPr txBox="1"/>
+          <p:nvPr/>
+        </p:nvSpPr>
+        <p:spPr>
+          <a:xfrm>
+            <a:off x="594360" y="1938528"/>
+            <a:ext cx="2350008" cy="274320"/>
           </a:xfrm>
           <a:prstGeom prst="rect">
             <a:avLst/>
@@ -2808,20 +2808,56 @@
               <a:buNone/>
             </a:pPr>
             <a:r>
-              <a:rPr lang="en-US" sz="1100" dirty="0">
+              <a:rPr lang="en-US" sz="1150" i="1" dirty="0">
+                <a:solidFill>
+                  <a:schemeClr val="accent5"/>
+                </a:solidFill>
+              </a:rPr>
+              <a:t>Working with AI directly</a:t>
+            </a:r>
+            <a:endParaRPr lang="en-US" sz="1150" dirty="0"/>
+          </a:p>
+        </p:txBody>
+      </p:sp>
+      <p:sp>
+        <p:nvSpPr>
+          <p:cNvPr id="9" name="1  Chat text"/>
+          <p:cNvSpPr txBox="1"/>
+          <p:nvPr/>
+        </p:nvSpPr>
+        <p:spPr>
+          <a:xfrm>
+            <a:off x="594360" y="2267712"/>
+            <a:ext cx="2350008" cy="1097280"/>
+          </a:xfrm>
+          <a:prstGeom prst="rect">
+            <a:avLst/>
+          </a:prstGeom>
+          <a:noFill/>
+          <a:ln/>
+        </p:spPr>
+        <p:txBody>
+          <a:bodyPr wrap="square" lIns="0" tIns="0" rIns="0" bIns="0" rtlCol="0" anchor="t"/>
+          <a:lstStyle/>
+          <a:p>
+            <a:pPr indent="0" marL="0">
+              <a:buNone/>
+            </a:pPr>
+            <a:r>
+              <a:rPr lang="en-US" sz="1150" dirty="0">
                 <a:solidFill>
                   <a:schemeClr val="tx1"/>
                 </a:solidFill>
               </a:rPr>
-              <a:t>Write down how the task is really done here, who touches it and which rules apply, before any screen is built.</a:t>
-            </a:r>
-            <a:endParaRPr lang="en-US" sz="1100" dirty="0"/>
+              <a:t>Drafting, summarizing, research and checking my own work. Anyone at the firm could start here.</a:t>
+            </a:r>
+            <a:endParaRPr lang="en-US" sz="1150" dirty="0"/>
           </a:p>
         </p:txBody>
       </p:sp>
       <p:pic>
         <p:nvPicPr>
-          <p:cNvPr id="9" name="how arrow 1" descr="preencoded.png">    </p:cNvPr>
+          <p:cNvPr id="10" name="layer arrow 1" descr="preencoded.png">    </p:cNvPr>
           <p:cNvPicPr>
             <a:picLocks noChangeAspect="1"/>
           </p:cNvPicPr>
@@ -2835,7 +2871,7 @@
         </p:blipFill>
         <p:spPr>
           <a:xfrm>
-            <a:off x="2395728" y="2194560"/>
+            <a:off x="3099816" y="2281428"/>
             <a:ext cx="146304" cy="146304"/>
           </a:xfrm>
           <a:prstGeom prst="rect">
@@ -2845,14 +2881,14 @@
       </p:pic>
       <p:sp>
         <p:nvSpPr>
-          <p:cNvPr id="10" name="Build with AI card"/>
+          <p:cNvPr id="11" name="2  AI-assisted tools card"/>
           <p:cNvSpPr/>
           <p:nvPr/>
         </p:nvSpPr>
         <p:spPr>
           <a:xfrm>
-            <a:off x="2560320" y="1280160"/>
-            <a:ext cx="1920240" cy="1965960"/>
+            <a:off x="3259836" y="1280160"/>
+            <a:ext cx="2624328" cy="2148840"/>
           </a:xfrm>
           <a:prstGeom prst="rect">
             <a:avLst/>
@@ -2870,13 +2906,13 @@
       </p:sp>
       <p:sp>
         <p:nvSpPr>
-          <p:cNvPr id="11" name="icon square"/>
+          <p:cNvPr id="12" name="icon square"/>
           <p:cNvSpPr/>
           <p:nvPr/>
         </p:nvSpPr>
         <p:spPr>
           <a:xfrm>
-            <a:off x="2697480" y="1417320"/>
+            <a:off x="3396996" y="1417320"/>
             <a:ext cx="384048" cy="384048"/>
           </a:xfrm>
           <a:prstGeom prst="rect">
@@ -2895,7 +2931,7 @@
       </p:sp>
       <p:pic>
         <p:nvPicPr>
-          <p:cNvPr id="12" name="tool icon" descr="preencoded.png">    </p:cNvPr>
+          <p:cNvPr id="13" name="tool icon" descr="preencoded.png">    </p:cNvPr>
           <p:cNvPicPr>
             <a:picLocks noChangeAspect="1"/>
           </p:cNvPicPr>
@@ -2909,7 +2945,7 @@
         </p:blipFill>
         <p:spPr>
           <a:xfrm>
-            <a:off x="2781971" y="1501811"/>
+            <a:off x="3481487" y="1501811"/>
             <a:ext cx="215067" cy="215067"/>
           </a:xfrm>
           <a:prstGeom prst="rect">
@@ -2919,14 +2955,14 @@
       </p:pic>
       <p:sp>
         <p:nvSpPr>
-          <p:cNvPr id="13" name="Build with AI name"/>
-          <p:cNvSpPr txBox="1"/>
-          <p:nvPr/>
-        </p:nvSpPr>
-        <p:spPr>
-          <a:xfrm>
-            <a:off x="2697480" y="1874520"/>
-            <a:ext cx="1645920" cy="292608"/>
+          <p:cNvPr id="14" name="2  AI-assisted tools name"/>
+          <p:cNvSpPr txBox="1"/>
+          <p:nvPr/>
+        </p:nvSpPr>
+        <p:spPr>
+          <a:xfrm>
+            <a:off x="3899916" y="1389888"/>
+            <a:ext cx="1847088" cy="438912"/>
           </a:xfrm>
           <a:prstGeom prst="rect">
             <a:avLst/>
@@ -2942,27 +2978,27 @@
               <a:buNone/>
             </a:pPr>
             <a:r>
-              <a:rPr lang="en-US" sz="1300" b="1" dirty="0">
+              <a:rPr lang="en-US" sz="1400" b="1" dirty="0">
                 <a:solidFill>
                   <a:schemeClr val="tx1"/>
                 </a:solidFill>
               </a:rPr>
-              <a:t>Build with AI</a:t>
-            </a:r>
-            <a:endParaRPr lang="en-US" sz="1300" dirty="0"/>
-          </a:p>
-        </p:txBody>
-      </p:sp>
-      <p:sp>
-        <p:nvSpPr>
-          <p:cNvPr id="14" name="Build with AI text"/>
-          <p:cNvSpPr txBox="1"/>
-          <p:nvPr/>
-        </p:nvSpPr>
-        <p:spPr>
-          <a:xfrm>
-            <a:off x="2697480" y="2194560"/>
-            <a:ext cx="1645920" cy="1005840"/>
+              <a:t>2  AI-assisted tools</a:t>
+            </a:r>
+            <a:endParaRPr lang="en-US" sz="1400" dirty="0"/>
+          </a:p>
+        </p:txBody>
+      </p:sp>
+      <p:sp>
+        <p:nvSpPr>
+          <p:cNvPr id="15" name="2  AI-assisted tools sub"/>
+          <p:cNvSpPr txBox="1"/>
+          <p:nvPr/>
+        </p:nvSpPr>
+        <p:spPr>
+          <a:xfrm>
+            <a:off x="3396996" y="1938528"/>
+            <a:ext cx="2350008" cy="274320"/>
           </a:xfrm>
           <a:prstGeom prst="rect">
             <a:avLst/>
@@ -2978,20 +3014,56 @@
               <a:buNone/>
             </a:pPr>
             <a:r>
-              <a:rPr lang="en-US" sz="1100" dirty="0">
+              <a:rPr lang="en-US" sz="1150" i="1" dirty="0">
+                <a:solidFill>
+                  <a:schemeClr val="accent5"/>
+                </a:solidFill>
+              </a:rPr>
+              <a:t>AI inside a tool built for one job</a:t>
+            </a:r>
+            <a:endParaRPr lang="en-US" sz="1150" dirty="0"/>
+          </a:p>
+        </p:txBody>
+      </p:sp>
+      <p:sp>
+        <p:nvSpPr>
+          <p:cNvPr id="16" name="2  AI-assisted tools text"/>
+          <p:cNvSpPr txBox="1"/>
+          <p:nvPr/>
+        </p:nvSpPr>
+        <p:spPr>
+          <a:xfrm>
+            <a:off x="3396996" y="2267712"/>
+            <a:ext cx="2350008" cy="1097280"/>
+          </a:xfrm>
+          <a:prstGeom prst="rect">
+            <a:avLst/>
+          </a:prstGeom>
+          <a:noFill/>
+          <a:ln/>
+        </p:spPr>
+        <p:txBody>
+          <a:bodyPr wrap="square" lIns="0" tIns="0" rIns="0" bIns="0" rtlCol="0" anchor="t"/>
+          <a:lstStyle/>
+          <a:p>
+            <a:pPr indent="0" marL="0">
+              <a:buNone/>
+            </a:pPr>
+            <a:r>
+              <a:rPr lang="en-US" sz="1150" dirty="0">
                 <a:solidFill>
                   <a:schemeClr val="tx1"/>
                 </a:solidFill>
               </a:rPr>
-              <a:t>Claude and Claude Code for most building. Open models such as Qwen on local hardware where client data must stay inside.</a:t>
-            </a:r>
-            <a:endParaRPr lang="en-US" sz="1100" dirty="0"/>
+              <a:t>Checks around the model and a person deciding. Guideline Guard checks prebills; Testimony Check preps depositions.</a:t>
+            </a:r>
+            <a:endParaRPr lang="en-US" sz="1150" dirty="0"/>
           </a:p>
         </p:txBody>
       </p:sp>
       <p:pic>
         <p:nvPicPr>
-          <p:cNvPr id="15" name="how arrow 2" descr="preencoded.png">    </p:cNvPr>
+          <p:cNvPr id="17" name="layer arrow 2" descr="preencoded.png">    </p:cNvPr>
           <p:cNvPicPr>
             <a:picLocks noChangeAspect="1"/>
           </p:cNvPicPr>
@@ -3005,7 +3077,7 @@
         </p:blipFill>
         <p:spPr>
           <a:xfrm>
-            <a:off x="4498848" y="2194560"/>
+            <a:off x="5902452" y="2281428"/>
             <a:ext cx="146304" cy="146304"/>
           </a:xfrm>
           <a:prstGeom prst="rect">
@@ -3015,14 +3087,14 @@
       </p:pic>
       <p:sp>
         <p:nvSpPr>
-          <p:cNvPr id="16" name="Test against reality card"/>
+          <p:cNvPr id="18" name="3  Automation card"/>
           <p:cNvSpPr/>
           <p:nvPr/>
         </p:nvSpPr>
         <p:spPr>
           <a:xfrm>
-            <a:off x="4663440" y="1280160"/>
-            <a:ext cx="1920240" cy="1965960"/>
+            <a:off x="6062472" y="1280160"/>
+            <a:ext cx="2624328" cy="2148840"/>
           </a:xfrm>
           <a:prstGeom prst="rect">
             <a:avLst/>
@@ -3040,13 +3112,13 @@
       </p:sp>
       <p:sp>
         <p:nvSpPr>
-          <p:cNvPr id="17" name="icon square"/>
+          <p:cNvPr id="19" name="icon square"/>
           <p:cNvSpPr/>
           <p:nvPr/>
         </p:nvSpPr>
         <p:spPr>
           <a:xfrm>
-            <a:off x="4800600" y="1417320"/>
+            <a:off x="6199632" y="1417320"/>
             <a:ext cx="384048" cy="384048"/>
           </a:xfrm>
           <a:prstGeom prst="rect">
@@ -3065,7 +3137,7 @@
       </p:sp>
       <p:pic>
         <p:nvPicPr>
-          <p:cNvPr id="18" name="check icon" descr="preencoded.png">    </p:cNvPr>
+          <p:cNvPr id="20" name="repeat icon" descr="preencoded.png">    </p:cNvPr>
           <p:cNvPicPr>
             <a:picLocks noChangeAspect="1"/>
           </p:cNvPicPr>
@@ -3079,7 +3151,7 @@
         </p:blipFill>
         <p:spPr>
           <a:xfrm>
-            <a:off x="4885091" y="1501811"/>
+            <a:off x="6284123" y="1501811"/>
             <a:ext cx="215067" cy="215067"/>
           </a:xfrm>
           <a:prstGeom prst="rect">
@@ -3089,14 +3161,14 @@
       </p:pic>
       <p:sp>
         <p:nvSpPr>
-          <p:cNvPr id="19" name="Test against reality name"/>
-          <p:cNvSpPr txBox="1"/>
-          <p:nvPr/>
-        </p:nvSpPr>
-        <p:spPr>
-          <a:xfrm>
-            <a:off x="4800600" y="1874520"/>
-            <a:ext cx="1645920" cy="292608"/>
+          <p:cNvPr id="21" name="3  Automation name"/>
+          <p:cNvSpPr txBox="1"/>
+          <p:nvPr/>
+        </p:nvSpPr>
+        <p:spPr>
+          <a:xfrm>
+            <a:off x="6702552" y="1389888"/>
+            <a:ext cx="1847088" cy="438912"/>
           </a:xfrm>
           <a:prstGeom prst="rect">
             <a:avLst/>
@@ -3112,27 +3184,27 @@
               <a:buNone/>
             </a:pPr>
             <a:r>
-              <a:rPr lang="en-US" sz="1300" b="1" dirty="0">
+              <a:rPr lang="en-US" sz="1400" b="1" dirty="0">
                 <a:solidFill>
                   <a:schemeClr val="tx1"/>
                 </a:solidFill>
               </a:rPr>
-              <a:t>Test against reality</a:t>
-            </a:r>
-            <a:endParaRPr lang="en-US" sz="1300" dirty="0"/>
-          </a:p>
-        </p:txBody>
-      </p:sp>
-      <p:sp>
-        <p:nvSpPr>
-          <p:cNvPr id="20" name="Test against reality text"/>
-          <p:cNvSpPr txBox="1"/>
-          <p:nvPr/>
-        </p:nvSpPr>
-        <p:spPr>
-          <a:xfrm>
-            <a:off x="4800600" y="2194560"/>
-            <a:ext cx="1645920" cy="1005840"/>
+              <a:t>3  Automation</a:t>
+            </a:r>
+            <a:endParaRPr lang="en-US" sz="1400" dirty="0"/>
+          </a:p>
+        </p:txBody>
+      </p:sp>
+      <p:sp>
+        <p:nvSpPr>
+          <p:cNvPr id="22" name="3  Automation sub"/>
+          <p:cNvSpPr txBox="1"/>
+          <p:nvPr/>
+        </p:nvSpPr>
+        <p:spPr>
+          <a:xfrm>
+            <a:off x="6199632" y="1938528"/>
+            <a:ext cx="2350008" cy="274320"/>
           </a:xfrm>
           <a:prstGeom prst="rect">
             <a:avLst/>
@@ -3148,76 +3220,63 @@
               <a:buNone/>
             </a:pPr>
             <a:r>
-              <a:rPr lang="en-US" sz="1100" dirty="0">
+              <a:rPr lang="en-US" sz="1150" i="1" dirty="0">
+                <a:solidFill>
+                  <a:schemeClr val="accent5"/>
+                </a:solidFill>
+              </a:rPr>
+              <a:t>Work that runs in the background</a:t>
+            </a:r>
+            <a:endParaRPr lang="en-US" sz="1150" dirty="0"/>
+          </a:p>
+        </p:txBody>
+      </p:sp>
+      <p:sp>
+        <p:nvSpPr>
+          <p:cNvPr id="23" name="3  Automation text"/>
+          <p:cNvSpPr txBox="1"/>
+          <p:nvPr/>
+        </p:nvSpPr>
+        <p:spPr>
+          <a:xfrm>
+            <a:off x="6199632" y="2267712"/>
+            <a:ext cx="2350008" cy="1097280"/>
+          </a:xfrm>
+          <a:prstGeom prst="rect">
+            <a:avLst/>
+          </a:prstGeom>
+          <a:noFill/>
+          <a:ln/>
+        </p:spPr>
+        <p:txBody>
+          <a:bodyPr wrap="square" lIns="0" tIns="0" rIns="0" bIns="0" rtlCol="0" anchor="t"/>
+          <a:lstStyle/>
+          <a:p>
+            <a:pPr indent="0" marL="0">
+              <a:buNone/>
+            </a:pPr>
+            <a:r>
+              <a:rPr lang="en-US" sz="1150" dirty="0">
                 <a:solidFill>
                   <a:schemeClr val="tx1"/>
                 </a:solidFill>
               </a:rPr>
-              <a:t>Score the tool against real outcomes, such as public court rulings, and keep a record of every run.</a:t>
-            </a:r>
-            <a:endParaRPr lang="en-US" sz="1100" dirty="0"/>
-          </a:p>
-        </p:txBody>
-      </p:sp>
-      <p:pic>
-        <p:nvPicPr>
-          <p:cNvPr id="21" name="how arrow 3" descr="preencoded.png">    </p:cNvPr>
-          <p:cNvPicPr>
-            <a:picLocks noChangeAspect="1"/>
-          </p:cNvPicPr>
-          <p:nvPr/>
-        </p:nvPicPr>
-        <p:blipFill>
-          <a:blip r:embed="rId6"/>
-          <a:stretch>
-            <a:fillRect/>
-          </a:stretch>
-        </p:blipFill>
-        <p:spPr>
-          <a:xfrm>
-            <a:off x="6601968" y="2194560"/>
-            <a:ext cx="146304" cy="146304"/>
-          </a:xfrm>
-          <a:prstGeom prst="rect">
-            <a:avLst/>
-          </a:prstGeom>
-        </p:spPr>
-      </p:pic>
-      <p:sp>
-        <p:nvSpPr>
-          <p:cNvPr id="22" name="Ship it complete card"/>
+              <a:t>Nobody has to ask; a person reviews what it finds. VigilMark watches new trademark filings; Conflion routes each intake.</a:t>
+            </a:r>
+            <a:endParaRPr lang="en-US" sz="1150" dirty="0"/>
+          </a:p>
+        </p:txBody>
+      </p:sp>
+      <p:sp>
+        <p:nvSpPr>
+          <p:cNvPr id="24" name="build card"/>
           <p:cNvSpPr/>
           <p:nvPr/>
         </p:nvSpPr>
         <p:spPr>
           <a:xfrm>
-            <a:off x="6766560" y="1280160"/>
-            <a:ext cx="1920240" cy="1965960"/>
-          </a:xfrm>
-          <a:prstGeom prst="rect">
-            <a:avLst/>
-          </a:prstGeom>
-          <a:solidFill>
-            <a:schemeClr val="bg2"/>
-          </a:solidFill>
-          <a:ln w="12700">
-            <a:solidFill>
-              <a:schemeClr val="bg2"/>
-            </a:solidFill>
-            <a:prstDash val="solid"/>
-          </a:ln>
-        </p:spPr>
-      </p:sp>
-      <p:sp>
-        <p:nvSpPr>
-          <p:cNvPr id="23" name="icon square"/>
-          <p:cNvSpPr/>
-          <p:nvPr/>
-        </p:nvSpPr>
-        <p:spPr>
-          <a:xfrm>
-            <a:off x="6903720" y="1417320"/>
-            <a:ext cx="384048" cy="384048"/>
+            <a:off x="457200" y="3611880"/>
+            <a:ext cx="8229600" cy="914400"/>
           </a:xfrm>
           <a:prstGeom prst="rect">
             <a:avLst/>
@@ -3233,40 +3292,16 @@
           </a:ln>
         </p:spPr>
       </p:sp>
-      <p:pic>
-        <p:nvPicPr>
-          <p:cNvPr id="24" name="list icon" descr="preencoded.png">    </p:cNvPr>
-          <p:cNvPicPr>
-            <a:picLocks noChangeAspect="1"/>
-          </p:cNvPicPr>
-          <p:nvPr/>
-        </p:nvPicPr>
-        <p:blipFill>
-          <a:blip r:embed="rId7"/>
-          <a:stretch>
-            <a:fillRect/>
-          </a:stretch>
-        </p:blipFill>
-        <p:spPr>
-          <a:xfrm>
-            <a:off x="6988211" y="1501811"/>
-            <a:ext cx="215067" cy="215067"/>
-          </a:xfrm>
-          <a:prstGeom prst="rect">
-            <a:avLst/>
-          </a:prstGeom>
-        </p:spPr>
-      </p:pic>
-      <p:sp>
-        <p:nvSpPr>
-          <p:cNvPr id="25" name="Ship it complete name"/>
-          <p:cNvSpPr txBox="1"/>
-          <p:nvPr/>
-        </p:nvSpPr>
-        <p:spPr>
-          <a:xfrm>
-            <a:off x="6903720" y="1874520"/>
-            <a:ext cx="1645920" cy="292608"/>
+      <p:sp>
+        <p:nvSpPr>
+          <p:cNvPr id="25" name="build heading"/>
+          <p:cNvSpPr txBox="1"/>
+          <p:nvPr/>
+        </p:nvSpPr>
+        <p:spPr>
+          <a:xfrm>
+            <a:off x="640080" y="3685032"/>
+            <a:ext cx="7863840" cy="292608"/>
           </a:xfrm>
           <a:prstGeom prst="rect">
             <a:avLst/>
@@ -3284,10 +3319,10 @@
             <a:r>
               <a:rPr lang="en-US" sz="1300" b="1" dirty="0">
                 <a:solidFill>
-                  <a:schemeClr val="tx1"/>
-                </a:solidFill>
-              </a:rPr>
-              <a:t>Ship it complete</a:t>
+                  <a:schemeClr val="bg1"/>
+                </a:solidFill>
+              </a:rPr>
+              <a:t>Using AI, and using AI to build tools</a:t>
             </a:r>
             <a:endParaRPr lang="en-US" sz="1300" dirty="0"/>
           </a:p>
@@ -3295,14 +3330,14 @@
       </p:sp>
       <p:sp>
         <p:nvSpPr>
-          <p:cNvPr id="26" name="Ship it complete text"/>
-          <p:cNvSpPr txBox="1"/>
-          <p:nvPr/>
-        </p:nvSpPr>
-        <p:spPr>
-          <a:xfrm>
-            <a:off x="6903720" y="2194560"/>
-            <a:ext cx="1645920" cy="1005840"/>
+          <p:cNvPr id="26" name="build text"/>
+          <p:cNvSpPr txBox="1"/>
+          <p:nvPr/>
+        </p:nvSpPr>
+        <p:spPr>
+          <a:xfrm>
+            <a:off x="640080" y="3995928"/>
+            <a:ext cx="7863840" cy="685800"/>
           </a:xfrm>
           <a:prstGeom prst="rect">
             <a:avLst/>
@@ -3320,346 +3355,10 @@
             <a:r>
               <a:rPr lang="en-US" sz="1100" dirty="0">
                 <a:solidFill>
-                  <a:schemeClr val="tx1"/>
-                </a:solidFill>
-              </a:rPr>
-              <a:t>Tests, walkthroughs, plain-language guides and a features list for IT, so it can be reviewed and supported.</a:t>
-            </a:r>
-            <a:endParaRPr lang="en-US" sz="1100" dirty="0"/>
-          </a:p>
-        </p:txBody>
-      </p:sp>
-      <p:sp>
-        <p:nvSpPr>
-          <p:cNvPr id="27" name="rules heading"/>
-          <p:cNvSpPr txBox="1"/>
-          <p:nvPr/>
-        </p:nvSpPr>
-        <p:spPr>
-          <a:xfrm>
-            <a:off x="457200" y="3520440"/>
-            <a:ext cx="8229600" cy="219456"/>
-          </a:xfrm>
-          <a:prstGeom prst="rect">
-            <a:avLst/>
-          </a:prstGeom>
-          <a:noFill/>
-          <a:ln/>
-        </p:spPr>
-        <p:txBody>
-          <a:bodyPr wrap="square" lIns="0" tIns="0" rIns="0" bIns="0" rtlCol="0" anchor="ctr"/>
-          <a:lstStyle/>
-          <a:p>
-            <a:pPr indent="0" marL="0">
-              <a:buNone/>
-            </a:pPr>
-            <a:r>
-              <a:rPr lang="en-US" sz="900" b="1" spc="150" kern="0" dirty="0">
-                <a:solidFill>
-                  <a:schemeClr val="accent5"/>
-                </a:solidFill>
-              </a:rPr>
-              <a:t>FOUR RULES EVERY TOOL FOLLOWS</a:t>
-            </a:r>
-            <a:endParaRPr lang="en-US" sz="900" dirty="0"/>
-          </a:p>
-        </p:txBody>
-      </p:sp>
-      <p:sp>
-        <p:nvSpPr>
-          <p:cNvPr id="28" name="rule bar 1"/>
-          <p:cNvSpPr/>
-          <p:nvPr/>
-        </p:nvSpPr>
-        <p:spPr>
-          <a:xfrm>
-            <a:off x="457200" y="3794760"/>
-            <a:ext cx="54864" cy="868680"/>
-          </a:xfrm>
-          <a:prstGeom prst="rect">
-            <a:avLst/>
-          </a:prstGeom>
-          <a:solidFill>
-            <a:schemeClr val="accent2"/>
-          </a:solidFill>
-          <a:ln w="12700">
-            <a:solidFill>
-              <a:schemeClr val="accent2"/>
-            </a:solidFill>
-            <a:prstDash val="solid"/>
-          </a:ln>
-        </p:spPr>
-      </p:sp>
-      <p:sp>
-        <p:nvSpPr>
-          <p:cNvPr id="29" name="Lawyers decide rule"/>
-          <p:cNvSpPr txBox="1"/>
-          <p:nvPr/>
-        </p:nvSpPr>
-        <p:spPr>
-          <a:xfrm>
-            <a:off x="594360" y="3794760"/>
-            <a:ext cx="1783080" cy="868680"/>
-          </a:xfrm>
-          <a:prstGeom prst="rect">
-            <a:avLst/>
-          </a:prstGeom>
-          <a:noFill/>
-          <a:ln/>
-        </p:spPr>
-        <p:txBody>
-          <a:bodyPr wrap="square" lIns="0" tIns="0" rIns="0" bIns="0" rtlCol="0" anchor="t"/>
-          <a:lstStyle/>
-          <a:p>
-            <a:pPr indent="0" marL="0">
-              <a:buNone/>
-            </a:pPr>
-            <a:r>
-              <a:rPr lang="en-US" sz="1100" b="1" dirty="0">
-                <a:solidFill>
-                  <a:schemeClr val="tx1"/>
-                </a:solidFill>
-              </a:rPr>
-              <a:t>Lawyers decide</a:t>
-            </a:r>
-            <a:endParaRPr lang="en-US" sz="1100" dirty="0"/>
-          </a:p>
-          <a:p>
-            <a:pPr indent="0" marL="0">
-              <a:buNone/>
-            </a:pPr>
-            <a:r>
-              <a:rPr lang="en-US" sz="1100" dirty="0">
-                <a:solidFill>
-                  <a:schemeClr val="tx2"/>
-                </a:solidFill>
-              </a:rPr>
-              <a:t>AI output stays a suggestion until a person confirms it.</a:t>
-            </a:r>
-            <a:endParaRPr lang="en-US" sz="1100" dirty="0"/>
-          </a:p>
-        </p:txBody>
-      </p:sp>
-      <p:sp>
-        <p:nvSpPr>
-          <p:cNvPr id="30" name="rule bar 2"/>
-          <p:cNvSpPr/>
-          <p:nvPr/>
-        </p:nvSpPr>
-        <p:spPr>
-          <a:xfrm>
-            <a:off x="2560320" y="3794760"/>
-            <a:ext cx="54864" cy="868680"/>
-          </a:xfrm>
-          <a:prstGeom prst="rect">
-            <a:avLst/>
-          </a:prstGeom>
-          <a:solidFill>
-            <a:schemeClr val="accent2"/>
-          </a:solidFill>
-          <a:ln w="12700">
-            <a:solidFill>
-              <a:schemeClr val="accent2"/>
-            </a:solidFill>
-            <a:prstDash val="solid"/>
-          </a:ln>
-        </p:spPr>
-      </p:sp>
-      <p:sp>
-        <p:nvSpPr>
-          <p:cNvPr id="31" name="Code checks the model rule"/>
-          <p:cNvSpPr txBox="1"/>
-          <p:nvPr/>
-        </p:nvSpPr>
-        <p:spPr>
-          <a:xfrm>
-            <a:off x="2697480" y="3794760"/>
-            <a:ext cx="1783080" cy="868680"/>
-          </a:xfrm>
-          <a:prstGeom prst="rect">
-            <a:avLst/>
-          </a:prstGeom>
-          <a:noFill/>
-          <a:ln/>
-        </p:spPr>
-        <p:txBody>
-          <a:bodyPr wrap="square" lIns="0" tIns="0" rIns="0" bIns="0" rtlCol="0" anchor="t"/>
-          <a:lstStyle/>
-          <a:p>
-            <a:pPr indent="0" marL="0">
-              <a:buNone/>
-            </a:pPr>
-            <a:r>
-              <a:rPr lang="en-US" sz="1100" b="1" dirty="0">
-                <a:solidFill>
-                  <a:schemeClr val="tx1"/>
-                </a:solidFill>
-              </a:rPr>
-              <a:t>Code checks the model</a:t>
-            </a:r>
-            <a:endParaRPr lang="en-US" sz="1100" dirty="0"/>
-          </a:p>
-          <a:p>
-            <a:pPr indent="0" marL="0">
-              <a:buNone/>
-            </a:pPr>
-            <a:r>
-              <a:rPr lang="en-US" sz="1100" dirty="0">
-                <a:solidFill>
-                  <a:schemeClr val="tx2"/>
-                </a:solidFill>
-              </a:rPr>
-              <a:t>Quotes, dates and totals are verified in code.</a:t>
-            </a:r>
-            <a:endParaRPr lang="en-US" sz="1100" dirty="0"/>
-          </a:p>
-        </p:txBody>
-      </p:sp>
-      <p:sp>
-        <p:nvSpPr>
-          <p:cNvPr id="32" name="rule bar 3"/>
-          <p:cNvSpPr/>
-          <p:nvPr/>
-        </p:nvSpPr>
-        <p:spPr>
-          <a:xfrm>
-            <a:off x="4663440" y="3794760"/>
-            <a:ext cx="54864" cy="868680"/>
-          </a:xfrm>
-          <a:prstGeom prst="rect">
-            <a:avLst/>
-          </a:prstGeom>
-          <a:solidFill>
-            <a:schemeClr val="accent2"/>
-          </a:solidFill>
-          <a:ln w="12700">
-            <a:solidFill>
-              <a:schemeClr val="accent2"/>
-            </a:solidFill>
-            <a:prstDash val="solid"/>
-          </a:ln>
-        </p:spPr>
-      </p:sp>
-      <p:sp>
-        <p:nvSpPr>
-          <p:cNvPr id="33" name="Client data protected rule"/>
-          <p:cNvSpPr txBox="1"/>
-          <p:nvPr/>
-        </p:nvSpPr>
-        <p:spPr>
-          <a:xfrm>
-            <a:off x="4800600" y="3794760"/>
-            <a:ext cx="1783080" cy="868680"/>
-          </a:xfrm>
-          <a:prstGeom prst="rect">
-            <a:avLst/>
-          </a:prstGeom>
-          <a:noFill/>
-          <a:ln/>
-        </p:spPr>
-        <p:txBody>
-          <a:bodyPr wrap="square" lIns="0" tIns="0" rIns="0" bIns="0" rtlCol="0" anchor="t"/>
-          <a:lstStyle/>
-          <a:p>
-            <a:pPr indent="0" marL="0">
-              <a:buNone/>
-            </a:pPr>
-            <a:r>
-              <a:rPr lang="en-US" sz="1100" b="1" dirty="0">
-                <a:solidFill>
-                  <a:schemeClr val="tx1"/>
-                </a:solidFill>
-              </a:rPr>
-              <a:t>Client data protected</a:t>
-            </a:r>
-            <a:endParaRPr lang="en-US" sz="1100" dirty="0"/>
-          </a:p>
-          <a:p>
-            <a:pPr indent="0" marL="0">
-              <a:buNone/>
-            </a:pPr>
-            <a:r>
-              <a:rPr lang="en-US" sz="1100" dirty="0">
-                <a:solidFill>
-                  <a:schemeClr val="tx2"/>
-                </a:solidFill>
-              </a:rPr>
-              <a:t>Firm hardware, walls in the data, nothing sent without approval.</a:t>
-            </a:r>
-            <a:endParaRPr lang="en-US" sz="1100" dirty="0"/>
-          </a:p>
-        </p:txBody>
-      </p:sp>
-      <p:sp>
-        <p:nvSpPr>
-          <p:cNvPr id="34" name="rule bar 4"/>
-          <p:cNvSpPr/>
-          <p:nvPr/>
-        </p:nvSpPr>
-        <p:spPr>
-          <a:xfrm>
-            <a:off x="6766560" y="3794760"/>
-            <a:ext cx="54864" cy="868680"/>
-          </a:xfrm>
-          <a:prstGeom prst="rect">
-            <a:avLst/>
-          </a:prstGeom>
-          <a:solidFill>
-            <a:schemeClr val="accent2"/>
-          </a:solidFill>
-          <a:ln w="12700">
-            <a:solidFill>
-              <a:schemeClr val="accent2"/>
-            </a:solidFill>
-            <a:prstDash val="solid"/>
-          </a:ln>
-        </p:spPr>
-      </p:sp>
-      <p:sp>
-        <p:nvSpPr>
-          <p:cNvPr id="35" name="Everything is traceable rule"/>
-          <p:cNvSpPr txBox="1"/>
-          <p:nvPr/>
-        </p:nvSpPr>
-        <p:spPr>
-          <a:xfrm>
-            <a:off x="6903720" y="3794760"/>
-            <a:ext cx="1783080" cy="868680"/>
-          </a:xfrm>
-          <a:prstGeom prst="rect">
-            <a:avLst/>
-          </a:prstGeom>
-          <a:noFill/>
-          <a:ln/>
-        </p:spPr>
-        <p:txBody>
-          <a:bodyPr wrap="square" lIns="0" tIns="0" rIns="0" bIns="0" rtlCol="0" anchor="t"/>
-          <a:lstStyle/>
-          <a:p>
-            <a:pPr indent="0" marL="0">
-              <a:buNone/>
-            </a:pPr>
-            <a:r>
-              <a:rPr lang="en-US" sz="1100" b="1" dirty="0">
-                <a:solidFill>
-                  <a:schemeClr val="tx1"/>
-                </a:solidFill>
-              </a:rPr>
-              <a:t>Everything is traceable</a:t>
-            </a:r>
-            <a:endParaRPr lang="en-US" sz="1100" dirty="0"/>
-          </a:p>
-          <a:p>
-            <a:pPr indent="0" marL="0">
-              <a:buNone/>
-            </a:pPr>
-            <a:r>
-              <a:rPr lang="en-US" sz="1100" dirty="0">
-                <a:solidFill>
-                  <a:schemeClr val="tx2"/>
-                </a:solidFill>
-              </a:rPr>
-              <a:t>Each finding cites its source; each decision is logged.</a:t>
+                  <a:schemeClr val="bg1"/>
+                </a:solidFill>
+              </a:rPr>
+              <a:t>I also use AI to build layers 2 and 3, so lawyers get the benefit without having to learn AI. Every build follows the same steps: start with how the work is really done, build, test against real outcomes, and ship it with tests, guides and a features list for IT.</a:t>
             </a:r>
             <a:endParaRPr lang="en-US" sz="1100" dirty="0"/>
           </a:p>
@@ -3767,7 +3466,7 @@
                   <a:srgbClr val="2D4459"/>
                 </a:solidFill>
               </a:rPr>
-              <a:t>Conflion shows what a full firm tool looks like</a:t>
+              <a:t>Conflion brings all of this together</a:t>
             </a:r>
             <a:endParaRPr lang="en-US" sz="2600" dirty="0"/>
           </a:p>
@@ -3805,7 +3504,7 @@
                   <a:schemeClr val="tx2"/>
                 </a:solidFill>
               </a:rPr>
-              <a:t>A conflicts and intake system that puts all four pieces together.</a:t>
+              <a:t>A conflicts and intake system that uses all three layers, built the way I think firm AI should be.</a:t>
             </a:r>
             <a:endParaRPr lang="en-US" sz="1300" dirty="0"/>
           </a:p>
@@ -4339,14 +4038,14 @@
               <a:buNone/>
             </a:pPr>
             <a:r>
-              <a:rPr lang="en-US" sz="1150" b="1" dirty="0">
+              <a:rPr lang="en-US" sz="1050" b="1" dirty="0">
                 <a:solidFill>
                   <a:schemeClr val="bg1"/>
                 </a:solidFill>
               </a:rPr>
-              <a:t>The same pattern could serve any workflow at the firm.</a:t>
-            </a:r>
-            <a:endParaRPr lang="en-US" sz="1150" dirty="0"/>
+              <a:t>It ships with role-based training walkthroughs. The same pattern could serve any workflow here.</a:t>
+            </a:r>
+            <a:endParaRPr lang="en-US" sz="1050" dirty="0"/>
           </a:p>
         </p:txBody>
       </p:sp>
@@ -4505,7 +4204,7 @@
         <p:spPr>
           <a:xfrm>
             <a:off x="457200" y="1280160"/>
-            <a:ext cx="2651760" cy="3291840"/>
+            <a:ext cx="2624328" cy="3291840"/>
           </a:xfrm>
           <a:prstGeom prst="rect">
             <a:avLst/>
@@ -4579,7 +4278,7 @@
         <p:spPr>
           <a:xfrm>
             <a:off x="1097280" y="1389888"/>
-            <a:ext cx="1874520" cy="438912"/>
+            <a:ext cx="1847088" cy="438912"/>
           </a:xfrm>
           <a:prstGeom prst="rect">
             <a:avLst/>
@@ -4615,7 +4314,7 @@
         <p:spPr>
           <a:xfrm>
             <a:off x="594360" y="1938528"/>
-            <a:ext cx="2377440" cy="292608"/>
+            <a:ext cx="2350008" cy="292608"/>
           </a:xfrm>
           <a:prstGeom prst="rect">
             <a:avLst/>
@@ -4651,7 +4350,7 @@
         <p:spPr>
           <a:xfrm>
             <a:off x="594360" y="2304288"/>
-            <a:ext cx="2377440" cy="2194560"/>
+            <a:ext cx="2350008" cy="2194560"/>
           </a:xfrm>
           <a:prstGeom prst="rect">
             <a:avLst/>
@@ -4671,14 +4370,14 @@
               <a:buChar char="•"/>
             </a:pPr>
             <a:r>
-              <a:rPr lang="en-US" sz="1250" dirty="0">
+              <a:rPr lang="en-US" sz="1200" dirty="0">
                 <a:solidFill>
                   <a:schemeClr val="tx1"/>
                 </a:solidFill>
               </a:rPr>
-              <a:t>Pilot Guideline Guard, Party Finder or Marketing Studio with our own documents.</a:t>
-            </a:r>
-            <a:endParaRPr lang="en-US" sz="1250" dirty="0"/>
+              <a:t>An AI dashboard on every computer that steers people to approved, easy tools.</a:t>
+            </a:r>
+            <a:endParaRPr lang="en-US" sz="1200" dirty="0"/>
           </a:p>
           <a:p>
             <a:pPr marL="342900" indent="-342900">
@@ -4689,14 +4388,14 @@
               <a:buChar char="•"/>
             </a:pPr>
             <a:r>
-              <a:rPr lang="en-US" sz="1250" dirty="0">
+              <a:rPr lang="en-US" sz="1200" dirty="0">
                 <a:solidFill>
                   <a:schemeClr val="tx1"/>
                 </a:solidFill>
               </a:rPr>
-              <a:t>No connection to firm systems needed.</a:t>
-            </a:r>
-            <a:endParaRPr lang="en-US" sz="1250" dirty="0"/>
+              <a:t>Start it with Guideline Guard, Party Finder and Marketing Studio.</a:t>
+            </a:r>
+            <a:endParaRPr lang="en-US" sz="1200" dirty="0"/>
           </a:p>
           <a:p>
             <a:pPr marL="342900" indent="-342900">
@@ -4707,14 +4406,14 @@
               <a:buChar char="•"/>
             </a:pPr>
             <a:r>
-              <a:rPr lang="en-US" sz="1250" dirty="0">
+              <a:rPr lang="en-US" sz="1200" dirty="0">
                 <a:solidFill>
                   <a:schemeClr val="tx1"/>
                 </a:solidFill>
               </a:rPr>
-              <a:t>A person reviews every output.</a:t>
-            </a:r>
-            <a:endParaRPr lang="en-US" sz="1250" dirty="0"/>
+              <a:t>No firm-system connection; a person reviews every output.</a:t>
+            </a:r>
+            <a:endParaRPr lang="en-US" sz="1200" dirty="0"/>
           </a:p>
         </p:txBody>
       </p:sp>
@@ -4734,7 +4433,7 @@
         </p:blipFill>
         <p:spPr>
           <a:xfrm>
-            <a:off x="3127248" y="2852928"/>
+            <a:off x="3099816" y="2852928"/>
             <a:ext cx="146304" cy="146304"/>
           </a:xfrm>
           <a:prstGeom prst="rect">
@@ -4750,8 +4449,8 @@
         </p:nvSpPr>
         <p:spPr>
           <a:xfrm>
-            <a:off x="3291840" y="1280160"/>
-            <a:ext cx="2651760" cy="3291840"/>
+            <a:off x="3259836" y="1280160"/>
+            <a:ext cx="2624328" cy="3291840"/>
           </a:xfrm>
           <a:prstGeom prst="rect">
             <a:avLst/>
@@ -4775,7 +4474,7 @@
         </p:nvSpPr>
         <p:spPr>
           <a:xfrm>
-            <a:off x="3429000" y="1417320"/>
+            <a:off x="3396996" y="1417320"/>
             <a:ext cx="384048" cy="384048"/>
           </a:xfrm>
           <a:prstGeom prst="rect">
@@ -4808,7 +4507,7 @@
         </p:blipFill>
         <p:spPr>
           <a:xfrm>
-            <a:off x="3513491" y="1501811"/>
+            <a:off x="3481487" y="1501811"/>
             <a:ext cx="215067" cy="215067"/>
           </a:xfrm>
           <a:prstGeom prst="rect">
@@ -4824,8 +4523,8 @@
         </p:nvSpPr>
         <p:spPr>
           <a:xfrm>
-            <a:off x="3931920" y="1389888"/>
-            <a:ext cx="1874520" cy="438912"/>
+            <a:off x="3899916" y="1389888"/>
+            <a:ext cx="1847088" cy="438912"/>
           </a:xfrm>
           <a:prstGeom prst="rect">
             <a:avLst/>
@@ -4860,8 +4559,8 @@
         </p:nvSpPr>
         <p:spPr>
           <a:xfrm>
-            <a:off x="3429000" y="1938528"/>
-            <a:ext cx="2377440" cy="292608"/>
+            <a:off x="3396996" y="1938528"/>
+            <a:ext cx="2350008" cy="292608"/>
           </a:xfrm>
           <a:prstGeom prst="rect">
             <a:avLst/>
@@ -4896,8 +4595,8 @@
         </p:nvSpPr>
         <p:spPr>
           <a:xfrm>
-            <a:off x="3429000" y="2304288"/>
-            <a:ext cx="2377440" cy="2194560"/>
+            <a:off x="3396996" y="2304288"/>
+            <a:ext cx="2350008" cy="2194560"/>
           </a:xfrm>
           <a:prstGeom prst="rect">
             <a:avLst/>
@@ -4917,14 +4616,14 @@
               <a:buChar char="•"/>
             </a:pPr>
             <a:r>
-              <a:rPr lang="en-US" sz="1250" dirty="0">
+              <a:rPr lang="en-US" sz="1200" dirty="0">
                 <a:solidFill>
                   <a:schemeClr val="tx1"/>
                 </a:solidFill>
               </a:rPr>
-              <a:t>Ask the matter: questions over a matter's files, answered with page cites.</a:t>
-            </a:r>
-            <a:endParaRPr lang="en-US" sz="1250" dirty="0"/>
+              <a:t>Client risk tracker: spot trouble so we call the client before they know they are being sued.</a:t>
+            </a:r>
+            <a:endParaRPr lang="en-US" sz="1200" dirty="0"/>
           </a:p>
           <a:p>
             <a:pPr marL="342900" indent="-342900">
@@ -4935,14 +4634,14 @@
               <a:buChar char="•"/>
             </a:pPr>
             <a:r>
-              <a:rPr lang="en-US" sz="1250" dirty="0">
+              <a:rPr lang="en-US" sz="1200" dirty="0">
                 <a:solidFill>
                   <a:schemeClr val="tx1"/>
                 </a:solidFill>
               </a:rPr>
-              <a:t>Hour Catch: draft time entries from Outlook and Teams.</a:t>
-            </a:r>
-            <a:endParaRPr lang="en-US" sz="1250" dirty="0"/>
+              <a:t>Custom newsletters for attorneys and training videos for new hires.</a:t>
+            </a:r>
+            <a:endParaRPr lang="en-US" sz="1200" dirty="0"/>
           </a:p>
           <a:p>
             <a:pPr marL="342900" indent="-342900">
@@ -4953,14 +4652,14 @@
               <a:buChar char="•"/>
             </a:pPr>
             <a:r>
-              <a:rPr lang="en-US" sz="1250" dirty="0">
+              <a:rPr lang="en-US" sz="1200" dirty="0">
                 <a:solidFill>
                   <a:schemeClr val="tx1"/>
                 </a:solidFill>
               </a:rPr>
-              <a:t>Client risk radar: flag lawsuits and audits hitting our clients.</a:t>
-            </a:r>
-            <a:endParaRPr lang="en-US" sz="1250" dirty="0"/>
+              <a:t>Ask the matter and Hour Catch on firm systems.</a:t>
+            </a:r>
+            <a:endParaRPr lang="en-US" sz="1200" dirty="0"/>
           </a:p>
         </p:txBody>
       </p:sp>
@@ -4980,7 +4679,7 @@
         </p:blipFill>
         <p:spPr>
           <a:xfrm>
-            <a:off x="5961888" y="2852928"/>
+            <a:off x="5902452" y="2852928"/>
             <a:ext cx="146304" cy="146304"/>
           </a:xfrm>
           <a:prstGeom prst="rect">
@@ -4996,8 +4695,8 @@
         </p:nvSpPr>
         <p:spPr>
           <a:xfrm>
-            <a:off x="6126480" y="1280160"/>
-            <a:ext cx="2651760" cy="3291840"/>
+            <a:off x="6062472" y="1280160"/>
+            <a:ext cx="2624328" cy="3291840"/>
           </a:xfrm>
           <a:prstGeom prst="rect">
             <a:avLst/>
@@ -5021,7 +4720,7 @@
         </p:nvSpPr>
         <p:spPr>
           <a:xfrm>
-            <a:off x="6263640" y="1417320"/>
+            <a:off x="6199632" y="1417320"/>
             <a:ext cx="384048" cy="384048"/>
           </a:xfrm>
           <a:prstGeom prst="rect">
@@ -5054,7 +4753,7 @@
         </p:blipFill>
         <p:spPr>
           <a:xfrm>
-            <a:off x="6345936" y="1499616"/>
+            <a:off x="6281928" y="1499616"/>
             <a:ext cx="219456" cy="219456"/>
           </a:xfrm>
           <a:prstGeom prst="rect">
@@ -5070,8 +4769,8 @@
         </p:nvSpPr>
         <p:spPr>
           <a:xfrm>
-            <a:off x="6766560" y="1389888"/>
-            <a:ext cx="1874520" cy="438912"/>
+            <a:off x="6702552" y="1389888"/>
+            <a:ext cx="1847088" cy="438912"/>
           </a:xfrm>
           <a:prstGeom prst="rect">
             <a:avLst/>
@@ -5106,8 +4805,8 @@
         </p:nvSpPr>
         <p:spPr>
           <a:xfrm>
-            <a:off x="6263640" y="1938528"/>
-            <a:ext cx="2377440" cy="292608"/>
+            <a:off x="6199632" y="1938528"/>
+            <a:ext cx="2350008" cy="292608"/>
           </a:xfrm>
           <a:prstGeom prst="rect">
             <a:avLst/>
@@ -5142,8 +4841,8 @@
         </p:nvSpPr>
         <p:spPr>
           <a:xfrm>
-            <a:off x="6263640" y="2304288"/>
-            <a:ext cx="2377440" cy="2194560"/>
+            <a:off x="6199632" y="2304288"/>
+            <a:ext cx="2350008" cy="2194560"/>
           </a:xfrm>
           <a:prstGeom prst="rect">
             <a:avLst/>
@@ -5163,14 +4862,14 @@
               <a:buChar char="•"/>
             </a:pPr>
             <a:r>
-              <a:rPr lang="en-US" sz="1250" dirty="0">
+              <a:rPr lang="en-US" sz="1200" dirty="0">
                 <a:solidFill>
                   <a:schemeClr val="bg1"/>
                 </a:solidFill>
               </a:rPr>
               <a:t>Every tool as a module over all files, matters and systems.</a:t>
             </a:r>
-            <a:endParaRPr lang="en-US" sz="1250" dirty="0"/>
+            <a:endParaRPr lang="en-US" sz="1200" dirty="0"/>
           </a:p>
           <a:p>
             <a:pPr marL="342900" indent="-342900">
@@ -5181,14 +4880,14 @@
               <a:buChar char="•"/>
             </a:pPr>
             <a:r>
-              <a:rPr lang="en-US" sz="1250" dirty="0">
+              <a:rPr lang="en-US" sz="1200" dirty="0">
                 <a:solidFill>
                   <a:schemeClr val="bg1"/>
                 </a:solidFill>
               </a:rPr>
               <a:t>One set of permissions, one audit trail, models on firm hardware.</a:t>
             </a:r>
-            <a:endParaRPr lang="en-US" sz="1250" dirty="0"/>
+            <a:endParaRPr lang="en-US" sz="1200" dirty="0"/>
           </a:p>
           <a:p>
             <a:pPr marL="342900" indent="-342900">
@@ -5199,14 +4898,14 @@
               <a:buChar char="•"/>
             </a:pPr>
             <a:r>
-              <a:rPr lang="en-US" sz="1250" dirty="0">
+              <a:rPr lang="en-US" sz="1200" dirty="0">
                 <a:solidFill>
                   <a:schemeClr val="bg1"/>
                 </a:solidFill>
               </a:rPr>
               <a:t>Includes a knowledge engine: "who here has handled this?"</a:t>
             </a:r>
-            <a:endParaRPr lang="en-US" sz="1250" dirty="0"/>
+            <a:endParaRPr lang="en-US" sz="1200" dirty="0"/>
           </a:p>
         </p:txBody>
       </p:sp>
@@ -5718,7 +5417,7 @@
                   <a:schemeClr val="accent3"/>
                 </a:solidFill>
               </a:rPr>
-              <a:t>Choosing what to pursue, and how</a:t>
+              <a:t>An ethos for choosing what to pursue</a:t>
             </a:r>
             <a:endParaRPr lang="en-US" sz="1150" dirty="0"/>
           </a:p>
@@ -5758,7 +5457,7 @@
                   <a:schemeClr val="bg1"/>
                 </a:solidFill>
               </a:rPr>
-              <a:t>Picking ideas on impact, effort, data readiness, risk and adoption.</a:t>
+              <a:t>Safety-minded and honest about what AI cannot do.</a:t>
             </a:r>
             <a:endParaRPr lang="en-US" sz="1150" dirty="0"/>
           </a:p>
@@ -5776,7 +5475,7 @@
                   <a:schemeClr val="bg1"/>
                 </a:solidFill>
               </a:rPr>
-              <a:t>Matching each job to the right AI, and knowing where client data can go.</a:t>
+              <a:t>Streamline real work; never add make-work.</a:t>
             </a:r>
             <a:endParaRPr lang="en-US" sz="1150" dirty="0"/>
           </a:p>
@@ -5794,7 +5493,25 @@
                   <a:schemeClr val="bg1"/>
                 </a:solidFill>
               </a:rPr>
-              <a:t>A practical path from quick wins to a firm-owned platform.</a:t>
+              <a:t>Weigh new capabilities (risk tracker) against refining what we do (M&amp;A review).</a:t>
+            </a:r>
+            <a:endParaRPr lang="en-US" sz="1150" dirty="0"/>
+          </a:p>
+          <a:p>
+            <a:pPr marL="342900" indent="-342900">
+              <a:spcAft>
+                <a:spcPts val="600"/>
+              </a:spcAft>
+              <a:buSzPct val="100000"/>
+              <a:buChar char="•"/>
+            </a:pPr>
+            <a:r>
+              <a:rPr lang="en-US" sz="1150" dirty="0">
+                <a:solidFill>
+                  <a:schemeClr val="bg1"/>
+                </a:solidFill>
+              </a:rPr>
+              <a:t>Practice impact and quality of life, with an eye on optics.</a:t>
             </a:r>
             <a:endParaRPr lang="en-US" sz="1150" dirty="0"/>
           </a:p>
